--- a/阶段性结论/week 0523v0.1.pptx
+++ b/阶段性结论/week 0523v0.1.pptx
@@ -6,10 +6,10 @@
     <p:sldMasterId id="2147483660" r:id="rId5"/>
   </p:sldMasterIdLst>
   <p:notesMasterIdLst>
-    <p:notesMasterId r:id="rId30"/>
+    <p:notesMasterId r:id="rId38"/>
   </p:notesMasterIdLst>
   <p:handoutMasterIdLst>
-    <p:handoutMasterId r:id="rId31"/>
+    <p:handoutMasterId r:id="rId39"/>
   </p:handoutMasterIdLst>
   <p:sldIdLst>
     <p:sldId id="16771194" r:id="rId6"/>
@@ -30,17 +30,25 @@
     <p:sldId id="2147477478" r:id="rId21"/>
     <p:sldId id="2147477479" r:id="rId22"/>
     <p:sldId id="2147477480" r:id="rId23"/>
-    <p:sldId id="2147477482" r:id="rId24"/>
-    <p:sldId id="2147477484" r:id="rId25"/>
-    <p:sldId id="2147477485" r:id="rId26"/>
-    <p:sldId id="2147477486" r:id="rId27"/>
-    <p:sldId id="2147477487" r:id="rId28"/>
-    <p:sldId id="2147477430" r:id="rId29"/>
+    <p:sldId id="2147477495" r:id="rId24"/>
+    <p:sldId id="2147477496" r:id="rId25"/>
+    <p:sldId id="2147477484" r:id="rId26"/>
+    <p:sldId id="2147477485" r:id="rId27"/>
+    <p:sldId id="2147477486" r:id="rId28"/>
+    <p:sldId id="2147477487" r:id="rId29"/>
+    <p:sldId id="2147477488" r:id="rId30"/>
+    <p:sldId id="2147477489" r:id="rId31"/>
+    <p:sldId id="2147477490" r:id="rId32"/>
+    <p:sldId id="2147477491" r:id="rId33"/>
+    <p:sldId id="2147477492" r:id="rId34"/>
+    <p:sldId id="2147477493" r:id="rId35"/>
+    <p:sldId id="2147477494" r:id="rId36"/>
+    <p:sldId id="2147477430" r:id="rId37"/>
   </p:sldIdLst>
   <p:sldSz cx="12192000" cy="6858000"/>
   <p:notesSz cx="6858000" cy="9144000"/>
   <p:custDataLst>
-    <p:tags r:id="rId32"/>
+    <p:tags r:id="rId40"/>
   </p:custDataLst>
   <p:defaultTextStyle>
     <a:defPPr>
@@ -168,7 +176,8 @@
             <p14:sldId id="2147477478"/>
             <p14:sldId id="2147477479"/>
             <p14:sldId id="2147477480"/>
-            <p14:sldId id="2147477482"/>
+            <p14:sldId id="2147477495"/>
+            <p14:sldId id="2147477496"/>
             <p14:sldId id="2147477484"/>
             <p14:sldId id="2147477485"/>
             <p14:sldId id="2147477486"/>
@@ -176,7 +185,15 @@
           </p14:sldIdLst>
         </p14:section>
         <p14:section name="eef" id="{0CBA3FCE-B567-4F49-936C-7A69C0064915}">
-          <p14:sldIdLst/>
+          <p14:sldIdLst>
+            <p14:sldId id="2147477488"/>
+            <p14:sldId id="2147477489"/>
+            <p14:sldId id="2147477490"/>
+            <p14:sldId id="2147477491"/>
+            <p14:sldId id="2147477492"/>
+            <p14:sldId id="2147477493"/>
+            <p14:sldId id="2147477494"/>
+          </p14:sldIdLst>
         </p14:section>
         <p14:section name="下周计划" id="{AAB4484A-A58E-4FF9-9CE2-A3928016DD34}">
           <p14:sldIdLst>
@@ -12867,8 +12884,8 @@
         </p:blipFill>
         <p:spPr>
           <a:xfrm>
-            <a:off x="404385" y="1153711"/>
-            <a:ext cx="6016964" cy="4550578"/>
+            <a:off x="952819" y="1568487"/>
+            <a:ext cx="5468529" cy="4135801"/>
           </a:xfrm>
           <a:prstGeom prst="rect">
             <a:avLst/>
@@ -13435,6 +13452,61 @@
           </a:p>
         </p:txBody>
       </p:sp>
+      <p:sp>
+        <p:nvSpPr>
+          <p:cNvPr id="2" name="矩形 1">
+            <a:extLst>
+              <a:ext uri="{FF2B5EF4-FFF2-40B4-BE49-F238E27FC236}">
+                <a16:creationId xmlns:a16="http://schemas.microsoft.com/office/drawing/2014/main" id="{280B4A65-0EC6-CC6B-7581-41744F40DB27}"/>
+              </a:ext>
+            </a:extLst>
+          </p:cNvPr>
+          <p:cNvSpPr/>
+          <p:nvPr/>
+        </p:nvSpPr>
+        <p:spPr>
+          <a:xfrm>
+            <a:off x="545399" y="570077"/>
+            <a:ext cx="2414954" cy="1167268"/>
+          </a:xfrm>
+          <a:prstGeom prst="rect">
+            <a:avLst/>
+          </a:prstGeom>
+          <a:solidFill>
+            <a:srgbClr val="FFC000"/>
+          </a:solidFill>
+          <a:ln>
+            <a:noFill/>
+          </a:ln>
+        </p:spPr>
+        <p:style>
+          <a:lnRef idx="2">
+            <a:schemeClr val="accent1">
+              <a:shade val="50000"/>
+            </a:schemeClr>
+          </a:lnRef>
+          <a:fillRef idx="1">
+            <a:schemeClr val="accent1"/>
+          </a:fillRef>
+          <a:effectRef idx="0">
+            <a:schemeClr val="accent1"/>
+          </a:effectRef>
+          <a:fontRef idx="minor">
+            <a:schemeClr val="lt1"/>
+          </a:fontRef>
+        </p:style>
+        <p:txBody>
+          <a:bodyPr rtlCol="0" anchor="ctr"/>
+          <a:lstStyle/>
+          <a:p>
+            <a:pPr algn="ctr"/>
+            <a:r>
+              <a:rPr lang="zh-CN" altLang="en-US" dirty="0"/>
+              <a:t>根据下页更改</a:t>
+            </a:r>
+          </a:p>
+        </p:txBody>
+      </p:sp>
     </p:spTree>
     <p:extLst>
       <p:ext uri="{BB962C8B-B14F-4D97-AF65-F5344CB8AC3E}">
@@ -13465,13 +13537,7 @@
   <p:cSld>
     <p:spTree>
       <p:nvGrpSpPr>
-        <p:cNvPr id="1" name="">
-          <a:extLst>
-            <a:ext uri="{FF2B5EF4-FFF2-40B4-BE49-F238E27FC236}">
-              <a16:creationId xmlns:a16="http://schemas.microsoft.com/office/drawing/2014/main" id="{CBF47FC9-5CAD-0BCB-513A-DBF161F80FD0}"/>
-            </a:ext>
-          </a:extLst>
-        </p:cNvPr>
+        <p:cNvPr id="1" name=""/>
         <p:cNvGrpSpPr/>
         <p:nvPr/>
       </p:nvGrpSpPr>
@@ -13483,90 +13549,12 @@
           <a:chExt cx="0" cy="0"/>
         </a:xfrm>
       </p:grpSpPr>
-      <p:sp>
-        <p:nvSpPr>
-          <p:cNvPr id="5" name="文本框 4">
-            <a:extLst>
-              <a:ext uri="{FF2B5EF4-FFF2-40B4-BE49-F238E27FC236}">
-                <a16:creationId xmlns:a16="http://schemas.microsoft.com/office/drawing/2014/main" id="{9B7F3B76-3395-3627-406B-5D8518E388FE}"/>
-              </a:ext>
-            </a:extLst>
-          </p:cNvPr>
-          <p:cNvSpPr txBox="1"/>
-          <p:nvPr/>
-        </p:nvSpPr>
-        <p:spPr>
-          <a:xfrm>
-            <a:off x="6747553" y="2644170"/>
-            <a:ext cx="5571162" cy="1569660"/>
-          </a:xfrm>
-          <a:prstGeom prst="rect">
-            <a:avLst/>
-          </a:prstGeom>
-          <a:noFill/>
-        </p:spPr>
-        <p:txBody>
-          <a:bodyPr wrap="square">
-            <a:spAutoFit/>
-          </a:bodyPr>
-          <a:lstStyle/>
-          <a:p>
-            <a:r>
-              <a:rPr lang="zh-CN" altLang="en-US" sz="1600" dirty="0"/>
-              <a:t> </a:t>
-            </a:r>
-            <a:r>
-              <a:rPr lang="en-US" altLang="zh-CN" sz="1600" dirty="0"/>
-              <a:t>  Bin  Count  </a:t>
-            </a:r>
-            <a:r>
-              <a:rPr lang="en-US" altLang="zh-CN" sz="1600" dirty="0" err="1"/>
-              <a:t>Count</a:t>
-            </a:r>
-            <a:r>
-              <a:rPr lang="en-US" altLang="zh-CN" sz="1600" dirty="0"/>
-              <a:t> (%)  Event rate  MORTALITY_RATE</a:t>
-            </a:r>
-          </a:p>
-          <a:p>
-            <a:r>
-              <a:rPr lang="en-US" altLang="zh-CN" sz="1600" dirty="0"/>
-              <a:t>0   (-inf, 10.13)    210   0.519802    0.276190        0.100248</a:t>
-            </a:r>
-          </a:p>
-          <a:p>
-            <a:r>
-              <a:rPr lang="en-US" altLang="zh-CN" sz="1600" dirty="0"/>
-              <a:t>1  [10.13, 12.55)     53   0.131188    0.150943        0.085784</a:t>
-            </a:r>
-          </a:p>
-          <a:p>
-            <a:r>
-              <a:rPr lang="en-US" altLang="zh-CN" sz="1600" dirty="0"/>
-              <a:t>2  [12.55, 15.02)     41   0.101485    0.121951        0.076452</a:t>
-            </a:r>
-          </a:p>
-          <a:p>
-            <a:r>
-              <a:rPr lang="en-US" altLang="zh-CN" sz="1600" dirty="0"/>
-              <a:t>3  [15.02, 15.94)     21   0.051980    0.047619        0.067034</a:t>
-            </a:r>
-          </a:p>
-          <a:p>
-            <a:r>
-              <a:rPr lang="en-US" altLang="zh-CN" sz="1600" dirty="0"/>
-              <a:t>4    [15.94, inf)     79   0.195545    0.113924        0.078049</a:t>
-            </a:r>
-            <a:endParaRPr lang="zh-CN" altLang="en-US" sz="1600" dirty="0"/>
-          </a:p>
-        </p:txBody>
-      </p:sp>
       <p:pic>
         <p:nvPicPr>
           <p:cNvPr id="3" name="图片 2">
             <a:extLst>
               <a:ext uri="{FF2B5EF4-FFF2-40B4-BE49-F238E27FC236}">
-                <a16:creationId xmlns:a16="http://schemas.microsoft.com/office/drawing/2014/main" id="{BFF279DA-0FDC-0D0E-78AE-983671A5D53B}"/>
+                <a16:creationId xmlns:a16="http://schemas.microsoft.com/office/drawing/2014/main" id="{DD1D66EA-262A-5F85-25AC-EF14384797C9}"/>
               </a:ext>
             </a:extLst>
           </p:cNvPr>
@@ -13583,8 +13571,218 @@
         </p:blipFill>
         <p:spPr>
           <a:xfrm>
-            <a:off x="688368" y="1805148"/>
-            <a:ext cx="5752190" cy="4252271"/>
+            <a:off x="254919" y="95249"/>
+            <a:ext cx="2345405" cy="1644247"/>
+          </a:xfrm>
+          <a:prstGeom prst="rect">
+            <a:avLst/>
+          </a:prstGeom>
+        </p:spPr>
+      </p:pic>
+      <p:pic>
+        <p:nvPicPr>
+          <p:cNvPr id="5" name="图片 4">
+            <a:extLst>
+              <a:ext uri="{FF2B5EF4-FFF2-40B4-BE49-F238E27FC236}">
+                <a16:creationId xmlns:a16="http://schemas.microsoft.com/office/drawing/2014/main" id="{C6BBF516-1A83-AD76-6AEE-D699D8F454B4}"/>
+              </a:ext>
+            </a:extLst>
+          </p:cNvPr>
+          <p:cNvPicPr>
+            <a:picLocks noChangeAspect="1"/>
+          </p:cNvPicPr>
+          <p:nvPr/>
+        </p:nvPicPr>
+        <p:blipFill>
+          <a:blip r:embed="rId3"/>
+          <a:stretch>
+            <a:fillRect/>
+          </a:stretch>
+        </p:blipFill>
+        <p:spPr>
+          <a:xfrm>
+            <a:off x="6121951" y="95249"/>
+            <a:ext cx="2277226" cy="1639675"/>
+          </a:xfrm>
+          <a:prstGeom prst="rect">
+            <a:avLst/>
+          </a:prstGeom>
+        </p:spPr>
+      </p:pic>
+      <p:pic>
+        <p:nvPicPr>
+          <p:cNvPr id="7" name="图片 6">
+            <a:extLst>
+              <a:ext uri="{FF2B5EF4-FFF2-40B4-BE49-F238E27FC236}">
+                <a16:creationId xmlns:a16="http://schemas.microsoft.com/office/drawing/2014/main" id="{3FEF4BE6-A66F-8D7C-3D75-F486D4209E62}"/>
+              </a:ext>
+            </a:extLst>
+          </p:cNvPr>
+          <p:cNvPicPr>
+            <a:picLocks noChangeAspect="1"/>
+          </p:cNvPicPr>
+          <p:nvPr/>
+        </p:nvPicPr>
+        <p:blipFill>
+          <a:blip r:embed="rId4"/>
+          <a:stretch>
+            <a:fillRect/>
+          </a:stretch>
+        </p:blipFill>
+        <p:spPr>
+          <a:xfrm>
+            <a:off x="283501" y="1734924"/>
+            <a:ext cx="2316823" cy="1639674"/>
+          </a:xfrm>
+          <a:prstGeom prst="rect">
+            <a:avLst/>
+          </a:prstGeom>
+        </p:spPr>
+      </p:pic>
+      <p:pic>
+        <p:nvPicPr>
+          <p:cNvPr id="9" name="图片 8">
+            <a:extLst>
+              <a:ext uri="{FF2B5EF4-FFF2-40B4-BE49-F238E27FC236}">
+                <a16:creationId xmlns:a16="http://schemas.microsoft.com/office/drawing/2014/main" id="{5C383971-BE34-449B-3876-3CE234A16605}"/>
+              </a:ext>
+            </a:extLst>
+          </p:cNvPr>
+          <p:cNvPicPr>
+            <a:picLocks noChangeAspect="1"/>
+          </p:cNvPicPr>
+          <p:nvPr/>
+        </p:nvPicPr>
+        <p:blipFill>
+          <a:blip r:embed="rId5"/>
+          <a:stretch>
+            <a:fillRect/>
+          </a:stretch>
+        </p:blipFill>
+        <p:spPr>
+          <a:xfrm>
+            <a:off x="6082354" y="1720662"/>
+            <a:ext cx="2316823" cy="1636432"/>
+          </a:xfrm>
+          <a:prstGeom prst="rect">
+            <a:avLst/>
+          </a:prstGeom>
+        </p:spPr>
+      </p:pic>
+      <p:pic>
+        <p:nvPicPr>
+          <p:cNvPr id="11" name="图片 10">
+            <a:extLst>
+              <a:ext uri="{FF2B5EF4-FFF2-40B4-BE49-F238E27FC236}">
+                <a16:creationId xmlns:a16="http://schemas.microsoft.com/office/drawing/2014/main" id="{E99B74F0-8117-B60C-1202-5DC6AB5F1A69}"/>
+              </a:ext>
+            </a:extLst>
+          </p:cNvPr>
+          <p:cNvPicPr>
+            <a:picLocks noChangeAspect="1"/>
+          </p:cNvPicPr>
+          <p:nvPr/>
+        </p:nvPicPr>
+        <p:blipFill>
+          <a:blip r:embed="rId6"/>
+          <a:stretch>
+            <a:fillRect/>
+          </a:stretch>
+        </p:blipFill>
+        <p:spPr>
+          <a:xfrm>
+            <a:off x="254918" y="3343957"/>
+            <a:ext cx="2345406" cy="1670316"/>
+          </a:xfrm>
+          <a:prstGeom prst="rect">
+            <a:avLst/>
+          </a:prstGeom>
+        </p:spPr>
+      </p:pic>
+      <p:pic>
+        <p:nvPicPr>
+          <p:cNvPr id="13" name="图片 12">
+            <a:extLst>
+              <a:ext uri="{FF2B5EF4-FFF2-40B4-BE49-F238E27FC236}">
+                <a16:creationId xmlns:a16="http://schemas.microsoft.com/office/drawing/2014/main" id="{89A37B85-1375-D2AA-B06C-AC1E4CF59A4F}"/>
+              </a:ext>
+            </a:extLst>
+          </p:cNvPr>
+          <p:cNvPicPr>
+            <a:picLocks noChangeAspect="1"/>
+          </p:cNvPicPr>
+          <p:nvPr/>
+        </p:nvPicPr>
+        <p:blipFill>
+          <a:blip r:embed="rId7"/>
+          <a:stretch>
+            <a:fillRect/>
+          </a:stretch>
+        </p:blipFill>
+        <p:spPr>
+          <a:xfrm>
+            <a:off x="6153150" y="3374599"/>
+            <a:ext cx="2280418" cy="1607909"/>
+          </a:xfrm>
+          <a:prstGeom prst="rect">
+            <a:avLst/>
+          </a:prstGeom>
+        </p:spPr>
+      </p:pic>
+      <p:pic>
+        <p:nvPicPr>
+          <p:cNvPr id="15" name="图片 14">
+            <a:extLst>
+              <a:ext uri="{FF2B5EF4-FFF2-40B4-BE49-F238E27FC236}">
+                <a16:creationId xmlns:a16="http://schemas.microsoft.com/office/drawing/2014/main" id="{D82D2D81-5188-66C3-6FBD-6029A3F2DB73}"/>
+              </a:ext>
+            </a:extLst>
+          </p:cNvPr>
+          <p:cNvPicPr>
+            <a:picLocks noChangeAspect="1"/>
+          </p:cNvPicPr>
+          <p:nvPr/>
+        </p:nvPicPr>
+        <p:blipFill>
+          <a:blip r:embed="rId8"/>
+          <a:stretch>
+            <a:fillRect/>
+          </a:stretch>
+        </p:blipFill>
+        <p:spPr>
+          <a:xfrm>
+            <a:off x="280661" y="4964340"/>
+            <a:ext cx="2319663" cy="1607910"/>
+          </a:xfrm>
+          <a:prstGeom prst="rect">
+            <a:avLst/>
+          </a:prstGeom>
+        </p:spPr>
+      </p:pic>
+      <p:pic>
+        <p:nvPicPr>
+          <p:cNvPr id="17" name="图片 16">
+            <a:extLst>
+              <a:ext uri="{FF2B5EF4-FFF2-40B4-BE49-F238E27FC236}">
+                <a16:creationId xmlns:a16="http://schemas.microsoft.com/office/drawing/2014/main" id="{F13F1AA4-5222-04E0-E34A-EDDB30B534AD}"/>
+              </a:ext>
+            </a:extLst>
+          </p:cNvPr>
+          <p:cNvPicPr>
+            <a:picLocks noChangeAspect="1"/>
+          </p:cNvPicPr>
+          <p:nvPr/>
+        </p:nvPicPr>
+        <p:blipFill>
+          <a:blip r:embed="rId9"/>
+          <a:stretch>
+            <a:fillRect/>
+          </a:stretch>
+        </p:blipFill>
+        <p:spPr>
+          <a:xfrm>
+            <a:off x="6137631" y="4964339"/>
+            <a:ext cx="2277634" cy="1607910"/>
           </a:xfrm>
           <a:prstGeom prst="rect">
             <a:avLst/>
@@ -13593,55 +13791,556 @@
       </p:pic>
       <p:sp>
         <p:nvSpPr>
-          <p:cNvPr id="2" name="矩形 1">
+          <p:cNvPr id="20" name="文本框 19">
             <a:extLst>
               <a:ext uri="{FF2B5EF4-FFF2-40B4-BE49-F238E27FC236}">
-                <a16:creationId xmlns:a16="http://schemas.microsoft.com/office/drawing/2014/main" id="{62B28B33-1AC1-D451-AF87-8717B798F7B7}"/>
+                <a16:creationId xmlns:a16="http://schemas.microsoft.com/office/drawing/2014/main" id="{2C21F09F-0D51-EA93-264F-DB26AC4C3D27}"/>
               </a:ext>
             </a:extLst>
           </p:cNvPr>
-          <p:cNvSpPr/>
+          <p:cNvSpPr txBox="1"/>
           <p:nvPr/>
         </p:nvSpPr>
         <p:spPr>
           <a:xfrm>
-            <a:off x="8543806" y="787476"/>
-            <a:ext cx="3102795" cy="732470"/>
+            <a:off x="2639921" y="394878"/>
+            <a:ext cx="3514725" cy="1061829"/>
           </a:xfrm>
           <a:prstGeom prst="rect">
             <a:avLst/>
           </a:prstGeom>
-          <a:solidFill>
-            <a:schemeClr val="accent1"/>
-          </a:solidFill>
-          <a:ln>
-            <a:noFill/>
-          </a:ln>
+          <a:noFill/>
         </p:spPr>
-        <p:style>
-          <a:lnRef idx="2">
-            <a:schemeClr val="accent1">
-              <a:shade val="50000"/>
-            </a:schemeClr>
-          </a:lnRef>
-          <a:fillRef idx="1">
-            <a:schemeClr val="accent1"/>
-          </a:fillRef>
-          <a:effectRef idx="0">
-            <a:schemeClr val="accent1"/>
-          </a:effectRef>
-          <a:fontRef idx="minor">
-            <a:schemeClr val="lt1"/>
-          </a:fontRef>
-        </p:style>
         <p:txBody>
-          <a:bodyPr rtlCol="0" anchor="ctr"/>
+          <a:bodyPr wrap="square">
+            <a:spAutoFit/>
+          </a:bodyPr>
           <a:lstStyle/>
           <a:p>
-            <a:pPr algn="ctr"/>
-            <a:r>
-              <a:rPr lang="zh-CN" altLang="en-US" dirty="0"/>
-              <a:t>冬季</a:t>
+            <a:r>
+              <a:rPr lang="zh-CN" altLang="en-US" sz="1050" dirty="0"/>
+              <a:t> Bin  Count  Count (%)  Event rate  MORTALITY_RATE</a:t>
+            </a:r>
+          </a:p>
+          <a:p>
+            <a:r>
+              <a:rPr lang="zh-CN" altLang="en-US" sz="1050" dirty="0"/>
+              <a:t>0   (-inf, 10.15)    210   0.519802    0.276190        0.100248</a:t>
+            </a:r>
+          </a:p>
+          <a:p>
+            <a:r>
+              <a:rPr lang="zh-CN" altLang="en-US" sz="1050" dirty="0"/>
+              <a:t>1  [10.15, 12.55)     53   0.131188    0.150943        0.085784</a:t>
+            </a:r>
+          </a:p>
+          <a:p>
+            <a:r>
+              <a:rPr lang="zh-CN" altLang="en-US" sz="1050" dirty="0"/>
+              <a:t>2  [12.55, 15.05)     42   0.103960    0.119048        0.075874</a:t>
+            </a:r>
+          </a:p>
+          <a:p>
+            <a:r>
+              <a:rPr lang="zh-CN" altLang="en-US" sz="1050" dirty="0"/>
+              <a:t>3  [15.05, 16.05)     24   0.059406    0.041667        0.068712</a:t>
+            </a:r>
+          </a:p>
+          <a:p>
+            <a:r>
+              <a:rPr lang="zh-CN" altLang="en-US" sz="1050" dirty="0"/>
+              <a:t>4    [16.05, inf)     75   0.185644    0.120000        0.078298</a:t>
+            </a:r>
+          </a:p>
+        </p:txBody>
+      </p:sp>
+      <p:sp>
+        <p:nvSpPr>
+          <p:cNvPr id="22" name="文本框 21">
+            <a:extLst>
+              <a:ext uri="{FF2B5EF4-FFF2-40B4-BE49-F238E27FC236}">
+                <a16:creationId xmlns:a16="http://schemas.microsoft.com/office/drawing/2014/main" id="{D3E0DAE6-93F4-55E9-E50F-CDA882916E7D}"/>
+              </a:ext>
+            </a:extLst>
+          </p:cNvPr>
+          <p:cNvSpPr txBox="1"/>
+          <p:nvPr/>
+        </p:nvSpPr>
+        <p:spPr>
+          <a:xfrm>
+            <a:off x="8433568" y="38782"/>
+            <a:ext cx="3648069" cy="1615827"/>
+          </a:xfrm>
+          <a:prstGeom prst="rect">
+            <a:avLst/>
+          </a:prstGeom>
+          <a:noFill/>
+        </p:spPr>
+        <p:txBody>
+          <a:bodyPr wrap="square">
+            <a:spAutoFit/>
+          </a:bodyPr>
+          <a:lstStyle/>
+          <a:p>
+            <a:r>
+              <a:rPr lang="zh-CN" altLang="en-US" sz="1100" dirty="0"/>
+              <a:t> Bin  Count  Count (%)  Event rate  MORTALITY_RATE</a:t>
+            </a:r>
+          </a:p>
+          <a:p>
+            <a:r>
+              <a:rPr lang="zh-CN" altLang="en-US" sz="1100" dirty="0"/>
+              <a:t>0     (-inf, 1.25)     32   0.079208    0.093750        0.082962</a:t>
+            </a:r>
+          </a:p>
+          <a:p>
+            <a:r>
+              <a:rPr lang="zh-CN" altLang="en-US" sz="1100" dirty="0"/>
+              <a:t>1     [1.25, 4.15)     60   0.148515    0.233333        0.095760</a:t>
+            </a:r>
+          </a:p>
+          <a:p>
+            <a:r>
+              <a:rPr lang="zh-CN" altLang="en-US" sz="1100" dirty="0"/>
+              <a:t>2     [4.15, 6.45)     79   0.195545    0.303797        0.098962</a:t>
+            </a:r>
+          </a:p>
+          <a:p>
+            <a:r>
+              <a:rPr lang="zh-CN" altLang="en-US" sz="1100" dirty="0"/>
+              <a:t>3     [6.45, 8.35)     36   0.089109    0.361111        0.110499</a:t>
+            </a:r>
+          </a:p>
+          <a:p>
+            <a:r>
+              <a:rPr lang="zh-CN" altLang="en-US" sz="1100" dirty="0"/>
+              <a:t>4     [8.35, 9.75)     22   0.054455    0.454545        0.107399</a:t>
+            </a:r>
+          </a:p>
+          <a:p>
+            <a:r>
+              <a:rPr lang="zh-CN" altLang="en-US" sz="1100" dirty="0"/>
+              <a:t>5    [9.75, 11.25)     47   0.116337    0.148936        0.091852</a:t>
+            </a:r>
+          </a:p>
+          <a:p>
+            <a:r>
+              <a:rPr lang="zh-CN" altLang="en-US" sz="1100" dirty="0"/>
+              <a:t>6   [11.25, 14.85)     49   0.121287    0.081633        0.075532</a:t>
+            </a:r>
+          </a:p>
+          <a:p>
+            <a:r>
+              <a:rPr lang="zh-CN" altLang="en-US" sz="1100" dirty="0"/>
+              <a:t>7     [14.85, inf)     79   0.195545    0.075949        0.072525</a:t>
+            </a:r>
+          </a:p>
+        </p:txBody>
+      </p:sp>
+      <p:sp>
+        <p:nvSpPr>
+          <p:cNvPr id="24" name="文本框 23">
+            <a:extLst>
+              <a:ext uri="{FF2B5EF4-FFF2-40B4-BE49-F238E27FC236}">
+                <a16:creationId xmlns:a16="http://schemas.microsoft.com/office/drawing/2014/main" id="{430EFAA4-B160-60FF-0D68-F6E4A928C8E5}"/>
+              </a:ext>
+            </a:extLst>
+          </p:cNvPr>
+          <p:cNvSpPr txBox="1"/>
+          <p:nvPr/>
+        </p:nvSpPr>
+        <p:spPr>
+          <a:xfrm>
+            <a:off x="2600324" y="2000763"/>
+            <a:ext cx="3762375" cy="1107996"/>
+          </a:xfrm>
+          <a:prstGeom prst="rect">
+            <a:avLst/>
+          </a:prstGeom>
+          <a:noFill/>
+        </p:spPr>
+        <p:txBody>
+          <a:bodyPr wrap="square">
+            <a:spAutoFit/>
+          </a:bodyPr>
+          <a:lstStyle/>
+          <a:p>
+            <a:r>
+              <a:rPr lang="zh-CN" altLang="en-US" sz="1100" dirty="0"/>
+              <a:t> Bin  Count  Count (%)  Event rate  MORTALITY_RATE</a:t>
+            </a:r>
+          </a:p>
+          <a:p>
+            <a:r>
+              <a:rPr lang="zh-CN" altLang="en-US" sz="1100" dirty="0"/>
+              <a:t>0   (-inf, 5.25)    151   0.373762    0.324503        0.104965</a:t>
+            </a:r>
+          </a:p>
+          <a:p>
+            <a:r>
+              <a:rPr lang="zh-CN" altLang="en-US" sz="1100" dirty="0"/>
+              <a:t>1   [5.25, 6.95)     60   0.148515    0.250000        0.103708</a:t>
+            </a:r>
+          </a:p>
+          <a:p>
+            <a:r>
+              <a:rPr lang="zh-CN" altLang="en-US" sz="1100" dirty="0"/>
+              <a:t>2   [6.95, 9.35)     65   0.160891    0.123077        0.073654</a:t>
+            </a:r>
+          </a:p>
+          <a:p>
+            <a:r>
+              <a:rPr lang="zh-CN" altLang="en-US" sz="1100" dirty="0"/>
+              <a:t>3  [9.35, 17.65)    100   0.247525    0.030000        0.068183</a:t>
+            </a:r>
+          </a:p>
+          <a:p>
+            <a:r>
+              <a:rPr lang="zh-CN" altLang="en-US" sz="1100" dirty="0"/>
+              <a:t>4   [17.65, inf)     28   0.069307    0.214286        0.093885</a:t>
+            </a:r>
+          </a:p>
+        </p:txBody>
+      </p:sp>
+      <p:sp>
+        <p:nvSpPr>
+          <p:cNvPr id="26" name="文本框 25">
+            <a:extLst>
+              <a:ext uri="{FF2B5EF4-FFF2-40B4-BE49-F238E27FC236}">
+                <a16:creationId xmlns:a16="http://schemas.microsoft.com/office/drawing/2014/main" id="{3E573F19-FB3C-9FD4-1EAA-7C341B8452B0}"/>
+              </a:ext>
+            </a:extLst>
+          </p:cNvPr>
+          <p:cNvSpPr txBox="1"/>
+          <p:nvPr/>
+        </p:nvSpPr>
+        <p:spPr>
+          <a:xfrm>
+            <a:off x="8433568" y="1960606"/>
+            <a:ext cx="3762376" cy="1107996"/>
+          </a:xfrm>
+          <a:prstGeom prst="rect">
+            <a:avLst/>
+          </a:prstGeom>
+          <a:noFill/>
+        </p:spPr>
+        <p:txBody>
+          <a:bodyPr wrap="square">
+            <a:spAutoFit/>
+          </a:bodyPr>
+          <a:lstStyle/>
+          <a:p>
+            <a:r>
+              <a:rPr lang="zh-CN" altLang="en-US" sz="1100" dirty="0"/>
+              <a:t> Bin  Count  Count (%)  Event rate  MORTALITY_RATE</a:t>
+            </a:r>
+          </a:p>
+          <a:p>
+            <a:r>
+              <a:rPr lang="zh-CN" altLang="en-US" sz="1100" dirty="0"/>
+              <a:t>0    (-inf, 5.95)    197   0.487624    0.329949        0.107700</a:t>
+            </a:r>
+          </a:p>
+          <a:p>
+            <a:r>
+              <a:rPr lang="zh-CN" altLang="en-US" sz="1100" dirty="0"/>
+              <a:t>1    [5.95, 8.15)     59   0.146040    0.084746        0.077403</a:t>
+            </a:r>
+          </a:p>
+          <a:p>
+            <a:r>
+              <a:rPr lang="zh-CN" altLang="en-US" sz="1100" dirty="0"/>
+              <a:t>2   [8.15, 10.70)     71   0.175743    0.028169        0.063527</a:t>
+            </a:r>
+          </a:p>
+          <a:p>
+            <a:r>
+              <a:rPr lang="zh-CN" altLang="en-US" sz="1100" dirty="0"/>
+              <a:t>3  [10.70, 15.95)     54   0.133663    0.037037        0.066473</a:t>
+            </a:r>
+          </a:p>
+          <a:p>
+            <a:r>
+              <a:rPr lang="zh-CN" altLang="en-US" sz="1100" dirty="0"/>
+              <a:t>4    [15.95, inf)     23   0.056931    0.304348        0.105351</a:t>
+            </a:r>
+          </a:p>
+        </p:txBody>
+      </p:sp>
+      <p:sp>
+        <p:nvSpPr>
+          <p:cNvPr id="28" name="文本框 27">
+            <a:extLst>
+              <a:ext uri="{FF2B5EF4-FFF2-40B4-BE49-F238E27FC236}">
+                <a16:creationId xmlns:a16="http://schemas.microsoft.com/office/drawing/2014/main" id="{E2337E0E-A0FB-C0B7-B22F-8F2ADF54405D}"/>
+              </a:ext>
+            </a:extLst>
+          </p:cNvPr>
+          <p:cNvSpPr txBox="1"/>
+          <p:nvPr/>
+        </p:nvSpPr>
+        <p:spPr>
+          <a:xfrm>
+            <a:off x="2600324" y="3455278"/>
+            <a:ext cx="3521627" cy="1446550"/>
+          </a:xfrm>
+          <a:prstGeom prst="rect">
+            <a:avLst/>
+          </a:prstGeom>
+          <a:noFill/>
+        </p:spPr>
+        <p:txBody>
+          <a:bodyPr wrap="square">
+            <a:spAutoFit/>
+          </a:bodyPr>
+          <a:lstStyle/>
+          <a:p>
+            <a:r>
+              <a:rPr lang="zh-CN" altLang="en-US" sz="1100" dirty="0"/>
+              <a:t> Bin  Count  Count (%)  Event rate  MORTALITY_RATE</a:t>
+            </a:r>
+          </a:p>
+          <a:p>
+            <a:r>
+              <a:rPr lang="zh-CN" altLang="en-US" sz="1100" dirty="0"/>
+              <a:t>0  (-inf, 2.15)     54   0.133663    0.259259        0.098866</a:t>
+            </a:r>
+          </a:p>
+          <a:p>
+            <a:r>
+              <a:rPr lang="zh-CN" altLang="en-US" sz="1100" dirty="0"/>
+              <a:t>1  [2.15, 3.15)     42   0.103960    0.500000        0.115316</a:t>
+            </a:r>
+          </a:p>
+          <a:p>
+            <a:r>
+              <a:rPr lang="zh-CN" altLang="en-US" sz="1100" dirty="0"/>
+              <a:t>2  [3.15, 4.55)     64   0.158416    0.265625        0.102329</a:t>
+            </a:r>
+          </a:p>
+          <a:p>
+            <a:r>
+              <a:rPr lang="zh-CN" altLang="en-US" sz="1100" dirty="0"/>
+              <a:t>3  [4.55, 4.95)     21   0.051980    0.190476        0.102084</a:t>
+            </a:r>
+          </a:p>
+          <a:p>
+            <a:r>
+              <a:rPr lang="zh-CN" altLang="en-US" sz="1100" dirty="0"/>
+              <a:t>4  [4.95, 6.25)     59   0.146040    0.186441        0.089334</a:t>
+            </a:r>
+          </a:p>
+          <a:p>
+            <a:r>
+              <a:rPr lang="zh-CN" altLang="en-US" sz="1100" dirty="0"/>
+              <a:t>5  [6.25, 8.60)     51   0.126238    0.137255        0.077110</a:t>
+            </a:r>
+          </a:p>
+          <a:p>
+            <a:r>
+              <a:rPr lang="zh-CN" altLang="en-US" sz="1100" dirty="0"/>
+              <a:t>6   [8.60, inf)    113   0.279703    0.061947        0.072818</a:t>
+            </a:r>
+          </a:p>
+        </p:txBody>
+      </p:sp>
+      <p:sp>
+        <p:nvSpPr>
+          <p:cNvPr id="30" name="文本框 29">
+            <a:extLst>
+              <a:ext uri="{FF2B5EF4-FFF2-40B4-BE49-F238E27FC236}">
+                <a16:creationId xmlns:a16="http://schemas.microsoft.com/office/drawing/2014/main" id="{DDD31F9C-C5C5-6F34-6C87-CAEF205F1DDA}"/>
+              </a:ext>
+            </a:extLst>
+          </p:cNvPr>
+          <p:cNvSpPr txBox="1"/>
+          <p:nvPr/>
+        </p:nvSpPr>
+        <p:spPr>
+          <a:xfrm>
+            <a:off x="8433568" y="3455278"/>
+            <a:ext cx="3514726" cy="1277273"/>
+          </a:xfrm>
+          <a:prstGeom prst="rect">
+            <a:avLst/>
+          </a:prstGeom>
+          <a:noFill/>
+        </p:spPr>
+        <p:txBody>
+          <a:bodyPr wrap="square">
+            <a:spAutoFit/>
+          </a:bodyPr>
+          <a:lstStyle/>
+          <a:p>
+            <a:r>
+              <a:rPr lang="zh-CN" altLang="en-US" sz="1100" dirty="0"/>
+              <a:t> Bin  Count  Count (%)  Event rate  MORTALITY_RATE</a:t>
+            </a:r>
+          </a:p>
+          <a:p>
+            <a:r>
+              <a:rPr lang="zh-CN" altLang="en-US" sz="1100" dirty="0"/>
+              <a:t>0  (-inf, 2.75)     93   0.230198    0.365591        0.114313</a:t>
+            </a:r>
+          </a:p>
+          <a:p>
+            <a:r>
+              <a:rPr lang="zh-CN" altLang="en-US" sz="1100" dirty="0"/>
+              <a:t>1  [2.75, 4.05)     54   0.133663    0.351852        0.104692</a:t>
+            </a:r>
+          </a:p>
+          <a:p>
+            <a:r>
+              <a:rPr lang="zh-CN" altLang="en-US" sz="1100" dirty="0"/>
+              <a:t>2  [4.05, 5.25)     42   0.103960    0.285714        0.100109</a:t>
+            </a:r>
+          </a:p>
+          <a:p>
+            <a:r>
+              <a:rPr lang="zh-CN" altLang="en-US" sz="1100" dirty="0"/>
+              <a:t>3  [5.25, 7.25)     89   0.220297    0.101124        0.074813</a:t>
+            </a:r>
+          </a:p>
+          <a:p>
+            <a:r>
+              <a:rPr lang="zh-CN" altLang="en-US" sz="1100" dirty="0"/>
+              <a:t>4  [7.25, 9.35)     63   0.155941    0.015873        0.070924</a:t>
+            </a:r>
+          </a:p>
+          <a:p>
+            <a:r>
+              <a:rPr lang="zh-CN" altLang="en-US" sz="1100" dirty="0"/>
+              <a:t>5   [9.35, inf)     63   0.155941    0.095238        0.074461</a:t>
+            </a:r>
+          </a:p>
+        </p:txBody>
+      </p:sp>
+      <p:sp>
+        <p:nvSpPr>
+          <p:cNvPr id="32" name="文本框 31">
+            <a:extLst>
+              <a:ext uri="{FF2B5EF4-FFF2-40B4-BE49-F238E27FC236}">
+                <a16:creationId xmlns:a16="http://schemas.microsoft.com/office/drawing/2014/main" id="{C1AD97CB-2152-FEC6-14AE-873BA3038E40}"/>
+              </a:ext>
+            </a:extLst>
+          </p:cNvPr>
+          <p:cNvSpPr txBox="1"/>
+          <p:nvPr/>
+        </p:nvSpPr>
+        <p:spPr>
+          <a:xfrm>
+            <a:off x="2600324" y="5229297"/>
+            <a:ext cx="3528579" cy="1107996"/>
+          </a:xfrm>
+          <a:prstGeom prst="rect">
+            <a:avLst/>
+          </a:prstGeom>
+          <a:noFill/>
+        </p:spPr>
+        <p:txBody>
+          <a:bodyPr wrap="square">
+            <a:spAutoFit/>
+          </a:bodyPr>
+          <a:lstStyle/>
+          <a:p>
+            <a:r>
+              <a:rPr lang="zh-CN" altLang="en-US" sz="1100" dirty="0"/>
+              <a:t> Bin  Count  Count (%)  Event rate  MORTALITY_RATE</a:t>
+            </a:r>
+          </a:p>
+          <a:p>
+            <a:r>
+              <a:rPr lang="zh-CN" altLang="en-US" sz="1100" dirty="0"/>
+              <a:t>0   (-inf, 3.65)    141   0.349010    0.312057        0.108052</a:t>
+            </a:r>
+          </a:p>
+          <a:p>
+            <a:r>
+              <a:rPr lang="zh-CN" altLang="en-US" sz="1100" dirty="0"/>
+              <a:t>1   [3.65, 4.55)     55   0.136139    0.254545        0.091386</a:t>
+            </a:r>
+          </a:p>
+          <a:p>
+            <a:r>
+              <a:rPr lang="zh-CN" altLang="en-US" sz="1100" dirty="0"/>
+              <a:t>2   [4.55, 6.25)     78   0.193069    0.153846        0.080637</a:t>
+            </a:r>
+          </a:p>
+          <a:p>
+            <a:r>
+              <a:rPr lang="zh-CN" altLang="en-US" sz="1100" dirty="0"/>
+              <a:t>3  [6.25, 10.15)     91   0.225248    0.098901        0.077711</a:t>
+            </a:r>
+          </a:p>
+          <a:p>
+            <a:r>
+              <a:rPr lang="zh-CN" altLang="en-US" sz="1100" dirty="0"/>
+              <a:t>4   [10.15, inf)     39   0.096535    0.051282        0.068813</a:t>
+            </a:r>
+          </a:p>
+        </p:txBody>
+      </p:sp>
+      <p:sp>
+        <p:nvSpPr>
+          <p:cNvPr id="34" name="文本框 33">
+            <a:extLst>
+              <a:ext uri="{FF2B5EF4-FFF2-40B4-BE49-F238E27FC236}">
+                <a16:creationId xmlns:a16="http://schemas.microsoft.com/office/drawing/2014/main" id="{9CCEE27E-F489-B571-57F0-07FD6500F071}"/>
+              </a:ext>
+            </a:extLst>
+          </p:cNvPr>
+          <p:cNvSpPr txBox="1"/>
+          <p:nvPr/>
+        </p:nvSpPr>
+        <p:spPr>
+          <a:xfrm>
+            <a:off x="8423993" y="5229297"/>
+            <a:ext cx="3657600" cy="1107996"/>
+          </a:xfrm>
+          <a:prstGeom prst="rect">
+            <a:avLst/>
+          </a:prstGeom>
+          <a:noFill/>
+        </p:spPr>
+        <p:txBody>
+          <a:bodyPr wrap="square">
+            <a:spAutoFit/>
+          </a:bodyPr>
+          <a:lstStyle/>
+          <a:p>
+            <a:r>
+              <a:rPr lang="zh-CN" altLang="en-US" sz="1100" dirty="0"/>
+              <a:t>Bin  Count  Count (%)  Event rate  MORTALITY_RATE</a:t>
+            </a:r>
+          </a:p>
+          <a:p>
+            <a:r>
+              <a:rPr lang="zh-CN" altLang="en-US" sz="1100" dirty="0"/>
+              <a:t>0  (-inf, 1.95)     87   0.215347    0.264368        0.096700</a:t>
+            </a:r>
+          </a:p>
+          <a:p>
+            <a:r>
+              <a:rPr lang="zh-CN" altLang="en-US" sz="1100" dirty="0"/>
+              <a:t>1  [1.95, 4.65)    137   0.339109    0.240876        0.096499</a:t>
+            </a:r>
+          </a:p>
+          <a:p>
+            <a:r>
+              <a:rPr lang="zh-CN" altLang="en-US" sz="1100" dirty="0"/>
+              <a:t>2  [4.65, 6.45)     81   0.200495    0.222222        0.095717</a:t>
+            </a:r>
+          </a:p>
+          <a:p>
+            <a:r>
+              <a:rPr lang="zh-CN" altLang="en-US" sz="1100" dirty="0"/>
+              <a:t>3  [6.45, 8.65)     43   0.106436    0.093023        0.073012</a:t>
+            </a:r>
+          </a:p>
+          <a:p>
+            <a:r>
+              <a:rPr lang="zh-CN" altLang="en-US" sz="1100" dirty="0"/>
+              <a:t>4   [8.65, inf)     56   0.138614    0.053571        0.067513</a:t>
             </a:r>
           </a:p>
         </p:txBody>
@@ -13649,7 +14348,7 @@
     </p:spTree>
     <p:extLst>
       <p:ext uri="{BB962C8B-B14F-4D97-AF65-F5344CB8AC3E}">
-        <p14:creationId xmlns:p14="http://schemas.microsoft.com/office/powerpoint/2010/main" val="3572903428"/>
+        <p14:creationId xmlns:p14="http://schemas.microsoft.com/office/powerpoint/2010/main" val="514309479"/>
       </p:ext>
     </p:extLst>
   </p:cSld>
@@ -17730,6 +18429,874 @@
           <p:cNvPr id="3" name="图片 2">
             <a:extLst>
               <a:ext uri="{FF2B5EF4-FFF2-40B4-BE49-F238E27FC236}">
+                <a16:creationId xmlns:a16="http://schemas.microsoft.com/office/drawing/2014/main" id="{1F772F10-ED34-EB21-1CAA-F19A245ECDFF}"/>
+              </a:ext>
+            </a:extLst>
+          </p:cNvPr>
+          <p:cNvPicPr>
+            <a:picLocks noChangeAspect="1"/>
+          </p:cNvPicPr>
+          <p:nvPr/>
+        </p:nvPicPr>
+        <p:blipFill>
+          <a:blip r:embed="rId2"/>
+          <a:stretch>
+            <a:fillRect/>
+          </a:stretch>
+        </p:blipFill>
+        <p:spPr>
+          <a:xfrm>
+            <a:off x="138462" y="0"/>
+            <a:ext cx="2449991" cy="1755586"/>
+          </a:xfrm>
+          <a:prstGeom prst="rect">
+            <a:avLst/>
+          </a:prstGeom>
+        </p:spPr>
+      </p:pic>
+      <p:pic>
+        <p:nvPicPr>
+          <p:cNvPr id="5" name="图片 4">
+            <a:extLst>
+              <a:ext uri="{FF2B5EF4-FFF2-40B4-BE49-F238E27FC236}">
+                <a16:creationId xmlns:a16="http://schemas.microsoft.com/office/drawing/2014/main" id="{F426479F-5F2D-7C98-965A-BF16DB4D5F54}"/>
+              </a:ext>
+            </a:extLst>
+          </p:cNvPr>
+          <p:cNvPicPr>
+            <a:picLocks noChangeAspect="1"/>
+          </p:cNvPicPr>
+          <p:nvPr/>
+        </p:nvPicPr>
+        <p:blipFill>
+          <a:blip r:embed="rId3"/>
+          <a:stretch>
+            <a:fillRect/>
+          </a:stretch>
+        </p:blipFill>
+        <p:spPr>
+          <a:xfrm>
+            <a:off x="6115474" y="0"/>
+            <a:ext cx="2449991" cy="1687736"/>
+          </a:xfrm>
+          <a:prstGeom prst="rect">
+            <a:avLst/>
+          </a:prstGeom>
+        </p:spPr>
+      </p:pic>
+      <p:pic>
+        <p:nvPicPr>
+          <p:cNvPr id="7" name="图片 6">
+            <a:extLst>
+              <a:ext uri="{FF2B5EF4-FFF2-40B4-BE49-F238E27FC236}">
+                <a16:creationId xmlns:a16="http://schemas.microsoft.com/office/drawing/2014/main" id="{FDDCB8F2-D611-5DEB-8208-E3FF5B45946E}"/>
+              </a:ext>
+            </a:extLst>
+          </p:cNvPr>
+          <p:cNvPicPr>
+            <a:picLocks noChangeAspect="1"/>
+          </p:cNvPicPr>
+          <p:nvPr/>
+        </p:nvPicPr>
+        <p:blipFill>
+          <a:blip r:embed="rId4"/>
+          <a:stretch>
+            <a:fillRect/>
+          </a:stretch>
+        </p:blipFill>
+        <p:spPr>
+          <a:xfrm>
+            <a:off x="177321" y="1715574"/>
+            <a:ext cx="2411132" cy="1715141"/>
+          </a:xfrm>
+          <a:prstGeom prst="rect">
+            <a:avLst/>
+          </a:prstGeom>
+        </p:spPr>
+      </p:pic>
+      <p:pic>
+        <p:nvPicPr>
+          <p:cNvPr id="9" name="图片 8">
+            <a:extLst>
+              <a:ext uri="{FF2B5EF4-FFF2-40B4-BE49-F238E27FC236}">
+                <a16:creationId xmlns:a16="http://schemas.microsoft.com/office/drawing/2014/main" id="{92006C5B-3D22-FA40-137C-E1CA82EB8BCC}"/>
+              </a:ext>
+            </a:extLst>
+          </p:cNvPr>
+          <p:cNvPicPr>
+            <a:picLocks noChangeAspect="1"/>
+          </p:cNvPicPr>
+          <p:nvPr/>
+        </p:nvPicPr>
+        <p:blipFill>
+          <a:blip r:embed="rId5"/>
+          <a:stretch>
+            <a:fillRect/>
+          </a:stretch>
+        </p:blipFill>
+        <p:spPr>
+          <a:xfrm>
+            <a:off x="6129072" y="1715575"/>
+            <a:ext cx="2422793" cy="1687496"/>
+          </a:xfrm>
+          <a:prstGeom prst="rect">
+            <a:avLst/>
+          </a:prstGeom>
+        </p:spPr>
+      </p:pic>
+      <p:pic>
+        <p:nvPicPr>
+          <p:cNvPr id="11" name="图片 10">
+            <a:extLst>
+              <a:ext uri="{FF2B5EF4-FFF2-40B4-BE49-F238E27FC236}">
+                <a16:creationId xmlns:a16="http://schemas.microsoft.com/office/drawing/2014/main" id="{1A204A90-0260-B3F2-7259-2970DEAC0CC8}"/>
+              </a:ext>
+            </a:extLst>
+          </p:cNvPr>
+          <p:cNvPicPr>
+            <a:picLocks noChangeAspect="1"/>
+          </p:cNvPicPr>
+          <p:nvPr/>
+        </p:nvPicPr>
+        <p:blipFill>
+          <a:blip r:embed="rId6"/>
+          <a:stretch>
+            <a:fillRect/>
+          </a:stretch>
+        </p:blipFill>
+        <p:spPr>
+          <a:xfrm>
+            <a:off x="177320" y="3401986"/>
+            <a:ext cx="2411131" cy="1663419"/>
+          </a:xfrm>
+          <a:prstGeom prst="rect">
+            <a:avLst/>
+          </a:prstGeom>
+        </p:spPr>
+      </p:pic>
+      <p:pic>
+        <p:nvPicPr>
+          <p:cNvPr id="13" name="图片 12">
+            <a:extLst>
+              <a:ext uri="{FF2B5EF4-FFF2-40B4-BE49-F238E27FC236}">
+                <a16:creationId xmlns:a16="http://schemas.microsoft.com/office/drawing/2014/main" id="{849193B5-A8D6-3346-4654-5F72DB9DF820}"/>
+              </a:ext>
+            </a:extLst>
+          </p:cNvPr>
+          <p:cNvPicPr>
+            <a:picLocks noChangeAspect="1"/>
+          </p:cNvPicPr>
+          <p:nvPr/>
+        </p:nvPicPr>
+        <p:blipFill>
+          <a:blip r:embed="rId7"/>
+          <a:stretch>
+            <a:fillRect/>
+          </a:stretch>
+        </p:blipFill>
+        <p:spPr>
+          <a:xfrm>
+            <a:off x="6129072" y="3429630"/>
+            <a:ext cx="2411131" cy="1679816"/>
+          </a:xfrm>
+          <a:prstGeom prst="rect">
+            <a:avLst/>
+          </a:prstGeom>
+        </p:spPr>
+      </p:pic>
+      <p:pic>
+        <p:nvPicPr>
+          <p:cNvPr id="15" name="图片 14">
+            <a:extLst>
+              <a:ext uri="{FF2B5EF4-FFF2-40B4-BE49-F238E27FC236}">
+                <a16:creationId xmlns:a16="http://schemas.microsoft.com/office/drawing/2014/main" id="{83F78882-8FBD-73A9-48D0-283640A24CC2}"/>
+              </a:ext>
+            </a:extLst>
+          </p:cNvPr>
+          <p:cNvPicPr>
+            <a:picLocks noChangeAspect="1"/>
+          </p:cNvPicPr>
+          <p:nvPr/>
+        </p:nvPicPr>
+        <p:blipFill>
+          <a:blip r:embed="rId8"/>
+          <a:stretch>
+            <a:fillRect/>
+          </a:stretch>
+        </p:blipFill>
+        <p:spPr>
+          <a:xfrm>
+            <a:off x="177318" y="4990822"/>
+            <a:ext cx="2418589" cy="1715140"/>
+          </a:xfrm>
+          <a:prstGeom prst="rect">
+            <a:avLst/>
+          </a:prstGeom>
+        </p:spPr>
+      </p:pic>
+      <p:pic>
+        <p:nvPicPr>
+          <p:cNvPr id="17" name="图片 16">
+            <a:extLst>
+              <a:ext uri="{FF2B5EF4-FFF2-40B4-BE49-F238E27FC236}">
+                <a16:creationId xmlns:a16="http://schemas.microsoft.com/office/drawing/2014/main" id="{DC4F2DAB-8D0D-A145-7E46-E69D169F5173}"/>
+              </a:ext>
+            </a:extLst>
+          </p:cNvPr>
+          <p:cNvPicPr>
+            <a:picLocks noChangeAspect="1"/>
+          </p:cNvPicPr>
+          <p:nvPr/>
+        </p:nvPicPr>
+        <p:blipFill>
+          <a:blip r:embed="rId9"/>
+          <a:stretch>
+            <a:fillRect/>
+          </a:stretch>
+        </p:blipFill>
+        <p:spPr>
+          <a:xfrm>
+            <a:off x="6115474" y="5126814"/>
+            <a:ext cx="2385526" cy="1679816"/>
+          </a:xfrm>
+          <a:prstGeom prst="rect">
+            <a:avLst/>
+          </a:prstGeom>
+        </p:spPr>
+      </p:pic>
+      <p:sp>
+        <p:nvSpPr>
+          <p:cNvPr id="20" name="文本框 19">
+            <a:extLst>
+              <a:ext uri="{FF2B5EF4-FFF2-40B4-BE49-F238E27FC236}">
+                <a16:creationId xmlns:a16="http://schemas.microsoft.com/office/drawing/2014/main" id="{5686D483-3105-BE83-58CE-DC6BCE367A17}"/>
+              </a:ext>
+            </a:extLst>
+          </p:cNvPr>
+          <p:cNvSpPr txBox="1"/>
+          <p:nvPr/>
+        </p:nvSpPr>
+        <p:spPr>
+          <a:xfrm>
+            <a:off x="2588451" y="69174"/>
+            <a:ext cx="3658244" cy="1615827"/>
+          </a:xfrm>
+          <a:prstGeom prst="rect">
+            <a:avLst/>
+          </a:prstGeom>
+          <a:noFill/>
+        </p:spPr>
+        <p:txBody>
+          <a:bodyPr wrap="square">
+            <a:spAutoFit/>
+          </a:bodyPr>
+          <a:lstStyle/>
+          <a:p>
+            <a:r>
+              <a:rPr lang="zh-CN" altLang="en-US" sz="1100" dirty="0"/>
+              <a:t> Bin  Count  Count (%)  Event rate  MORTALITY_RATE</a:t>
+            </a:r>
+          </a:p>
+          <a:p>
+            <a:r>
+              <a:rPr lang="zh-CN" altLang="en-US" sz="1100" dirty="0"/>
+              <a:t>0    (-inf, 33.05)     34   0.084158    0.088235        0.076695</a:t>
+            </a:r>
+          </a:p>
+          <a:p>
+            <a:r>
+              <a:rPr lang="zh-CN" altLang="en-US" sz="1100" dirty="0"/>
+              <a:t>1   [33.05, 33.25)     23   0.056931    0.130435        0.083993</a:t>
+            </a:r>
+          </a:p>
+          <a:p>
+            <a:r>
+              <a:rPr lang="zh-CN" altLang="en-US" sz="1100" dirty="0"/>
+              <a:t>2   [33.25, 33.55)     70   0.173267    0.185714        0.080204</a:t>
+            </a:r>
+          </a:p>
+          <a:p>
+            <a:r>
+              <a:rPr lang="zh-CN" altLang="en-US" sz="1100" dirty="0"/>
+              <a:t>3   [33.55, 33.65)     59   0.146040    0.186441        0.084923</a:t>
+            </a:r>
+          </a:p>
+          <a:p>
+            <a:r>
+              <a:rPr lang="zh-CN" altLang="en-US" sz="1100" dirty="0"/>
+              <a:t>4   [33.65, 33.85)    101   0.250000    0.188119        0.092970</a:t>
+            </a:r>
+          </a:p>
+          <a:p>
+            <a:r>
+              <a:rPr lang="zh-CN" altLang="en-US" sz="1100" dirty="0"/>
+              <a:t>5   [33.85, 33.95)     43   0.106436    0.209302        0.091942</a:t>
+            </a:r>
+          </a:p>
+          <a:p>
+            <a:r>
+              <a:rPr lang="zh-CN" altLang="en-US" sz="1100" dirty="0"/>
+              <a:t>6   [33.95, 34.15)     42   0.103960    0.261905        0.102060</a:t>
+            </a:r>
+          </a:p>
+          <a:p>
+            <a:r>
+              <a:rPr lang="zh-CN" altLang="en-US" sz="1100" dirty="0"/>
+              <a:t>7     [34.15, inf)     32   0.079208    0.375000        0.109767</a:t>
+            </a:r>
+          </a:p>
+        </p:txBody>
+      </p:sp>
+      <p:sp>
+        <p:nvSpPr>
+          <p:cNvPr id="22" name="文本框 21">
+            <a:extLst>
+              <a:ext uri="{FF2B5EF4-FFF2-40B4-BE49-F238E27FC236}">
+                <a16:creationId xmlns:a16="http://schemas.microsoft.com/office/drawing/2014/main" id="{3A3D3D5D-D396-DC48-05A4-537CCF57C89D}"/>
+              </a:ext>
+            </a:extLst>
+          </p:cNvPr>
+          <p:cNvSpPr txBox="1"/>
+          <p:nvPr/>
+        </p:nvSpPr>
+        <p:spPr>
+          <a:xfrm>
+            <a:off x="8551865" y="120593"/>
+            <a:ext cx="3658244" cy="1446550"/>
+          </a:xfrm>
+          <a:prstGeom prst="rect">
+            <a:avLst/>
+          </a:prstGeom>
+          <a:noFill/>
+        </p:spPr>
+        <p:txBody>
+          <a:bodyPr wrap="square">
+            <a:spAutoFit/>
+          </a:bodyPr>
+          <a:lstStyle/>
+          <a:p>
+            <a:r>
+              <a:rPr lang="zh-CN" altLang="en-US" sz="1100" dirty="0"/>
+              <a:t> Bin  Count  Count (%)  Event rate  MORTALITY_RATE</a:t>
+            </a:r>
+          </a:p>
+          <a:p>
+            <a:r>
+              <a:rPr lang="zh-CN" altLang="en-US" sz="1100" dirty="0"/>
+              <a:t>0   (-inf, 30.95)     29   0.071782    0.034483        0.072092</a:t>
+            </a:r>
+          </a:p>
+          <a:p>
+            <a:r>
+              <a:rPr lang="zh-CN" altLang="en-US" sz="1100" dirty="0"/>
+              <a:t>1  [30.95, 31.25)     28   0.069307    0.178571        0.074802</a:t>
+            </a:r>
+          </a:p>
+          <a:p>
+            <a:r>
+              <a:rPr lang="zh-CN" altLang="en-US" sz="1100" dirty="0"/>
+              <a:t>2  [31.25, 31.85)    209   0.517327    0.200957        0.091897</a:t>
+            </a:r>
+          </a:p>
+          <a:p>
+            <a:r>
+              <a:rPr lang="zh-CN" altLang="en-US" sz="1100" dirty="0"/>
+              <a:t>3  [31.85, 31.95)     37   0.091584    0.216216        0.090022</a:t>
+            </a:r>
+          </a:p>
+          <a:p>
+            <a:r>
+              <a:rPr lang="zh-CN" altLang="en-US" sz="1100" dirty="0"/>
+              <a:t>4  [31.95, 32.05)     26   0.064356    0.307692        0.100650</a:t>
+            </a:r>
+          </a:p>
+          <a:p>
+            <a:r>
+              <a:rPr lang="zh-CN" altLang="en-US" sz="1100" dirty="0"/>
+              <a:t>5  [32.05, 32.25)     52   0.128713    0.250000        0.094086</a:t>
+            </a:r>
+          </a:p>
+          <a:p>
+            <a:r>
+              <a:rPr lang="zh-CN" altLang="en-US" sz="1100" dirty="0"/>
+              <a:t>6    [32.25, inf)     23   0.056931    0.173913        0.090215</a:t>
+            </a:r>
+          </a:p>
+        </p:txBody>
+      </p:sp>
+      <p:sp>
+        <p:nvSpPr>
+          <p:cNvPr id="24" name="文本框 23">
+            <a:extLst>
+              <a:ext uri="{FF2B5EF4-FFF2-40B4-BE49-F238E27FC236}">
+                <a16:creationId xmlns:a16="http://schemas.microsoft.com/office/drawing/2014/main" id="{0714C632-739D-0A9D-EF24-A541643C7708}"/>
+              </a:ext>
+            </a:extLst>
+          </p:cNvPr>
+          <p:cNvSpPr txBox="1"/>
+          <p:nvPr/>
+        </p:nvSpPr>
+        <p:spPr>
+          <a:xfrm>
+            <a:off x="2595907" y="1849869"/>
+            <a:ext cx="3770616" cy="1446550"/>
+          </a:xfrm>
+          <a:prstGeom prst="rect">
+            <a:avLst/>
+          </a:prstGeom>
+          <a:noFill/>
+        </p:spPr>
+        <p:txBody>
+          <a:bodyPr wrap="square">
+            <a:spAutoFit/>
+          </a:bodyPr>
+          <a:lstStyle/>
+          <a:p>
+            <a:r>
+              <a:rPr lang="zh-CN" altLang="en-US" sz="1100" dirty="0"/>
+              <a:t> Bin  Count  Count (%)  Event rate  MORTALITY_RATE</a:t>
+            </a:r>
+          </a:p>
+          <a:p>
+            <a:r>
+              <a:rPr lang="zh-CN" altLang="en-US" sz="1100" dirty="0"/>
+              <a:t>0   (-inf, 29.15)     51   0.126238    0.058824        0.068412</a:t>
+            </a:r>
+          </a:p>
+          <a:p>
+            <a:r>
+              <a:rPr lang="zh-CN" altLang="en-US" sz="1100" dirty="0"/>
+              <a:t>1  [29.15, 29.45)     55   0.136139    0.127273        0.077225</a:t>
+            </a:r>
+          </a:p>
+          <a:p>
+            <a:r>
+              <a:rPr lang="zh-CN" altLang="en-US" sz="1100" dirty="0"/>
+              <a:t>2  [29.45, 29.75)    103   0.254950    0.184466        0.092664</a:t>
+            </a:r>
+          </a:p>
+          <a:p>
+            <a:r>
+              <a:rPr lang="zh-CN" altLang="en-US" sz="1100" dirty="0"/>
+              <a:t>3  [29.75, 29.95)     58   0.143564    0.206897        0.094285</a:t>
+            </a:r>
+          </a:p>
+          <a:p>
+            <a:r>
+              <a:rPr lang="zh-CN" altLang="en-US" sz="1100" dirty="0"/>
+              <a:t>4  [29.95, 30.05)     27   0.066832    0.407407        0.107271</a:t>
+            </a:r>
+          </a:p>
+          <a:p>
+            <a:r>
+              <a:rPr lang="zh-CN" altLang="en-US" sz="1100" dirty="0"/>
+              <a:t>5  [30.05, 30.25)     45   0.111386    0.288889        0.097879</a:t>
+            </a:r>
+          </a:p>
+          <a:p>
+            <a:r>
+              <a:rPr lang="zh-CN" altLang="en-US" sz="1100" dirty="0"/>
+              <a:t>6    [30.25, inf)     65   0.160891    0.246154        0.096254</a:t>
+            </a:r>
+          </a:p>
+        </p:txBody>
+      </p:sp>
+      <p:sp>
+        <p:nvSpPr>
+          <p:cNvPr id="26" name="文本框 25">
+            <a:extLst>
+              <a:ext uri="{FF2B5EF4-FFF2-40B4-BE49-F238E27FC236}">
+                <a16:creationId xmlns:a16="http://schemas.microsoft.com/office/drawing/2014/main" id="{FCD915A5-0AA1-B147-5387-D2B0275BD036}"/>
+              </a:ext>
+            </a:extLst>
+          </p:cNvPr>
+          <p:cNvSpPr txBox="1"/>
+          <p:nvPr/>
+        </p:nvSpPr>
+        <p:spPr>
+          <a:xfrm>
+            <a:off x="8565465" y="1920686"/>
+            <a:ext cx="3658244" cy="1277273"/>
+          </a:xfrm>
+          <a:prstGeom prst="rect">
+            <a:avLst/>
+          </a:prstGeom>
+          <a:noFill/>
+        </p:spPr>
+        <p:txBody>
+          <a:bodyPr wrap="square">
+            <a:spAutoFit/>
+          </a:bodyPr>
+          <a:lstStyle/>
+          <a:p>
+            <a:r>
+              <a:rPr lang="zh-CN" altLang="en-US" sz="1100" dirty="0"/>
+              <a:t> Bin  Count  Count (%)  Event rate  MORTALITY_RATE</a:t>
+            </a:r>
+          </a:p>
+          <a:p>
+            <a:r>
+              <a:rPr lang="zh-CN" altLang="en-US" sz="1100" dirty="0"/>
+              <a:t>0   (-inf, 27.95)     32   0.079208    0.031250        0.065801</a:t>
+            </a:r>
+          </a:p>
+          <a:p>
+            <a:r>
+              <a:rPr lang="zh-CN" altLang="en-US" sz="1100" dirty="0"/>
+              <a:t>1  [27.95, 28.15)     43   0.106436    0.069767        0.068893</a:t>
+            </a:r>
+          </a:p>
+          <a:p>
+            <a:r>
+              <a:rPr lang="zh-CN" altLang="en-US" sz="1100" dirty="0"/>
+              <a:t>2  [28.15, 28.35)     46   0.113861    0.108696        0.079062</a:t>
+            </a:r>
+          </a:p>
+          <a:p>
+            <a:r>
+              <a:rPr lang="zh-CN" altLang="en-US" sz="1100" dirty="0"/>
+              <a:t>3  [28.35, 28.75)    138   0.341584    0.210145        0.092584</a:t>
+            </a:r>
+          </a:p>
+          <a:p>
+            <a:r>
+              <a:rPr lang="zh-CN" altLang="en-US" sz="1100" dirty="0"/>
+              <a:t>4  [28.75, 29.35)    108   0.267327    0.268519        0.098986</a:t>
+            </a:r>
+          </a:p>
+          <a:p>
+            <a:r>
+              <a:rPr lang="zh-CN" altLang="en-US" sz="1100" dirty="0"/>
+              <a:t>5    [29.35, inf)     37   0.091584    0.378378        0.111746</a:t>
+            </a:r>
+          </a:p>
+        </p:txBody>
+      </p:sp>
+      <p:sp>
+        <p:nvSpPr>
+          <p:cNvPr id="28" name="文本框 27">
+            <a:extLst>
+              <a:ext uri="{FF2B5EF4-FFF2-40B4-BE49-F238E27FC236}">
+                <a16:creationId xmlns:a16="http://schemas.microsoft.com/office/drawing/2014/main" id="{2ACFBB5A-4B40-DD5B-173D-4C5252CD151E}"/>
+              </a:ext>
+            </a:extLst>
+          </p:cNvPr>
+          <p:cNvSpPr txBox="1"/>
+          <p:nvPr/>
+        </p:nvSpPr>
+        <p:spPr>
+          <a:xfrm>
+            <a:off x="2595907" y="3656771"/>
+            <a:ext cx="3546311" cy="1107996"/>
+          </a:xfrm>
+          <a:prstGeom prst="rect">
+            <a:avLst/>
+          </a:prstGeom>
+          <a:noFill/>
+        </p:spPr>
+        <p:txBody>
+          <a:bodyPr wrap="square">
+            <a:spAutoFit/>
+          </a:bodyPr>
+          <a:lstStyle/>
+          <a:p>
+            <a:r>
+              <a:rPr lang="zh-CN" altLang="en-US" sz="1100" dirty="0"/>
+              <a:t> Bin  Count  Count (%)  Event rate  MORTALITY_RATE</a:t>
+            </a:r>
+          </a:p>
+          <a:p>
+            <a:r>
+              <a:rPr lang="zh-CN" altLang="en-US" sz="1100" dirty="0"/>
+              <a:t>0   (-inf, 27.15)     96   0.237624    0.083333        0.072373</a:t>
+            </a:r>
+          </a:p>
+          <a:p>
+            <a:r>
+              <a:rPr lang="zh-CN" altLang="en-US" sz="1100" dirty="0"/>
+              <a:t>1  [27.15, 27.55)    125   0.309406    0.176000        0.089379</a:t>
+            </a:r>
+          </a:p>
+          <a:p>
+            <a:r>
+              <a:rPr lang="zh-CN" altLang="en-US" sz="1100" dirty="0"/>
+              <a:t>2  [27.55, 27.65)     22   0.054455    0.181818        0.093767</a:t>
+            </a:r>
+          </a:p>
+          <a:p>
+            <a:r>
+              <a:rPr lang="zh-CN" altLang="en-US" sz="1100" dirty="0"/>
+              <a:t>3  [27.65, 28.45)    137   0.339109    0.262774        0.097189</a:t>
+            </a:r>
+          </a:p>
+          <a:p>
+            <a:r>
+              <a:rPr lang="zh-CN" altLang="en-US" sz="1100" dirty="0"/>
+              <a:t>4    [28.45, inf)     24   0.059406    0.458333        0.117031</a:t>
+            </a:r>
+          </a:p>
+        </p:txBody>
+      </p:sp>
+      <p:sp>
+        <p:nvSpPr>
+          <p:cNvPr id="30" name="文本框 29">
+            <a:extLst>
+              <a:ext uri="{FF2B5EF4-FFF2-40B4-BE49-F238E27FC236}">
+                <a16:creationId xmlns:a16="http://schemas.microsoft.com/office/drawing/2014/main" id="{3B2850C3-03AD-F288-CEC6-5A57C2C6AF4F}"/>
+              </a:ext>
+            </a:extLst>
+          </p:cNvPr>
+          <p:cNvSpPr txBox="1"/>
+          <p:nvPr/>
+        </p:nvSpPr>
+        <p:spPr>
+          <a:xfrm>
+            <a:off x="8565465" y="3510420"/>
+            <a:ext cx="3658244" cy="1446550"/>
+          </a:xfrm>
+          <a:prstGeom prst="rect">
+            <a:avLst/>
+          </a:prstGeom>
+          <a:noFill/>
+        </p:spPr>
+        <p:txBody>
+          <a:bodyPr wrap="square">
+            <a:spAutoFit/>
+          </a:bodyPr>
+          <a:lstStyle/>
+          <a:p>
+            <a:r>
+              <a:rPr lang="zh-CN" altLang="en-US" sz="1100" dirty="0"/>
+              <a:t> Bin  Count  Count (%)  Event rate  MORTALITY_RATE</a:t>
+            </a:r>
+          </a:p>
+          <a:p>
+            <a:r>
+              <a:rPr lang="zh-CN" altLang="en-US" sz="1100" dirty="0"/>
+              <a:t>0   (-inf, 25.65)     29   0.071782    0.103448        0.078517</a:t>
+            </a:r>
+          </a:p>
+          <a:p>
+            <a:r>
+              <a:rPr lang="zh-CN" altLang="en-US" sz="1100" dirty="0"/>
+              <a:t>1  [25.65, 25.85)     32   0.079208    0.062500        0.068773</a:t>
+            </a:r>
+          </a:p>
+          <a:p>
+            <a:r>
+              <a:rPr lang="zh-CN" altLang="en-US" sz="1100" dirty="0"/>
+              <a:t>2  [25.85, 25.95)     25   0.061881    0.040000        0.064914</a:t>
+            </a:r>
+          </a:p>
+          <a:p>
+            <a:r>
+              <a:rPr lang="zh-CN" altLang="en-US" sz="1100" dirty="0"/>
+              <a:t>3  [25.95, 26.05)     23   0.056931    0.043478        0.073774</a:t>
+            </a:r>
+          </a:p>
+          <a:p>
+            <a:r>
+              <a:rPr lang="zh-CN" altLang="en-US" sz="1100" dirty="0"/>
+              <a:t>4  [26.05, 26.15)     29   0.071782    0.103448        0.084139</a:t>
+            </a:r>
+          </a:p>
+          <a:p>
+            <a:r>
+              <a:rPr lang="zh-CN" altLang="en-US" sz="1100" dirty="0"/>
+              <a:t>5  [26.15, 26.65)    123   0.304455    0.195122        0.087749</a:t>
+            </a:r>
+          </a:p>
+          <a:p>
+            <a:r>
+              <a:rPr lang="zh-CN" altLang="en-US" sz="1100" dirty="0"/>
+              <a:t>6    [26.65, inf)    143   0.353960    0.328671        0.106826</a:t>
+            </a:r>
+          </a:p>
+        </p:txBody>
+      </p:sp>
+      <p:sp>
+        <p:nvSpPr>
+          <p:cNvPr id="32" name="文本框 31">
+            <a:extLst>
+              <a:ext uri="{FF2B5EF4-FFF2-40B4-BE49-F238E27FC236}">
+                <a16:creationId xmlns:a16="http://schemas.microsoft.com/office/drawing/2014/main" id="{624BF5EB-B872-2A1C-DE22-35570B0131D0}"/>
+              </a:ext>
+            </a:extLst>
+          </p:cNvPr>
+          <p:cNvSpPr txBox="1"/>
+          <p:nvPr/>
+        </p:nvSpPr>
+        <p:spPr>
+          <a:xfrm>
+            <a:off x="2595907" y="5181897"/>
+            <a:ext cx="3546311" cy="1277273"/>
+          </a:xfrm>
+          <a:prstGeom prst="rect">
+            <a:avLst/>
+          </a:prstGeom>
+          <a:noFill/>
+        </p:spPr>
+        <p:txBody>
+          <a:bodyPr wrap="square">
+            <a:spAutoFit/>
+          </a:bodyPr>
+          <a:lstStyle/>
+          <a:p>
+            <a:r>
+              <a:rPr lang="zh-CN" altLang="en-US" sz="1100" dirty="0"/>
+              <a:t> Bin  Count  Count (%)  Event rate  MORTALITY_RATE</a:t>
+            </a:r>
+          </a:p>
+          <a:p>
+            <a:r>
+              <a:rPr lang="zh-CN" altLang="en-US" sz="1100" dirty="0"/>
+              <a:t>0   (-inf, 24.45)     34   0.084158    0.058824        0.067310</a:t>
+            </a:r>
+          </a:p>
+          <a:p>
+            <a:r>
+              <a:rPr lang="zh-CN" altLang="en-US" sz="1100" dirty="0"/>
+              <a:t>1  [24.45, 25.15)    126   0.311881    0.079365        0.075167</a:t>
+            </a:r>
+          </a:p>
+          <a:p>
+            <a:r>
+              <a:rPr lang="zh-CN" altLang="en-US" sz="1100" dirty="0"/>
+              <a:t>2  [25.15, 25.45)     64   0.158416    0.156250        0.080239</a:t>
+            </a:r>
+          </a:p>
+          <a:p>
+            <a:r>
+              <a:rPr lang="zh-CN" altLang="en-US" sz="1100" dirty="0"/>
+              <a:t>3  [25.45, 25.75)     56   0.138614    0.285714        0.101255</a:t>
+            </a:r>
+          </a:p>
+          <a:p>
+            <a:r>
+              <a:rPr lang="zh-CN" altLang="en-US" sz="1100" dirty="0"/>
+              <a:t>4  [25.75, 26.05)     57   0.141089    0.333333        0.115685</a:t>
+            </a:r>
+          </a:p>
+          <a:p>
+            <a:r>
+              <a:rPr lang="zh-CN" altLang="en-US" sz="1100" dirty="0"/>
+              <a:t>5    [26.05, inf)     67   0.165842    0.358209        0.106678</a:t>
+            </a:r>
+          </a:p>
+        </p:txBody>
+      </p:sp>
+      <p:sp>
+        <p:nvSpPr>
+          <p:cNvPr id="34" name="文本框 33">
+            <a:extLst>
+              <a:ext uri="{FF2B5EF4-FFF2-40B4-BE49-F238E27FC236}">
+                <a16:creationId xmlns:a16="http://schemas.microsoft.com/office/drawing/2014/main" id="{BB9F4BE9-EFD7-B124-7A9C-1224EE2D68F7}"/>
+              </a:ext>
+            </a:extLst>
+          </p:cNvPr>
+          <p:cNvSpPr txBox="1"/>
+          <p:nvPr/>
+        </p:nvSpPr>
+        <p:spPr>
+          <a:xfrm>
+            <a:off x="8578117" y="5317077"/>
+            <a:ext cx="3658244" cy="1107996"/>
+          </a:xfrm>
+          <a:prstGeom prst="rect">
+            <a:avLst/>
+          </a:prstGeom>
+          <a:noFill/>
+        </p:spPr>
+        <p:txBody>
+          <a:bodyPr wrap="square">
+            <a:spAutoFit/>
+          </a:bodyPr>
+          <a:lstStyle/>
+          <a:p>
+            <a:r>
+              <a:rPr lang="zh-CN" altLang="en-US" sz="1100" dirty="0"/>
+              <a:t> Bin  Count  Count (%)  Event rate  MORTALITY_RATE</a:t>
+            </a:r>
+          </a:p>
+          <a:p>
+            <a:r>
+              <a:rPr lang="zh-CN" altLang="en-US" sz="1100" dirty="0"/>
+              <a:t>0   (-inf, 23.15)     32   0.079208    0.062500        0.072143</a:t>
+            </a:r>
+          </a:p>
+          <a:p>
+            <a:r>
+              <a:rPr lang="zh-CN" altLang="en-US" sz="1100" dirty="0"/>
+              <a:t>1  [23.15, 23.95)     76   0.188119    0.013158        0.064684</a:t>
+            </a:r>
+          </a:p>
+          <a:p>
+            <a:r>
+              <a:rPr lang="zh-CN" altLang="en-US" sz="1100" dirty="0"/>
+              <a:t>2  [23.95, 24.55)     83   0.205446    0.144578        0.083970</a:t>
+            </a:r>
+          </a:p>
+          <a:p>
+            <a:r>
+              <a:rPr lang="zh-CN" altLang="en-US" sz="1100" dirty="0"/>
+              <a:t>3  [24.55, 25.85)    187   0.462871    0.299465        0.104482</a:t>
+            </a:r>
+          </a:p>
+          <a:p>
+            <a:r>
+              <a:rPr lang="zh-CN" altLang="en-US" sz="1100" dirty="0"/>
+              <a:t>4    [25.85, inf)     26   0.064356    0.384615        0.099017</a:t>
+            </a:r>
+          </a:p>
+        </p:txBody>
+      </p:sp>
+    </p:spTree>
+    <p:extLst>
+      <p:ext uri="{BB962C8B-B14F-4D97-AF65-F5344CB8AC3E}">
+        <p14:creationId xmlns:p14="http://schemas.microsoft.com/office/powerpoint/2010/main" val="2072985589"/>
+      </p:ext>
+    </p:extLst>
+  </p:cSld>
+  <p:clrMapOvr>
+    <a:masterClrMapping/>
+  </p:clrMapOvr>
+  <mc:AlternateContent xmlns:mc="http://schemas.openxmlformats.org/markup-compatibility/2006" xmlns:p14="http://schemas.microsoft.com/office/powerpoint/2010/main">
+    <mc:Choice Requires="p14">
+      <p:transition spd="med" p14:dur="700">
+        <p:fade/>
+      </p:transition>
+    </mc:Choice>
+    <mc:Fallback xmlns="">
+      <p:transition spd="med">
+        <p:fade/>
+      </p:transition>
+    </mc:Fallback>
+  </mc:AlternateContent>
+</p:sld>
+</file>
+
+<file path=ppt/slides/slide21.xml><?xml version="1.0" encoding="utf-8"?>
+<p:sld xmlns:a="http://schemas.openxmlformats.org/drawingml/2006/main" xmlns:r="http://schemas.openxmlformats.org/officeDocument/2006/relationships" xmlns:p="http://schemas.openxmlformats.org/presentationml/2006/main">
+  <p:cSld>
+    <p:spTree>
+      <p:nvGrpSpPr>
+        <p:cNvPr id="1" name=""/>
+        <p:cNvGrpSpPr/>
+        <p:nvPr/>
+      </p:nvGrpSpPr>
+      <p:grpSpPr>
+        <a:xfrm>
+          <a:off x="0" y="0"/>
+          <a:ext cx="0" cy="0"/>
+          <a:chOff x="0" y="0"/>
+          <a:chExt cx="0" cy="0"/>
+        </a:xfrm>
+      </p:grpSpPr>
+      <p:pic>
+        <p:nvPicPr>
+          <p:cNvPr id="3" name="图片 2">
+            <a:extLst>
+              <a:ext uri="{FF2B5EF4-FFF2-40B4-BE49-F238E27FC236}">
                 <a16:creationId xmlns:a16="http://schemas.microsoft.com/office/drawing/2014/main" id="{8083C07E-ED31-1655-4781-4FB905135973}"/>
               </a:ext>
             </a:extLst>
@@ -17900,7 +19467,7 @@
 </p:sld>
 </file>
 
-<file path=ppt/slides/slide21.xml><?xml version="1.0" encoding="utf-8"?>
+<file path=ppt/slides/slide22.xml><?xml version="1.0" encoding="utf-8"?>
 <p:sld xmlns:a="http://schemas.openxmlformats.org/drawingml/2006/main" xmlns:r="http://schemas.openxmlformats.org/officeDocument/2006/relationships" xmlns:p="http://schemas.openxmlformats.org/presentationml/2006/main">
   <p:cSld>
     <p:spTree>
@@ -18104,7 +19671,7 @@
 </p:sld>
 </file>
 
-<file path=ppt/slides/slide22.xml><?xml version="1.0" encoding="utf-8"?>
+<file path=ppt/slides/slide23.xml><?xml version="1.0" encoding="utf-8"?>
 <p:sld xmlns:a="http://schemas.openxmlformats.org/drawingml/2006/main" xmlns:r="http://schemas.openxmlformats.org/officeDocument/2006/relationships" xmlns:p="http://schemas.openxmlformats.org/presentationml/2006/main">
   <p:cSld>
     <p:spTree>
@@ -18320,7 +19887,7 @@
 </p:sld>
 </file>
 
-<file path=ppt/slides/slide23.xml><?xml version="1.0" encoding="utf-8"?>
+<file path=ppt/slides/slide24.xml><?xml version="1.0" encoding="utf-8"?>
 <p:sld xmlns:a="http://schemas.openxmlformats.org/drawingml/2006/main" xmlns:r="http://schemas.openxmlformats.org/officeDocument/2006/relationships" xmlns:p="http://schemas.openxmlformats.org/presentationml/2006/main">
   <p:cSld>
     <p:spTree>
@@ -18518,7 +20085,7 @@
 </p:sld>
 </file>
 
-<file path=ppt/slides/slide24.xml><?xml version="1.0" encoding="utf-8"?>
+<file path=ppt/slides/slide25.xml><?xml version="1.0" encoding="utf-8"?>
 <p:sld xmlns:a="http://schemas.openxmlformats.org/drawingml/2006/main" xmlns:r="http://schemas.openxmlformats.org/officeDocument/2006/relationships" xmlns:p="http://schemas.openxmlformats.org/presentationml/2006/main">
   <p:cSld>
     <p:spTree>
@@ -18526,7 +20093,7 @@
         <p:cNvPr id="1" name="">
           <a:extLst>
             <a:ext uri="{FF2B5EF4-FFF2-40B4-BE49-F238E27FC236}">
-              <a16:creationId xmlns:a16="http://schemas.microsoft.com/office/drawing/2014/main" id="{E3FE1759-B493-67DE-1F9E-D3F539CEB049}"/>
+              <a16:creationId xmlns:a16="http://schemas.microsoft.com/office/drawing/2014/main" id="{F4DCBA6F-3D2C-20D7-D43E-E85A7E42278C}"/>
             </a:ext>
           </a:extLst>
         </p:cNvPr>
@@ -18543,38 +20110,53 @@
       </p:grpSpPr>
       <p:sp>
         <p:nvSpPr>
-          <p:cNvPr id="4" name="Title 3">
+          <p:cNvPr id="8" name="箭头: 五边形 7">
             <a:extLst>
               <a:ext uri="{FF2B5EF4-FFF2-40B4-BE49-F238E27FC236}">
-                <a16:creationId xmlns:a16="http://schemas.microsoft.com/office/drawing/2014/main" id="{547F18B6-B26F-09DF-E000-A7BF0AD0D84B}"/>
+                <a16:creationId xmlns:a16="http://schemas.microsoft.com/office/drawing/2014/main" id="{CACE3152-7DC5-9C8E-0A06-CB346A96C5E9}"/>
               </a:ext>
             </a:extLst>
           </p:cNvPr>
-          <p:cNvSpPr>
-            <a:spLocks noGrp="1"/>
-          </p:cNvSpPr>
-          <p:nvPr>
-            <p:ph type="title"/>
-          </p:nvPr>
+          <p:cNvSpPr/>
+          <p:nvPr/>
         </p:nvSpPr>
         <p:spPr>
           <a:xfrm>
-            <a:off x="792226" y="957768"/>
-            <a:ext cx="8082481" cy="861774"/>
+            <a:off x="0" y="591378"/>
+            <a:ext cx="8067675" cy="576475"/>
           </a:xfrm>
+          <a:prstGeom prst="homePlate">
+            <a:avLst/>
+          </a:prstGeom>
+          <a:solidFill>
+            <a:schemeClr val="tx2"/>
+          </a:solidFill>
+          <a:ln>
+            <a:noFill/>
+          </a:ln>
         </p:spPr>
+        <p:style>
+          <a:lnRef idx="2">
+            <a:schemeClr val="accent1">
+              <a:shade val="50000"/>
+            </a:schemeClr>
+          </a:lnRef>
+          <a:fillRef idx="1">
+            <a:schemeClr val="accent1"/>
+          </a:fillRef>
+          <a:effectRef idx="0">
+            <a:schemeClr val="accent1"/>
+          </a:effectRef>
+          <a:fontRef idx="minor">
+            <a:schemeClr val="lt1"/>
+          </a:fontRef>
+        </p:style>
         <p:txBody>
-          <a:bodyPr/>
+          <a:bodyPr rtlCol="0" anchor="ctr"/>
           <a:lstStyle/>
           <a:p>
-            <a:r>
-              <a:rPr lang="zh-CN" altLang="en-US" sz="4400" dirty="0">
-                <a:latin typeface="等线" panose="02010600030101010101" pitchFamily="2" charset="-122"/>
-                <a:ea typeface="等线" panose="02010600030101010101" pitchFamily="2" charset="-122"/>
-              </a:rPr>
-              <a:t>下周计划</a:t>
-            </a:r>
-            <a:endParaRPr lang="en-US" sz="4400" dirty="0">
+            <a:pPr algn="ctr"/>
+            <a:endParaRPr lang="zh-CN" altLang="en-US" sz="2000">
               <a:latin typeface="等线" panose="02010600030101010101" pitchFamily="2" charset="-122"/>
               <a:ea typeface="等线" panose="02010600030101010101" pitchFamily="2" charset="-122"/>
             </a:endParaRPr>
@@ -18583,36 +20165,4431 @@
       </p:sp>
       <p:sp>
         <p:nvSpPr>
-          <p:cNvPr id="3" name="文本占位符 2">
+          <p:cNvPr id="4" name="标题 1">
             <a:extLst>
               <a:ext uri="{FF2B5EF4-FFF2-40B4-BE49-F238E27FC236}">
-                <a16:creationId xmlns:a16="http://schemas.microsoft.com/office/drawing/2014/main" id="{62344FB5-5D1A-25EB-41D1-35CC3CFE3176}"/>
+                <a16:creationId xmlns:a16="http://schemas.microsoft.com/office/drawing/2014/main" id="{DBAD38D9-5547-0095-D581-6882C80E9117}"/>
               </a:ext>
             </a:extLst>
           </p:cNvPr>
-          <p:cNvSpPr>
-            <a:spLocks noGrp="1"/>
-          </p:cNvSpPr>
-          <p:nvPr>
-            <p:ph type="body" sz="quarter" idx="10"/>
-          </p:nvPr>
+          <p:cNvSpPr txBox="1"/>
+          <p:nvPr/>
         </p:nvSpPr>
-        <p:spPr/>
+        <p:spPr>
+          <a:xfrm>
+            <a:off x="313885" y="31758"/>
+            <a:ext cx="3277040" cy="628110"/>
+          </a:xfrm>
+          <a:prstGeom prst="rect">
+            <a:avLst/>
+          </a:prstGeom>
+        </p:spPr>
         <p:txBody>
-          <a:bodyPr/>
+          <a:bodyPr vert="horz" wrap="square" lIns="121920" tIns="60960" rIns="121920" bIns="60960" rtlCol="0" anchor="ctr" anchorCtr="0">
+            <a:noAutofit/>
+          </a:bodyPr>
+          <a:lstStyle>
+            <a:lvl1pPr algn="ctr" defTabSz="182880" rtl="0" eaLnBrk="1" latinLnBrk="0" hangingPunct="1">
+              <a:spcBef>
+                <a:spcPct val="0"/>
+              </a:spcBef>
+              <a:buNone/>
+              <a:defRPr lang="en-US" sz="1500" b="1" kern="1200" cap="none" baseline="0">
+                <a:solidFill>
+                  <a:schemeClr val="tx2"/>
+                </a:solidFill>
+                <a:latin typeface="+mj-lt"/>
+                <a:ea typeface="+mj-ea"/>
+                <a:cs typeface="+mj-cs"/>
+              </a:defRPr>
+            </a:lvl1pPr>
+          </a:lstStyle>
+          <a:p>
+            <a:pPr marL="0" marR="0" lvl="0" indent="0" algn="l" defTabSz="182880" rtl="0" eaLnBrk="1" fontAlgn="auto" latinLnBrk="0" hangingPunct="1">
+              <a:lnSpc>
+                <a:spcPct val="100000"/>
+              </a:lnSpc>
+              <a:spcBef>
+                <a:spcPct val="0"/>
+              </a:spcBef>
+              <a:spcAft>
+                <a:spcPts val="0"/>
+              </a:spcAft>
+              <a:buClrTx/>
+              <a:buSzTx/>
+              <a:buFontTx/>
+              <a:buNone/>
+              <a:defRPr/>
+            </a:pPr>
+            <a:endParaRPr kumimoji="0" lang="zh-CN" altLang="en-US" sz="2400" b="1" i="0" u="none" strike="noStrike" kern="1200" cap="none" spc="0" normalizeH="0" baseline="0" noProof="0" dirty="0">
+              <a:ln>
+                <a:noFill/>
+              </a:ln>
+              <a:solidFill>
+                <a:srgbClr val="000000"/>
+              </a:solidFill>
+              <a:effectLst/>
+              <a:uLnTx/>
+              <a:uFillTx/>
+              <a:latin typeface="等线" panose="02010600030101010101" pitchFamily="2" charset="-122"/>
+              <a:ea typeface="等线" panose="02010600030101010101" pitchFamily="2" charset="-122"/>
+            </a:endParaRPr>
+          </a:p>
+        </p:txBody>
+      </p:sp>
+      <p:sp>
+        <p:nvSpPr>
+          <p:cNvPr id="2" name="标题 1">
+            <a:extLst>
+              <a:ext uri="{FF2B5EF4-FFF2-40B4-BE49-F238E27FC236}">
+                <a16:creationId xmlns:a16="http://schemas.microsoft.com/office/drawing/2014/main" id="{BE37B370-645B-7668-E10A-715E325E0FC0}"/>
+              </a:ext>
+            </a:extLst>
+          </p:cNvPr>
+          <p:cNvSpPr txBox="1"/>
+          <p:nvPr/>
+        </p:nvSpPr>
+        <p:spPr>
+          <a:xfrm>
+            <a:off x="551901" y="559215"/>
+            <a:ext cx="7249074" cy="640800"/>
+          </a:xfrm>
+          <a:prstGeom prst="rect">
+            <a:avLst/>
+          </a:prstGeom>
+        </p:spPr>
+        <p:txBody>
+          <a:bodyPr vert="horz" wrap="square" lIns="121920" tIns="60960" rIns="121920" bIns="60960" rtlCol="0" anchor="ctr" anchorCtr="0">
+            <a:noAutofit/>
+          </a:bodyPr>
+          <a:lstStyle>
+            <a:lvl1pPr algn="ctr" defTabSz="182880" rtl="0" eaLnBrk="1" latinLnBrk="0" hangingPunct="1">
+              <a:spcBef>
+                <a:spcPct val="0"/>
+              </a:spcBef>
+              <a:buNone/>
+              <a:defRPr lang="en-US" sz="1500" b="1" kern="1200" cap="none" baseline="0">
+                <a:solidFill>
+                  <a:schemeClr val="tx2"/>
+                </a:solidFill>
+                <a:latin typeface="+mj-lt"/>
+                <a:ea typeface="+mj-ea"/>
+                <a:cs typeface="+mj-cs"/>
+              </a:defRPr>
+            </a:lvl1pPr>
+          </a:lstStyle>
+          <a:p>
+            <a:pPr algn="l">
+              <a:defRPr/>
+            </a:pPr>
+            <a:r>
+              <a:rPr kumimoji="0" lang="zh-CN" altLang="en-US" sz="1800" b="1" i="0" u="none" strike="noStrike" kern="1200" cap="none" spc="0" normalizeH="0" baseline="0" noProof="0" dirty="0">
+                <a:ln>
+                  <a:noFill/>
+                </a:ln>
+                <a:solidFill>
+                  <a:schemeClr val="bg1"/>
+                </a:solidFill>
+                <a:effectLst/>
+                <a:uLnTx/>
+                <a:uFillTx/>
+                <a:latin typeface="等线" panose="02010600030101010101" pitchFamily="2" charset="-122"/>
+                <a:ea typeface="等线" panose="02010600030101010101" pitchFamily="2" charset="-122"/>
+              </a:rPr>
+              <a:t>固定变量和温度数据对</a:t>
+            </a:r>
+            <a:r>
+              <a:rPr kumimoji="0" lang="en-US" altLang="zh-CN" sz="1800" b="1" i="0" u="none" strike="noStrike" kern="1200" cap="none" spc="0" normalizeH="0" baseline="0" noProof="0" dirty="0">
+                <a:ln>
+                  <a:noFill/>
+                </a:ln>
+                <a:solidFill>
+                  <a:schemeClr val="bg1"/>
+                </a:solidFill>
+                <a:effectLst/>
+                <a:uLnTx/>
+                <a:uFillTx/>
+                <a:latin typeface="等线" panose="02010600030101010101" pitchFamily="2" charset="-122"/>
+                <a:ea typeface="等线" panose="02010600030101010101" pitchFamily="2" charset="-122"/>
+              </a:rPr>
+              <a:t>EEF</a:t>
+            </a:r>
+            <a:r>
+              <a:rPr kumimoji="0" lang="zh-CN" altLang="en-US" sz="1800" b="1" i="0" u="none" strike="noStrike" kern="1200" cap="none" spc="0" normalizeH="0" baseline="0" noProof="0" dirty="0">
+                <a:ln>
+                  <a:noFill/>
+                </a:ln>
+                <a:solidFill>
+                  <a:schemeClr val="bg1"/>
+                </a:solidFill>
+                <a:effectLst/>
+                <a:uLnTx/>
+                <a:uFillTx/>
+                <a:latin typeface="等线" panose="02010600030101010101" pitchFamily="2" charset="-122"/>
+                <a:ea typeface="等线" panose="02010600030101010101" pitchFamily="2" charset="-122"/>
+              </a:rPr>
+              <a:t>是否存在影响？</a:t>
+            </a:r>
+          </a:p>
+        </p:txBody>
+      </p:sp>
+      <p:sp>
+        <p:nvSpPr>
+          <p:cNvPr id="21" name="标题 1">
+            <a:extLst>
+              <a:ext uri="{FF2B5EF4-FFF2-40B4-BE49-F238E27FC236}">
+                <a16:creationId xmlns:a16="http://schemas.microsoft.com/office/drawing/2014/main" id="{4BFF91E6-F352-FEA3-D27C-72B655FCAE1F}"/>
+              </a:ext>
+            </a:extLst>
+          </p:cNvPr>
+          <p:cNvSpPr txBox="1"/>
+          <p:nvPr/>
+        </p:nvSpPr>
+        <p:spPr>
+          <a:xfrm>
+            <a:off x="98783" y="-30126"/>
+            <a:ext cx="11239200" cy="640800"/>
+          </a:xfrm>
+          <a:prstGeom prst="rect">
+            <a:avLst/>
+          </a:prstGeom>
+        </p:spPr>
+        <p:txBody>
+          <a:bodyPr vert="horz" wrap="square" lIns="121920" tIns="60960" rIns="121920" bIns="60960" rtlCol="0" anchor="ctr" anchorCtr="0">
+            <a:noAutofit/>
+          </a:bodyPr>
+          <a:lstStyle>
+            <a:lvl1pPr algn="ctr" defTabSz="182880" rtl="0" eaLnBrk="1" latinLnBrk="0" hangingPunct="1">
+              <a:spcBef>
+                <a:spcPct val="0"/>
+              </a:spcBef>
+              <a:buNone/>
+              <a:defRPr lang="en-US" sz="1500" b="1" kern="1200" cap="none" baseline="0">
+                <a:solidFill>
+                  <a:schemeClr val="tx2"/>
+                </a:solidFill>
+                <a:latin typeface="+mj-lt"/>
+                <a:ea typeface="+mj-ea"/>
+                <a:cs typeface="+mj-cs"/>
+              </a:defRPr>
+            </a:lvl1pPr>
+          </a:lstStyle>
+          <a:p>
+            <a:pPr marL="0" marR="0" lvl="0" indent="0" algn="l" defTabSz="182880" rtl="0" eaLnBrk="1" fontAlgn="auto" latinLnBrk="0" hangingPunct="1">
+              <a:lnSpc>
+                <a:spcPct val="100000"/>
+              </a:lnSpc>
+              <a:spcBef>
+                <a:spcPct val="0"/>
+              </a:spcBef>
+              <a:spcAft>
+                <a:spcPts val="0"/>
+              </a:spcAft>
+              <a:buClrTx/>
+              <a:buSzTx/>
+              <a:buFontTx/>
+              <a:buNone/>
+              <a:defRPr/>
+            </a:pPr>
+            <a:r>
+              <a:rPr lang="en-US" altLang="zh-CN" sz="2800" dirty="0">
+                <a:solidFill>
+                  <a:schemeClr val="accent5">
+                    <a:lumMod val="75000"/>
+                  </a:schemeClr>
+                </a:solidFill>
+                <a:latin typeface="等线" panose="02010600030101010101" pitchFamily="2" charset="-122"/>
+                <a:ea typeface="等线" panose="02010600030101010101" pitchFamily="2" charset="-122"/>
+              </a:rPr>
+              <a:t>EEF</a:t>
+            </a:r>
+            <a:r>
+              <a:rPr kumimoji="0" lang="zh-CN" altLang="en-US" sz="2800" b="1" i="0" u="none" strike="noStrike" kern="1200" cap="none" spc="0" normalizeH="0" baseline="0" noProof="0" dirty="0">
+                <a:ln>
+                  <a:noFill/>
+                </a:ln>
+                <a:solidFill>
+                  <a:schemeClr val="accent5">
+                    <a:lumMod val="75000"/>
+                  </a:schemeClr>
+                </a:solidFill>
+                <a:effectLst/>
+                <a:uLnTx/>
+                <a:uFillTx/>
+                <a:latin typeface="等线" panose="02010600030101010101" pitchFamily="2" charset="-122"/>
+                <a:ea typeface="等线" panose="02010600030101010101" pitchFamily="2" charset="-122"/>
+              </a:rPr>
+              <a:t>分析</a:t>
+            </a:r>
+          </a:p>
+        </p:txBody>
+      </p:sp>
+      <p:sp>
+        <p:nvSpPr>
+          <p:cNvPr id="3" name="矩形 2">
+            <a:extLst>
+              <a:ext uri="{FF2B5EF4-FFF2-40B4-BE49-F238E27FC236}">
+                <a16:creationId xmlns:a16="http://schemas.microsoft.com/office/drawing/2014/main" id="{927878C8-D80C-7B04-A401-DA541A750CCB}"/>
+              </a:ext>
+            </a:extLst>
+          </p:cNvPr>
+          <p:cNvSpPr/>
+          <p:nvPr/>
+        </p:nvSpPr>
+        <p:spPr>
+          <a:xfrm>
+            <a:off x="492981" y="1249209"/>
+            <a:ext cx="564032" cy="786613"/>
+          </a:xfrm>
+          <a:prstGeom prst="rect">
+            <a:avLst/>
+          </a:prstGeom>
+          <a:pattFill prst="ltDnDiag">
+            <a:fgClr>
+              <a:schemeClr val="accent1">
+                <a:lumMod val="20000"/>
+                <a:lumOff val="80000"/>
+              </a:schemeClr>
+            </a:fgClr>
+            <a:bgClr>
+              <a:schemeClr val="bg1"/>
+            </a:bgClr>
+          </a:pattFill>
+          <a:ln w="19050">
+            <a:solidFill>
+              <a:schemeClr val="accent4"/>
+            </a:solidFill>
+          </a:ln>
+        </p:spPr>
+        <p:style>
+          <a:lnRef idx="2">
+            <a:schemeClr val="accent1">
+              <a:shade val="50000"/>
+            </a:schemeClr>
+          </a:lnRef>
+          <a:fillRef idx="1">
+            <a:schemeClr val="accent1"/>
+          </a:fillRef>
+          <a:effectRef idx="0">
+            <a:schemeClr val="accent1"/>
+          </a:effectRef>
+          <a:fontRef idx="minor">
+            <a:schemeClr val="lt1"/>
+          </a:fontRef>
+        </p:style>
+        <p:txBody>
+          <a:bodyPr lIns="72000" rIns="72000" rtlCol="0" anchor="ctr" anchorCtr="0"/>
           <a:lstStyle/>
           <a:p>
-            <a:endParaRPr lang="zh-CN" altLang="en-US"/>
+            <a:pPr marL="0" marR="0" lvl="0" indent="0" algn="ctr" defTabSz="914400" rtl="0" eaLnBrk="1" fontAlgn="auto" latinLnBrk="0" hangingPunct="1">
+              <a:lnSpc>
+                <a:spcPct val="100000"/>
+              </a:lnSpc>
+              <a:spcBef>
+                <a:spcPts val="0"/>
+              </a:spcBef>
+              <a:spcAft>
+                <a:spcPts val="0"/>
+              </a:spcAft>
+              <a:buClrTx/>
+              <a:buSzTx/>
+              <a:buFontTx/>
+              <a:buNone/>
+              <a:tabLst/>
+              <a:defRPr/>
+            </a:pPr>
+            <a:r>
+              <a:rPr lang="zh-CN" altLang="en-US" sz="1600" b="1" dirty="0">
+                <a:solidFill>
+                  <a:srgbClr val="33A3FF"/>
+                </a:solidFill>
+                <a:latin typeface="等线" panose="02010600030101010101" pitchFamily="2" charset="-122"/>
+                <a:ea typeface="等线" panose="02010600030101010101" pitchFamily="2" charset="-122"/>
+              </a:rPr>
+              <a:t>探查方法</a:t>
+            </a:r>
+            <a:endParaRPr kumimoji="0" lang="zh-CN" altLang="en-US" sz="1600" b="1" i="0" u="none" strike="noStrike" kern="1200" cap="none" spc="0" normalizeH="0" baseline="0" noProof="0" dirty="0">
+              <a:ln>
+                <a:noFill/>
+              </a:ln>
+              <a:solidFill>
+                <a:srgbClr val="33A3FF"/>
+              </a:solidFill>
+              <a:effectLst/>
+              <a:uLnTx/>
+              <a:uFillTx/>
+              <a:latin typeface="等线" panose="02010600030101010101" pitchFamily="2" charset="-122"/>
+              <a:ea typeface="等线" panose="02010600030101010101" pitchFamily="2" charset="-122"/>
+            </a:endParaRPr>
+          </a:p>
+        </p:txBody>
+      </p:sp>
+      <p:sp>
+        <p:nvSpPr>
+          <p:cNvPr id="5" name="矩形 4">
+            <a:extLst>
+              <a:ext uri="{FF2B5EF4-FFF2-40B4-BE49-F238E27FC236}">
+                <a16:creationId xmlns:a16="http://schemas.microsoft.com/office/drawing/2014/main" id="{5362506A-533D-2F50-9D6D-B2E37EE1E1D4}"/>
+              </a:ext>
+            </a:extLst>
+          </p:cNvPr>
+          <p:cNvSpPr/>
+          <p:nvPr/>
+        </p:nvSpPr>
+        <p:spPr>
+          <a:xfrm>
+            <a:off x="492981" y="1249209"/>
+            <a:ext cx="11060104" cy="786613"/>
+          </a:xfrm>
+          <a:prstGeom prst="rect">
+            <a:avLst/>
+          </a:prstGeom>
+          <a:noFill/>
+          <a:ln>
+            <a:solidFill>
+              <a:schemeClr val="tx2"/>
+            </a:solidFill>
+          </a:ln>
+        </p:spPr>
+        <p:style>
+          <a:lnRef idx="2">
+            <a:schemeClr val="accent1">
+              <a:shade val="50000"/>
+            </a:schemeClr>
+          </a:lnRef>
+          <a:fillRef idx="1">
+            <a:schemeClr val="accent1"/>
+          </a:fillRef>
+          <a:effectRef idx="0">
+            <a:schemeClr val="accent1"/>
+          </a:effectRef>
+          <a:fontRef idx="minor">
+            <a:schemeClr val="lt1"/>
+          </a:fontRef>
+        </p:style>
+        <p:txBody>
+          <a:bodyPr rtlCol="0" anchor="ctr"/>
+          <a:lstStyle/>
+          <a:p>
+            <a:pPr algn="ctr"/>
+            <a:endParaRPr lang="zh-CN" altLang="en-US">
+              <a:latin typeface="等线" panose="02010600030101010101" pitchFamily="2" charset="-122"/>
+              <a:ea typeface="等线" panose="02010600030101010101" pitchFamily="2" charset="-122"/>
+            </a:endParaRPr>
+          </a:p>
+        </p:txBody>
+      </p:sp>
+      <p:sp>
+        <p:nvSpPr>
+          <p:cNvPr id="6" name="标题 1">
+            <a:extLst>
+              <a:ext uri="{FF2B5EF4-FFF2-40B4-BE49-F238E27FC236}">
+                <a16:creationId xmlns:a16="http://schemas.microsoft.com/office/drawing/2014/main" id="{67584FD9-7F17-BC4B-3DA4-F90CF66BD536}"/>
+              </a:ext>
+            </a:extLst>
+          </p:cNvPr>
+          <p:cNvSpPr txBox="1"/>
+          <p:nvPr/>
+        </p:nvSpPr>
+        <p:spPr>
+          <a:xfrm>
+            <a:off x="1057013" y="1339235"/>
+            <a:ext cx="10642006" cy="690076"/>
+          </a:xfrm>
+          <a:prstGeom prst="rect">
+            <a:avLst/>
+          </a:prstGeom>
+        </p:spPr>
+        <p:txBody>
+          <a:bodyPr vert="horz" wrap="square" lIns="121920" tIns="60960" rIns="121920" bIns="60960" rtlCol="0" anchor="ctr" anchorCtr="0">
+            <a:noAutofit/>
+          </a:bodyPr>
+          <a:lstStyle>
+            <a:lvl1pPr algn="ctr" defTabSz="182880" rtl="0" eaLnBrk="1" latinLnBrk="0" hangingPunct="1">
+              <a:spcBef>
+                <a:spcPct val="0"/>
+              </a:spcBef>
+              <a:buNone/>
+              <a:defRPr lang="en-US" sz="1500" b="1" kern="1200" cap="none" baseline="0">
+                <a:solidFill>
+                  <a:schemeClr val="tx2"/>
+                </a:solidFill>
+                <a:latin typeface="+mj-lt"/>
+                <a:ea typeface="+mj-ea"/>
+                <a:cs typeface="+mj-cs"/>
+              </a:defRPr>
+            </a:lvl1pPr>
+          </a:lstStyle>
+          <a:p>
+            <a:pPr marL="285750" indent="-285750" algn="l">
+              <a:buFont typeface="Wingdings" panose="05000000000000000000" pitchFamily="2" charset="2"/>
+              <a:buChar char="Ø"/>
+            </a:pPr>
+            <a:r>
+              <a:rPr lang="zh-CN" altLang="en-US" sz="1400" dirty="0">
+                <a:solidFill>
+                  <a:schemeClr val="tx1"/>
+                </a:solidFill>
+                <a:latin typeface="等线" panose="02010600030101010101" pitchFamily="2" charset="-122"/>
+                <a:ea typeface="等线" panose="02010600030101010101" pitchFamily="2" charset="-122"/>
+              </a:rPr>
+              <a:t>以出栏</a:t>
+            </a:r>
+            <a:r>
+              <a:rPr lang="en-US" altLang="zh-CN" sz="1400" dirty="0">
+                <a:solidFill>
+                  <a:schemeClr val="tx1"/>
+                </a:solidFill>
+                <a:latin typeface="等线" panose="02010600030101010101" pitchFamily="2" charset="-122"/>
+                <a:ea typeface="等线" panose="02010600030101010101" pitchFamily="2" charset="-122"/>
+              </a:rPr>
+              <a:t>EEF</a:t>
+            </a:r>
+            <a:r>
+              <a:rPr lang="zh-CN" altLang="en-US" sz="1400" dirty="0">
+                <a:solidFill>
+                  <a:schemeClr val="tx1"/>
+                </a:solidFill>
+                <a:latin typeface="等线" panose="02010600030101010101" pitchFamily="2" charset="-122"/>
+                <a:ea typeface="等线" panose="02010600030101010101" pitchFamily="2" charset="-122"/>
+              </a:rPr>
+              <a:t>为目标变量，探索各阶段温度及温度变化对</a:t>
+            </a:r>
+            <a:r>
+              <a:rPr lang="en-US" altLang="zh-CN" sz="1400" dirty="0">
+                <a:solidFill>
+                  <a:schemeClr val="tx1"/>
+                </a:solidFill>
+                <a:latin typeface="等线" panose="02010600030101010101" pitchFamily="2" charset="-122"/>
+                <a:ea typeface="等线" panose="02010600030101010101" pitchFamily="2" charset="-122"/>
+              </a:rPr>
+              <a:t>EEF</a:t>
+            </a:r>
+            <a:r>
+              <a:rPr lang="zh-CN" altLang="en-US" sz="1400" dirty="0">
+                <a:solidFill>
+                  <a:schemeClr val="tx1"/>
+                </a:solidFill>
+                <a:latin typeface="等线" panose="02010600030101010101" pitchFamily="2" charset="-122"/>
+                <a:ea typeface="等线" panose="02010600030101010101" pitchFamily="2" charset="-122"/>
+              </a:rPr>
+              <a:t>的影响。分季节取样本的</a:t>
+            </a:r>
+            <a:r>
+              <a:rPr lang="en-US" altLang="zh-CN" sz="1400" dirty="0">
+                <a:solidFill>
+                  <a:schemeClr val="tx1"/>
+                </a:solidFill>
+                <a:latin typeface="等线" panose="02010600030101010101" pitchFamily="2" charset="-122"/>
+                <a:ea typeface="等线" panose="02010600030101010101" pitchFamily="2" charset="-122"/>
+              </a:rPr>
+              <a:t>80%</a:t>
+            </a:r>
+            <a:r>
+              <a:rPr lang="zh-CN" altLang="en-US" sz="1400" dirty="0">
+                <a:solidFill>
+                  <a:schemeClr val="tx1"/>
+                </a:solidFill>
+                <a:latin typeface="等线" panose="02010600030101010101" pitchFamily="2" charset="-122"/>
+                <a:ea typeface="等线" panose="02010600030101010101" pitchFamily="2" charset="-122"/>
+              </a:rPr>
+              <a:t>分位数划分高低</a:t>
+            </a:r>
+            <a:r>
+              <a:rPr lang="en-US" altLang="zh-CN" sz="1400" dirty="0">
+                <a:solidFill>
+                  <a:schemeClr val="tx1"/>
+                </a:solidFill>
+                <a:latin typeface="等线" panose="02010600030101010101" pitchFamily="2" charset="-122"/>
+                <a:ea typeface="等线" panose="02010600030101010101" pitchFamily="2" charset="-122"/>
+              </a:rPr>
+              <a:t>EEF</a:t>
+            </a:r>
+            <a:r>
+              <a:rPr lang="zh-CN" altLang="en-US" sz="1400" dirty="0">
+                <a:solidFill>
+                  <a:schemeClr val="tx1"/>
+                </a:solidFill>
+                <a:latin typeface="等线" panose="02010600030101010101" pitchFamily="2" charset="-122"/>
+                <a:ea typeface="等线" panose="02010600030101010101" pitchFamily="2" charset="-122"/>
+              </a:rPr>
+              <a:t>。指标为三天滑窗</a:t>
+            </a:r>
+          </a:p>
+        </p:txBody>
+      </p:sp>
+      <p:sp>
+        <p:nvSpPr>
+          <p:cNvPr id="7" name="矩形 6">
+            <a:extLst>
+              <a:ext uri="{FF2B5EF4-FFF2-40B4-BE49-F238E27FC236}">
+                <a16:creationId xmlns:a16="http://schemas.microsoft.com/office/drawing/2014/main" id="{1A6CC099-A307-B15F-9649-9B0DDC3BBEA3}"/>
+              </a:ext>
+            </a:extLst>
+          </p:cNvPr>
+          <p:cNvSpPr/>
+          <p:nvPr/>
+        </p:nvSpPr>
+        <p:spPr>
+          <a:xfrm>
+            <a:off x="9602815" y="2585930"/>
+            <a:ext cx="3102795" cy="986319"/>
+          </a:xfrm>
+          <a:prstGeom prst="rect">
+            <a:avLst/>
+          </a:prstGeom>
+          <a:solidFill>
+            <a:schemeClr val="accent1"/>
+          </a:solidFill>
+          <a:ln>
+            <a:noFill/>
+          </a:ln>
+        </p:spPr>
+        <p:style>
+          <a:lnRef idx="2">
+            <a:schemeClr val="accent1">
+              <a:shade val="50000"/>
+            </a:schemeClr>
+          </a:lnRef>
+          <a:fillRef idx="1">
+            <a:schemeClr val="accent1"/>
+          </a:fillRef>
+          <a:effectRef idx="0">
+            <a:schemeClr val="accent1"/>
+          </a:effectRef>
+          <a:fontRef idx="minor">
+            <a:schemeClr val="lt1"/>
+          </a:fontRef>
+        </p:style>
+        <p:txBody>
+          <a:bodyPr rtlCol="0" anchor="ctr"/>
+          <a:lstStyle/>
+          <a:p>
+            <a:pPr algn="ctr"/>
+            <a:r>
+              <a:rPr lang="zh-CN" altLang="en-US" dirty="0"/>
+              <a:t>见文档</a:t>
+            </a:r>
+          </a:p>
+        </p:txBody>
+      </p:sp>
+      <p:graphicFrame>
+        <p:nvGraphicFramePr>
+          <p:cNvPr id="9" name="表格 8">
+            <a:extLst>
+              <a:ext uri="{FF2B5EF4-FFF2-40B4-BE49-F238E27FC236}">
+                <a16:creationId xmlns:a16="http://schemas.microsoft.com/office/drawing/2014/main" id="{9C2BD32D-E8FF-3236-0E4F-18FBD2167560}"/>
+              </a:ext>
+            </a:extLst>
+          </p:cNvPr>
+          <p:cNvGraphicFramePr>
+            <a:graphicFrameLocks noGrp="1"/>
+          </p:cNvGraphicFramePr>
+          <p:nvPr/>
+        </p:nvGraphicFramePr>
+        <p:xfrm>
+          <a:off x="1191873" y="3204916"/>
+          <a:ext cx="9043839" cy="872490"/>
+        </p:xfrm>
+        <a:graphic>
+          <a:graphicData uri="http://schemas.openxmlformats.org/drawingml/2006/table">
+            <a:tbl>
+              <a:tblPr firstRow="1" firstCol="1" bandRow="1"/>
+              <a:tblGrid>
+                <a:gridCol w="1298704">
+                  <a:extLst>
+                    <a:ext uri="{9D8B030D-6E8A-4147-A177-3AD203B41FA5}">
+                      <a16:colId xmlns:a16="http://schemas.microsoft.com/office/drawing/2014/main" val="3801373755"/>
+                    </a:ext>
+                  </a:extLst>
+                </a:gridCol>
+                <a:gridCol w="875269">
+                  <a:extLst>
+                    <a:ext uri="{9D8B030D-6E8A-4147-A177-3AD203B41FA5}">
+                      <a16:colId xmlns:a16="http://schemas.microsoft.com/office/drawing/2014/main" val="811401970"/>
+                    </a:ext>
+                  </a:extLst>
+                </a:gridCol>
+                <a:gridCol w="1158803">
+                  <a:extLst>
+                    <a:ext uri="{9D8B030D-6E8A-4147-A177-3AD203B41FA5}">
+                      <a16:colId xmlns:a16="http://schemas.microsoft.com/office/drawing/2014/main" val="1679194711"/>
+                    </a:ext>
+                  </a:extLst>
+                </a:gridCol>
+                <a:gridCol w="1301989">
+                  <a:extLst>
+                    <a:ext uri="{9D8B030D-6E8A-4147-A177-3AD203B41FA5}">
+                      <a16:colId xmlns:a16="http://schemas.microsoft.com/office/drawing/2014/main" val="3461694118"/>
+                    </a:ext>
+                  </a:extLst>
+                </a:gridCol>
+                <a:gridCol w="1132749">
+                  <a:extLst>
+                    <a:ext uri="{9D8B030D-6E8A-4147-A177-3AD203B41FA5}">
+                      <a16:colId xmlns:a16="http://schemas.microsoft.com/office/drawing/2014/main" val="2447547013"/>
+                    </a:ext>
+                  </a:extLst>
+                </a:gridCol>
+                <a:gridCol w="1588419">
+                  <a:extLst>
+                    <a:ext uri="{9D8B030D-6E8A-4147-A177-3AD203B41FA5}">
+                      <a16:colId xmlns:a16="http://schemas.microsoft.com/office/drawing/2014/main" val="2128753147"/>
+                    </a:ext>
+                  </a:extLst>
+                </a:gridCol>
+                <a:gridCol w="1687906">
+                  <a:extLst>
+                    <a:ext uri="{9D8B030D-6E8A-4147-A177-3AD203B41FA5}">
+                      <a16:colId xmlns:a16="http://schemas.microsoft.com/office/drawing/2014/main" val="995393870"/>
+                    </a:ext>
+                  </a:extLst>
+                </a:gridCol>
+              </a:tblGrid>
+              <a:tr h="117209">
+                <a:tc>
+                  <a:txBody>
+                    <a:bodyPr/>
+                    <a:lstStyle/>
+                    <a:p>
+                      <a:pPr algn="l">
+                        <a:buNone/>
+                      </a:pPr>
+                      <a:r>
+                        <a:rPr lang="zh-CN" sz="1400" kern="100" dirty="0">
+                          <a:effectLst/>
+                          <a:latin typeface="等线" panose="02010600030101010101" pitchFamily="2" charset="-122"/>
+                          <a:ea typeface="等线" panose="02010600030101010101" pitchFamily="2" charset="-122"/>
+                          <a:cs typeface="Times New Roman" panose="02020603050405020304" pitchFamily="18" charset="0"/>
+                        </a:rPr>
+                        <a:t>季节</a:t>
+                      </a:r>
+                    </a:p>
+                  </a:txBody>
+                  <a:tcPr marL="68580" marR="68580" marT="0" marB="0" anchor="ctr">
+                    <a:lnL w="12700" cap="flat" cmpd="sng" algn="ctr">
+                      <a:solidFill>
+                        <a:srgbClr val="000000"/>
+                      </a:solidFill>
+                      <a:prstDash val="solid"/>
+                      <a:round/>
+                      <a:headEnd type="none" w="med" len="med"/>
+                      <a:tailEnd type="none" w="med" len="med"/>
+                    </a:lnL>
+                    <a:lnR w="12700" cap="flat" cmpd="sng" algn="ctr">
+                      <a:solidFill>
+                        <a:srgbClr val="000000"/>
+                      </a:solidFill>
+                      <a:prstDash val="solid"/>
+                      <a:round/>
+                      <a:headEnd type="none" w="med" len="med"/>
+                      <a:tailEnd type="none" w="med" len="med"/>
+                    </a:lnR>
+                    <a:lnT w="12700" cap="flat" cmpd="sng" algn="ctr">
+                      <a:solidFill>
+                        <a:srgbClr val="000000"/>
+                      </a:solidFill>
+                      <a:prstDash val="solid"/>
+                      <a:round/>
+                      <a:headEnd type="none" w="med" len="med"/>
+                      <a:tailEnd type="none" w="med" len="med"/>
+                    </a:lnT>
+                    <a:lnB w="12700" cap="flat" cmpd="sng" algn="ctr">
+                      <a:solidFill>
+                        <a:srgbClr val="000000"/>
+                      </a:solidFill>
+                      <a:prstDash val="solid"/>
+                      <a:round/>
+                      <a:headEnd type="none" w="med" len="med"/>
+                      <a:tailEnd type="none" w="med" len="med"/>
+                    </a:lnB>
+                    <a:noFill/>
+                  </a:tcPr>
+                </a:tc>
+                <a:tc>
+                  <a:txBody>
+                    <a:bodyPr/>
+                    <a:lstStyle/>
+                    <a:p>
+                      <a:pPr algn="l">
+                        <a:buNone/>
+                      </a:pPr>
+                      <a:r>
+                        <a:rPr lang="en-US" sz="1400" kern="100" dirty="0">
+                          <a:effectLst/>
+                          <a:latin typeface="等线" panose="02010600030101010101" pitchFamily="2" charset="-122"/>
+                          <a:ea typeface="等线" panose="02010600030101010101" pitchFamily="2" charset="-122"/>
+                          <a:cs typeface="Times New Roman" panose="02020603050405020304" pitchFamily="18" charset="0"/>
+                        </a:rPr>
+                        <a:t>AUC</a:t>
+                      </a:r>
+                      <a:endParaRPr lang="zh-CN" sz="1400" kern="100" dirty="0">
+                        <a:effectLst/>
+                        <a:latin typeface="等线" panose="02010600030101010101" pitchFamily="2" charset="-122"/>
+                        <a:ea typeface="等线" panose="02010600030101010101" pitchFamily="2" charset="-122"/>
+                        <a:cs typeface="Times New Roman" panose="02020603050405020304" pitchFamily="18" charset="0"/>
+                      </a:endParaRPr>
+                    </a:p>
+                  </a:txBody>
+                  <a:tcPr marL="68580" marR="68580" marT="0" marB="0" anchor="ctr">
+                    <a:lnL w="12700" cap="flat" cmpd="sng" algn="ctr">
+                      <a:solidFill>
+                        <a:srgbClr val="000000"/>
+                      </a:solidFill>
+                      <a:prstDash val="solid"/>
+                      <a:round/>
+                      <a:headEnd type="none" w="med" len="med"/>
+                      <a:tailEnd type="none" w="med" len="med"/>
+                    </a:lnL>
+                    <a:lnR w="12700" cap="flat" cmpd="sng" algn="ctr">
+                      <a:solidFill>
+                        <a:srgbClr val="000000"/>
+                      </a:solidFill>
+                      <a:prstDash val="solid"/>
+                      <a:round/>
+                      <a:headEnd type="none" w="med" len="med"/>
+                      <a:tailEnd type="none" w="med" len="med"/>
+                    </a:lnR>
+                    <a:lnT w="12700" cap="flat" cmpd="sng" algn="ctr">
+                      <a:solidFill>
+                        <a:srgbClr val="000000"/>
+                      </a:solidFill>
+                      <a:prstDash val="solid"/>
+                      <a:round/>
+                      <a:headEnd type="none" w="med" len="med"/>
+                      <a:tailEnd type="none" w="med" len="med"/>
+                    </a:lnT>
+                    <a:lnB w="12700" cap="flat" cmpd="sng" algn="ctr">
+                      <a:solidFill>
+                        <a:srgbClr val="000000"/>
+                      </a:solidFill>
+                      <a:prstDash val="solid"/>
+                      <a:round/>
+                      <a:headEnd type="none" w="med" len="med"/>
+                      <a:tailEnd type="none" w="med" len="med"/>
+                    </a:lnB>
+                    <a:noFill/>
+                  </a:tcPr>
+                </a:tc>
+                <a:tc>
+                  <a:txBody>
+                    <a:bodyPr/>
+                    <a:lstStyle/>
+                    <a:p>
+                      <a:pPr algn="l">
+                        <a:buNone/>
+                      </a:pPr>
+                      <a:r>
+                        <a:rPr lang="zh-CN" sz="1400" kern="100" dirty="0">
+                          <a:effectLst/>
+                          <a:latin typeface="等线" panose="02010600030101010101" pitchFamily="2" charset="-122"/>
+                          <a:ea typeface="等线" panose="02010600030101010101" pitchFamily="2" charset="-122"/>
+                          <a:cs typeface="Times New Roman" panose="02020603050405020304" pitchFamily="18" charset="0"/>
+                        </a:rPr>
+                        <a:t>平衡准确率</a:t>
+                      </a:r>
+                    </a:p>
+                  </a:txBody>
+                  <a:tcPr marL="68580" marR="68580" marT="0" marB="0" anchor="ctr">
+                    <a:lnL w="12700" cap="flat" cmpd="sng" algn="ctr">
+                      <a:solidFill>
+                        <a:srgbClr val="000000"/>
+                      </a:solidFill>
+                      <a:prstDash val="solid"/>
+                      <a:round/>
+                      <a:headEnd type="none" w="med" len="med"/>
+                      <a:tailEnd type="none" w="med" len="med"/>
+                    </a:lnL>
+                    <a:lnR w="12700" cap="flat" cmpd="sng" algn="ctr">
+                      <a:solidFill>
+                        <a:srgbClr val="000000"/>
+                      </a:solidFill>
+                      <a:prstDash val="solid"/>
+                      <a:round/>
+                      <a:headEnd type="none" w="med" len="med"/>
+                      <a:tailEnd type="none" w="med" len="med"/>
+                    </a:lnR>
+                    <a:lnT w="12700" cap="flat" cmpd="sng" algn="ctr">
+                      <a:solidFill>
+                        <a:srgbClr val="000000"/>
+                      </a:solidFill>
+                      <a:prstDash val="solid"/>
+                      <a:round/>
+                      <a:headEnd type="none" w="med" len="med"/>
+                      <a:tailEnd type="none" w="med" len="med"/>
+                    </a:lnT>
+                    <a:lnB w="12700" cap="flat" cmpd="sng" algn="ctr">
+                      <a:solidFill>
+                        <a:srgbClr val="000000"/>
+                      </a:solidFill>
+                      <a:prstDash val="solid"/>
+                      <a:round/>
+                      <a:headEnd type="none" w="med" len="med"/>
+                      <a:tailEnd type="none" w="med" len="med"/>
+                    </a:lnB>
+                    <a:noFill/>
+                  </a:tcPr>
+                </a:tc>
+                <a:tc>
+                  <a:txBody>
+                    <a:bodyPr/>
+                    <a:lstStyle/>
+                    <a:p>
+                      <a:pPr algn="l">
+                        <a:buNone/>
+                      </a:pPr>
+                      <a:r>
+                        <a:rPr lang="en-US" sz="1400" kern="100" dirty="0">
+                          <a:effectLst/>
+                          <a:latin typeface="等线" panose="02010600030101010101" pitchFamily="2" charset="-122"/>
+                          <a:ea typeface="等线" panose="02010600030101010101" pitchFamily="2" charset="-122"/>
+                          <a:cs typeface="Times New Roman" panose="02020603050405020304" pitchFamily="18" charset="0"/>
+                        </a:rPr>
+                        <a:t>F1-Score</a:t>
+                      </a:r>
+                      <a:endParaRPr lang="zh-CN" sz="1400" kern="100" dirty="0">
+                        <a:effectLst/>
+                        <a:latin typeface="等线" panose="02010600030101010101" pitchFamily="2" charset="-122"/>
+                        <a:ea typeface="等线" panose="02010600030101010101" pitchFamily="2" charset="-122"/>
+                        <a:cs typeface="Times New Roman" panose="02020603050405020304" pitchFamily="18" charset="0"/>
+                      </a:endParaRPr>
+                    </a:p>
+                  </a:txBody>
+                  <a:tcPr marL="68580" marR="68580" marT="0" marB="0" anchor="ctr">
+                    <a:lnL w="12700" cap="flat" cmpd="sng" algn="ctr">
+                      <a:solidFill>
+                        <a:srgbClr val="000000"/>
+                      </a:solidFill>
+                      <a:prstDash val="solid"/>
+                      <a:round/>
+                      <a:headEnd type="none" w="med" len="med"/>
+                      <a:tailEnd type="none" w="med" len="med"/>
+                    </a:lnL>
+                    <a:lnR w="12700" cap="flat" cmpd="sng" algn="ctr">
+                      <a:solidFill>
+                        <a:srgbClr val="000000"/>
+                      </a:solidFill>
+                      <a:prstDash val="solid"/>
+                      <a:round/>
+                      <a:headEnd type="none" w="med" len="med"/>
+                      <a:tailEnd type="none" w="med" len="med"/>
+                    </a:lnR>
+                    <a:lnT w="12700" cap="flat" cmpd="sng" algn="ctr">
+                      <a:solidFill>
+                        <a:srgbClr val="000000"/>
+                      </a:solidFill>
+                      <a:prstDash val="solid"/>
+                      <a:round/>
+                      <a:headEnd type="none" w="med" len="med"/>
+                      <a:tailEnd type="none" w="med" len="med"/>
+                    </a:lnT>
+                    <a:lnB w="12700" cap="flat" cmpd="sng" algn="ctr">
+                      <a:solidFill>
+                        <a:srgbClr val="000000"/>
+                      </a:solidFill>
+                      <a:prstDash val="solid"/>
+                      <a:round/>
+                      <a:headEnd type="none" w="med" len="med"/>
+                      <a:tailEnd type="none" w="med" len="med"/>
+                    </a:lnB>
+                    <a:noFill/>
+                  </a:tcPr>
+                </a:tc>
+                <a:tc>
+                  <a:txBody>
+                    <a:bodyPr/>
+                    <a:lstStyle/>
+                    <a:p>
+                      <a:pPr algn="l">
+                        <a:buNone/>
+                      </a:pPr>
+                      <a:r>
+                        <a:rPr lang="zh-CN" sz="1400" kern="100" dirty="0">
+                          <a:effectLst/>
+                          <a:latin typeface="等线" panose="02010600030101010101" pitchFamily="2" charset="-122"/>
+                          <a:ea typeface="等线" panose="02010600030101010101" pitchFamily="2" charset="-122"/>
+                          <a:cs typeface="Times New Roman" panose="02020603050405020304" pitchFamily="18" charset="0"/>
+                        </a:rPr>
+                        <a:t>验证集</a:t>
+                      </a:r>
+                      <a:r>
+                        <a:rPr lang="en-US" sz="1400" kern="100" dirty="0">
+                          <a:effectLst/>
+                          <a:latin typeface="等线" panose="02010600030101010101" pitchFamily="2" charset="-122"/>
+                          <a:ea typeface="等线" panose="02010600030101010101" pitchFamily="2" charset="-122"/>
+                          <a:cs typeface="Times New Roman" panose="02020603050405020304" pitchFamily="18" charset="0"/>
+                        </a:rPr>
+                        <a:t>AUC</a:t>
+                      </a:r>
+                      <a:endParaRPr lang="zh-CN" sz="1400" kern="100" dirty="0">
+                        <a:effectLst/>
+                        <a:latin typeface="等线" panose="02010600030101010101" pitchFamily="2" charset="-122"/>
+                        <a:ea typeface="等线" panose="02010600030101010101" pitchFamily="2" charset="-122"/>
+                        <a:cs typeface="Times New Roman" panose="02020603050405020304" pitchFamily="18" charset="0"/>
+                      </a:endParaRPr>
+                    </a:p>
+                  </a:txBody>
+                  <a:tcPr marL="68580" marR="68580" marT="0" marB="0" anchor="ctr">
+                    <a:lnL w="12700" cap="flat" cmpd="sng" algn="ctr">
+                      <a:solidFill>
+                        <a:srgbClr val="000000"/>
+                      </a:solidFill>
+                      <a:prstDash val="solid"/>
+                      <a:round/>
+                      <a:headEnd type="none" w="med" len="med"/>
+                      <a:tailEnd type="none" w="med" len="med"/>
+                    </a:lnL>
+                    <a:lnR w="12700" cap="flat" cmpd="sng" algn="ctr">
+                      <a:solidFill>
+                        <a:srgbClr val="000000"/>
+                      </a:solidFill>
+                      <a:prstDash val="solid"/>
+                      <a:round/>
+                      <a:headEnd type="none" w="med" len="med"/>
+                      <a:tailEnd type="none" w="med" len="med"/>
+                    </a:lnR>
+                    <a:lnT w="12700" cap="flat" cmpd="sng" algn="ctr">
+                      <a:solidFill>
+                        <a:srgbClr val="000000"/>
+                      </a:solidFill>
+                      <a:prstDash val="solid"/>
+                      <a:round/>
+                      <a:headEnd type="none" w="med" len="med"/>
+                      <a:tailEnd type="none" w="med" len="med"/>
+                    </a:lnT>
+                    <a:lnB w="12700" cap="flat" cmpd="sng" algn="ctr">
+                      <a:solidFill>
+                        <a:srgbClr val="000000"/>
+                      </a:solidFill>
+                      <a:prstDash val="solid"/>
+                      <a:round/>
+                      <a:headEnd type="none" w="med" len="med"/>
+                      <a:tailEnd type="none" w="med" len="med"/>
+                    </a:lnB>
+                    <a:noFill/>
+                  </a:tcPr>
+                </a:tc>
+                <a:tc>
+                  <a:txBody>
+                    <a:bodyPr/>
+                    <a:lstStyle/>
+                    <a:p>
+                      <a:pPr algn="l">
+                        <a:buNone/>
+                      </a:pPr>
+                      <a:r>
+                        <a:rPr lang="zh-CN" altLang="en-US" sz="1400" kern="100" dirty="0">
+                          <a:effectLst/>
+                          <a:latin typeface="等线" panose="02010600030101010101" pitchFamily="2" charset="-122"/>
+                          <a:ea typeface="等线" panose="02010600030101010101" pitchFamily="2" charset="-122"/>
+                          <a:cs typeface="Times New Roman" panose="02020603050405020304" pitchFamily="18" charset="0"/>
+                        </a:rPr>
+                        <a:t>验证集平衡准确率</a:t>
+                      </a:r>
+                      <a:endParaRPr lang="zh-CN" sz="1400" kern="100" dirty="0">
+                        <a:effectLst/>
+                        <a:latin typeface="等线" panose="02010600030101010101" pitchFamily="2" charset="-122"/>
+                        <a:ea typeface="等线" panose="02010600030101010101" pitchFamily="2" charset="-122"/>
+                        <a:cs typeface="Times New Roman" panose="02020603050405020304" pitchFamily="18" charset="0"/>
+                      </a:endParaRPr>
+                    </a:p>
+                  </a:txBody>
+                  <a:tcPr marL="68580" marR="68580" marT="0" marB="0" anchor="ctr">
+                    <a:lnL w="12700" cap="flat" cmpd="sng" algn="ctr">
+                      <a:solidFill>
+                        <a:srgbClr val="000000"/>
+                      </a:solidFill>
+                      <a:prstDash val="solid"/>
+                      <a:round/>
+                      <a:headEnd type="none" w="med" len="med"/>
+                      <a:tailEnd type="none" w="med" len="med"/>
+                    </a:lnL>
+                    <a:lnR w="12700" cap="flat" cmpd="sng" algn="ctr">
+                      <a:solidFill>
+                        <a:srgbClr val="000000"/>
+                      </a:solidFill>
+                      <a:prstDash val="solid"/>
+                      <a:round/>
+                      <a:headEnd type="none" w="med" len="med"/>
+                      <a:tailEnd type="none" w="med" len="med"/>
+                    </a:lnR>
+                    <a:lnT w="12700" cap="flat" cmpd="sng" algn="ctr">
+                      <a:solidFill>
+                        <a:srgbClr val="000000"/>
+                      </a:solidFill>
+                      <a:prstDash val="solid"/>
+                      <a:round/>
+                      <a:headEnd type="none" w="med" len="med"/>
+                      <a:tailEnd type="none" w="med" len="med"/>
+                    </a:lnT>
+                    <a:lnB w="12700" cap="flat" cmpd="sng" algn="ctr">
+                      <a:solidFill>
+                        <a:srgbClr val="000000"/>
+                      </a:solidFill>
+                      <a:prstDash val="solid"/>
+                      <a:round/>
+                      <a:headEnd type="none" w="med" len="med"/>
+                      <a:tailEnd type="none" w="med" len="med"/>
+                    </a:lnB>
+                    <a:noFill/>
+                  </a:tcPr>
+                </a:tc>
+                <a:tc>
+                  <a:txBody>
+                    <a:bodyPr/>
+                    <a:lstStyle/>
+                    <a:p>
+                      <a:pPr algn="l">
+                        <a:buNone/>
+                      </a:pPr>
+                      <a:r>
+                        <a:rPr lang="zh-CN" altLang="en-US" sz="1400" kern="100" dirty="0">
+                          <a:effectLst/>
+                          <a:latin typeface="等线" panose="02010600030101010101" pitchFamily="2" charset="-122"/>
+                          <a:ea typeface="等线" panose="02010600030101010101" pitchFamily="2" charset="-122"/>
+                          <a:cs typeface="Times New Roman" panose="02020603050405020304" pitchFamily="18" charset="0"/>
+                        </a:rPr>
+                        <a:t>验证集</a:t>
+                      </a:r>
+                      <a:r>
+                        <a:rPr lang="en-US" altLang="zh-CN" sz="1400" kern="100" dirty="0">
+                          <a:effectLst/>
+                          <a:latin typeface="等线" panose="02010600030101010101" pitchFamily="2" charset="-122"/>
+                          <a:ea typeface="等线" panose="02010600030101010101" pitchFamily="2" charset="-122"/>
+                          <a:cs typeface="Times New Roman" panose="02020603050405020304" pitchFamily="18" charset="0"/>
+                        </a:rPr>
+                        <a:t>F1-score</a:t>
+                      </a:r>
+                      <a:endParaRPr lang="zh-CN" sz="1400" kern="100" dirty="0">
+                        <a:effectLst/>
+                        <a:latin typeface="等线" panose="02010600030101010101" pitchFamily="2" charset="-122"/>
+                        <a:ea typeface="等线" panose="02010600030101010101" pitchFamily="2" charset="-122"/>
+                        <a:cs typeface="Times New Roman" panose="02020603050405020304" pitchFamily="18" charset="0"/>
+                      </a:endParaRPr>
+                    </a:p>
+                  </a:txBody>
+                  <a:tcPr marL="68580" marR="68580" marT="0" marB="0" anchor="ctr">
+                    <a:lnL w="12700" cap="flat" cmpd="sng" algn="ctr">
+                      <a:solidFill>
+                        <a:srgbClr val="000000"/>
+                      </a:solidFill>
+                      <a:prstDash val="solid"/>
+                      <a:round/>
+                      <a:headEnd type="none" w="med" len="med"/>
+                      <a:tailEnd type="none" w="med" len="med"/>
+                    </a:lnL>
+                    <a:lnR w="12700" cap="flat" cmpd="sng" algn="ctr">
+                      <a:solidFill>
+                        <a:srgbClr val="000000"/>
+                      </a:solidFill>
+                      <a:prstDash val="solid"/>
+                      <a:round/>
+                      <a:headEnd type="none" w="med" len="med"/>
+                      <a:tailEnd type="none" w="med" len="med"/>
+                    </a:lnR>
+                    <a:lnT w="12700" cap="flat" cmpd="sng" algn="ctr">
+                      <a:solidFill>
+                        <a:srgbClr val="000000"/>
+                      </a:solidFill>
+                      <a:prstDash val="solid"/>
+                      <a:round/>
+                      <a:headEnd type="none" w="med" len="med"/>
+                      <a:tailEnd type="none" w="med" len="med"/>
+                    </a:lnT>
+                    <a:lnB w="12700" cap="flat" cmpd="sng" algn="ctr">
+                      <a:solidFill>
+                        <a:srgbClr val="000000"/>
+                      </a:solidFill>
+                      <a:prstDash val="solid"/>
+                      <a:round/>
+                      <a:headEnd type="none" w="med" len="med"/>
+                      <a:tailEnd type="none" w="med" len="med"/>
+                    </a:lnB>
+                    <a:noFill/>
+                  </a:tcPr>
+                </a:tc>
+                <a:extLst>
+                  <a:ext uri="{0D108BD9-81ED-4DB2-BD59-A6C34878D82A}">
+                    <a16:rowId xmlns:a16="http://schemas.microsoft.com/office/drawing/2014/main" val="2397880505"/>
+                  </a:ext>
+                </a:extLst>
+              </a:tr>
+              <a:tr h="200930">
+                <a:tc>
+                  <a:txBody>
+                    <a:bodyPr/>
+                    <a:lstStyle/>
+                    <a:p>
+                      <a:pPr algn="just">
+                        <a:buNone/>
+                      </a:pPr>
+                      <a:r>
+                        <a:rPr lang="zh-CN" sz="1400" kern="100" dirty="0">
+                          <a:effectLst/>
+                          <a:latin typeface="等线" panose="02010600030101010101" pitchFamily="2" charset="-122"/>
+                          <a:ea typeface="等线" panose="02010600030101010101" pitchFamily="2" charset="-122"/>
+                          <a:cs typeface="Times New Roman" panose="02020603050405020304" pitchFamily="18" charset="0"/>
+                        </a:rPr>
+                        <a:t>冬季</a:t>
+                      </a:r>
+                    </a:p>
+                  </a:txBody>
+                  <a:tcPr marL="68580" marR="68580" marT="0" marB="0">
+                    <a:lnL w="12700" cap="flat" cmpd="sng" algn="ctr">
+                      <a:solidFill>
+                        <a:srgbClr val="000000"/>
+                      </a:solidFill>
+                      <a:prstDash val="solid"/>
+                      <a:round/>
+                      <a:headEnd type="none" w="med" len="med"/>
+                      <a:tailEnd type="none" w="med" len="med"/>
+                    </a:lnL>
+                    <a:lnR w="12700" cap="flat" cmpd="sng" algn="ctr">
+                      <a:solidFill>
+                        <a:srgbClr val="000000"/>
+                      </a:solidFill>
+                      <a:prstDash val="solid"/>
+                      <a:round/>
+                      <a:headEnd type="none" w="med" len="med"/>
+                      <a:tailEnd type="none" w="med" len="med"/>
+                    </a:lnR>
+                    <a:lnT w="12700" cap="flat" cmpd="sng" algn="ctr">
+                      <a:solidFill>
+                        <a:srgbClr val="000000"/>
+                      </a:solidFill>
+                      <a:prstDash val="solid"/>
+                      <a:round/>
+                      <a:headEnd type="none" w="med" len="med"/>
+                      <a:tailEnd type="none" w="med" len="med"/>
+                    </a:lnT>
+                    <a:lnB w="12700" cap="flat" cmpd="sng" algn="ctr">
+                      <a:solidFill>
+                        <a:srgbClr val="000000"/>
+                      </a:solidFill>
+                      <a:prstDash val="solid"/>
+                      <a:round/>
+                      <a:headEnd type="none" w="med" len="med"/>
+                      <a:tailEnd type="none" w="med" len="med"/>
+                    </a:lnB>
+                    <a:noFill/>
+                  </a:tcPr>
+                </a:tc>
+                <a:tc>
+                  <a:txBody>
+                    <a:bodyPr/>
+                    <a:lstStyle/>
+                    <a:p>
+                      <a:pPr marL="0" algn="l" defTabSz="914400" rtl="0" eaLnBrk="1" fontAlgn="ctr" latinLnBrk="0" hangingPunct="1">
+                        <a:buNone/>
+                      </a:pPr>
+                      <a:r>
+                        <a:rPr lang="en-US" altLang="zh-CN" sz="1400" kern="100" dirty="0">
+                          <a:solidFill>
+                            <a:schemeClr val="tx1"/>
+                          </a:solidFill>
+                          <a:effectLst/>
+                          <a:latin typeface="等线" panose="02010600030101010101" pitchFamily="2" charset="-122"/>
+                          <a:ea typeface="等线" panose="02010600030101010101" pitchFamily="2" charset="-122"/>
+                          <a:cs typeface="Times New Roman" panose="02020603050405020304" pitchFamily="18" charset="0"/>
+                        </a:rPr>
+                        <a:t>0.81</a:t>
+                      </a:r>
+                    </a:p>
+                  </a:txBody>
+                  <a:tcPr marL="114300" marR="6350" marT="6350" marB="0" anchor="ctr">
+                    <a:lnL w="12700" cap="flat" cmpd="sng" algn="ctr">
+                      <a:solidFill>
+                        <a:srgbClr val="000000"/>
+                      </a:solidFill>
+                      <a:prstDash val="solid"/>
+                      <a:round/>
+                      <a:headEnd type="none" w="med" len="med"/>
+                      <a:tailEnd type="none" w="med" len="med"/>
+                    </a:lnL>
+                    <a:lnR w="12700" cap="flat" cmpd="sng" algn="ctr">
+                      <a:solidFill>
+                        <a:srgbClr val="000000"/>
+                      </a:solidFill>
+                      <a:prstDash val="solid"/>
+                      <a:round/>
+                      <a:headEnd type="none" w="med" len="med"/>
+                      <a:tailEnd type="none" w="med" len="med"/>
+                    </a:lnR>
+                    <a:lnT w="12700" cap="flat" cmpd="sng" algn="ctr">
+                      <a:solidFill>
+                        <a:srgbClr val="000000"/>
+                      </a:solidFill>
+                      <a:prstDash val="solid"/>
+                      <a:round/>
+                      <a:headEnd type="none" w="med" len="med"/>
+                      <a:tailEnd type="none" w="med" len="med"/>
+                    </a:lnT>
+                    <a:lnB w="12700" cap="flat" cmpd="sng" algn="ctr">
+                      <a:solidFill>
+                        <a:srgbClr val="000000"/>
+                      </a:solidFill>
+                      <a:prstDash val="solid"/>
+                      <a:round/>
+                      <a:headEnd type="none" w="med" len="med"/>
+                      <a:tailEnd type="none" w="med" len="med"/>
+                    </a:lnB>
+                    <a:noFill/>
+                  </a:tcPr>
+                </a:tc>
+                <a:tc>
+                  <a:txBody>
+                    <a:bodyPr/>
+                    <a:lstStyle/>
+                    <a:p>
+                      <a:pPr marL="0" algn="l" defTabSz="914400" rtl="0" eaLnBrk="1" fontAlgn="ctr" latinLnBrk="0" hangingPunct="1">
+                        <a:buNone/>
+                      </a:pPr>
+                      <a:endParaRPr lang="en-US" altLang="zh-CN" sz="1400" kern="100" dirty="0">
+                        <a:solidFill>
+                          <a:schemeClr val="tx1"/>
+                        </a:solidFill>
+                        <a:effectLst/>
+                        <a:latin typeface="等线" panose="02010600030101010101" pitchFamily="2" charset="-122"/>
+                        <a:ea typeface="等线" panose="02010600030101010101" pitchFamily="2" charset="-122"/>
+                        <a:cs typeface="Times New Roman" panose="02020603050405020304" pitchFamily="18" charset="0"/>
+                      </a:endParaRPr>
+                    </a:p>
+                  </a:txBody>
+                  <a:tcPr marL="114300" marR="6350" marT="6350" marB="0" anchor="ctr">
+                    <a:lnL w="12700" cap="flat" cmpd="sng" algn="ctr">
+                      <a:solidFill>
+                        <a:srgbClr val="000000"/>
+                      </a:solidFill>
+                      <a:prstDash val="solid"/>
+                      <a:round/>
+                      <a:headEnd type="none" w="med" len="med"/>
+                      <a:tailEnd type="none" w="med" len="med"/>
+                    </a:lnL>
+                    <a:lnR w="12700" cap="flat" cmpd="sng" algn="ctr">
+                      <a:solidFill>
+                        <a:srgbClr val="000000"/>
+                      </a:solidFill>
+                      <a:prstDash val="solid"/>
+                      <a:round/>
+                      <a:headEnd type="none" w="med" len="med"/>
+                      <a:tailEnd type="none" w="med" len="med"/>
+                    </a:lnR>
+                    <a:lnT w="12700" cap="flat" cmpd="sng" algn="ctr">
+                      <a:solidFill>
+                        <a:srgbClr val="000000"/>
+                      </a:solidFill>
+                      <a:prstDash val="solid"/>
+                      <a:round/>
+                      <a:headEnd type="none" w="med" len="med"/>
+                      <a:tailEnd type="none" w="med" len="med"/>
+                    </a:lnT>
+                    <a:lnB w="12700" cap="flat" cmpd="sng" algn="ctr">
+                      <a:solidFill>
+                        <a:srgbClr val="000000"/>
+                      </a:solidFill>
+                      <a:prstDash val="solid"/>
+                      <a:round/>
+                      <a:headEnd type="none" w="med" len="med"/>
+                      <a:tailEnd type="none" w="med" len="med"/>
+                    </a:lnB>
+                    <a:noFill/>
+                  </a:tcPr>
+                </a:tc>
+                <a:tc>
+                  <a:txBody>
+                    <a:bodyPr/>
+                    <a:lstStyle/>
+                    <a:p>
+                      <a:pPr marL="0" algn="l" defTabSz="914400" rtl="0" eaLnBrk="1" fontAlgn="ctr" latinLnBrk="0" hangingPunct="1">
+                        <a:buNone/>
+                      </a:pPr>
+                      <a:endParaRPr lang="en-US" altLang="zh-CN" sz="1400" kern="100" dirty="0">
+                        <a:solidFill>
+                          <a:schemeClr val="tx1"/>
+                        </a:solidFill>
+                        <a:effectLst/>
+                        <a:latin typeface="等线" panose="02010600030101010101" pitchFamily="2" charset="-122"/>
+                        <a:ea typeface="等线" panose="02010600030101010101" pitchFamily="2" charset="-122"/>
+                        <a:cs typeface="Times New Roman" panose="02020603050405020304" pitchFamily="18" charset="0"/>
+                      </a:endParaRPr>
+                    </a:p>
+                  </a:txBody>
+                  <a:tcPr marL="114300" marR="6350" marT="6350" marB="0" anchor="ctr">
+                    <a:lnL w="12700" cap="flat" cmpd="sng" algn="ctr">
+                      <a:solidFill>
+                        <a:srgbClr val="000000"/>
+                      </a:solidFill>
+                      <a:prstDash val="solid"/>
+                      <a:round/>
+                      <a:headEnd type="none" w="med" len="med"/>
+                      <a:tailEnd type="none" w="med" len="med"/>
+                    </a:lnL>
+                    <a:lnR w="12700" cap="flat" cmpd="sng" algn="ctr">
+                      <a:solidFill>
+                        <a:srgbClr val="000000"/>
+                      </a:solidFill>
+                      <a:prstDash val="solid"/>
+                      <a:round/>
+                      <a:headEnd type="none" w="med" len="med"/>
+                      <a:tailEnd type="none" w="med" len="med"/>
+                    </a:lnR>
+                    <a:lnT w="12700" cap="flat" cmpd="sng" algn="ctr">
+                      <a:solidFill>
+                        <a:srgbClr val="000000"/>
+                      </a:solidFill>
+                      <a:prstDash val="solid"/>
+                      <a:round/>
+                      <a:headEnd type="none" w="med" len="med"/>
+                      <a:tailEnd type="none" w="med" len="med"/>
+                    </a:lnT>
+                    <a:lnB w="12700" cap="flat" cmpd="sng" algn="ctr">
+                      <a:solidFill>
+                        <a:srgbClr val="000000"/>
+                      </a:solidFill>
+                      <a:prstDash val="solid"/>
+                      <a:round/>
+                      <a:headEnd type="none" w="med" len="med"/>
+                      <a:tailEnd type="none" w="med" len="med"/>
+                    </a:lnB>
+                    <a:noFill/>
+                  </a:tcPr>
+                </a:tc>
+                <a:tc>
+                  <a:txBody>
+                    <a:bodyPr/>
+                    <a:lstStyle/>
+                    <a:p>
+                      <a:pPr marL="0" algn="l" defTabSz="914400" rtl="0" eaLnBrk="1" fontAlgn="ctr" latinLnBrk="0" hangingPunct="1">
+                        <a:buNone/>
+                      </a:pPr>
+                      <a:r>
+                        <a:rPr lang="en-US" altLang="zh-CN" sz="1400" kern="100" dirty="0">
+                          <a:solidFill>
+                            <a:schemeClr val="tx1"/>
+                          </a:solidFill>
+                          <a:effectLst/>
+                          <a:latin typeface="等线" panose="02010600030101010101" pitchFamily="2" charset="-122"/>
+                          <a:ea typeface="等线" panose="02010600030101010101" pitchFamily="2" charset="-122"/>
+                          <a:cs typeface="Times New Roman" panose="02020603050405020304" pitchFamily="18" charset="0"/>
+                        </a:rPr>
+                        <a:t>0.72</a:t>
+                      </a:r>
+                    </a:p>
+                  </a:txBody>
+                  <a:tcPr marL="114300" marR="6350" marT="6350" marB="0" anchor="ctr">
+                    <a:lnL w="12700" cap="flat" cmpd="sng" algn="ctr">
+                      <a:solidFill>
+                        <a:srgbClr val="000000"/>
+                      </a:solidFill>
+                      <a:prstDash val="solid"/>
+                      <a:round/>
+                      <a:headEnd type="none" w="med" len="med"/>
+                      <a:tailEnd type="none" w="med" len="med"/>
+                    </a:lnL>
+                    <a:lnR w="12700" cap="flat" cmpd="sng" algn="ctr">
+                      <a:solidFill>
+                        <a:srgbClr val="000000"/>
+                      </a:solidFill>
+                      <a:prstDash val="solid"/>
+                      <a:round/>
+                      <a:headEnd type="none" w="med" len="med"/>
+                      <a:tailEnd type="none" w="med" len="med"/>
+                    </a:lnR>
+                    <a:lnT w="12700" cap="flat" cmpd="sng" algn="ctr">
+                      <a:solidFill>
+                        <a:srgbClr val="000000"/>
+                      </a:solidFill>
+                      <a:prstDash val="solid"/>
+                      <a:round/>
+                      <a:headEnd type="none" w="med" len="med"/>
+                      <a:tailEnd type="none" w="med" len="med"/>
+                    </a:lnT>
+                    <a:lnB w="12700" cap="flat" cmpd="sng" algn="ctr">
+                      <a:solidFill>
+                        <a:srgbClr val="000000"/>
+                      </a:solidFill>
+                      <a:prstDash val="solid"/>
+                      <a:round/>
+                      <a:headEnd type="none" w="med" len="med"/>
+                      <a:tailEnd type="none" w="med" len="med"/>
+                    </a:lnB>
+                    <a:noFill/>
+                  </a:tcPr>
+                </a:tc>
+                <a:tc>
+                  <a:txBody>
+                    <a:bodyPr/>
+                    <a:lstStyle/>
+                    <a:p>
+                      <a:pPr marL="0" algn="l" defTabSz="914400" rtl="0" eaLnBrk="1" fontAlgn="ctr" latinLnBrk="0" hangingPunct="1">
+                        <a:buNone/>
+                      </a:pPr>
+                      <a:endParaRPr lang="en-US" altLang="zh-CN" sz="1400" kern="100" dirty="0">
+                        <a:solidFill>
+                          <a:schemeClr val="tx1"/>
+                        </a:solidFill>
+                        <a:effectLst/>
+                        <a:latin typeface="等线" panose="02010600030101010101" pitchFamily="2" charset="-122"/>
+                        <a:ea typeface="等线" panose="02010600030101010101" pitchFamily="2" charset="-122"/>
+                        <a:cs typeface="Times New Roman" panose="02020603050405020304" pitchFamily="18" charset="0"/>
+                      </a:endParaRPr>
+                    </a:p>
+                  </a:txBody>
+                  <a:tcPr marL="114300" marR="6350" marT="6350" marB="0" anchor="ctr">
+                    <a:lnL w="12700" cap="flat" cmpd="sng" algn="ctr">
+                      <a:solidFill>
+                        <a:srgbClr val="000000"/>
+                      </a:solidFill>
+                      <a:prstDash val="solid"/>
+                      <a:round/>
+                      <a:headEnd type="none" w="med" len="med"/>
+                      <a:tailEnd type="none" w="med" len="med"/>
+                    </a:lnL>
+                    <a:lnR w="12700" cap="flat" cmpd="sng" algn="ctr">
+                      <a:solidFill>
+                        <a:srgbClr val="000000"/>
+                      </a:solidFill>
+                      <a:prstDash val="solid"/>
+                      <a:round/>
+                      <a:headEnd type="none" w="med" len="med"/>
+                      <a:tailEnd type="none" w="med" len="med"/>
+                    </a:lnR>
+                    <a:lnT w="12700" cap="flat" cmpd="sng" algn="ctr">
+                      <a:solidFill>
+                        <a:srgbClr val="000000"/>
+                      </a:solidFill>
+                      <a:prstDash val="solid"/>
+                      <a:round/>
+                      <a:headEnd type="none" w="med" len="med"/>
+                      <a:tailEnd type="none" w="med" len="med"/>
+                    </a:lnT>
+                    <a:lnB w="12700" cap="flat" cmpd="sng" algn="ctr">
+                      <a:solidFill>
+                        <a:srgbClr val="000000"/>
+                      </a:solidFill>
+                      <a:prstDash val="solid"/>
+                      <a:round/>
+                      <a:headEnd type="none" w="med" len="med"/>
+                      <a:tailEnd type="none" w="med" len="med"/>
+                    </a:lnB>
+                    <a:noFill/>
+                  </a:tcPr>
+                </a:tc>
+                <a:tc>
+                  <a:txBody>
+                    <a:bodyPr/>
+                    <a:lstStyle/>
+                    <a:p>
+                      <a:pPr marL="0" algn="l" defTabSz="914400" rtl="0" eaLnBrk="1" fontAlgn="ctr" latinLnBrk="0" hangingPunct="1">
+                        <a:buNone/>
+                      </a:pPr>
+                      <a:endParaRPr lang="en-US" altLang="zh-CN" sz="1400" kern="100" dirty="0">
+                        <a:solidFill>
+                          <a:schemeClr val="tx1"/>
+                        </a:solidFill>
+                        <a:effectLst/>
+                        <a:latin typeface="等线" panose="02010600030101010101" pitchFamily="2" charset="-122"/>
+                        <a:ea typeface="等线" panose="02010600030101010101" pitchFamily="2" charset="-122"/>
+                        <a:cs typeface="Times New Roman" panose="02020603050405020304" pitchFamily="18" charset="0"/>
+                      </a:endParaRPr>
+                    </a:p>
+                  </a:txBody>
+                  <a:tcPr marL="114300" marR="6350" marT="6350" marB="0" anchor="ctr">
+                    <a:lnL w="12700" cap="flat" cmpd="sng" algn="ctr">
+                      <a:solidFill>
+                        <a:srgbClr val="000000"/>
+                      </a:solidFill>
+                      <a:prstDash val="solid"/>
+                      <a:round/>
+                      <a:headEnd type="none" w="med" len="med"/>
+                      <a:tailEnd type="none" w="med" len="med"/>
+                    </a:lnL>
+                    <a:lnR w="12700" cap="flat" cmpd="sng" algn="ctr">
+                      <a:solidFill>
+                        <a:srgbClr val="000000"/>
+                      </a:solidFill>
+                      <a:prstDash val="solid"/>
+                      <a:round/>
+                      <a:headEnd type="none" w="med" len="med"/>
+                      <a:tailEnd type="none" w="med" len="med"/>
+                    </a:lnR>
+                    <a:lnT w="12700" cap="flat" cmpd="sng" algn="ctr">
+                      <a:solidFill>
+                        <a:srgbClr val="000000"/>
+                      </a:solidFill>
+                      <a:prstDash val="solid"/>
+                      <a:round/>
+                      <a:headEnd type="none" w="med" len="med"/>
+                      <a:tailEnd type="none" w="med" len="med"/>
+                    </a:lnT>
+                    <a:lnB w="12700" cap="flat" cmpd="sng" algn="ctr">
+                      <a:solidFill>
+                        <a:srgbClr val="000000"/>
+                      </a:solidFill>
+                      <a:prstDash val="solid"/>
+                      <a:round/>
+                      <a:headEnd type="none" w="med" len="med"/>
+                      <a:tailEnd type="none" w="med" len="med"/>
+                    </a:lnB>
+                    <a:noFill/>
+                  </a:tcPr>
+                </a:tc>
+                <a:extLst>
+                  <a:ext uri="{0D108BD9-81ED-4DB2-BD59-A6C34878D82A}">
+                    <a16:rowId xmlns:a16="http://schemas.microsoft.com/office/drawing/2014/main" val="3877902591"/>
+                  </a:ext>
+                </a:extLst>
+              </a:tr>
+              <a:tr h="200930">
+                <a:tc>
+                  <a:txBody>
+                    <a:bodyPr/>
+                    <a:lstStyle/>
+                    <a:p>
+                      <a:pPr algn="just">
+                        <a:buNone/>
+                      </a:pPr>
+                      <a:r>
+                        <a:rPr lang="zh-CN" sz="1400" kern="100" dirty="0">
+                          <a:effectLst/>
+                          <a:latin typeface="等线" panose="02010600030101010101" pitchFamily="2" charset="-122"/>
+                          <a:ea typeface="等线" panose="02010600030101010101" pitchFamily="2" charset="-122"/>
+                          <a:cs typeface="Times New Roman" panose="02020603050405020304" pitchFamily="18" charset="0"/>
+                        </a:rPr>
+                        <a:t>秋季</a:t>
+                      </a:r>
+                    </a:p>
+                  </a:txBody>
+                  <a:tcPr marL="68580" marR="68580" marT="0" marB="0">
+                    <a:lnL w="12700" cap="flat" cmpd="sng" algn="ctr">
+                      <a:solidFill>
+                        <a:srgbClr val="000000"/>
+                      </a:solidFill>
+                      <a:prstDash val="solid"/>
+                      <a:round/>
+                      <a:headEnd type="none" w="med" len="med"/>
+                      <a:tailEnd type="none" w="med" len="med"/>
+                    </a:lnL>
+                    <a:lnR w="12700" cap="flat" cmpd="sng" algn="ctr">
+                      <a:solidFill>
+                        <a:srgbClr val="000000"/>
+                      </a:solidFill>
+                      <a:prstDash val="solid"/>
+                      <a:round/>
+                      <a:headEnd type="none" w="med" len="med"/>
+                      <a:tailEnd type="none" w="med" len="med"/>
+                    </a:lnR>
+                    <a:lnT w="12700" cap="flat" cmpd="sng" algn="ctr">
+                      <a:solidFill>
+                        <a:srgbClr val="000000"/>
+                      </a:solidFill>
+                      <a:prstDash val="solid"/>
+                      <a:round/>
+                      <a:headEnd type="none" w="med" len="med"/>
+                      <a:tailEnd type="none" w="med" len="med"/>
+                    </a:lnT>
+                    <a:lnB w="12700" cap="flat" cmpd="sng" algn="ctr">
+                      <a:solidFill>
+                        <a:srgbClr val="000000"/>
+                      </a:solidFill>
+                      <a:prstDash val="solid"/>
+                      <a:round/>
+                      <a:headEnd type="none" w="med" len="med"/>
+                      <a:tailEnd type="none" w="med" len="med"/>
+                    </a:lnB>
+                    <a:noFill/>
+                  </a:tcPr>
+                </a:tc>
+                <a:tc>
+                  <a:txBody>
+                    <a:bodyPr/>
+                    <a:lstStyle/>
+                    <a:p>
+                      <a:pPr marL="0" algn="l" defTabSz="914400" rtl="0" eaLnBrk="1" fontAlgn="ctr" latinLnBrk="0" hangingPunct="1">
+                        <a:buNone/>
+                      </a:pPr>
+                      <a:r>
+                        <a:rPr lang="en-US" altLang="zh-CN" sz="1400" kern="100" dirty="0">
+                          <a:solidFill>
+                            <a:schemeClr val="tx1"/>
+                          </a:solidFill>
+                          <a:effectLst/>
+                          <a:latin typeface="等线" panose="02010600030101010101" pitchFamily="2" charset="-122"/>
+                          <a:ea typeface="等线" panose="02010600030101010101" pitchFamily="2" charset="-122"/>
+                          <a:cs typeface="Times New Roman" panose="02020603050405020304" pitchFamily="18" charset="0"/>
+                        </a:rPr>
+                        <a:t>0.85</a:t>
+                      </a:r>
+                    </a:p>
+                  </a:txBody>
+                  <a:tcPr marL="114300" marR="6350" marT="6350" marB="0" anchor="ctr">
+                    <a:lnL w="12700" cap="flat" cmpd="sng" algn="ctr">
+                      <a:solidFill>
+                        <a:srgbClr val="000000"/>
+                      </a:solidFill>
+                      <a:prstDash val="solid"/>
+                      <a:round/>
+                      <a:headEnd type="none" w="med" len="med"/>
+                      <a:tailEnd type="none" w="med" len="med"/>
+                    </a:lnL>
+                    <a:lnR w="12700" cap="flat" cmpd="sng" algn="ctr">
+                      <a:solidFill>
+                        <a:srgbClr val="000000"/>
+                      </a:solidFill>
+                      <a:prstDash val="solid"/>
+                      <a:round/>
+                      <a:headEnd type="none" w="med" len="med"/>
+                      <a:tailEnd type="none" w="med" len="med"/>
+                    </a:lnR>
+                    <a:lnT w="12700" cap="flat" cmpd="sng" algn="ctr">
+                      <a:solidFill>
+                        <a:srgbClr val="000000"/>
+                      </a:solidFill>
+                      <a:prstDash val="solid"/>
+                      <a:round/>
+                      <a:headEnd type="none" w="med" len="med"/>
+                      <a:tailEnd type="none" w="med" len="med"/>
+                    </a:lnT>
+                    <a:lnB w="12700" cap="flat" cmpd="sng" algn="ctr">
+                      <a:solidFill>
+                        <a:srgbClr val="000000"/>
+                      </a:solidFill>
+                      <a:prstDash val="solid"/>
+                      <a:round/>
+                      <a:headEnd type="none" w="med" len="med"/>
+                      <a:tailEnd type="none" w="med" len="med"/>
+                    </a:lnB>
+                    <a:noFill/>
+                  </a:tcPr>
+                </a:tc>
+                <a:tc>
+                  <a:txBody>
+                    <a:bodyPr/>
+                    <a:lstStyle/>
+                    <a:p>
+                      <a:pPr marL="0" algn="l" defTabSz="914400" rtl="0" eaLnBrk="1" fontAlgn="ctr" latinLnBrk="0" hangingPunct="1">
+                        <a:buNone/>
+                      </a:pPr>
+                      <a:endParaRPr lang="en-US" altLang="zh-CN" sz="1400" kern="100" dirty="0">
+                        <a:solidFill>
+                          <a:schemeClr val="tx1"/>
+                        </a:solidFill>
+                        <a:effectLst/>
+                        <a:latin typeface="等线" panose="02010600030101010101" pitchFamily="2" charset="-122"/>
+                        <a:ea typeface="等线" panose="02010600030101010101" pitchFamily="2" charset="-122"/>
+                        <a:cs typeface="Times New Roman" panose="02020603050405020304" pitchFamily="18" charset="0"/>
+                      </a:endParaRPr>
+                    </a:p>
+                  </a:txBody>
+                  <a:tcPr marL="114300" marR="6350" marT="6350" marB="0" anchor="ctr">
+                    <a:lnL w="12700" cap="flat" cmpd="sng" algn="ctr">
+                      <a:solidFill>
+                        <a:srgbClr val="000000"/>
+                      </a:solidFill>
+                      <a:prstDash val="solid"/>
+                      <a:round/>
+                      <a:headEnd type="none" w="med" len="med"/>
+                      <a:tailEnd type="none" w="med" len="med"/>
+                    </a:lnL>
+                    <a:lnR w="12700" cap="flat" cmpd="sng" algn="ctr">
+                      <a:solidFill>
+                        <a:srgbClr val="000000"/>
+                      </a:solidFill>
+                      <a:prstDash val="solid"/>
+                      <a:round/>
+                      <a:headEnd type="none" w="med" len="med"/>
+                      <a:tailEnd type="none" w="med" len="med"/>
+                    </a:lnR>
+                    <a:lnT w="12700" cap="flat" cmpd="sng" algn="ctr">
+                      <a:solidFill>
+                        <a:srgbClr val="000000"/>
+                      </a:solidFill>
+                      <a:prstDash val="solid"/>
+                      <a:round/>
+                      <a:headEnd type="none" w="med" len="med"/>
+                      <a:tailEnd type="none" w="med" len="med"/>
+                    </a:lnT>
+                    <a:lnB w="12700" cap="flat" cmpd="sng" algn="ctr">
+                      <a:solidFill>
+                        <a:srgbClr val="000000"/>
+                      </a:solidFill>
+                      <a:prstDash val="solid"/>
+                      <a:round/>
+                      <a:headEnd type="none" w="med" len="med"/>
+                      <a:tailEnd type="none" w="med" len="med"/>
+                    </a:lnB>
+                    <a:noFill/>
+                  </a:tcPr>
+                </a:tc>
+                <a:tc>
+                  <a:txBody>
+                    <a:bodyPr/>
+                    <a:lstStyle/>
+                    <a:p>
+                      <a:pPr marL="0" algn="l" defTabSz="914400" rtl="0" eaLnBrk="1" fontAlgn="ctr" latinLnBrk="0" hangingPunct="1">
+                        <a:buNone/>
+                      </a:pPr>
+                      <a:endParaRPr lang="en-US" altLang="zh-CN" sz="1400" kern="100" dirty="0">
+                        <a:solidFill>
+                          <a:schemeClr val="tx1"/>
+                        </a:solidFill>
+                        <a:effectLst/>
+                        <a:latin typeface="等线" panose="02010600030101010101" pitchFamily="2" charset="-122"/>
+                        <a:ea typeface="等线" panose="02010600030101010101" pitchFamily="2" charset="-122"/>
+                        <a:cs typeface="Times New Roman" panose="02020603050405020304" pitchFamily="18" charset="0"/>
+                      </a:endParaRPr>
+                    </a:p>
+                  </a:txBody>
+                  <a:tcPr marL="114300" marR="6350" marT="6350" marB="0" anchor="ctr">
+                    <a:lnL w="12700" cap="flat" cmpd="sng" algn="ctr">
+                      <a:solidFill>
+                        <a:srgbClr val="000000"/>
+                      </a:solidFill>
+                      <a:prstDash val="solid"/>
+                      <a:round/>
+                      <a:headEnd type="none" w="med" len="med"/>
+                      <a:tailEnd type="none" w="med" len="med"/>
+                    </a:lnL>
+                    <a:lnR w="12700" cap="flat" cmpd="sng" algn="ctr">
+                      <a:solidFill>
+                        <a:srgbClr val="000000"/>
+                      </a:solidFill>
+                      <a:prstDash val="solid"/>
+                      <a:round/>
+                      <a:headEnd type="none" w="med" len="med"/>
+                      <a:tailEnd type="none" w="med" len="med"/>
+                    </a:lnR>
+                    <a:lnT w="12700" cap="flat" cmpd="sng" algn="ctr">
+                      <a:solidFill>
+                        <a:srgbClr val="000000"/>
+                      </a:solidFill>
+                      <a:prstDash val="solid"/>
+                      <a:round/>
+                      <a:headEnd type="none" w="med" len="med"/>
+                      <a:tailEnd type="none" w="med" len="med"/>
+                    </a:lnT>
+                    <a:lnB w="12700" cap="flat" cmpd="sng" algn="ctr">
+                      <a:solidFill>
+                        <a:srgbClr val="000000"/>
+                      </a:solidFill>
+                      <a:prstDash val="solid"/>
+                      <a:round/>
+                      <a:headEnd type="none" w="med" len="med"/>
+                      <a:tailEnd type="none" w="med" len="med"/>
+                    </a:lnB>
+                    <a:noFill/>
+                  </a:tcPr>
+                </a:tc>
+                <a:tc>
+                  <a:txBody>
+                    <a:bodyPr/>
+                    <a:lstStyle/>
+                    <a:p>
+                      <a:pPr marL="0" algn="l" defTabSz="914400" rtl="0" eaLnBrk="1" fontAlgn="ctr" latinLnBrk="0" hangingPunct="1">
+                        <a:buNone/>
+                      </a:pPr>
+                      <a:r>
+                        <a:rPr lang="en-US" altLang="zh-CN" sz="1400" kern="100" dirty="0">
+                          <a:solidFill>
+                            <a:schemeClr val="tx1"/>
+                          </a:solidFill>
+                          <a:effectLst/>
+                          <a:latin typeface="等线" panose="02010600030101010101" pitchFamily="2" charset="-122"/>
+                          <a:ea typeface="等线" panose="02010600030101010101" pitchFamily="2" charset="-122"/>
+                          <a:cs typeface="Times New Roman" panose="02020603050405020304" pitchFamily="18" charset="0"/>
+                        </a:rPr>
+                        <a:t>0.74</a:t>
+                      </a:r>
+                    </a:p>
+                  </a:txBody>
+                  <a:tcPr marL="114300" marR="6350" marT="6350" marB="0" anchor="ctr">
+                    <a:lnL w="12700" cap="flat" cmpd="sng" algn="ctr">
+                      <a:solidFill>
+                        <a:srgbClr val="000000"/>
+                      </a:solidFill>
+                      <a:prstDash val="solid"/>
+                      <a:round/>
+                      <a:headEnd type="none" w="med" len="med"/>
+                      <a:tailEnd type="none" w="med" len="med"/>
+                    </a:lnL>
+                    <a:lnR w="12700" cap="flat" cmpd="sng" algn="ctr">
+                      <a:solidFill>
+                        <a:srgbClr val="000000"/>
+                      </a:solidFill>
+                      <a:prstDash val="solid"/>
+                      <a:round/>
+                      <a:headEnd type="none" w="med" len="med"/>
+                      <a:tailEnd type="none" w="med" len="med"/>
+                    </a:lnR>
+                    <a:lnT w="12700" cap="flat" cmpd="sng" algn="ctr">
+                      <a:solidFill>
+                        <a:srgbClr val="000000"/>
+                      </a:solidFill>
+                      <a:prstDash val="solid"/>
+                      <a:round/>
+                      <a:headEnd type="none" w="med" len="med"/>
+                      <a:tailEnd type="none" w="med" len="med"/>
+                    </a:lnT>
+                    <a:lnB w="12700" cap="flat" cmpd="sng" algn="ctr">
+                      <a:solidFill>
+                        <a:srgbClr val="000000"/>
+                      </a:solidFill>
+                      <a:prstDash val="solid"/>
+                      <a:round/>
+                      <a:headEnd type="none" w="med" len="med"/>
+                      <a:tailEnd type="none" w="med" len="med"/>
+                    </a:lnB>
+                    <a:noFill/>
+                  </a:tcPr>
+                </a:tc>
+                <a:tc>
+                  <a:txBody>
+                    <a:bodyPr/>
+                    <a:lstStyle/>
+                    <a:p>
+                      <a:pPr marL="0" algn="l" defTabSz="914400" rtl="0" eaLnBrk="1" fontAlgn="ctr" latinLnBrk="0" hangingPunct="1">
+                        <a:buNone/>
+                      </a:pPr>
+                      <a:endParaRPr lang="en-US" altLang="zh-CN" sz="1400" kern="100" dirty="0">
+                        <a:solidFill>
+                          <a:schemeClr val="tx1"/>
+                        </a:solidFill>
+                        <a:effectLst/>
+                        <a:latin typeface="等线" panose="02010600030101010101" pitchFamily="2" charset="-122"/>
+                        <a:ea typeface="等线" panose="02010600030101010101" pitchFamily="2" charset="-122"/>
+                        <a:cs typeface="Times New Roman" panose="02020603050405020304" pitchFamily="18" charset="0"/>
+                      </a:endParaRPr>
+                    </a:p>
+                  </a:txBody>
+                  <a:tcPr marL="114300" marR="6350" marT="6350" marB="0" anchor="ctr">
+                    <a:lnL w="12700" cap="flat" cmpd="sng" algn="ctr">
+                      <a:solidFill>
+                        <a:srgbClr val="000000"/>
+                      </a:solidFill>
+                      <a:prstDash val="solid"/>
+                      <a:round/>
+                      <a:headEnd type="none" w="med" len="med"/>
+                      <a:tailEnd type="none" w="med" len="med"/>
+                    </a:lnL>
+                    <a:lnR w="12700" cap="flat" cmpd="sng" algn="ctr">
+                      <a:solidFill>
+                        <a:srgbClr val="000000"/>
+                      </a:solidFill>
+                      <a:prstDash val="solid"/>
+                      <a:round/>
+                      <a:headEnd type="none" w="med" len="med"/>
+                      <a:tailEnd type="none" w="med" len="med"/>
+                    </a:lnR>
+                    <a:lnT w="12700" cap="flat" cmpd="sng" algn="ctr">
+                      <a:solidFill>
+                        <a:srgbClr val="000000"/>
+                      </a:solidFill>
+                      <a:prstDash val="solid"/>
+                      <a:round/>
+                      <a:headEnd type="none" w="med" len="med"/>
+                      <a:tailEnd type="none" w="med" len="med"/>
+                    </a:lnT>
+                    <a:lnB w="12700" cap="flat" cmpd="sng" algn="ctr">
+                      <a:solidFill>
+                        <a:srgbClr val="000000"/>
+                      </a:solidFill>
+                      <a:prstDash val="solid"/>
+                      <a:round/>
+                      <a:headEnd type="none" w="med" len="med"/>
+                      <a:tailEnd type="none" w="med" len="med"/>
+                    </a:lnB>
+                    <a:noFill/>
+                  </a:tcPr>
+                </a:tc>
+                <a:tc>
+                  <a:txBody>
+                    <a:bodyPr/>
+                    <a:lstStyle/>
+                    <a:p>
+                      <a:pPr marL="0" algn="l" defTabSz="914400" rtl="0" eaLnBrk="1" fontAlgn="ctr" latinLnBrk="0" hangingPunct="1">
+                        <a:buNone/>
+                      </a:pPr>
+                      <a:endParaRPr lang="en-US" altLang="zh-CN" sz="1400" kern="100" dirty="0">
+                        <a:solidFill>
+                          <a:schemeClr val="tx1"/>
+                        </a:solidFill>
+                        <a:effectLst/>
+                        <a:latin typeface="等线" panose="02010600030101010101" pitchFamily="2" charset="-122"/>
+                        <a:ea typeface="等线" panose="02010600030101010101" pitchFamily="2" charset="-122"/>
+                        <a:cs typeface="Times New Roman" panose="02020603050405020304" pitchFamily="18" charset="0"/>
+                      </a:endParaRPr>
+                    </a:p>
+                  </a:txBody>
+                  <a:tcPr marL="114300" marR="6350" marT="6350" marB="0" anchor="ctr">
+                    <a:lnL w="12700" cap="flat" cmpd="sng" algn="ctr">
+                      <a:solidFill>
+                        <a:srgbClr val="000000"/>
+                      </a:solidFill>
+                      <a:prstDash val="solid"/>
+                      <a:round/>
+                      <a:headEnd type="none" w="med" len="med"/>
+                      <a:tailEnd type="none" w="med" len="med"/>
+                    </a:lnL>
+                    <a:lnR w="12700" cap="flat" cmpd="sng" algn="ctr">
+                      <a:solidFill>
+                        <a:srgbClr val="000000"/>
+                      </a:solidFill>
+                      <a:prstDash val="solid"/>
+                      <a:round/>
+                      <a:headEnd type="none" w="med" len="med"/>
+                      <a:tailEnd type="none" w="med" len="med"/>
+                    </a:lnR>
+                    <a:lnT w="12700" cap="flat" cmpd="sng" algn="ctr">
+                      <a:solidFill>
+                        <a:srgbClr val="000000"/>
+                      </a:solidFill>
+                      <a:prstDash val="solid"/>
+                      <a:round/>
+                      <a:headEnd type="none" w="med" len="med"/>
+                      <a:tailEnd type="none" w="med" len="med"/>
+                    </a:lnT>
+                    <a:lnB w="12700" cap="flat" cmpd="sng" algn="ctr">
+                      <a:solidFill>
+                        <a:srgbClr val="000000"/>
+                      </a:solidFill>
+                      <a:prstDash val="solid"/>
+                      <a:round/>
+                      <a:headEnd type="none" w="med" len="med"/>
+                      <a:tailEnd type="none" w="med" len="med"/>
+                    </a:lnB>
+                    <a:noFill/>
+                  </a:tcPr>
+                </a:tc>
+                <a:extLst>
+                  <a:ext uri="{0D108BD9-81ED-4DB2-BD59-A6C34878D82A}">
+                    <a16:rowId xmlns:a16="http://schemas.microsoft.com/office/drawing/2014/main" val="3661794857"/>
+                  </a:ext>
+                </a:extLst>
+              </a:tr>
+              <a:tr h="200930">
+                <a:tc>
+                  <a:txBody>
+                    <a:bodyPr/>
+                    <a:lstStyle/>
+                    <a:p>
+                      <a:pPr algn="just">
+                        <a:buNone/>
+                      </a:pPr>
+                      <a:r>
+                        <a:rPr lang="zh-CN" sz="1400" kern="100" dirty="0">
+                          <a:effectLst/>
+                          <a:latin typeface="等线" panose="02010600030101010101" pitchFamily="2" charset="-122"/>
+                          <a:ea typeface="等线" panose="02010600030101010101" pitchFamily="2" charset="-122"/>
+                          <a:cs typeface="Times New Roman" panose="02020603050405020304" pitchFamily="18" charset="0"/>
+                        </a:rPr>
+                        <a:t>夏季</a:t>
+                      </a:r>
+                    </a:p>
+                  </a:txBody>
+                  <a:tcPr marL="68580" marR="68580" marT="0" marB="0">
+                    <a:lnL w="12700" cap="flat" cmpd="sng" algn="ctr">
+                      <a:solidFill>
+                        <a:srgbClr val="000000"/>
+                      </a:solidFill>
+                      <a:prstDash val="solid"/>
+                      <a:round/>
+                      <a:headEnd type="none" w="med" len="med"/>
+                      <a:tailEnd type="none" w="med" len="med"/>
+                    </a:lnL>
+                    <a:lnR w="12700" cap="flat" cmpd="sng" algn="ctr">
+                      <a:solidFill>
+                        <a:srgbClr val="000000"/>
+                      </a:solidFill>
+                      <a:prstDash val="solid"/>
+                      <a:round/>
+                      <a:headEnd type="none" w="med" len="med"/>
+                      <a:tailEnd type="none" w="med" len="med"/>
+                    </a:lnR>
+                    <a:lnT w="12700" cap="flat" cmpd="sng" algn="ctr">
+                      <a:solidFill>
+                        <a:srgbClr val="000000"/>
+                      </a:solidFill>
+                      <a:prstDash val="solid"/>
+                      <a:round/>
+                      <a:headEnd type="none" w="med" len="med"/>
+                      <a:tailEnd type="none" w="med" len="med"/>
+                    </a:lnT>
+                    <a:lnB w="12700" cap="flat" cmpd="sng" algn="ctr">
+                      <a:solidFill>
+                        <a:srgbClr val="000000"/>
+                      </a:solidFill>
+                      <a:prstDash val="solid"/>
+                      <a:round/>
+                      <a:headEnd type="none" w="med" len="med"/>
+                      <a:tailEnd type="none" w="med" len="med"/>
+                    </a:lnB>
+                    <a:noFill/>
+                  </a:tcPr>
+                </a:tc>
+                <a:tc>
+                  <a:txBody>
+                    <a:bodyPr/>
+                    <a:lstStyle/>
+                    <a:p>
+                      <a:pPr marL="0" algn="l" defTabSz="914400" rtl="0" eaLnBrk="1" fontAlgn="ctr" latinLnBrk="0" hangingPunct="1">
+                        <a:buNone/>
+                      </a:pPr>
+                      <a:r>
+                        <a:rPr lang="en-US" altLang="zh-CN" sz="1400" kern="100" dirty="0">
+                          <a:solidFill>
+                            <a:schemeClr val="tx1"/>
+                          </a:solidFill>
+                          <a:effectLst/>
+                          <a:latin typeface="等线" panose="02010600030101010101" pitchFamily="2" charset="-122"/>
+                          <a:ea typeface="等线" panose="02010600030101010101" pitchFamily="2" charset="-122"/>
+                          <a:cs typeface="Times New Roman" panose="02020603050405020304" pitchFamily="18" charset="0"/>
+                        </a:rPr>
+                        <a:t>0.72</a:t>
+                      </a:r>
+                    </a:p>
+                  </a:txBody>
+                  <a:tcPr marL="114300" marR="6350" marT="6350" marB="0" anchor="ctr">
+                    <a:lnL w="12700" cap="flat" cmpd="sng" algn="ctr">
+                      <a:solidFill>
+                        <a:srgbClr val="000000"/>
+                      </a:solidFill>
+                      <a:prstDash val="solid"/>
+                      <a:round/>
+                      <a:headEnd type="none" w="med" len="med"/>
+                      <a:tailEnd type="none" w="med" len="med"/>
+                    </a:lnL>
+                    <a:lnR w="12700" cap="flat" cmpd="sng" algn="ctr">
+                      <a:solidFill>
+                        <a:srgbClr val="000000"/>
+                      </a:solidFill>
+                      <a:prstDash val="solid"/>
+                      <a:round/>
+                      <a:headEnd type="none" w="med" len="med"/>
+                      <a:tailEnd type="none" w="med" len="med"/>
+                    </a:lnR>
+                    <a:lnT w="12700" cap="flat" cmpd="sng" algn="ctr">
+                      <a:solidFill>
+                        <a:srgbClr val="000000"/>
+                      </a:solidFill>
+                      <a:prstDash val="solid"/>
+                      <a:round/>
+                      <a:headEnd type="none" w="med" len="med"/>
+                      <a:tailEnd type="none" w="med" len="med"/>
+                    </a:lnT>
+                    <a:lnB w="12700" cap="flat" cmpd="sng" algn="ctr">
+                      <a:solidFill>
+                        <a:srgbClr val="000000"/>
+                      </a:solidFill>
+                      <a:prstDash val="solid"/>
+                      <a:round/>
+                      <a:headEnd type="none" w="med" len="med"/>
+                      <a:tailEnd type="none" w="med" len="med"/>
+                    </a:lnB>
+                    <a:noFill/>
+                  </a:tcPr>
+                </a:tc>
+                <a:tc>
+                  <a:txBody>
+                    <a:bodyPr/>
+                    <a:lstStyle/>
+                    <a:p>
+                      <a:pPr marL="0" algn="l" defTabSz="914400" rtl="0" eaLnBrk="1" fontAlgn="ctr" latinLnBrk="0" hangingPunct="1">
+                        <a:buNone/>
+                      </a:pPr>
+                      <a:endParaRPr lang="en-US" altLang="zh-CN" sz="1400" kern="100" dirty="0">
+                        <a:solidFill>
+                          <a:schemeClr val="tx1"/>
+                        </a:solidFill>
+                        <a:effectLst/>
+                        <a:latin typeface="等线" panose="02010600030101010101" pitchFamily="2" charset="-122"/>
+                        <a:ea typeface="等线" panose="02010600030101010101" pitchFamily="2" charset="-122"/>
+                        <a:cs typeface="Times New Roman" panose="02020603050405020304" pitchFamily="18" charset="0"/>
+                      </a:endParaRPr>
+                    </a:p>
+                  </a:txBody>
+                  <a:tcPr marL="114300" marR="6350" marT="6350" marB="0" anchor="ctr">
+                    <a:lnL w="12700" cap="flat" cmpd="sng" algn="ctr">
+                      <a:solidFill>
+                        <a:srgbClr val="000000"/>
+                      </a:solidFill>
+                      <a:prstDash val="solid"/>
+                      <a:round/>
+                      <a:headEnd type="none" w="med" len="med"/>
+                      <a:tailEnd type="none" w="med" len="med"/>
+                    </a:lnL>
+                    <a:lnR w="12700" cap="flat" cmpd="sng" algn="ctr">
+                      <a:solidFill>
+                        <a:srgbClr val="000000"/>
+                      </a:solidFill>
+                      <a:prstDash val="solid"/>
+                      <a:round/>
+                      <a:headEnd type="none" w="med" len="med"/>
+                      <a:tailEnd type="none" w="med" len="med"/>
+                    </a:lnR>
+                    <a:lnT w="12700" cap="flat" cmpd="sng" algn="ctr">
+                      <a:solidFill>
+                        <a:srgbClr val="000000"/>
+                      </a:solidFill>
+                      <a:prstDash val="solid"/>
+                      <a:round/>
+                      <a:headEnd type="none" w="med" len="med"/>
+                      <a:tailEnd type="none" w="med" len="med"/>
+                    </a:lnT>
+                    <a:lnB w="12700" cap="flat" cmpd="sng" algn="ctr">
+                      <a:solidFill>
+                        <a:srgbClr val="000000"/>
+                      </a:solidFill>
+                      <a:prstDash val="solid"/>
+                      <a:round/>
+                      <a:headEnd type="none" w="med" len="med"/>
+                      <a:tailEnd type="none" w="med" len="med"/>
+                    </a:lnB>
+                    <a:noFill/>
+                  </a:tcPr>
+                </a:tc>
+                <a:tc>
+                  <a:txBody>
+                    <a:bodyPr/>
+                    <a:lstStyle/>
+                    <a:p>
+                      <a:pPr marL="0" algn="l" defTabSz="914400" rtl="0" eaLnBrk="1" fontAlgn="ctr" latinLnBrk="0" hangingPunct="1">
+                        <a:buNone/>
+                      </a:pPr>
+                      <a:endParaRPr lang="en-US" altLang="zh-CN" sz="1400" kern="100" dirty="0">
+                        <a:solidFill>
+                          <a:schemeClr val="tx1"/>
+                        </a:solidFill>
+                        <a:effectLst/>
+                        <a:latin typeface="等线" panose="02010600030101010101" pitchFamily="2" charset="-122"/>
+                        <a:ea typeface="等线" panose="02010600030101010101" pitchFamily="2" charset="-122"/>
+                        <a:cs typeface="Times New Roman" panose="02020603050405020304" pitchFamily="18" charset="0"/>
+                      </a:endParaRPr>
+                    </a:p>
+                  </a:txBody>
+                  <a:tcPr marL="114300" marR="6350" marT="6350" marB="0" anchor="ctr">
+                    <a:lnL w="12700" cap="flat" cmpd="sng" algn="ctr">
+                      <a:solidFill>
+                        <a:srgbClr val="000000"/>
+                      </a:solidFill>
+                      <a:prstDash val="solid"/>
+                      <a:round/>
+                      <a:headEnd type="none" w="med" len="med"/>
+                      <a:tailEnd type="none" w="med" len="med"/>
+                    </a:lnL>
+                    <a:lnR w="12700" cap="flat" cmpd="sng" algn="ctr">
+                      <a:solidFill>
+                        <a:srgbClr val="000000"/>
+                      </a:solidFill>
+                      <a:prstDash val="solid"/>
+                      <a:round/>
+                      <a:headEnd type="none" w="med" len="med"/>
+                      <a:tailEnd type="none" w="med" len="med"/>
+                    </a:lnR>
+                    <a:lnT w="12700" cap="flat" cmpd="sng" algn="ctr">
+                      <a:solidFill>
+                        <a:srgbClr val="000000"/>
+                      </a:solidFill>
+                      <a:prstDash val="solid"/>
+                      <a:round/>
+                      <a:headEnd type="none" w="med" len="med"/>
+                      <a:tailEnd type="none" w="med" len="med"/>
+                    </a:lnT>
+                    <a:lnB w="12700" cap="flat" cmpd="sng" algn="ctr">
+                      <a:solidFill>
+                        <a:srgbClr val="000000"/>
+                      </a:solidFill>
+                      <a:prstDash val="solid"/>
+                      <a:round/>
+                      <a:headEnd type="none" w="med" len="med"/>
+                      <a:tailEnd type="none" w="med" len="med"/>
+                    </a:lnB>
+                    <a:noFill/>
+                  </a:tcPr>
+                </a:tc>
+                <a:tc>
+                  <a:txBody>
+                    <a:bodyPr/>
+                    <a:lstStyle/>
+                    <a:p>
+                      <a:pPr marL="0" algn="l" defTabSz="914400" rtl="0" eaLnBrk="1" fontAlgn="ctr" latinLnBrk="0" hangingPunct="1">
+                        <a:buNone/>
+                      </a:pPr>
+                      <a:r>
+                        <a:rPr lang="en-US" altLang="zh-CN" sz="1400" kern="100" dirty="0">
+                          <a:solidFill>
+                            <a:schemeClr val="tx1"/>
+                          </a:solidFill>
+                          <a:effectLst/>
+                          <a:latin typeface="等线" panose="02010600030101010101" pitchFamily="2" charset="-122"/>
+                          <a:ea typeface="等线" panose="02010600030101010101" pitchFamily="2" charset="-122"/>
+                          <a:cs typeface="Times New Roman" panose="02020603050405020304" pitchFamily="18" charset="0"/>
+                        </a:rPr>
+                        <a:t>0.74</a:t>
+                      </a:r>
+                    </a:p>
+                  </a:txBody>
+                  <a:tcPr marL="114300" marR="6350" marT="6350" marB="0" anchor="ctr">
+                    <a:lnL w="12700" cap="flat" cmpd="sng" algn="ctr">
+                      <a:solidFill>
+                        <a:srgbClr val="000000"/>
+                      </a:solidFill>
+                      <a:prstDash val="solid"/>
+                      <a:round/>
+                      <a:headEnd type="none" w="med" len="med"/>
+                      <a:tailEnd type="none" w="med" len="med"/>
+                    </a:lnL>
+                    <a:lnR w="12700" cap="flat" cmpd="sng" algn="ctr">
+                      <a:solidFill>
+                        <a:srgbClr val="000000"/>
+                      </a:solidFill>
+                      <a:prstDash val="solid"/>
+                      <a:round/>
+                      <a:headEnd type="none" w="med" len="med"/>
+                      <a:tailEnd type="none" w="med" len="med"/>
+                    </a:lnR>
+                    <a:lnT w="12700" cap="flat" cmpd="sng" algn="ctr">
+                      <a:solidFill>
+                        <a:srgbClr val="000000"/>
+                      </a:solidFill>
+                      <a:prstDash val="solid"/>
+                      <a:round/>
+                      <a:headEnd type="none" w="med" len="med"/>
+                      <a:tailEnd type="none" w="med" len="med"/>
+                    </a:lnT>
+                    <a:lnB w="12700" cap="flat" cmpd="sng" algn="ctr">
+                      <a:solidFill>
+                        <a:srgbClr val="000000"/>
+                      </a:solidFill>
+                      <a:prstDash val="solid"/>
+                      <a:round/>
+                      <a:headEnd type="none" w="med" len="med"/>
+                      <a:tailEnd type="none" w="med" len="med"/>
+                    </a:lnB>
+                    <a:noFill/>
+                  </a:tcPr>
+                </a:tc>
+                <a:tc>
+                  <a:txBody>
+                    <a:bodyPr/>
+                    <a:lstStyle/>
+                    <a:p>
+                      <a:pPr marL="0" algn="l" defTabSz="914400" rtl="0" eaLnBrk="1" fontAlgn="ctr" latinLnBrk="0" hangingPunct="1">
+                        <a:buNone/>
+                      </a:pPr>
+                      <a:endParaRPr lang="en-US" altLang="zh-CN" sz="1400" kern="100" dirty="0">
+                        <a:solidFill>
+                          <a:schemeClr val="tx1"/>
+                        </a:solidFill>
+                        <a:effectLst/>
+                        <a:latin typeface="等线" panose="02010600030101010101" pitchFamily="2" charset="-122"/>
+                        <a:ea typeface="等线" panose="02010600030101010101" pitchFamily="2" charset="-122"/>
+                        <a:cs typeface="Times New Roman" panose="02020603050405020304" pitchFamily="18" charset="0"/>
+                      </a:endParaRPr>
+                    </a:p>
+                  </a:txBody>
+                  <a:tcPr marL="114300" marR="6350" marT="6350" marB="0" anchor="ctr">
+                    <a:lnL w="12700" cap="flat" cmpd="sng" algn="ctr">
+                      <a:solidFill>
+                        <a:srgbClr val="000000"/>
+                      </a:solidFill>
+                      <a:prstDash val="solid"/>
+                      <a:round/>
+                      <a:headEnd type="none" w="med" len="med"/>
+                      <a:tailEnd type="none" w="med" len="med"/>
+                    </a:lnL>
+                    <a:lnR w="12700" cap="flat" cmpd="sng" algn="ctr">
+                      <a:solidFill>
+                        <a:srgbClr val="000000"/>
+                      </a:solidFill>
+                      <a:prstDash val="solid"/>
+                      <a:round/>
+                      <a:headEnd type="none" w="med" len="med"/>
+                      <a:tailEnd type="none" w="med" len="med"/>
+                    </a:lnR>
+                    <a:lnT w="12700" cap="flat" cmpd="sng" algn="ctr">
+                      <a:solidFill>
+                        <a:srgbClr val="000000"/>
+                      </a:solidFill>
+                      <a:prstDash val="solid"/>
+                      <a:round/>
+                      <a:headEnd type="none" w="med" len="med"/>
+                      <a:tailEnd type="none" w="med" len="med"/>
+                    </a:lnT>
+                    <a:lnB w="12700" cap="flat" cmpd="sng" algn="ctr">
+                      <a:solidFill>
+                        <a:srgbClr val="000000"/>
+                      </a:solidFill>
+                      <a:prstDash val="solid"/>
+                      <a:round/>
+                      <a:headEnd type="none" w="med" len="med"/>
+                      <a:tailEnd type="none" w="med" len="med"/>
+                    </a:lnB>
+                    <a:noFill/>
+                  </a:tcPr>
+                </a:tc>
+                <a:tc>
+                  <a:txBody>
+                    <a:bodyPr/>
+                    <a:lstStyle/>
+                    <a:p>
+                      <a:pPr marL="0" algn="l" defTabSz="914400" rtl="0" eaLnBrk="1" fontAlgn="ctr" latinLnBrk="0" hangingPunct="1">
+                        <a:buNone/>
+                      </a:pPr>
+                      <a:endParaRPr lang="en-US" altLang="zh-CN" sz="1400" kern="100" dirty="0">
+                        <a:solidFill>
+                          <a:schemeClr val="tx1"/>
+                        </a:solidFill>
+                        <a:effectLst/>
+                        <a:latin typeface="等线" panose="02010600030101010101" pitchFamily="2" charset="-122"/>
+                        <a:ea typeface="等线" panose="02010600030101010101" pitchFamily="2" charset="-122"/>
+                        <a:cs typeface="Times New Roman" panose="02020603050405020304" pitchFamily="18" charset="0"/>
+                      </a:endParaRPr>
+                    </a:p>
+                  </a:txBody>
+                  <a:tcPr marL="114300" marR="6350" marT="6350" marB="0" anchor="ctr">
+                    <a:lnL w="12700" cap="flat" cmpd="sng" algn="ctr">
+                      <a:solidFill>
+                        <a:srgbClr val="000000"/>
+                      </a:solidFill>
+                      <a:prstDash val="solid"/>
+                      <a:round/>
+                      <a:headEnd type="none" w="med" len="med"/>
+                      <a:tailEnd type="none" w="med" len="med"/>
+                    </a:lnL>
+                    <a:lnR w="12700" cap="flat" cmpd="sng" algn="ctr">
+                      <a:solidFill>
+                        <a:srgbClr val="000000"/>
+                      </a:solidFill>
+                      <a:prstDash val="solid"/>
+                      <a:round/>
+                      <a:headEnd type="none" w="med" len="med"/>
+                      <a:tailEnd type="none" w="med" len="med"/>
+                    </a:lnR>
+                    <a:lnT w="12700" cap="flat" cmpd="sng" algn="ctr">
+                      <a:solidFill>
+                        <a:srgbClr val="000000"/>
+                      </a:solidFill>
+                      <a:prstDash val="solid"/>
+                      <a:round/>
+                      <a:headEnd type="none" w="med" len="med"/>
+                      <a:tailEnd type="none" w="med" len="med"/>
+                    </a:lnT>
+                    <a:lnB w="12700" cap="flat" cmpd="sng" algn="ctr">
+                      <a:solidFill>
+                        <a:srgbClr val="000000"/>
+                      </a:solidFill>
+                      <a:prstDash val="solid"/>
+                      <a:round/>
+                      <a:headEnd type="none" w="med" len="med"/>
+                      <a:tailEnd type="none" w="med" len="med"/>
+                    </a:lnB>
+                    <a:noFill/>
+                  </a:tcPr>
+                </a:tc>
+                <a:extLst>
+                  <a:ext uri="{0D108BD9-81ED-4DB2-BD59-A6C34878D82A}">
+                    <a16:rowId xmlns:a16="http://schemas.microsoft.com/office/drawing/2014/main" val="1069347528"/>
+                  </a:ext>
+                </a:extLst>
+              </a:tr>
+            </a:tbl>
+          </a:graphicData>
+        </a:graphic>
+      </p:graphicFrame>
+      <p:graphicFrame>
+        <p:nvGraphicFramePr>
+          <p:cNvPr id="10" name="表格 9">
+            <a:extLst>
+              <a:ext uri="{FF2B5EF4-FFF2-40B4-BE49-F238E27FC236}">
+                <a16:creationId xmlns:a16="http://schemas.microsoft.com/office/drawing/2014/main" id="{E9B4818C-5B59-6FB2-770A-BA16A9F7B615}"/>
+              </a:ext>
+            </a:extLst>
+          </p:cNvPr>
+          <p:cNvGraphicFramePr>
+            <a:graphicFrameLocks noGrp="1"/>
+          </p:cNvGraphicFramePr>
+          <p:nvPr/>
+        </p:nvGraphicFramePr>
+        <p:xfrm>
+          <a:off x="1199712" y="4927061"/>
+          <a:ext cx="6974237" cy="872490"/>
+        </p:xfrm>
+        <a:graphic>
+          <a:graphicData uri="http://schemas.openxmlformats.org/drawingml/2006/table">
+            <a:tbl>
+              <a:tblPr firstRow="1" firstCol="1" bandRow="1"/>
+              <a:tblGrid>
+                <a:gridCol w="996845">
+                  <a:extLst>
+                    <a:ext uri="{9D8B030D-6E8A-4147-A177-3AD203B41FA5}">
+                      <a16:colId xmlns:a16="http://schemas.microsoft.com/office/drawing/2014/main" val="3801373755"/>
+                    </a:ext>
+                  </a:extLst>
+                </a:gridCol>
+                <a:gridCol w="675505">
+                  <a:extLst>
+                    <a:ext uri="{9D8B030D-6E8A-4147-A177-3AD203B41FA5}">
+                      <a16:colId xmlns:a16="http://schemas.microsoft.com/office/drawing/2014/main" val="811401970"/>
+                    </a:ext>
+                  </a:extLst>
+                </a:gridCol>
+                <a:gridCol w="894303">
+                  <a:extLst>
+                    <a:ext uri="{9D8B030D-6E8A-4147-A177-3AD203B41FA5}">
+                      <a16:colId xmlns:a16="http://schemas.microsoft.com/office/drawing/2014/main" val="1679194711"/>
+                    </a:ext>
+                  </a:extLst>
+                </a:gridCol>
+                <a:gridCol w="691335">
+                  <a:extLst>
+                    <a:ext uri="{9D8B030D-6E8A-4147-A177-3AD203B41FA5}">
+                      <a16:colId xmlns:a16="http://schemas.microsoft.com/office/drawing/2014/main" val="3461694118"/>
+                    </a:ext>
+                  </a:extLst>
+                </a:gridCol>
+                <a:gridCol w="1187707">
+                  <a:extLst>
+                    <a:ext uri="{9D8B030D-6E8A-4147-A177-3AD203B41FA5}">
+                      <a16:colId xmlns:a16="http://schemas.microsoft.com/office/drawing/2014/main" val="2447547013"/>
+                    </a:ext>
+                  </a:extLst>
+                </a:gridCol>
+                <a:gridCol w="1225899">
+                  <a:extLst>
+                    <a:ext uri="{9D8B030D-6E8A-4147-A177-3AD203B41FA5}">
+                      <a16:colId xmlns:a16="http://schemas.microsoft.com/office/drawing/2014/main" val="2128753147"/>
+                    </a:ext>
+                  </a:extLst>
+                </a:gridCol>
+                <a:gridCol w="1302643">
+                  <a:extLst>
+                    <a:ext uri="{9D8B030D-6E8A-4147-A177-3AD203B41FA5}">
+                      <a16:colId xmlns:a16="http://schemas.microsoft.com/office/drawing/2014/main" val="995393870"/>
+                    </a:ext>
+                  </a:extLst>
+                </a:gridCol>
+              </a:tblGrid>
+              <a:tr h="0">
+                <a:tc>
+                  <a:txBody>
+                    <a:bodyPr/>
+                    <a:lstStyle/>
+                    <a:p>
+                      <a:pPr marL="0" algn="l" defTabSz="914400" rtl="0" eaLnBrk="1" latinLnBrk="0" hangingPunct="1">
+                        <a:buNone/>
+                      </a:pPr>
+                      <a:r>
+                        <a:rPr lang="zh-CN" altLang="en-US" sz="1400" kern="100" dirty="0">
+                          <a:solidFill>
+                            <a:schemeClr val="tx1"/>
+                          </a:solidFill>
+                          <a:effectLst/>
+                          <a:latin typeface="等线" panose="02010600030101010101" pitchFamily="2" charset="-122"/>
+                          <a:ea typeface="等线" panose="02010600030101010101" pitchFamily="2" charset="-122"/>
+                          <a:cs typeface="Times New Roman" panose="02020603050405020304" pitchFamily="18" charset="0"/>
+                        </a:rPr>
+                        <a:t>季节</a:t>
+                      </a:r>
+                    </a:p>
+                  </a:txBody>
+                  <a:tcPr marL="68580" marR="68580" marT="0" marB="0" anchor="ctr">
+                    <a:lnL w="12700" cap="flat" cmpd="sng" algn="ctr">
+                      <a:solidFill>
+                        <a:srgbClr val="000000"/>
+                      </a:solidFill>
+                      <a:prstDash val="solid"/>
+                      <a:round/>
+                      <a:headEnd type="none" w="med" len="med"/>
+                      <a:tailEnd type="none" w="med" len="med"/>
+                    </a:lnL>
+                    <a:lnR w="12700" cap="flat" cmpd="sng" algn="ctr">
+                      <a:solidFill>
+                        <a:srgbClr val="000000"/>
+                      </a:solidFill>
+                      <a:prstDash val="solid"/>
+                      <a:round/>
+                      <a:headEnd type="none" w="med" len="med"/>
+                      <a:tailEnd type="none" w="med" len="med"/>
+                    </a:lnR>
+                    <a:lnT w="12700" cap="flat" cmpd="sng" algn="ctr">
+                      <a:solidFill>
+                        <a:srgbClr val="000000"/>
+                      </a:solidFill>
+                      <a:prstDash val="solid"/>
+                      <a:round/>
+                      <a:headEnd type="none" w="med" len="med"/>
+                      <a:tailEnd type="none" w="med" len="med"/>
+                    </a:lnT>
+                    <a:lnB w="12700" cap="flat" cmpd="sng" algn="ctr">
+                      <a:solidFill>
+                        <a:srgbClr val="000000"/>
+                      </a:solidFill>
+                      <a:prstDash val="solid"/>
+                      <a:round/>
+                      <a:headEnd type="none" w="med" len="med"/>
+                      <a:tailEnd type="none" w="med" len="med"/>
+                    </a:lnB>
+                    <a:noFill/>
+                  </a:tcPr>
+                </a:tc>
+                <a:tc>
+                  <a:txBody>
+                    <a:bodyPr/>
+                    <a:lstStyle/>
+                    <a:p>
+                      <a:pPr marL="0" algn="l" defTabSz="914400" rtl="0" eaLnBrk="1" latinLnBrk="0" hangingPunct="1">
+                        <a:buNone/>
+                      </a:pPr>
+                      <a:r>
+                        <a:rPr lang="en-US" altLang="zh-CN" sz="1400" kern="100" dirty="0">
+                          <a:solidFill>
+                            <a:schemeClr val="tx1"/>
+                          </a:solidFill>
+                          <a:effectLst/>
+                          <a:latin typeface="等线" panose="02010600030101010101" pitchFamily="2" charset="-122"/>
+                          <a:ea typeface="等线" panose="02010600030101010101" pitchFamily="2" charset="-122"/>
+                          <a:cs typeface="Times New Roman" panose="02020603050405020304" pitchFamily="18" charset="0"/>
+                        </a:rPr>
+                        <a:t>RMSE</a:t>
+                      </a:r>
+                      <a:endParaRPr lang="zh-CN" altLang="en-US" sz="1400" kern="100" dirty="0">
+                        <a:solidFill>
+                          <a:schemeClr val="tx1"/>
+                        </a:solidFill>
+                        <a:effectLst/>
+                        <a:latin typeface="等线" panose="02010600030101010101" pitchFamily="2" charset="-122"/>
+                        <a:ea typeface="等线" panose="02010600030101010101" pitchFamily="2" charset="-122"/>
+                        <a:cs typeface="Times New Roman" panose="02020603050405020304" pitchFamily="18" charset="0"/>
+                      </a:endParaRPr>
+                    </a:p>
+                  </a:txBody>
+                  <a:tcPr marL="68580" marR="68580" marT="0" marB="0" anchor="ctr">
+                    <a:lnL w="12700" cap="flat" cmpd="sng" algn="ctr">
+                      <a:solidFill>
+                        <a:srgbClr val="000000"/>
+                      </a:solidFill>
+                      <a:prstDash val="solid"/>
+                      <a:round/>
+                      <a:headEnd type="none" w="med" len="med"/>
+                      <a:tailEnd type="none" w="med" len="med"/>
+                    </a:lnL>
+                    <a:lnR w="12700" cap="flat" cmpd="sng" algn="ctr">
+                      <a:solidFill>
+                        <a:srgbClr val="000000"/>
+                      </a:solidFill>
+                      <a:prstDash val="solid"/>
+                      <a:round/>
+                      <a:headEnd type="none" w="med" len="med"/>
+                      <a:tailEnd type="none" w="med" len="med"/>
+                    </a:lnR>
+                    <a:lnT w="12700" cap="flat" cmpd="sng" algn="ctr">
+                      <a:solidFill>
+                        <a:srgbClr val="000000"/>
+                      </a:solidFill>
+                      <a:prstDash val="solid"/>
+                      <a:round/>
+                      <a:headEnd type="none" w="med" len="med"/>
+                      <a:tailEnd type="none" w="med" len="med"/>
+                    </a:lnT>
+                    <a:lnB w="12700" cap="flat" cmpd="sng" algn="ctr">
+                      <a:solidFill>
+                        <a:srgbClr val="000000"/>
+                      </a:solidFill>
+                      <a:prstDash val="solid"/>
+                      <a:round/>
+                      <a:headEnd type="none" w="med" len="med"/>
+                      <a:tailEnd type="none" w="med" len="med"/>
+                    </a:lnB>
+                    <a:noFill/>
+                  </a:tcPr>
+                </a:tc>
+                <a:tc>
+                  <a:txBody>
+                    <a:bodyPr/>
+                    <a:lstStyle/>
+                    <a:p>
+                      <a:pPr marL="0" algn="l" defTabSz="914400" rtl="0" eaLnBrk="1" latinLnBrk="0" hangingPunct="1">
+                        <a:buNone/>
+                      </a:pPr>
+                      <a:r>
+                        <a:rPr lang="en-US" altLang="zh-CN" sz="1400" kern="100" dirty="0">
+                          <a:solidFill>
+                            <a:schemeClr val="tx1"/>
+                          </a:solidFill>
+                          <a:effectLst/>
+                          <a:latin typeface="等线" panose="02010600030101010101" pitchFamily="2" charset="-122"/>
+                          <a:ea typeface="等线" panose="02010600030101010101" pitchFamily="2" charset="-122"/>
+                          <a:cs typeface="Times New Roman" panose="02020603050405020304" pitchFamily="18" charset="0"/>
+                        </a:rPr>
+                        <a:t>MAE</a:t>
+                      </a:r>
+                      <a:endParaRPr lang="zh-CN" altLang="en-US" sz="1400" kern="100" dirty="0">
+                        <a:solidFill>
+                          <a:schemeClr val="tx1"/>
+                        </a:solidFill>
+                        <a:effectLst/>
+                        <a:latin typeface="等线" panose="02010600030101010101" pitchFamily="2" charset="-122"/>
+                        <a:ea typeface="等线" panose="02010600030101010101" pitchFamily="2" charset="-122"/>
+                        <a:cs typeface="Times New Roman" panose="02020603050405020304" pitchFamily="18" charset="0"/>
+                      </a:endParaRPr>
+                    </a:p>
+                  </a:txBody>
+                  <a:tcPr marL="68580" marR="68580" marT="0" marB="0" anchor="ctr">
+                    <a:lnL w="12700" cap="flat" cmpd="sng" algn="ctr">
+                      <a:solidFill>
+                        <a:srgbClr val="000000"/>
+                      </a:solidFill>
+                      <a:prstDash val="solid"/>
+                      <a:round/>
+                      <a:headEnd type="none" w="med" len="med"/>
+                      <a:tailEnd type="none" w="med" len="med"/>
+                    </a:lnL>
+                    <a:lnR w="12700" cap="flat" cmpd="sng" algn="ctr">
+                      <a:solidFill>
+                        <a:srgbClr val="000000"/>
+                      </a:solidFill>
+                      <a:prstDash val="solid"/>
+                      <a:round/>
+                      <a:headEnd type="none" w="med" len="med"/>
+                      <a:tailEnd type="none" w="med" len="med"/>
+                    </a:lnR>
+                    <a:lnT w="12700" cap="flat" cmpd="sng" algn="ctr">
+                      <a:solidFill>
+                        <a:srgbClr val="000000"/>
+                      </a:solidFill>
+                      <a:prstDash val="solid"/>
+                      <a:round/>
+                      <a:headEnd type="none" w="med" len="med"/>
+                      <a:tailEnd type="none" w="med" len="med"/>
+                    </a:lnT>
+                    <a:lnB w="12700" cap="flat" cmpd="sng" algn="ctr">
+                      <a:solidFill>
+                        <a:srgbClr val="000000"/>
+                      </a:solidFill>
+                      <a:prstDash val="solid"/>
+                      <a:round/>
+                      <a:headEnd type="none" w="med" len="med"/>
+                      <a:tailEnd type="none" w="med" len="med"/>
+                    </a:lnB>
+                    <a:noFill/>
+                  </a:tcPr>
+                </a:tc>
+                <a:tc>
+                  <a:txBody>
+                    <a:bodyPr/>
+                    <a:lstStyle/>
+                    <a:p>
+                      <a:pPr marL="0" algn="l" defTabSz="914400" rtl="0" eaLnBrk="1" latinLnBrk="0" hangingPunct="1">
+                        <a:buNone/>
+                      </a:pPr>
+                      <a:r>
+                        <a:rPr lang="en-US" altLang="zh-CN" sz="1400" kern="100" dirty="0">
+                          <a:solidFill>
+                            <a:schemeClr val="tx1"/>
+                          </a:solidFill>
+                          <a:effectLst/>
+                          <a:latin typeface="等线" panose="02010600030101010101" pitchFamily="2" charset="-122"/>
+                          <a:ea typeface="等线" panose="02010600030101010101" pitchFamily="2" charset="-122"/>
+                          <a:cs typeface="Times New Roman" panose="02020603050405020304" pitchFamily="18" charset="0"/>
+                        </a:rPr>
+                        <a:t>R</a:t>
+                      </a:r>
+                      <a:r>
+                        <a:rPr lang="zh-CN" altLang="en-US" sz="1400" kern="100" dirty="0">
+                          <a:solidFill>
+                            <a:schemeClr val="tx1"/>
+                          </a:solidFill>
+                          <a:effectLst/>
+                          <a:latin typeface="等线" panose="02010600030101010101" pitchFamily="2" charset="-122"/>
+                          <a:ea typeface="等线" panose="02010600030101010101" pitchFamily="2" charset="-122"/>
+                          <a:cs typeface="Times New Roman" panose="02020603050405020304" pitchFamily="18" charset="0"/>
+                        </a:rPr>
+                        <a:t>方</a:t>
+                      </a:r>
+                    </a:p>
+                  </a:txBody>
+                  <a:tcPr marL="68580" marR="68580" marT="0" marB="0" anchor="ctr">
+                    <a:lnL w="12700" cap="flat" cmpd="sng" algn="ctr">
+                      <a:solidFill>
+                        <a:srgbClr val="000000"/>
+                      </a:solidFill>
+                      <a:prstDash val="solid"/>
+                      <a:round/>
+                      <a:headEnd type="none" w="med" len="med"/>
+                      <a:tailEnd type="none" w="med" len="med"/>
+                    </a:lnL>
+                    <a:lnR w="12700" cap="flat" cmpd="sng" algn="ctr">
+                      <a:solidFill>
+                        <a:srgbClr val="000000"/>
+                      </a:solidFill>
+                      <a:prstDash val="solid"/>
+                      <a:round/>
+                      <a:headEnd type="none" w="med" len="med"/>
+                      <a:tailEnd type="none" w="med" len="med"/>
+                    </a:lnR>
+                    <a:lnT w="12700" cap="flat" cmpd="sng" algn="ctr">
+                      <a:solidFill>
+                        <a:srgbClr val="000000"/>
+                      </a:solidFill>
+                      <a:prstDash val="solid"/>
+                      <a:round/>
+                      <a:headEnd type="none" w="med" len="med"/>
+                      <a:tailEnd type="none" w="med" len="med"/>
+                    </a:lnT>
+                    <a:lnB w="12700" cap="flat" cmpd="sng" algn="ctr">
+                      <a:solidFill>
+                        <a:srgbClr val="000000"/>
+                      </a:solidFill>
+                      <a:prstDash val="solid"/>
+                      <a:round/>
+                      <a:headEnd type="none" w="med" len="med"/>
+                      <a:tailEnd type="none" w="med" len="med"/>
+                    </a:lnB>
+                    <a:noFill/>
+                  </a:tcPr>
+                </a:tc>
+                <a:tc>
+                  <a:txBody>
+                    <a:bodyPr/>
+                    <a:lstStyle/>
+                    <a:p>
+                      <a:pPr marL="0" algn="l" defTabSz="914400" rtl="0" eaLnBrk="1" latinLnBrk="0" hangingPunct="1">
+                        <a:buNone/>
+                      </a:pPr>
+                      <a:r>
+                        <a:rPr lang="zh-CN" altLang="en-US" sz="1400" kern="100" dirty="0">
+                          <a:solidFill>
+                            <a:schemeClr val="tx1"/>
+                          </a:solidFill>
+                          <a:effectLst/>
+                          <a:latin typeface="等线" panose="02010600030101010101" pitchFamily="2" charset="-122"/>
+                          <a:ea typeface="等线" panose="02010600030101010101" pitchFamily="2" charset="-122"/>
+                          <a:cs typeface="Times New Roman" panose="02020603050405020304" pitchFamily="18" charset="0"/>
+                        </a:rPr>
+                        <a:t>验证集</a:t>
+                      </a:r>
+                      <a:r>
+                        <a:rPr lang="en-US" altLang="zh-CN" sz="1400" kern="100" dirty="0">
+                          <a:solidFill>
+                            <a:schemeClr val="tx1"/>
+                          </a:solidFill>
+                          <a:effectLst/>
+                          <a:latin typeface="等线" panose="02010600030101010101" pitchFamily="2" charset="-122"/>
+                          <a:ea typeface="等线" panose="02010600030101010101" pitchFamily="2" charset="-122"/>
+                          <a:cs typeface="Times New Roman" panose="02020603050405020304" pitchFamily="18" charset="0"/>
+                        </a:rPr>
+                        <a:t>RMSE</a:t>
+                      </a:r>
+                      <a:endParaRPr lang="zh-CN" altLang="en-US" sz="1400" kern="100" dirty="0">
+                        <a:solidFill>
+                          <a:schemeClr val="tx1"/>
+                        </a:solidFill>
+                        <a:effectLst/>
+                        <a:latin typeface="等线" panose="02010600030101010101" pitchFamily="2" charset="-122"/>
+                        <a:ea typeface="等线" panose="02010600030101010101" pitchFamily="2" charset="-122"/>
+                        <a:cs typeface="Times New Roman" panose="02020603050405020304" pitchFamily="18" charset="0"/>
+                      </a:endParaRPr>
+                    </a:p>
+                  </a:txBody>
+                  <a:tcPr marL="68580" marR="68580" marT="0" marB="0" anchor="ctr">
+                    <a:lnL w="12700" cap="flat" cmpd="sng" algn="ctr">
+                      <a:solidFill>
+                        <a:srgbClr val="000000"/>
+                      </a:solidFill>
+                      <a:prstDash val="solid"/>
+                      <a:round/>
+                      <a:headEnd type="none" w="med" len="med"/>
+                      <a:tailEnd type="none" w="med" len="med"/>
+                    </a:lnL>
+                    <a:lnR w="12700" cap="flat" cmpd="sng" algn="ctr">
+                      <a:solidFill>
+                        <a:srgbClr val="000000"/>
+                      </a:solidFill>
+                      <a:prstDash val="solid"/>
+                      <a:round/>
+                      <a:headEnd type="none" w="med" len="med"/>
+                      <a:tailEnd type="none" w="med" len="med"/>
+                    </a:lnR>
+                    <a:lnT w="12700" cap="flat" cmpd="sng" algn="ctr">
+                      <a:solidFill>
+                        <a:srgbClr val="000000"/>
+                      </a:solidFill>
+                      <a:prstDash val="solid"/>
+                      <a:round/>
+                      <a:headEnd type="none" w="med" len="med"/>
+                      <a:tailEnd type="none" w="med" len="med"/>
+                    </a:lnT>
+                    <a:lnB w="12700" cap="flat" cmpd="sng" algn="ctr">
+                      <a:solidFill>
+                        <a:srgbClr val="000000"/>
+                      </a:solidFill>
+                      <a:prstDash val="solid"/>
+                      <a:round/>
+                      <a:headEnd type="none" w="med" len="med"/>
+                      <a:tailEnd type="none" w="med" len="med"/>
+                    </a:lnB>
+                    <a:noFill/>
+                  </a:tcPr>
+                </a:tc>
+                <a:tc>
+                  <a:txBody>
+                    <a:bodyPr/>
+                    <a:lstStyle/>
+                    <a:p>
+                      <a:pPr marL="0" algn="l" defTabSz="914400" rtl="0" eaLnBrk="1" latinLnBrk="0" hangingPunct="1">
+                        <a:buNone/>
+                      </a:pPr>
+                      <a:r>
+                        <a:rPr lang="zh-CN" altLang="en-US" sz="1400" kern="100" dirty="0">
+                          <a:solidFill>
+                            <a:schemeClr val="tx1"/>
+                          </a:solidFill>
+                          <a:effectLst/>
+                          <a:latin typeface="等线" panose="02010600030101010101" pitchFamily="2" charset="-122"/>
+                          <a:ea typeface="等线" panose="02010600030101010101" pitchFamily="2" charset="-122"/>
+                          <a:cs typeface="Times New Roman" panose="02020603050405020304" pitchFamily="18" charset="0"/>
+                        </a:rPr>
+                        <a:t>验证集</a:t>
+                      </a:r>
+                      <a:r>
+                        <a:rPr lang="en-US" altLang="zh-CN" sz="1400" kern="100" dirty="0">
+                          <a:solidFill>
+                            <a:schemeClr val="tx1"/>
+                          </a:solidFill>
+                          <a:effectLst/>
+                          <a:latin typeface="等线" panose="02010600030101010101" pitchFamily="2" charset="-122"/>
+                          <a:ea typeface="等线" panose="02010600030101010101" pitchFamily="2" charset="-122"/>
+                          <a:cs typeface="Times New Roman" panose="02020603050405020304" pitchFamily="18" charset="0"/>
+                        </a:rPr>
+                        <a:t>MAE</a:t>
+                      </a:r>
+                      <a:endParaRPr lang="zh-CN" altLang="en-US" sz="1400" kern="100" dirty="0">
+                        <a:solidFill>
+                          <a:schemeClr val="tx1"/>
+                        </a:solidFill>
+                        <a:effectLst/>
+                        <a:latin typeface="等线" panose="02010600030101010101" pitchFamily="2" charset="-122"/>
+                        <a:ea typeface="等线" panose="02010600030101010101" pitchFamily="2" charset="-122"/>
+                        <a:cs typeface="Times New Roman" panose="02020603050405020304" pitchFamily="18" charset="0"/>
+                      </a:endParaRPr>
+                    </a:p>
+                  </a:txBody>
+                  <a:tcPr marL="68580" marR="68580" marT="0" marB="0" anchor="ctr">
+                    <a:lnL w="12700" cap="flat" cmpd="sng" algn="ctr">
+                      <a:solidFill>
+                        <a:srgbClr val="000000"/>
+                      </a:solidFill>
+                      <a:prstDash val="solid"/>
+                      <a:round/>
+                      <a:headEnd type="none" w="med" len="med"/>
+                      <a:tailEnd type="none" w="med" len="med"/>
+                    </a:lnL>
+                    <a:lnR w="12700" cap="flat" cmpd="sng" algn="ctr">
+                      <a:solidFill>
+                        <a:srgbClr val="000000"/>
+                      </a:solidFill>
+                      <a:prstDash val="solid"/>
+                      <a:round/>
+                      <a:headEnd type="none" w="med" len="med"/>
+                      <a:tailEnd type="none" w="med" len="med"/>
+                    </a:lnR>
+                    <a:lnT w="12700" cap="flat" cmpd="sng" algn="ctr">
+                      <a:solidFill>
+                        <a:srgbClr val="000000"/>
+                      </a:solidFill>
+                      <a:prstDash val="solid"/>
+                      <a:round/>
+                      <a:headEnd type="none" w="med" len="med"/>
+                      <a:tailEnd type="none" w="med" len="med"/>
+                    </a:lnT>
+                    <a:lnB w="12700" cap="flat" cmpd="sng" algn="ctr">
+                      <a:solidFill>
+                        <a:srgbClr val="000000"/>
+                      </a:solidFill>
+                      <a:prstDash val="solid"/>
+                      <a:round/>
+                      <a:headEnd type="none" w="med" len="med"/>
+                      <a:tailEnd type="none" w="med" len="med"/>
+                    </a:lnB>
+                    <a:noFill/>
+                  </a:tcPr>
+                </a:tc>
+                <a:tc>
+                  <a:txBody>
+                    <a:bodyPr/>
+                    <a:lstStyle/>
+                    <a:p>
+                      <a:pPr marL="0" algn="l" defTabSz="914400" rtl="0" eaLnBrk="1" latinLnBrk="0" hangingPunct="1">
+                        <a:buNone/>
+                      </a:pPr>
+                      <a:r>
+                        <a:rPr lang="zh-CN" altLang="en-US" sz="1400" kern="100" dirty="0">
+                          <a:solidFill>
+                            <a:schemeClr val="tx1"/>
+                          </a:solidFill>
+                          <a:effectLst/>
+                          <a:latin typeface="等线" panose="02010600030101010101" pitchFamily="2" charset="-122"/>
+                          <a:ea typeface="等线" panose="02010600030101010101" pitchFamily="2" charset="-122"/>
+                          <a:cs typeface="Times New Roman" panose="02020603050405020304" pitchFamily="18" charset="0"/>
+                        </a:rPr>
+                        <a:t>验证集</a:t>
+                      </a:r>
+                      <a:r>
+                        <a:rPr lang="en-US" altLang="zh-CN" sz="1400" kern="100" dirty="0">
+                          <a:solidFill>
+                            <a:schemeClr val="tx1"/>
+                          </a:solidFill>
+                          <a:effectLst/>
+                          <a:latin typeface="等线" panose="02010600030101010101" pitchFamily="2" charset="-122"/>
+                          <a:ea typeface="等线" panose="02010600030101010101" pitchFamily="2" charset="-122"/>
+                          <a:cs typeface="Times New Roman" panose="02020603050405020304" pitchFamily="18" charset="0"/>
+                        </a:rPr>
+                        <a:t>R</a:t>
+                      </a:r>
+                      <a:r>
+                        <a:rPr lang="zh-CN" altLang="en-US" sz="1400" kern="100" dirty="0">
+                          <a:solidFill>
+                            <a:schemeClr val="tx1"/>
+                          </a:solidFill>
+                          <a:effectLst/>
+                          <a:latin typeface="等线" panose="02010600030101010101" pitchFamily="2" charset="-122"/>
+                          <a:ea typeface="等线" panose="02010600030101010101" pitchFamily="2" charset="-122"/>
+                          <a:cs typeface="Times New Roman" panose="02020603050405020304" pitchFamily="18" charset="0"/>
+                        </a:rPr>
+                        <a:t>方</a:t>
+                      </a:r>
+                    </a:p>
+                  </a:txBody>
+                  <a:tcPr marL="68580" marR="68580" marT="0" marB="0" anchor="ctr">
+                    <a:lnL w="12700" cap="flat" cmpd="sng" algn="ctr">
+                      <a:solidFill>
+                        <a:srgbClr val="000000"/>
+                      </a:solidFill>
+                      <a:prstDash val="solid"/>
+                      <a:round/>
+                      <a:headEnd type="none" w="med" len="med"/>
+                      <a:tailEnd type="none" w="med" len="med"/>
+                    </a:lnL>
+                    <a:lnR w="12700" cap="flat" cmpd="sng" algn="ctr">
+                      <a:solidFill>
+                        <a:srgbClr val="000000"/>
+                      </a:solidFill>
+                      <a:prstDash val="solid"/>
+                      <a:round/>
+                      <a:headEnd type="none" w="med" len="med"/>
+                      <a:tailEnd type="none" w="med" len="med"/>
+                    </a:lnR>
+                    <a:lnT w="12700" cap="flat" cmpd="sng" algn="ctr">
+                      <a:solidFill>
+                        <a:srgbClr val="000000"/>
+                      </a:solidFill>
+                      <a:prstDash val="solid"/>
+                      <a:round/>
+                      <a:headEnd type="none" w="med" len="med"/>
+                      <a:tailEnd type="none" w="med" len="med"/>
+                    </a:lnT>
+                    <a:lnB w="12700" cap="flat" cmpd="sng" algn="ctr">
+                      <a:solidFill>
+                        <a:srgbClr val="000000"/>
+                      </a:solidFill>
+                      <a:prstDash val="solid"/>
+                      <a:round/>
+                      <a:headEnd type="none" w="med" len="med"/>
+                      <a:tailEnd type="none" w="med" len="med"/>
+                    </a:lnB>
+                    <a:noFill/>
+                  </a:tcPr>
+                </a:tc>
+                <a:extLst>
+                  <a:ext uri="{0D108BD9-81ED-4DB2-BD59-A6C34878D82A}">
+                    <a16:rowId xmlns:a16="http://schemas.microsoft.com/office/drawing/2014/main" val="2397880505"/>
+                  </a:ext>
+                </a:extLst>
+              </a:tr>
+              <a:tr h="0">
+                <a:tc>
+                  <a:txBody>
+                    <a:bodyPr/>
+                    <a:lstStyle/>
+                    <a:p>
+                      <a:pPr algn="just">
+                        <a:buNone/>
+                      </a:pPr>
+                      <a:r>
+                        <a:rPr lang="zh-CN" sz="1400" kern="100" dirty="0">
+                          <a:effectLst/>
+                          <a:latin typeface="等线" panose="02010600030101010101" pitchFamily="2" charset="-122"/>
+                          <a:ea typeface="等线" panose="02010600030101010101" pitchFamily="2" charset="-122"/>
+                          <a:cs typeface="Times New Roman" panose="02020603050405020304" pitchFamily="18" charset="0"/>
+                        </a:rPr>
+                        <a:t>冬季</a:t>
+                      </a:r>
+                    </a:p>
+                  </a:txBody>
+                  <a:tcPr marL="68580" marR="68580" marT="0" marB="0">
+                    <a:lnL w="12700" cap="flat" cmpd="sng" algn="ctr">
+                      <a:solidFill>
+                        <a:srgbClr val="000000"/>
+                      </a:solidFill>
+                      <a:prstDash val="solid"/>
+                      <a:round/>
+                      <a:headEnd type="none" w="med" len="med"/>
+                      <a:tailEnd type="none" w="med" len="med"/>
+                    </a:lnL>
+                    <a:lnR w="12700" cap="flat" cmpd="sng" algn="ctr">
+                      <a:solidFill>
+                        <a:srgbClr val="000000"/>
+                      </a:solidFill>
+                      <a:prstDash val="solid"/>
+                      <a:round/>
+                      <a:headEnd type="none" w="med" len="med"/>
+                      <a:tailEnd type="none" w="med" len="med"/>
+                    </a:lnR>
+                    <a:lnT w="12700" cap="flat" cmpd="sng" algn="ctr">
+                      <a:solidFill>
+                        <a:srgbClr val="000000"/>
+                      </a:solidFill>
+                      <a:prstDash val="solid"/>
+                      <a:round/>
+                      <a:headEnd type="none" w="med" len="med"/>
+                      <a:tailEnd type="none" w="med" len="med"/>
+                    </a:lnT>
+                    <a:lnB w="12700" cap="flat" cmpd="sng" algn="ctr">
+                      <a:solidFill>
+                        <a:srgbClr val="000000"/>
+                      </a:solidFill>
+                      <a:prstDash val="solid"/>
+                      <a:round/>
+                      <a:headEnd type="none" w="med" len="med"/>
+                      <a:tailEnd type="none" w="med" len="med"/>
+                    </a:lnB>
+                    <a:noFill/>
+                  </a:tcPr>
+                </a:tc>
+                <a:tc>
+                  <a:txBody>
+                    <a:bodyPr/>
+                    <a:lstStyle/>
+                    <a:p>
+                      <a:pPr marL="0" algn="l" defTabSz="914400" rtl="0" eaLnBrk="1" fontAlgn="ctr" latinLnBrk="0" hangingPunct="1">
+                        <a:buNone/>
+                      </a:pPr>
+                      <a:endParaRPr lang="en-US" altLang="zh-CN" sz="1400" kern="100" dirty="0">
+                        <a:solidFill>
+                          <a:schemeClr val="tx1"/>
+                        </a:solidFill>
+                        <a:effectLst/>
+                        <a:latin typeface="等线" panose="02010600030101010101" pitchFamily="2" charset="-122"/>
+                        <a:ea typeface="等线" panose="02010600030101010101" pitchFamily="2" charset="-122"/>
+                        <a:cs typeface="Times New Roman" panose="02020603050405020304" pitchFamily="18" charset="0"/>
+                      </a:endParaRPr>
+                    </a:p>
+                  </a:txBody>
+                  <a:tcPr marL="114300" marR="6350" marT="6350" marB="0" anchor="ctr">
+                    <a:lnL w="12700" cap="flat" cmpd="sng" algn="ctr">
+                      <a:solidFill>
+                        <a:srgbClr val="000000"/>
+                      </a:solidFill>
+                      <a:prstDash val="solid"/>
+                      <a:round/>
+                      <a:headEnd type="none" w="med" len="med"/>
+                      <a:tailEnd type="none" w="med" len="med"/>
+                    </a:lnL>
+                    <a:lnR w="12700" cap="flat" cmpd="sng" algn="ctr">
+                      <a:solidFill>
+                        <a:srgbClr val="000000"/>
+                      </a:solidFill>
+                      <a:prstDash val="solid"/>
+                      <a:round/>
+                      <a:headEnd type="none" w="med" len="med"/>
+                      <a:tailEnd type="none" w="med" len="med"/>
+                    </a:lnR>
+                    <a:lnT w="12700" cap="flat" cmpd="sng" algn="ctr">
+                      <a:solidFill>
+                        <a:srgbClr val="000000"/>
+                      </a:solidFill>
+                      <a:prstDash val="solid"/>
+                      <a:round/>
+                      <a:headEnd type="none" w="med" len="med"/>
+                      <a:tailEnd type="none" w="med" len="med"/>
+                    </a:lnT>
+                    <a:lnB w="12700" cap="flat" cmpd="sng" algn="ctr">
+                      <a:solidFill>
+                        <a:srgbClr val="000000"/>
+                      </a:solidFill>
+                      <a:prstDash val="solid"/>
+                      <a:round/>
+                      <a:headEnd type="none" w="med" len="med"/>
+                      <a:tailEnd type="none" w="med" len="med"/>
+                    </a:lnB>
+                    <a:noFill/>
+                  </a:tcPr>
+                </a:tc>
+                <a:tc>
+                  <a:txBody>
+                    <a:bodyPr/>
+                    <a:lstStyle/>
+                    <a:p>
+                      <a:pPr marL="0" algn="l" defTabSz="914400" rtl="0" eaLnBrk="1" fontAlgn="ctr" latinLnBrk="0" hangingPunct="1">
+                        <a:buNone/>
+                      </a:pPr>
+                      <a:endParaRPr lang="en-US" altLang="zh-CN" sz="1400" kern="100" dirty="0">
+                        <a:solidFill>
+                          <a:schemeClr val="tx1"/>
+                        </a:solidFill>
+                        <a:effectLst/>
+                        <a:latin typeface="等线" panose="02010600030101010101" pitchFamily="2" charset="-122"/>
+                        <a:ea typeface="等线" panose="02010600030101010101" pitchFamily="2" charset="-122"/>
+                        <a:cs typeface="Times New Roman" panose="02020603050405020304" pitchFamily="18" charset="0"/>
+                      </a:endParaRPr>
+                    </a:p>
+                  </a:txBody>
+                  <a:tcPr marL="114300" marR="6350" marT="6350" marB="0" anchor="ctr">
+                    <a:lnL w="12700" cap="flat" cmpd="sng" algn="ctr">
+                      <a:solidFill>
+                        <a:srgbClr val="000000"/>
+                      </a:solidFill>
+                      <a:prstDash val="solid"/>
+                      <a:round/>
+                      <a:headEnd type="none" w="med" len="med"/>
+                      <a:tailEnd type="none" w="med" len="med"/>
+                    </a:lnL>
+                    <a:lnR w="12700" cap="flat" cmpd="sng" algn="ctr">
+                      <a:solidFill>
+                        <a:srgbClr val="000000"/>
+                      </a:solidFill>
+                      <a:prstDash val="solid"/>
+                      <a:round/>
+                      <a:headEnd type="none" w="med" len="med"/>
+                      <a:tailEnd type="none" w="med" len="med"/>
+                    </a:lnR>
+                    <a:lnT w="12700" cap="flat" cmpd="sng" algn="ctr">
+                      <a:solidFill>
+                        <a:srgbClr val="000000"/>
+                      </a:solidFill>
+                      <a:prstDash val="solid"/>
+                      <a:round/>
+                      <a:headEnd type="none" w="med" len="med"/>
+                      <a:tailEnd type="none" w="med" len="med"/>
+                    </a:lnT>
+                    <a:lnB w="12700" cap="flat" cmpd="sng" algn="ctr">
+                      <a:solidFill>
+                        <a:srgbClr val="000000"/>
+                      </a:solidFill>
+                      <a:prstDash val="solid"/>
+                      <a:round/>
+                      <a:headEnd type="none" w="med" len="med"/>
+                      <a:tailEnd type="none" w="med" len="med"/>
+                    </a:lnB>
+                    <a:noFill/>
+                  </a:tcPr>
+                </a:tc>
+                <a:tc>
+                  <a:txBody>
+                    <a:bodyPr/>
+                    <a:lstStyle/>
+                    <a:p>
+                      <a:pPr marL="0" algn="l" defTabSz="914400" rtl="0" eaLnBrk="1" fontAlgn="ctr" latinLnBrk="0" hangingPunct="1">
+                        <a:buNone/>
+                      </a:pPr>
+                      <a:endParaRPr lang="en-US" altLang="zh-CN" sz="1400" kern="100">
+                        <a:solidFill>
+                          <a:schemeClr val="tx1"/>
+                        </a:solidFill>
+                        <a:effectLst/>
+                        <a:latin typeface="等线" panose="02010600030101010101" pitchFamily="2" charset="-122"/>
+                        <a:ea typeface="等线" panose="02010600030101010101" pitchFamily="2" charset="-122"/>
+                        <a:cs typeface="Times New Roman" panose="02020603050405020304" pitchFamily="18" charset="0"/>
+                      </a:endParaRPr>
+                    </a:p>
+                  </a:txBody>
+                  <a:tcPr marL="114300" marR="6350" marT="6350" marB="0" anchor="ctr">
+                    <a:lnL w="12700" cap="flat" cmpd="sng" algn="ctr">
+                      <a:solidFill>
+                        <a:srgbClr val="000000"/>
+                      </a:solidFill>
+                      <a:prstDash val="solid"/>
+                      <a:round/>
+                      <a:headEnd type="none" w="med" len="med"/>
+                      <a:tailEnd type="none" w="med" len="med"/>
+                    </a:lnL>
+                    <a:lnR w="12700" cap="flat" cmpd="sng" algn="ctr">
+                      <a:solidFill>
+                        <a:srgbClr val="000000"/>
+                      </a:solidFill>
+                      <a:prstDash val="solid"/>
+                      <a:round/>
+                      <a:headEnd type="none" w="med" len="med"/>
+                      <a:tailEnd type="none" w="med" len="med"/>
+                    </a:lnR>
+                    <a:lnT w="12700" cap="flat" cmpd="sng" algn="ctr">
+                      <a:solidFill>
+                        <a:srgbClr val="000000"/>
+                      </a:solidFill>
+                      <a:prstDash val="solid"/>
+                      <a:round/>
+                      <a:headEnd type="none" w="med" len="med"/>
+                      <a:tailEnd type="none" w="med" len="med"/>
+                    </a:lnT>
+                    <a:lnB w="12700" cap="flat" cmpd="sng" algn="ctr">
+                      <a:solidFill>
+                        <a:srgbClr val="000000"/>
+                      </a:solidFill>
+                      <a:prstDash val="solid"/>
+                      <a:round/>
+                      <a:headEnd type="none" w="med" len="med"/>
+                      <a:tailEnd type="none" w="med" len="med"/>
+                    </a:lnB>
+                    <a:noFill/>
+                  </a:tcPr>
+                </a:tc>
+                <a:tc>
+                  <a:txBody>
+                    <a:bodyPr/>
+                    <a:lstStyle/>
+                    <a:p>
+                      <a:pPr marL="0" algn="l" defTabSz="914400" rtl="0" eaLnBrk="1" fontAlgn="ctr" latinLnBrk="0" hangingPunct="1">
+                        <a:buNone/>
+                      </a:pPr>
+                      <a:endParaRPr lang="en-US" altLang="zh-CN" sz="1400" kern="100">
+                        <a:solidFill>
+                          <a:schemeClr val="tx1"/>
+                        </a:solidFill>
+                        <a:effectLst/>
+                        <a:latin typeface="等线" panose="02010600030101010101" pitchFamily="2" charset="-122"/>
+                        <a:ea typeface="等线" panose="02010600030101010101" pitchFamily="2" charset="-122"/>
+                        <a:cs typeface="Times New Roman" panose="02020603050405020304" pitchFamily="18" charset="0"/>
+                      </a:endParaRPr>
+                    </a:p>
+                  </a:txBody>
+                  <a:tcPr marL="114300" marR="6350" marT="6350" marB="0" anchor="ctr">
+                    <a:lnL w="12700" cap="flat" cmpd="sng" algn="ctr">
+                      <a:solidFill>
+                        <a:srgbClr val="000000"/>
+                      </a:solidFill>
+                      <a:prstDash val="solid"/>
+                      <a:round/>
+                      <a:headEnd type="none" w="med" len="med"/>
+                      <a:tailEnd type="none" w="med" len="med"/>
+                    </a:lnL>
+                    <a:lnR w="12700" cap="flat" cmpd="sng" algn="ctr">
+                      <a:solidFill>
+                        <a:srgbClr val="000000"/>
+                      </a:solidFill>
+                      <a:prstDash val="solid"/>
+                      <a:round/>
+                      <a:headEnd type="none" w="med" len="med"/>
+                      <a:tailEnd type="none" w="med" len="med"/>
+                    </a:lnR>
+                    <a:lnT w="12700" cap="flat" cmpd="sng" algn="ctr">
+                      <a:solidFill>
+                        <a:srgbClr val="000000"/>
+                      </a:solidFill>
+                      <a:prstDash val="solid"/>
+                      <a:round/>
+                      <a:headEnd type="none" w="med" len="med"/>
+                      <a:tailEnd type="none" w="med" len="med"/>
+                    </a:lnT>
+                    <a:lnB w="12700" cap="flat" cmpd="sng" algn="ctr">
+                      <a:solidFill>
+                        <a:srgbClr val="000000"/>
+                      </a:solidFill>
+                      <a:prstDash val="solid"/>
+                      <a:round/>
+                      <a:headEnd type="none" w="med" len="med"/>
+                      <a:tailEnd type="none" w="med" len="med"/>
+                    </a:lnB>
+                    <a:noFill/>
+                  </a:tcPr>
+                </a:tc>
+                <a:tc>
+                  <a:txBody>
+                    <a:bodyPr/>
+                    <a:lstStyle/>
+                    <a:p>
+                      <a:pPr marL="0" algn="l" defTabSz="914400" rtl="0" eaLnBrk="1" fontAlgn="ctr" latinLnBrk="0" hangingPunct="1">
+                        <a:buNone/>
+                      </a:pPr>
+                      <a:endParaRPr lang="en-US" altLang="zh-CN" sz="1400" kern="100" dirty="0">
+                        <a:solidFill>
+                          <a:schemeClr val="tx1"/>
+                        </a:solidFill>
+                        <a:effectLst/>
+                        <a:latin typeface="等线" panose="02010600030101010101" pitchFamily="2" charset="-122"/>
+                        <a:ea typeface="等线" panose="02010600030101010101" pitchFamily="2" charset="-122"/>
+                        <a:cs typeface="Times New Roman" panose="02020603050405020304" pitchFamily="18" charset="0"/>
+                      </a:endParaRPr>
+                    </a:p>
+                  </a:txBody>
+                  <a:tcPr marL="114300" marR="6350" marT="6350" marB="0" anchor="ctr">
+                    <a:lnL w="12700" cap="flat" cmpd="sng" algn="ctr">
+                      <a:solidFill>
+                        <a:srgbClr val="000000"/>
+                      </a:solidFill>
+                      <a:prstDash val="solid"/>
+                      <a:round/>
+                      <a:headEnd type="none" w="med" len="med"/>
+                      <a:tailEnd type="none" w="med" len="med"/>
+                    </a:lnL>
+                    <a:lnR w="12700" cap="flat" cmpd="sng" algn="ctr">
+                      <a:solidFill>
+                        <a:srgbClr val="000000"/>
+                      </a:solidFill>
+                      <a:prstDash val="solid"/>
+                      <a:round/>
+                      <a:headEnd type="none" w="med" len="med"/>
+                      <a:tailEnd type="none" w="med" len="med"/>
+                    </a:lnR>
+                    <a:lnT w="12700" cap="flat" cmpd="sng" algn="ctr">
+                      <a:solidFill>
+                        <a:srgbClr val="000000"/>
+                      </a:solidFill>
+                      <a:prstDash val="solid"/>
+                      <a:round/>
+                      <a:headEnd type="none" w="med" len="med"/>
+                      <a:tailEnd type="none" w="med" len="med"/>
+                    </a:lnT>
+                    <a:lnB w="12700" cap="flat" cmpd="sng" algn="ctr">
+                      <a:solidFill>
+                        <a:srgbClr val="000000"/>
+                      </a:solidFill>
+                      <a:prstDash val="solid"/>
+                      <a:round/>
+                      <a:headEnd type="none" w="med" len="med"/>
+                      <a:tailEnd type="none" w="med" len="med"/>
+                    </a:lnB>
+                    <a:noFill/>
+                  </a:tcPr>
+                </a:tc>
+                <a:tc>
+                  <a:txBody>
+                    <a:bodyPr/>
+                    <a:lstStyle/>
+                    <a:p>
+                      <a:pPr marL="0" algn="l" defTabSz="914400" rtl="0" eaLnBrk="1" fontAlgn="ctr" latinLnBrk="0" hangingPunct="1">
+                        <a:buNone/>
+                      </a:pPr>
+                      <a:endParaRPr lang="en-US" altLang="zh-CN" sz="1400" kern="100" dirty="0">
+                        <a:solidFill>
+                          <a:schemeClr val="tx1"/>
+                        </a:solidFill>
+                        <a:effectLst/>
+                        <a:latin typeface="等线" panose="02010600030101010101" pitchFamily="2" charset="-122"/>
+                        <a:ea typeface="等线" panose="02010600030101010101" pitchFamily="2" charset="-122"/>
+                        <a:cs typeface="Times New Roman" panose="02020603050405020304" pitchFamily="18" charset="0"/>
+                      </a:endParaRPr>
+                    </a:p>
+                  </a:txBody>
+                  <a:tcPr marL="114300" marR="6350" marT="6350" marB="0" anchor="ctr">
+                    <a:lnL w="12700" cap="flat" cmpd="sng" algn="ctr">
+                      <a:solidFill>
+                        <a:srgbClr val="000000"/>
+                      </a:solidFill>
+                      <a:prstDash val="solid"/>
+                      <a:round/>
+                      <a:headEnd type="none" w="med" len="med"/>
+                      <a:tailEnd type="none" w="med" len="med"/>
+                    </a:lnL>
+                    <a:lnR w="12700" cap="flat" cmpd="sng" algn="ctr">
+                      <a:solidFill>
+                        <a:srgbClr val="000000"/>
+                      </a:solidFill>
+                      <a:prstDash val="solid"/>
+                      <a:round/>
+                      <a:headEnd type="none" w="med" len="med"/>
+                      <a:tailEnd type="none" w="med" len="med"/>
+                    </a:lnR>
+                    <a:lnT w="12700" cap="flat" cmpd="sng" algn="ctr">
+                      <a:solidFill>
+                        <a:srgbClr val="000000"/>
+                      </a:solidFill>
+                      <a:prstDash val="solid"/>
+                      <a:round/>
+                      <a:headEnd type="none" w="med" len="med"/>
+                      <a:tailEnd type="none" w="med" len="med"/>
+                    </a:lnT>
+                    <a:lnB w="12700" cap="flat" cmpd="sng" algn="ctr">
+                      <a:solidFill>
+                        <a:srgbClr val="000000"/>
+                      </a:solidFill>
+                      <a:prstDash val="solid"/>
+                      <a:round/>
+                      <a:headEnd type="none" w="med" len="med"/>
+                      <a:tailEnd type="none" w="med" len="med"/>
+                    </a:lnB>
+                    <a:noFill/>
+                  </a:tcPr>
+                </a:tc>
+                <a:extLst>
+                  <a:ext uri="{0D108BD9-81ED-4DB2-BD59-A6C34878D82A}">
+                    <a16:rowId xmlns:a16="http://schemas.microsoft.com/office/drawing/2014/main" val="3877902591"/>
+                  </a:ext>
+                </a:extLst>
+              </a:tr>
+              <a:tr h="0">
+                <a:tc>
+                  <a:txBody>
+                    <a:bodyPr/>
+                    <a:lstStyle/>
+                    <a:p>
+                      <a:pPr algn="just">
+                        <a:buNone/>
+                      </a:pPr>
+                      <a:r>
+                        <a:rPr lang="zh-CN" sz="1400" kern="100" dirty="0">
+                          <a:effectLst/>
+                          <a:latin typeface="等线" panose="02010600030101010101" pitchFamily="2" charset="-122"/>
+                          <a:ea typeface="等线" panose="02010600030101010101" pitchFamily="2" charset="-122"/>
+                          <a:cs typeface="Times New Roman" panose="02020603050405020304" pitchFamily="18" charset="0"/>
+                        </a:rPr>
+                        <a:t>秋季</a:t>
+                      </a:r>
+                    </a:p>
+                  </a:txBody>
+                  <a:tcPr marL="68580" marR="68580" marT="0" marB="0">
+                    <a:lnL w="12700" cap="flat" cmpd="sng" algn="ctr">
+                      <a:solidFill>
+                        <a:srgbClr val="000000"/>
+                      </a:solidFill>
+                      <a:prstDash val="solid"/>
+                      <a:round/>
+                      <a:headEnd type="none" w="med" len="med"/>
+                      <a:tailEnd type="none" w="med" len="med"/>
+                    </a:lnL>
+                    <a:lnR w="12700" cap="flat" cmpd="sng" algn="ctr">
+                      <a:solidFill>
+                        <a:srgbClr val="000000"/>
+                      </a:solidFill>
+                      <a:prstDash val="solid"/>
+                      <a:round/>
+                      <a:headEnd type="none" w="med" len="med"/>
+                      <a:tailEnd type="none" w="med" len="med"/>
+                    </a:lnR>
+                    <a:lnT w="12700" cap="flat" cmpd="sng" algn="ctr">
+                      <a:solidFill>
+                        <a:srgbClr val="000000"/>
+                      </a:solidFill>
+                      <a:prstDash val="solid"/>
+                      <a:round/>
+                      <a:headEnd type="none" w="med" len="med"/>
+                      <a:tailEnd type="none" w="med" len="med"/>
+                    </a:lnT>
+                    <a:lnB w="12700" cap="flat" cmpd="sng" algn="ctr">
+                      <a:solidFill>
+                        <a:srgbClr val="000000"/>
+                      </a:solidFill>
+                      <a:prstDash val="solid"/>
+                      <a:round/>
+                      <a:headEnd type="none" w="med" len="med"/>
+                      <a:tailEnd type="none" w="med" len="med"/>
+                    </a:lnB>
+                    <a:noFill/>
+                  </a:tcPr>
+                </a:tc>
+                <a:tc>
+                  <a:txBody>
+                    <a:bodyPr/>
+                    <a:lstStyle/>
+                    <a:p>
+                      <a:pPr marL="0" algn="l" defTabSz="914400" rtl="0" eaLnBrk="1" fontAlgn="ctr" latinLnBrk="0" hangingPunct="1">
+                        <a:buNone/>
+                      </a:pPr>
+                      <a:endParaRPr lang="en-US" altLang="zh-CN" sz="1400" kern="100">
+                        <a:solidFill>
+                          <a:schemeClr val="tx1"/>
+                        </a:solidFill>
+                        <a:effectLst/>
+                        <a:latin typeface="等线" panose="02010600030101010101" pitchFamily="2" charset="-122"/>
+                        <a:ea typeface="等线" panose="02010600030101010101" pitchFamily="2" charset="-122"/>
+                        <a:cs typeface="Times New Roman" panose="02020603050405020304" pitchFamily="18" charset="0"/>
+                      </a:endParaRPr>
+                    </a:p>
+                  </a:txBody>
+                  <a:tcPr marL="114300" marR="6350" marT="6350" marB="0" anchor="ctr">
+                    <a:lnL w="12700" cap="flat" cmpd="sng" algn="ctr">
+                      <a:solidFill>
+                        <a:srgbClr val="000000"/>
+                      </a:solidFill>
+                      <a:prstDash val="solid"/>
+                      <a:round/>
+                      <a:headEnd type="none" w="med" len="med"/>
+                      <a:tailEnd type="none" w="med" len="med"/>
+                    </a:lnL>
+                    <a:lnR w="12700" cap="flat" cmpd="sng" algn="ctr">
+                      <a:solidFill>
+                        <a:srgbClr val="000000"/>
+                      </a:solidFill>
+                      <a:prstDash val="solid"/>
+                      <a:round/>
+                      <a:headEnd type="none" w="med" len="med"/>
+                      <a:tailEnd type="none" w="med" len="med"/>
+                    </a:lnR>
+                    <a:lnT w="12700" cap="flat" cmpd="sng" algn="ctr">
+                      <a:solidFill>
+                        <a:srgbClr val="000000"/>
+                      </a:solidFill>
+                      <a:prstDash val="solid"/>
+                      <a:round/>
+                      <a:headEnd type="none" w="med" len="med"/>
+                      <a:tailEnd type="none" w="med" len="med"/>
+                    </a:lnT>
+                    <a:lnB w="12700" cap="flat" cmpd="sng" algn="ctr">
+                      <a:solidFill>
+                        <a:srgbClr val="000000"/>
+                      </a:solidFill>
+                      <a:prstDash val="solid"/>
+                      <a:round/>
+                      <a:headEnd type="none" w="med" len="med"/>
+                      <a:tailEnd type="none" w="med" len="med"/>
+                    </a:lnB>
+                    <a:noFill/>
+                  </a:tcPr>
+                </a:tc>
+                <a:tc>
+                  <a:txBody>
+                    <a:bodyPr/>
+                    <a:lstStyle/>
+                    <a:p>
+                      <a:pPr marL="0" algn="l" defTabSz="914400" rtl="0" eaLnBrk="1" fontAlgn="ctr" latinLnBrk="0" hangingPunct="1">
+                        <a:buNone/>
+                      </a:pPr>
+                      <a:endParaRPr lang="en-US" altLang="zh-CN" sz="1400" kern="100">
+                        <a:solidFill>
+                          <a:schemeClr val="tx1"/>
+                        </a:solidFill>
+                        <a:effectLst/>
+                        <a:latin typeface="等线" panose="02010600030101010101" pitchFamily="2" charset="-122"/>
+                        <a:ea typeface="等线" panose="02010600030101010101" pitchFamily="2" charset="-122"/>
+                        <a:cs typeface="Times New Roman" panose="02020603050405020304" pitchFamily="18" charset="0"/>
+                      </a:endParaRPr>
+                    </a:p>
+                  </a:txBody>
+                  <a:tcPr marL="114300" marR="6350" marT="6350" marB="0" anchor="ctr">
+                    <a:lnL w="12700" cap="flat" cmpd="sng" algn="ctr">
+                      <a:solidFill>
+                        <a:srgbClr val="000000"/>
+                      </a:solidFill>
+                      <a:prstDash val="solid"/>
+                      <a:round/>
+                      <a:headEnd type="none" w="med" len="med"/>
+                      <a:tailEnd type="none" w="med" len="med"/>
+                    </a:lnL>
+                    <a:lnR w="12700" cap="flat" cmpd="sng" algn="ctr">
+                      <a:solidFill>
+                        <a:srgbClr val="000000"/>
+                      </a:solidFill>
+                      <a:prstDash val="solid"/>
+                      <a:round/>
+                      <a:headEnd type="none" w="med" len="med"/>
+                      <a:tailEnd type="none" w="med" len="med"/>
+                    </a:lnR>
+                    <a:lnT w="12700" cap="flat" cmpd="sng" algn="ctr">
+                      <a:solidFill>
+                        <a:srgbClr val="000000"/>
+                      </a:solidFill>
+                      <a:prstDash val="solid"/>
+                      <a:round/>
+                      <a:headEnd type="none" w="med" len="med"/>
+                      <a:tailEnd type="none" w="med" len="med"/>
+                    </a:lnT>
+                    <a:lnB w="12700" cap="flat" cmpd="sng" algn="ctr">
+                      <a:solidFill>
+                        <a:srgbClr val="000000"/>
+                      </a:solidFill>
+                      <a:prstDash val="solid"/>
+                      <a:round/>
+                      <a:headEnd type="none" w="med" len="med"/>
+                      <a:tailEnd type="none" w="med" len="med"/>
+                    </a:lnB>
+                    <a:noFill/>
+                  </a:tcPr>
+                </a:tc>
+                <a:tc>
+                  <a:txBody>
+                    <a:bodyPr/>
+                    <a:lstStyle/>
+                    <a:p>
+                      <a:pPr marL="0" algn="l" defTabSz="914400" rtl="0" eaLnBrk="1" fontAlgn="ctr" latinLnBrk="0" hangingPunct="1">
+                        <a:buNone/>
+                      </a:pPr>
+                      <a:endParaRPr lang="en-US" altLang="zh-CN" sz="1400" kern="100" dirty="0">
+                        <a:solidFill>
+                          <a:schemeClr val="tx1"/>
+                        </a:solidFill>
+                        <a:effectLst/>
+                        <a:latin typeface="等线" panose="02010600030101010101" pitchFamily="2" charset="-122"/>
+                        <a:ea typeface="等线" panose="02010600030101010101" pitchFamily="2" charset="-122"/>
+                        <a:cs typeface="Times New Roman" panose="02020603050405020304" pitchFamily="18" charset="0"/>
+                      </a:endParaRPr>
+                    </a:p>
+                  </a:txBody>
+                  <a:tcPr marL="114300" marR="6350" marT="6350" marB="0" anchor="ctr">
+                    <a:lnL w="12700" cap="flat" cmpd="sng" algn="ctr">
+                      <a:solidFill>
+                        <a:srgbClr val="000000"/>
+                      </a:solidFill>
+                      <a:prstDash val="solid"/>
+                      <a:round/>
+                      <a:headEnd type="none" w="med" len="med"/>
+                      <a:tailEnd type="none" w="med" len="med"/>
+                    </a:lnL>
+                    <a:lnR w="12700" cap="flat" cmpd="sng" algn="ctr">
+                      <a:solidFill>
+                        <a:srgbClr val="000000"/>
+                      </a:solidFill>
+                      <a:prstDash val="solid"/>
+                      <a:round/>
+                      <a:headEnd type="none" w="med" len="med"/>
+                      <a:tailEnd type="none" w="med" len="med"/>
+                    </a:lnR>
+                    <a:lnT w="12700" cap="flat" cmpd="sng" algn="ctr">
+                      <a:solidFill>
+                        <a:srgbClr val="000000"/>
+                      </a:solidFill>
+                      <a:prstDash val="solid"/>
+                      <a:round/>
+                      <a:headEnd type="none" w="med" len="med"/>
+                      <a:tailEnd type="none" w="med" len="med"/>
+                    </a:lnT>
+                    <a:lnB w="12700" cap="flat" cmpd="sng" algn="ctr">
+                      <a:solidFill>
+                        <a:srgbClr val="000000"/>
+                      </a:solidFill>
+                      <a:prstDash val="solid"/>
+                      <a:round/>
+                      <a:headEnd type="none" w="med" len="med"/>
+                      <a:tailEnd type="none" w="med" len="med"/>
+                    </a:lnB>
+                    <a:noFill/>
+                  </a:tcPr>
+                </a:tc>
+                <a:tc>
+                  <a:txBody>
+                    <a:bodyPr/>
+                    <a:lstStyle/>
+                    <a:p>
+                      <a:pPr marL="0" algn="l" defTabSz="914400" rtl="0" eaLnBrk="1" fontAlgn="ctr" latinLnBrk="0" hangingPunct="1">
+                        <a:buNone/>
+                      </a:pPr>
+                      <a:endParaRPr lang="en-US" altLang="zh-CN" sz="1400" kern="100" dirty="0">
+                        <a:solidFill>
+                          <a:schemeClr val="tx1"/>
+                        </a:solidFill>
+                        <a:effectLst/>
+                        <a:latin typeface="等线" panose="02010600030101010101" pitchFamily="2" charset="-122"/>
+                        <a:ea typeface="等线" panose="02010600030101010101" pitchFamily="2" charset="-122"/>
+                        <a:cs typeface="Times New Roman" panose="02020603050405020304" pitchFamily="18" charset="0"/>
+                      </a:endParaRPr>
+                    </a:p>
+                  </a:txBody>
+                  <a:tcPr marL="114300" marR="6350" marT="6350" marB="0" anchor="ctr">
+                    <a:lnL w="12700" cap="flat" cmpd="sng" algn="ctr">
+                      <a:solidFill>
+                        <a:srgbClr val="000000"/>
+                      </a:solidFill>
+                      <a:prstDash val="solid"/>
+                      <a:round/>
+                      <a:headEnd type="none" w="med" len="med"/>
+                      <a:tailEnd type="none" w="med" len="med"/>
+                    </a:lnL>
+                    <a:lnR w="12700" cap="flat" cmpd="sng" algn="ctr">
+                      <a:solidFill>
+                        <a:srgbClr val="000000"/>
+                      </a:solidFill>
+                      <a:prstDash val="solid"/>
+                      <a:round/>
+                      <a:headEnd type="none" w="med" len="med"/>
+                      <a:tailEnd type="none" w="med" len="med"/>
+                    </a:lnR>
+                    <a:lnT w="12700" cap="flat" cmpd="sng" algn="ctr">
+                      <a:solidFill>
+                        <a:srgbClr val="000000"/>
+                      </a:solidFill>
+                      <a:prstDash val="solid"/>
+                      <a:round/>
+                      <a:headEnd type="none" w="med" len="med"/>
+                      <a:tailEnd type="none" w="med" len="med"/>
+                    </a:lnT>
+                    <a:lnB w="12700" cap="flat" cmpd="sng" algn="ctr">
+                      <a:solidFill>
+                        <a:srgbClr val="000000"/>
+                      </a:solidFill>
+                      <a:prstDash val="solid"/>
+                      <a:round/>
+                      <a:headEnd type="none" w="med" len="med"/>
+                      <a:tailEnd type="none" w="med" len="med"/>
+                    </a:lnB>
+                    <a:noFill/>
+                  </a:tcPr>
+                </a:tc>
+                <a:tc>
+                  <a:txBody>
+                    <a:bodyPr/>
+                    <a:lstStyle/>
+                    <a:p>
+                      <a:pPr marL="0" algn="l" defTabSz="914400" rtl="0" eaLnBrk="1" fontAlgn="ctr" latinLnBrk="0" hangingPunct="1">
+                        <a:buNone/>
+                      </a:pPr>
+                      <a:endParaRPr lang="en-US" altLang="zh-CN" sz="1400" kern="100" dirty="0">
+                        <a:solidFill>
+                          <a:schemeClr val="tx1"/>
+                        </a:solidFill>
+                        <a:effectLst/>
+                        <a:latin typeface="等线" panose="02010600030101010101" pitchFamily="2" charset="-122"/>
+                        <a:ea typeface="等线" panose="02010600030101010101" pitchFamily="2" charset="-122"/>
+                        <a:cs typeface="Times New Roman" panose="02020603050405020304" pitchFamily="18" charset="0"/>
+                      </a:endParaRPr>
+                    </a:p>
+                  </a:txBody>
+                  <a:tcPr marL="114300" marR="6350" marT="6350" marB="0" anchor="ctr">
+                    <a:lnL w="12700" cap="flat" cmpd="sng" algn="ctr">
+                      <a:solidFill>
+                        <a:srgbClr val="000000"/>
+                      </a:solidFill>
+                      <a:prstDash val="solid"/>
+                      <a:round/>
+                      <a:headEnd type="none" w="med" len="med"/>
+                      <a:tailEnd type="none" w="med" len="med"/>
+                    </a:lnL>
+                    <a:lnR w="12700" cap="flat" cmpd="sng" algn="ctr">
+                      <a:solidFill>
+                        <a:srgbClr val="000000"/>
+                      </a:solidFill>
+                      <a:prstDash val="solid"/>
+                      <a:round/>
+                      <a:headEnd type="none" w="med" len="med"/>
+                      <a:tailEnd type="none" w="med" len="med"/>
+                    </a:lnR>
+                    <a:lnT w="12700" cap="flat" cmpd="sng" algn="ctr">
+                      <a:solidFill>
+                        <a:srgbClr val="000000"/>
+                      </a:solidFill>
+                      <a:prstDash val="solid"/>
+                      <a:round/>
+                      <a:headEnd type="none" w="med" len="med"/>
+                      <a:tailEnd type="none" w="med" len="med"/>
+                    </a:lnT>
+                    <a:lnB w="12700" cap="flat" cmpd="sng" algn="ctr">
+                      <a:solidFill>
+                        <a:srgbClr val="000000"/>
+                      </a:solidFill>
+                      <a:prstDash val="solid"/>
+                      <a:round/>
+                      <a:headEnd type="none" w="med" len="med"/>
+                      <a:tailEnd type="none" w="med" len="med"/>
+                    </a:lnB>
+                    <a:noFill/>
+                  </a:tcPr>
+                </a:tc>
+                <a:tc>
+                  <a:txBody>
+                    <a:bodyPr/>
+                    <a:lstStyle/>
+                    <a:p>
+                      <a:pPr marL="0" algn="l" defTabSz="914400" rtl="0" eaLnBrk="1" fontAlgn="ctr" latinLnBrk="0" hangingPunct="1">
+                        <a:buNone/>
+                      </a:pPr>
+                      <a:endParaRPr lang="en-US" altLang="zh-CN" sz="1400" kern="100" dirty="0">
+                        <a:solidFill>
+                          <a:schemeClr val="tx1"/>
+                        </a:solidFill>
+                        <a:effectLst/>
+                        <a:latin typeface="等线" panose="02010600030101010101" pitchFamily="2" charset="-122"/>
+                        <a:ea typeface="等线" panose="02010600030101010101" pitchFamily="2" charset="-122"/>
+                        <a:cs typeface="Times New Roman" panose="02020603050405020304" pitchFamily="18" charset="0"/>
+                      </a:endParaRPr>
+                    </a:p>
+                  </a:txBody>
+                  <a:tcPr marL="114300" marR="6350" marT="6350" marB="0" anchor="ctr">
+                    <a:lnL w="12700" cap="flat" cmpd="sng" algn="ctr">
+                      <a:solidFill>
+                        <a:srgbClr val="000000"/>
+                      </a:solidFill>
+                      <a:prstDash val="solid"/>
+                      <a:round/>
+                      <a:headEnd type="none" w="med" len="med"/>
+                      <a:tailEnd type="none" w="med" len="med"/>
+                    </a:lnL>
+                    <a:lnR w="12700" cap="flat" cmpd="sng" algn="ctr">
+                      <a:solidFill>
+                        <a:srgbClr val="000000"/>
+                      </a:solidFill>
+                      <a:prstDash val="solid"/>
+                      <a:round/>
+                      <a:headEnd type="none" w="med" len="med"/>
+                      <a:tailEnd type="none" w="med" len="med"/>
+                    </a:lnR>
+                    <a:lnT w="12700" cap="flat" cmpd="sng" algn="ctr">
+                      <a:solidFill>
+                        <a:srgbClr val="000000"/>
+                      </a:solidFill>
+                      <a:prstDash val="solid"/>
+                      <a:round/>
+                      <a:headEnd type="none" w="med" len="med"/>
+                      <a:tailEnd type="none" w="med" len="med"/>
+                    </a:lnT>
+                    <a:lnB w="12700" cap="flat" cmpd="sng" algn="ctr">
+                      <a:solidFill>
+                        <a:srgbClr val="000000"/>
+                      </a:solidFill>
+                      <a:prstDash val="solid"/>
+                      <a:round/>
+                      <a:headEnd type="none" w="med" len="med"/>
+                      <a:tailEnd type="none" w="med" len="med"/>
+                    </a:lnB>
+                    <a:noFill/>
+                  </a:tcPr>
+                </a:tc>
+                <a:extLst>
+                  <a:ext uri="{0D108BD9-81ED-4DB2-BD59-A6C34878D82A}">
+                    <a16:rowId xmlns:a16="http://schemas.microsoft.com/office/drawing/2014/main" val="3661794857"/>
+                  </a:ext>
+                </a:extLst>
+              </a:tr>
+              <a:tr h="0">
+                <a:tc>
+                  <a:txBody>
+                    <a:bodyPr/>
+                    <a:lstStyle/>
+                    <a:p>
+                      <a:pPr algn="just">
+                        <a:buNone/>
+                      </a:pPr>
+                      <a:r>
+                        <a:rPr lang="zh-CN" sz="1400" kern="100" dirty="0">
+                          <a:effectLst/>
+                          <a:latin typeface="等线" panose="02010600030101010101" pitchFamily="2" charset="-122"/>
+                          <a:ea typeface="等线" panose="02010600030101010101" pitchFamily="2" charset="-122"/>
+                          <a:cs typeface="Times New Roman" panose="02020603050405020304" pitchFamily="18" charset="0"/>
+                        </a:rPr>
+                        <a:t>夏季</a:t>
+                      </a:r>
+                    </a:p>
+                  </a:txBody>
+                  <a:tcPr marL="68580" marR="68580" marT="0" marB="0">
+                    <a:lnL w="12700" cap="flat" cmpd="sng" algn="ctr">
+                      <a:solidFill>
+                        <a:srgbClr val="000000"/>
+                      </a:solidFill>
+                      <a:prstDash val="solid"/>
+                      <a:round/>
+                      <a:headEnd type="none" w="med" len="med"/>
+                      <a:tailEnd type="none" w="med" len="med"/>
+                    </a:lnL>
+                    <a:lnR w="12700" cap="flat" cmpd="sng" algn="ctr">
+                      <a:solidFill>
+                        <a:srgbClr val="000000"/>
+                      </a:solidFill>
+                      <a:prstDash val="solid"/>
+                      <a:round/>
+                      <a:headEnd type="none" w="med" len="med"/>
+                      <a:tailEnd type="none" w="med" len="med"/>
+                    </a:lnR>
+                    <a:lnT w="12700" cap="flat" cmpd="sng" algn="ctr">
+                      <a:solidFill>
+                        <a:srgbClr val="000000"/>
+                      </a:solidFill>
+                      <a:prstDash val="solid"/>
+                      <a:round/>
+                      <a:headEnd type="none" w="med" len="med"/>
+                      <a:tailEnd type="none" w="med" len="med"/>
+                    </a:lnT>
+                    <a:lnB w="12700" cap="flat" cmpd="sng" algn="ctr">
+                      <a:solidFill>
+                        <a:srgbClr val="000000"/>
+                      </a:solidFill>
+                      <a:prstDash val="solid"/>
+                      <a:round/>
+                      <a:headEnd type="none" w="med" len="med"/>
+                      <a:tailEnd type="none" w="med" len="med"/>
+                    </a:lnB>
+                    <a:noFill/>
+                  </a:tcPr>
+                </a:tc>
+                <a:tc>
+                  <a:txBody>
+                    <a:bodyPr/>
+                    <a:lstStyle/>
+                    <a:p>
+                      <a:pPr marL="0" algn="l" defTabSz="914400" rtl="0" eaLnBrk="1" fontAlgn="ctr" latinLnBrk="0" hangingPunct="1">
+                        <a:buNone/>
+                      </a:pPr>
+                      <a:endParaRPr lang="en-US" altLang="zh-CN" sz="1400" kern="100">
+                        <a:solidFill>
+                          <a:schemeClr val="tx1"/>
+                        </a:solidFill>
+                        <a:effectLst/>
+                        <a:latin typeface="等线" panose="02010600030101010101" pitchFamily="2" charset="-122"/>
+                        <a:ea typeface="等线" panose="02010600030101010101" pitchFamily="2" charset="-122"/>
+                        <a:cs typeface="Times New Roman" panose="02020603050405020304" pitchFamily="18" charset="0"/>
+                      </a:endParaRPr>
+                    </a:p>
+                  </a:txBody>
+                  <a:tcPr marL="114300" marR="6350" marT="6350" marB="0" anchor="ctr">
+                    <a:lnL w="12700" cap="flat" cmpd="sng" algn="ctr">
+                      <a:solidFill>
+                        <a:srgbClr val="000000"/>
+                      </a:solidFill>
+                      <a:prstDash val="solid"/>
+                      <a:round/>
+                      <a:headEnd type="none" w="med" len="med"/>
+                      <a:tailEnd type="none" w="med" len="med"/>
+                    </a:lnL>
+                    <a:lnR w="12700" cap="flat" cmpd="sng" algn="ctr">
+                      <a:solidFill>
+                        <a:srgbClr val="000000"/>
+                      </a:solidFill>
+                      <a:prstDash val="solid"/>
+                      <a:round/>
+                      <a:headEnd type="none" w="med" len="med"/>
+                      <a:tailEnd type="none" w="med" len="med"/>
+                    </a:lnR>
+                    <a:lnT w="12700" cap="flat" cmpd="sng" algn="ctr">
+                      <a:solidFill>
+                        <a:srgbClr val="000000"/>
+                      </a:solidFill>
+                      <a:prstDash val="solid"/>
+                      <a:round/>
+                      <a:headEnd type="none" w="med" len="med"/>
+                      <a:tailEnd type="none" w="med" len="med"/>
+                    </a:lnT>
+                    <a:lnB w="12700" cap="flat" cmpd="sng" algn="ctr">
+                      <a:solidFill>
+                        <a:srgbClr val="000000"/>
+                      </a:solidFill>
+                      <a:prstDash val="solid"/>
+                      <a:round/>
+                      <a:headEnd type="none" w="med" len="med"/>
+                      <a:tailEnd type="none" w="med" len="med"/>
+                    </a:lnB>
+                    <a:noFill/>
+                  </a:tcPr>
+                </a:tc>
+                <a:tc>
+                  <a:txBody>
+                    <a:bodyPr/>
+                    <a:lstStyle/>
+                    <a:p>
+                      <a:pPr marL="0" algn="l" defTabSz="914400" rtl="0" eaLnBrk="1" fontAlgn="ctr" latinLnBrk="0" hangingPunct="1">
+                        <a:buNone/>
+                      </a:pPr>
+                      <a:endParaRPr lang="en-US" altLang="zh-CN" sz="1400" kern="100">
+                        <a:solidFill>
+                          <a:schemeClr val="tx1"/>
+                        </a:solidFill>
+                        <a:effectLst/>
+                        <a:latin typeface="等线" panose="02010600030101010101" pitchFamily="2" charset="-122"/>
+                        <a:ea typeface="等线" panose="02010600030101010101" pitchFamily="2" charset="-122"/>
+                        <a:cs typeface="Times New Roman" panose="02020603050405020304" pitchFamily="18" charset="0"/>
+                      </a:endParaRPr>
+                    </a:p>
+                  </a:txBody>
+                  <a:tcPr marL="114300" marR="6350" marT="6350" marB="0" anchor="ctr">
+                    <a:lnL w="12700" cap="flat" cmpd="sng" algn="ctr">
+                      <a:solidFill>
+                        <a:srgbClr val="000000"/>
+                      </a:solidFill>
+                      <a:prstDash val="solid"/>
+                      <a:round/>
+                      <a:headEnd type="none" w="med" len="med"/>
+                      <a:tailEnd type="none" w="med" len="med"/>
+                    </a:lnL>
+                    <a:lnR w="12700" cap="flat" cmpd="sng" algn="ctr">
+                      <a:solidFill>
+                        <a:srgbClr val="000000"/>
+                      </a:solidFill>
+                      <a:prstDash val="solid"/>
+                      <a:round/>
+                      <a:headEnd type="none" w="med" len="med"/>
+                      <a:tailEnd type="none" w="med" len="med"/>
+                    </a:lnR>
+                    <a:lnT w="12700" cap="flat" cmpd="sng" algn="ctr">
+                      <a:solidFill>
+                        <a:srgbClr val="000000"/>
+                      </a:solidFill>
+                      <a:prstDash val="solid"/>
+                      <a:round/>
+                      <a:headEnd type="none" w="med" len="med"/>
+                      <a:tailEnd type="none" w="med" len="med"/>
+                    </a:lnT>
+                    <a:lnB w="12700" cap="flat" cmpd="sng" algn="ctr">
+                      <a:solidFill>
+                        <a:srgbClr val="000000"/>
+                      </a:solidFill>
+                      <a:prstDash val="solid"/>
+                      <a:round/>
+                      <a:headEnd type="none" w="med" len="med"/>
+                      <a:tailEnd type="none" w="med" len="med"/>
+                    </a:lnB>
+                    <a:noFill/>
+                  </a:tcPr>
+                </a:tc>
+                <a:tc>
+                  <a:txBody>
+                    <a:bodyPr/>
+                    <a:lstStyle/>
+                    <a:p>
+                      <a:pPr marL="0" algn="l" defTabSz="914400" rtl="0" eaLnBrk="1" fontAlgn="ctr" latinLnBrk="0" hangingPunct="1">
+                        <a:buNone/>
+                      </a:pPr>
+                      <a:endParaRPr lang="en-US" altLang="zh-CN" sz="1400" kern="100" dirty="0">
+                        <a:solidFill>
+                          <a:schemeClr val="tx1"/>
+                        </a:solidFill>
+                        <a:effectLst/>
+                        <a:latin typeface="等线" panose="02010600030101010101" pitchFamily="2" charset="-122"/>
+                        <a:ea typeface="等线" panose="02010600030101010101" pitchFamily="2" charset="-122"/>
+                        <a:cs typeface="Times New Roman" panose="02020603050405020304" pitchFamily="18" charset="0"/>
+                      </a:endParaRPr>
+                    </a:p>
+                  </a:txBody>
+                  <a:tcPr marL="114300" marR="6350" marT="6350" marB="0" anchor="ctr">
+                    <a:lnL w="12700" cap="flat" cmpd="sng" algn="ctr">
+                      <a:solidFill>
+                        <a:srgbClr val="000000"/>
+                      </a:solidFill>
+                      <a:prstDash val="solid"/>
+                      <a:round/>
+                      <a:headEnd type="none" w="med" len="med"/>
+                      <a:tailEnd type="none" w="med" len="med"/>
+                    </a:lnL>
+                    <a:lnR w="12700" cap="flat" cmpd="sng" algn="ctr">
+                      <a:solidFill>
+                        <a:srgbClr val="000000"/>
+                      </a:solidFill>
+                      <a:prstDash val="solid"/>
+                      <a:round/>
+                      <a:headEnd type="none" w="med" len="med"/>
+                      <a:tailEnd type="none" w="med" len="med"/>
+                    </a:lnR>
+                    <a:lnT w="12700" cap="flat" cmpd="sng" algn="ctr">
+                      <a:solidFill>
+                        <a:srgbClr val="000000"/>
+                      </a:solidFill>
+                      <a:prstDash val="solid"/>
+                      <a:round/>
+                      <a:headEnd type="none" w="med" len="med"/>
+                      <a:tailEnd type="none" w="med" len="med"/>
+                    </a:lnT>
+                    <a:lnB w="12700" cap="flat" cmpd="sng" algn="ctr">
+                      <a:solidFill>
+                        <a:srgbClr val="000000"/>
+                      </a:solidFill>
+                      <a:prstDash val="solid"/>
+                      <a:round/>
+                      <a:headEnd type="none" w="med" len="med"/>
+                      <a:tailEnd type="none" w="med" len="med"/>
+                    </a:lnB>
+                    <a:noFill/>
+                  </a:tcPr>
+                </a:tc>
+                <a:tc>
+                  <a:txBody>
+                    <a:bodyPr/>
+                    <a:lstStyle/>
+                    <a:p>
+                      <a:pPr marL="0" algn="l" defTabSz="914400" rtl="0" eaLnBrk="1" fontAlgn="ctr" latinLnBrk="0" hangingPunct="1">
+                        <a:buNone/>
+                      </a:pPr>
+                      <a:endParaRPr lang="en-US" altLang="zh-CN" sz="1400" kern="100" dirty="0">
+                        <a:solidFill>
+                          <a:schemeClr val="tx1"/>
+                        </a:solidFill>
+                        <a:effectLst/>
+                        <a:latin typeface="等线" panose="02010600030101010101" pitchFamily="2" charset="-122"/>
+                        <a:ea typeface="等线" panose="02010600030101010101" pitchFamily="2" charset="-122"/>
+                        <a:cs typeface="Times New Roman" panose="02020603050405020304" pitchFamily="18" charset="0"/>
+                      </a:endParaRPr>
+                    </a:p>
+                  </a:txBody>
+                  <a:tcPr marL="114300" marR="6350" marT="6350" marB="0" anchor="ctr">
+                    <a:lnL w="12700" cap="flat" cmpd="sng" algn="ctr">
+                      <a:solidFill>
+                        <a:srgbClr val="000000"/>
+                      </a:solidFill>
+                      <a:prstDash val="solid"/>
+                      <a:round/>
+                      <a:headEnd type="none" w="med" len="med"/>
+                      <a:tailEnd type="none" w="med" len="med"/>
+                    </a:lnL>
+                    <a:lnR w="12700" cap="flat" cmpd="sng" algn="ctr">
+                      <a:solidFill>
+                        <a:srgbClr val="000000"/>
+                      </a:solidFill>
+                      <a:prstDash val="solid"/>
+                      <a:round/>
+                      <a:headEnd type="none" w="med" len="med"/>
+                      <a:tailEnd type="none" w="med" len="med"/>
+                    </a:lnR>
+                    <a:lnT w="12700" cap="flat" cmpd="sng" algn="ctr">
+                      <a:solidFill>
+                        <a:srgbClr val="000000"/>
+                      </a:solidFill>
+                      <a:prstDash val="solid"/>
+                      <a:round/>
+                      <a:headEnd type="none" w="med" len="med"/>
+                      <a:tailEnd type="none" w="med" len="med"/>
+                    </a:lnT>
+                    <a:lnB w="12700" cap="flat" cmpd="sng" algn="ctr">
+                      <a:solidFill>
+                        <a:srgbClr val="000000"/>
+                      </a:solidFill>
+                      <a:prstDash val="solid"/>
+                      <a:round/>
+                      <a:headEnd type="none" w="med" len="med"/>
+                      <a:tailEnd type="none" w="med" len="med"/>
+                    </a:lnB>
+                    <a:noFill/>
+                  </a:tcPr>
+                </a:tc>
+                <a:tc>
+                  <a:txBody>
+                    <a:bodyPr/>
+                    <a:lstStyle/>
+                    <a:p>
+                      <a:pPr marL="0" algn="l" defTabSz="914400" rtl="0" eaLnBrk="1" fontAlgn="ctr" latinLnBrk="0" hangingPunct="1">
+                        <a:buNone/>
+                      </a:pPr>
+                      <a:endParaRPr lang="en-US" altLang="zh-CN" sz="1400" kern="100" dirty="0">
+                        <a:solidFill>
+                          <a:schemeClr val="tx1"/>
+                        </a:solidFill>
+                        <a:effectLst/>
+                        <a:latin typeface="等线" panose="02010600030101010101" pitchFamily="2" charset="-122"/>
+                        <a:ea typeface="等线" panose="02010600030101010101" pitchFamily="2" charset="-122"/>
+                        <a:cs typeface="Times New Roman" panose="02020603050405020304" pitchFamily="18" charset="0"/>
+                      </a:endParaRPr>
+                    </a:p>
+                  </a:txBody>
+                  <a:tcPr marL="114300" marR="6350" marT="6350" marB="0" anchor="ctr">
+                    <a:lnL w="12700" cap="flat" cmpd="sng" algn="ctr">
+                      <a:solidFill>
+                        <a:srgbClr val="000000"/>
+                      </a:solidFill>
+                      <a:prstDash val="solid"/>
+                      <a:round/>
+                      <a:headEnd type="none" w="med" len="med"/>
+                      <a:tailEnd type="none" w="med" len="med"/>
+                    </a:lnL>
+                    <a:lnR w="12700" cap="flat" cmpd="sng" algn="ctr">
+                      <a:solidFill>
+                        <a:srgbClr val="000000"/>
+                      </a:solidFill>
+                      <a:prstDash val="solid"/>
+                      <a:round/>
+                      <a:headEnd type="none" w="med" len="med"/>
+                      <a:tailEnd type="none" w="med" len="med"/>
+                    </a:lnR>
+                    <a:lnT w="12700" cap="flat" cmpd="sng" algn="ctr">
+                      <a:solidFill>
+                        <a:srgbClr val="000000"/>
+                      </a:solidFill>
+                      <a:prstDash val="solid"/>
+                      <a:round/>
+                      <a:headEnd type="none" w="med" len="med"/>
+                      <a:tailEnd type="none" w="med" len="med"/>
+                    </a:lnT>
+                    <a:lnB w="12700" cap="flat" cmpd="sng" algn="ctr">
+                      <a:solidFill>
+                        <a:srgbClr val="000000"/>
+                      </a:solidFill>
+                      <a:prstDash val="solid"/>
+                      <a:round/>
+                      <a:headEnd type="none" w="med" len="med"/>
+                      <a:tailEnd type="none" w="med" len="med"/>
+                    </a:lnB>
+                    <a:noFill/>
+                  </a:tcPr>
+                </a:tc>
+                <a:tc>
+                  <a:txBody>
+                    <a:bodyPr/>
+                    <a:lstStyle/>
+                    <a:p>
+                      <a:pPr marL="0" algn="l" defTabSz="914400" rtl="0" eaLnBrk="1" fontAlgn="ctr" latinLnBrk="0" hangingPunct="1">
+                        <a:buNone/>
+                      </a:pPr>
+                      <a:endParaRPr lang="en-US" altLang="zh-CN" sz="1400" kern="100" dirty="0">
+                        <a:solidFill>
+                          <a:schemeClr val="tx1"/>
+                        </a:solidFill>
+                        <a:effectLst/>
+                        <a:latin typeface="等线" panose="02010600030101010101" pitchFamily="2" charset="-122"/>
+                        <a:ea typeface="等线" panose="02010600030101010101" pitchFamily="2" charset="-122"/>
+                        <a:cs typeface="Times New Roman" panose="02020603050405020304" pitchFamily="18" charset="0"/>
+                      </a:endParaRPr>
+                    </a:p>
+                  </a:txBody>
+                  <a:tcPr marL="114300" marR="6350" marT="6350" marB="0" anchor="ctr">
+                    <a:lnL w="12700" cap="flat" cmpd="sng" algn="ctr">
+                      <a:solidFill>
+                        <a:srgbClr val="000000"/>
+                      </a:solidFill>
+                      <a:prstDash val="solid"/>
+                      <a:round/>
+                      <a:headEnd type="none" w="med" len="med"/>
+                      <a:tailEnd type="none" w="med" len="med"/>
+                    </a:lnL>
+                    <a:lnR w="12700" cap="flat" cmpd="sng" algn="ctr">
+                      <a:solidFill>
+                        <a:srgbClr val="000000"/>
+                      </a:solidFill>
+                      <a:prstDash val="solid"/>
+                      <a:round/>
+                      <a:headEnd type="none" w="med" len="med"/>
+                      <a:tailEnd type="none" w="med" len="med"/>
+                    </a:lnR>
+                    <a:lnT w="12700" cap="flat" cmpd="sng" algn="ctr">
+                      <a:solidFill>
+                        <a:srgbClr val="000000"/>
+                      </a:solidFill>
+                      <a:prstDash val="solid"/>
+                      <a:round/>
+                      <a:headEnd type="none" w="med" len="med"/>
+                      <a:tailEnd type="none" w="med" len="med"/>
+                    </a:lnT>
+                    <a:lnB w="12700" cap="flat" cmpd="sng" algn="ctr">
+                      <a:solidFill>
+                        <a:srgbClr val="000000"/>
+                      </a:solidFill>
+                      <a:prstDash val="solid"/>
+                      <a:round/>
+                      <a:headEnd type="none" w="med" len="med"/>
+                      <a:tailEnd type="none" w="med" len="med"/>
+                    </a:lnB>
+                    <a:noFill/>
+                  </a:tcPr>
+                </a:tc>
+                <a:extLst>
+                  <a:ext uri="{0D108BD9-81ED-4DB2-BD59-A6C34878D82A}">
+                    <a16:rowId xmlns:a16="http://schemas.microsoft.com/office/drawing/2014/main" val="1069347528"/>
+                  </a:ext>
+                </a:extLst>
+              </a:tr>
+            </a:tbl>
+          </a:graphicData>
+        </a:graphic>
+      </p:graphicFrame>
+      <p:sp>
+        <p:nvSpPr>
+          <p:cNvPr id="11" name="矩形 10">
+            <a:extLst>
+              <a:ext uri="{FF2B5EF4-FFF2-40B4-BE49-F238E27FC236}">
+                <a16:creationId xmlns:a16="http://schemas.microsoft.com/office/drawing/2014/main" id="{6F1452B6-3A22-659B-BAB4-8C22D2E7FBCE}"/>
+              </a:ext>
+            </a:extLst>
+          </p:cNvPr>
+          <p:cNvSpPr/>
+          <p:nvPr/>
+        </p:nvSpPr>
+        <p:spPr>
+          <a:xfrm>
+            <a:off x="1199713" y="2660206"/>
+            <a:ext cx="1029137" cy="367988"/>
+          </a:xfrm>
+          <a:prstGeom prst="rect">
+            <a:avLst/>
+          </a:prstGeom>
+          <a:solidFill>
+            <a:schemeClr val="tx2"/>
+          </a:solidFill>
+          <a:ln>
+            <a:noFill/>
+          </a:ln>
+        </p:spPr>
+        <p:style>
+          <a:lnRef idx="2">
+            <a:schemeClr val="accent1">
+              <a:shade val="50000"/>
+            </a:schemeClr>
+          </a:lnRef>
+          <a:fillRef idx="1">
+            <a:schemeClr val="accent1"/>
+          </a:fillRef>
+          <a:effectRef idx="0">
+            <a:schemeClr val="accent1"/>
+          </a:effectRef>
+          <a:fontRef idx="minor">
+            <a:schemeClr val="lt1"/>
+          </a:fontRef>
+        </p:style>
+        <p:txBody>
+          <a:bodyPr rtlCol="0" anchor="ctr"/>
+          <a:lstStyle/>
+          <a:p>
+            <a:pPr algn="ctr"/>
+            <a:r>
+              <a:rPr lang="zh-CN" altLang="en-US" sz="1600" b="1" dirty="0">
+                <a:latin typeface="等线" panose="02010600030101010101" pitchFamily="2" charset="-122"/>
+                <a:ea typeface="等线" panose="02010600030101010101" pitchFamily="2" charset="-122"/>
+              </a:rPr>
+              <a:t>二分类</a:t>
+            </a:r>
+          </a:p>
+        </p:txBody>
+      </p:sp>
+      <p:sp>
+        <p:nvSpPr>
+          <p:cNvPr id="12" name="矩形 11">
+            <a:extLst>
+              <a:ext uri="{FF2B5EF4-FFF2-40B4-BE49-F238E27FC236}">
+                <a16:creationId xmlns:a16="http://schemas.microsoft.com/office/drawing/2014/main" id="{4F779BA6-9DE8-7C6C-D096-B4C0A45E496D}"/>
+              </a:ext>
+            </a:extLst>
+          </p:cNvPr>
+          <p:cNvSpPr/>
+          <p:nvPr/>
+        </p:nvSpPr>
+        <p:spPr>
+          <a:xfrm>
+            <a:off x="1199712" y="4353559"/>
+            <a:ext cx="1029137" cy="367988"/>
+          </a:xfrm>
+          <a:prstGeom prst="rect">
+            <a:avLst/>
+          </a:prstGeom>
+          <a:solidFill>
+            <a:schemeClr val="tx2"/>
+          </a:solidFill>
+          <a:ln>
+            <a:noFill/>
+          </a:ln>
+        </p:spPr>
+        <p:style>
+          <a:lnRef idx="2">
+            <a:schemeClr val="accent1">
+              <a:shade val="50000"/>
+            </a:schemeClr>
+          </a:lnRef>
+          <a:fillRef idx="1">
+            <a:schemeClr val="accent1"/>
+          </a:fillRef>
+          <a:effectRef idx="0">
+            <a:schemeClr val="accent1"/>
+          </a:effectRef>
+          <a:fontRef idx="minor">
+            <a:schemeClr val="lt1"/>
+          </a:fontRef>
+        </p:style>
+        <p:txBody>
+          <a:bodyPr rtlCol="0" anchor="ctr"/>
+          <a:lstStyle/>
+          <a:p>
+            <a:pPr algn="ctr"/>
+            <a:r>
+              <a:rPr lang="zh-CN" altLang="en-US" sz="1600" b="1" dirty="0">
+                <a:latin typeface="等线" panose="02010600030101010101" pitchFamily="2" charset="-122"/>
+                <a:ea typeface="等线" panose="02010600030101010101" pitchFamily="2" charset="-122"/>
+              </a:rPr>
+              <a:t>回归</a:t>
+            </a:r>
           </a:p>
         </p:txBody>
       </p:sp>
     </p:spTree>
-    <p:custDataLst>
-      <p:tags r:id="rId1"/>
-    </p:custDataLst>
     <p:extLst>
       <p:ext uri="{BB962C8B-B14F-4D97-AF65-F5344CB8AC3E}">
-        <p14:creationId xmlns:p14="http://schemas.microsoft.com/office/powerpoint/2010/main" val="1501994932"/>
+        <p14:creationId xmlns:p14="http://schemas.microsoft.com/office/powerpoint/2010/main" val="1826473935"/>
       </p:ext>
     </p:extLst>
   </p:cSld>
@@ -18626,6 +24603,700 @@
       </p:transition>
     </mc:Choice>
     <mc:Fallback xmlns="">
+      <p:transition spd="med">
+        <p:fade/>
+      </p:transition>
+    </mc:Fallback>
+  </mc:AlternateContent>
+</p:sld>
+</file>
+
+<file path=ppt/slides/slide26.xml><?xml version="1.0" encoding="utf-8"?>
+<p:sld xmlns:a="http://schemas.openxmlformats.org/drawingml/2006/main" xmlns:r="http://schemas.openxmlformats.org/officeDocument/2006/relationships" xmlns:p="http://schemas.openxmlformats.org/presentationml/2006/main">
+  <p:cSld>
+    <p:spTree>
+      <p:nvGrpSpPr>
+        <p:cNvPr id="1" name="">
+          <a:extLst>
+            <a:ext uri="{FF2B5EF4-FFF2-40B4-BE49-F238E27FC236}">
+              <a16:creationId xmlns:a16="http://schemas.microsoft.com/office/drawing/2014/main" id="{50510B67-167D-D557-D8E4-42E71E4C974A}"/>
+            </a:ext>
+          </a:extLst>
+        </p:cNvPr>
+        <p:cNvGrpSpPr/>
+        <p:nvPr/>
+      </p:nvGrpSpPr>
+      <p:grpSpPr>
+        <a:xfrm>
+          <a:off x="0" y="0"/>
+          <a:ext cx="0" cy="0"/>
+          <a:chOff x="0" y="0"/>
+          <a:chExt cx="0" cy="0"/>
+        </a:xfrm>
+      </p:grpSpPr>
+      <p:sp>
+        <p:nvSpPr>
+          <p:cNvPr id="5" name="文本框 4">
+            <a:extLst>
+              <a:ext uri="{FF2B5EF4-FFF2-40B4-BE49-F238E27FC236}">
+                <a16:creationId xmlns:a16="http://schemas.microsoft.com/office/drawing/2014/main" id="{736D6F6B-1A11-6046-9B6D-EEFF7C386BD3}"/>
+              </a:ext>
+            </a:extLst>
+          </p:cNvPr>
+          <p:cNvSpPr txBox="1"/>
+          <p:nvPr/>
+        </p:nvSpPr>
+        <p:spPr>
+          <a:xfrm>
+            <a:off x="6747553" y="2644170"/>
+            <a:ext cx="5571162" cy="1815882"/>
+          </a:xfrm>
+          <a:prstGeom prst="rect">
+            <a:avLst/>
+          </a:prstGeom>
+          <a:noFill/>
+        </p:spPr>
+        <p:txBody>
+          <a:bodyPr wrap="square">
+            <a:spAutoFit/>
+          </a:bodyPr>
+          <a:lstStyle/>
+          <a:p>
+            <a:r>
+              <a:rPr lang="zh-CN" altLang="en-US" sz="1600" dirty="0"/>
+              <a:t> </a:t>
+            </a:r>
+            <a:r>
+              <a:rPr lang="en-US" altLang="zh-CN" sz="1600" dirty="0"/>
+              <a:t>   Bin  Count  </a:t>
+            </a:r>
+            <a:r>
+              <a:rPr lang="en-US" altLang="zh-CN" sz="1600" dirty="0" err="1"/>
+              <a:t>Count</a:t>
+            </a:r>
+            <a:r>
+              <a:rPr lang="en-US" altLang="zh-CN" sz="1600" dirty="0"/>
+              <a:t> (%)  Event rate         EEF</a:t>
+            </a:r>
+          </a:p>
+          <a:p>
+            <a:r>
+              <a:rPr lang="en-US" altLang="zh-CN" sz="1600" dirty="0"/>
+              <a:t>0  (-inf, 0.60)     29   0.071782    0.068966  300.897899</a:t>
+            </a:r>
+          </a:p>
+          <a:p>
+            <a:r>
+              <a:rPr lang="en-US" altLang="zh-CN" sz="1600" dirty="0"/>
+              <a:t>1  [0.60, 0.83)    150   0.371287    0.113333  300.651211</a:t>
+            </a:r>
+          </a:p>
+          <a:p>
+            <a:r>
+              <a:rPr lang="en-US" altLang="zh-CN" sz="1600" dirty="0"/>
+              <a:t>2  [0.83, 0.87)     22   0.054455    0.136364  318.850657</a:t>
+            </a:r>
+          </a:p>
+          <a:p>
+            <a:r>
+              <a:rPr lang="en-US" altLang="zh-CN" sz="1600" dirty="0"/>
+              <a:t>3  [0.87, 1.03)     84   0.207921    0.214286  318.844291</a:t>
+            </a:r>
+          </a:p>
+          <a:p>
+            <a:r>
+              <a:rPr lang="en-US" altLang="zh-CN" sz="1600" dirty="0"/>
+              <a:t>4  [1.03, 1.30)     88   0.217822    0.250000  338.249461</a:t>
+            </a:r>
+          </a:p>
+          <a:p>
+            <a:r>
+              <a:rPr lang="en-US" altLang="zh-CN" sz="1600" dirty="0"/>
+              <a:t>5   [1.30, inf)     31   0.076733    0.612903  367.296961</a:t>
+            </a:r>
+            <a:endParaRPr lang="zh-CN" altLang="en-US" sz="1600" dirty="0"/>
+          </a:p>
+        </p:txBody>
+      </p:sp>
+      <p:sp>
+        <p:nvSpPr>
+          <p:cNvPr id="6" name="矩形 5">
+            <a:extLst>
+              <a:ext uri="{FF2B5EF4-FFF2-40B4-BE49-F238E27FC236}">
+                <a16:creationId xmlns:a16="http://schemas.microsoft.com/office/drawing/2014/main" id="{5185FB7B-4C75-B6F3-32FD-082B779F1F52}"/>
+              </a:ext>
+            </a:extLst>
+          </p:cNvPr>
+          <p:cNvSpPr/>
+          <p:nvPr/>
+        </p:nvSpPr>
+        <p:spPr>
+          <a:xfrm>
+            <a:off x="8543806" y="787476"/>
+            <a:ext cx="3102795" cy="732470"/>
+          </a:xfrm>
+          <a:prstGeom prst="rect">
+            <a:avLst/>
+          </a:prstGeom>
+          <a:solidFill>
+            <a:schemeClr val="accent1"/>
+          </a:solidFill>
+          <a:ln>
+            <a:noFill/>
+          </a:ln>
+        </p:spPr>
+        <p:style>
+          <a:lnRef idx="2">
+            <a:schemeClr val="accent1">
+              <a:shade val="50000"/>
+            </a:schemeClr>
+          </a:lnRef>
+          <a:fillRef idx="1">
+            <a:schemeClr val="accent1"/>
+          </a:fillRef>
+          <a:effectRef idx="0">
+            <a:schemeClr val="accent1"/>
+          </a:effectRef>
+          <a:fontRef idx="minor">
+            <a:schemeClr val="lt1"/>
+          </a:fontRef>
+        </p:style>
+        <p:txBody>
+          <a:bodyPr rtlCol="0" anchor="ctr"/>
+          <a:lstStyle/>
+          <a:p>
+            <a:pPr algn="ctr"/>
+            <a:r>
+              <a:rPr lang="zh-CN" altLang="en-US" dirty="0"/>
+              <a:t>冬季</a:t>
+            </a:r>
+          </a:p>
+        </p:txBody>
+      </p:sp>
+      <p:pic>
+        <p:nvPicPr>
+          <p:cNvPr id="4" name="图片 3">
+            <a:extLst>
+              <a:ext uri="{FF2B5EF4-FFF2-40B4-BE49-F238E27FC236}">
+                <a16:creationId xmlns:a16="http://schemas.microsoft.com/office/drawing/2014/main" id="{0639BCBF-950E-0373-D3C8-B3C40AD60812}"/>
+              </a:ext>
+            </a:extLst>
+          </p:cNvPr>
+          <p:cNvPicPr>
+            <a:picLocks noChangeAspect="1"/>
+          </p:cNvPicPr>
+          <p:nvPr/>
+        </p:nvPicPr>
+        <p:blipFill>
+          <a:blip r:embed="rId2"/>
+          <a:stretch>
+            <a:fillRect/>
+          </a:stretch>
+        </p:blipFill>
+        <p:spPr>
+          <a:xfrm>
+            <a:off x="816978" y="1230085"/>
+            <a:ext cx="5431422" cy="4066494"/>
+          </a:xfrm>
+          <a:prstGeom prst="rect">
+            <a:avLst/>
+          </a:prstGeom>
+        </p:spPr>
+      </p:pic>
+    </p:spTree>
+    <p:extLst>
+      <p:ext uri="{BB962C8B-B14F-4D97-AF65-F5344CB8AC3E}">
+        <p14:creationId xmlns:p14="http://schemas.microsoft.com/office/powerpoint/2010/main" val="2454574603"/>
+      </p:ext>
+    </p:extLst>
+  </p:cSld>
+  <p:clrMapOvr>
+    <a:masterClrMapping/>
+  </p:clrMapOvr>
+  <mc:AlternateContent xmlns:mc="http://schemas.openxmlformats.org/markup-compatibility/2006" xmlns:p14="http://schemas.microsoft.com/office/powerpoint/2010/main">
+    <mc:Choice Requires="p14">
+      <p:transition spd="med" p14:dur="700">
+        <p:fade/>
+      </p:transition>
+    </mc:Choice>
+    <mc:Fallback xmlns="">
+      <p:transition spd="med">
+        <p:fade/>
+      </p:transition>
+    </mc:Fallback>
+  </mc:AlternateContent>
+</p:sld>
+</file>
+
+<file path=ppt/slides/slide27.xml><?xml version="1.0" encoding="utf-8"?>
+<p:sld xmlns:a="http://schemas.openxmlformats.org/drawingml/2006/main" xmlns:r="http://schemas.openxmlformats.org/officeDocument/2006/relationships" xmlns:p="http://schemas.openxmlformats.org/presentationml/2006/main">
+  <p:cSld>
+    <p:spTree>
+      <p:nvGrpSpPr>
+        <p:cNvPr id="1" name=""/>
+        <p:cNvGrpSpPr/>
+        <p:nvPr/>
+      </p:nvGrpSpPr>
+      <p:grpSpPr>
+        <a:xfrm>
+          <a:off x="0" y="0"/>
+          <a:ext cx="0" cy="0"/>
+          <a:chOff x="0" y="0"/>
+          <a:chExt cx="0" cy="0"/>
+        </a:xfrm>
+      </p:grpSpPr>
+      <p:pic>
+        <p:nvPicPr>
+          <p:cNvPr id="3" name="图片 2">
+            <a:extLst>
+              <a:ext uri="{FF2B5EF4-FFF2-40B4-BE49-F238E27FC236}">
+                <a16:creationId xmlns:a16="http://schemas.microsoft.com/office/drawing/2014/main" id="{196F9A8C-154F-F0A1-B1B8-0A9D8E08700B}"/>
+              </a:ext>
+            </a:extLst>
+          </p:cNvPr>
+          <p:cNvPicPr>
+            <a:picLocks noChangeAspect="1"/>
+          </p:cNvPicPr>
+          <p:nvPr/>
+        </p:nvPicPr>
+        <p:blipFill>
+          <a:blip r:embed="rId2"/>
+          <a:stretch>
+            <a:fillRect/>
+          </a:stretch>
+        </p:blipFill>
+        <p:spPr>
+          <a:xfrm>
+            <a:off x="695325" y="1890065"/>
+            <a:ext cx="5329237" cy="3929709"/>
+          </a:xfrm>
+          <a:prstGeom prst="rect">
+            <a:avLst/>
+          </a:prstGeom>
+        </p:spPr>
+      </p:pic>
+      <p:sp>
+        <p:nvSpPr>
+          <p:cNvPr id="5" name="文本框 4">
+            <a:extLst>
+              <a:ext uri="{FF2B5EF4-FFF2-40B4-BE49-F238E27FC236}">
+                <a16:creationId xmlns:a16="http://schemas.microsoft.com/office/drawing/2014/main" id="{10795AE2-A649-BAA7-C79C-CC35F5E4357B}"/>
+              </a:ext>
+            </a:extLst>
+          </p:cNvPr>
+          <p:cNvSpPr txBox="1"/>
+          <p:nvPr/>
+        </p:nvSpPr>
+        <p:spPr>
+          <a:xfrm>
+            <a:off x="6448426" y="2820502"/>
+            <a:ext cx="5181600" cy="1815882"/>
+          </a:xfrm>
+          <a:prstGeom prst="rect">
+            <a:avLst/>
+          </a:prstGeom>
+          <a:noFill/>
+        </p:spPr>
+        <p:txBody>
+          <a:bodyPr wrap="square">
+            <a:spAutoFit/>
+          </a:bodyPr>
+          <a:lstStyle/>
+          <a:p>
+            <a:r>
+              <a:rPr lang="zh-CN" altLang="en-US" sz="1600" dirty="0"/>
+              <a:t> Bin  Count  Count (%)  Event rate         EEF</a:t>
+            </a:r>
+          </a:p>
+          <a:p>
+            <a:r>
+              <a:rPr lang="zh-CN" altLang="en-US" sz="1600" dirty="0"/>
+              <a:t>0  (-inf, 0.60)     58   0.143564    0.017241  301.347572</a:t>
+            </a:r>
+          </a:p>
+          <a:p>
+            <a:r>
+              <a:rPr lang="zh-CN" altLang="en-US" sz="1600" dirty="0"/>
+              <a:t>1  [0.60, 0.85)    116   0.287129    0.129310  301.177435</a:t>
+            </a:r>
+          </a:p>
+          <a:p>
+            <a:r>
+              <a:rPr lang="zh-CN" altLang="en-US" sz="1600" dirty="0"/>
+              <a:t>2  [0.85, 1.00)     87   0.215347    0.275862  328.363528</a:t>
+            </a:r>
+          </a:p>
+          <a:p>
+            <a:r>
+              <a:rPr lang="zh-CN" altLang="en-US" sz="1600" dirty="0"/>
+              <a:t>3  [1.00, 1.08)     43   0.106436    0.465116  346.770853</a:t>
+            </a:r>
+          </a:p>
+          <a:p>
+            <a:r>
+              <a:rPr lang="zh-CN" altLang="en-US" sz="1600" dirty="0"/>
+              <a:t>4  [1.08, 1.16)     39   0.096535    0.307692  322.649837</a:t>
+            </a:r>
+          </a:p>
+          <a:p>
+            <a:r>
+              <a:rPr lang="zh-CN" altLang="en-US" sz="1600" dirty="0"/>
+              <a:t>5   [1.16, inf)     61   0.150990    0.147541  332.732053</a:t>
+            </a:r>
+          </a:p>
+        </p:txBody>
+      </p:sp>
+    </p:spTree>
+    <p:extLst>
+      <p:ext uri="{BB962C8B-B14F-4D97-AF65-F5344CB8AC3E}">
+        <p14:creationId xmlns:p14="http://schemas.microsoft.com/office/powerpoint/2010/main" val="501996300"/>
+      </p:ext>
+    </p:extLst>
+  </p:cSld>
+  <p:clrMapOvr>
+    <a:masterClrMapping/>
+  </p:clrMapOvr>
+  <mc:AlternateContent xmlns:mc="http://schemas.openxmlformats.org/markup-compatibility/2006" xmlns:p14="http://schemas.microsoft.com/office/powerpoint/2010/main">
+    <mc:Choice Requires="p14">
+      <p:transition spd="med" p14:dur="700">
+        <p:fade/>
+      </p:transition>
+    </mc:Choice>
+    <mc:Fallback xmlns="">
+      <p:transition spd="med">
+        <p:fade/>
+      </p:transition>
+    </mc:Fallback>
+  </mc:AlternateContent>
+</p:sld>
+</file>
+
+<file path=ppt/slides/slide28.xml><?xml version="1.0" encoding="utf-8"?>
+<p:sld xmlns:a="http://schemas.openxmlformats.org/drawingml/2006/main" xmlns:r="http://schemas.openxmlformats.org/officeDocument/2006/relationships" xmlns:p="http://schemas.openxmlformats.org/presentationml/2006/main">
+  <p:cSld>
+    <p:spTree>
+      <p:nvGrpSpPr>
+        <p:cNvPr id="1" name="">
+          <a:extLst>
+            <a:ext uri="{FF2B5EF4-FFF2-40B4-BE49-F238E27FC236}">
+              <a16:creationId xmlns:a16="http://schemas.microsoft.com/office/drawing/2014/main" id="{063975C2-0D80-D735-6513-CEDD90110D16}"/>
+            </a:ext>
+          </a:extLst>
+        </p:cNvPr>
+        <p:cNvGrpSpPr/>
+        <p:nvPr/>
+      </p:nvGrpSpPr>
+      <p:grpSpPr>
+        <a:xfrm>
+          <a:off x="0" y="0"/>
+          <a:ext cx="0" cy="0"/>
+          <a:chOff x="0" y="0"/>
+          <a:chExt cx="0" cy="0"/>
+        </a:xfrm>
+      </p:grpSpPr>
+      <p:sp>
+        <p:nvSpPr>
+          <p:cNvPr id="5" name="文本框 4">
+            <a:extLst>
+              <a:ext uri="{FF2B5EF4-FFF2-40B4-BE49-F238E27FC236}">
+                <a16:creationId xmlns:a16="http://schemas.microsoft.com/office/drawing/2014/main" id="{1936D3BC-5B8E-260D-777C-8CEA18D64C23}"/>
+              </a:ext>
+            </a:extLst>
+          </p:cNvPr>
+          <p:cNvSpPr txBox="1"/>
+          <p:nvPr/>
+        </p:nvSpPr>
+        <p:spPr>
+          <a:xfrm>
+            <a:off x="6343651" y="2220427"/>
+            <a:ext cx="5181600" cy="2554545"/>
+          </a:xfrm>
+          <a:prstGeom prst="rect">
+            <a:avLst/>
+          </a:prstGeom>
+          <a:noFill/>
+        </p:spPr>
+        <p:txBody>
+          <a:bodyPr wrap="square">
+            <a:spAutoFit/>
+          </a:bodyPr>
+          <a:lstStyle/>
+          <a:p>
+            <a:r>
+              <a:rPr lang="en-US" altLang="zh-CN" sz="1600" dirty="0"/>
+              <a:t> Bin  Count  </a:t>
+            </a:r>
+            <a:r>
+              <a:rPr lang="en-US" altLang="zh-CN" sz="1600" dirty="0" err="1"/>
+              <a:t>Count</a:t>
+            </a:r>
+            <a:r>
+              <a:rPr lang="en-US" altLang="zh-CN" sz="1600" dirty="0"/>
+              <a:t> (%)  Event rate         EEF</a:t>
+            </a:r>
+          </a:p>
+          <a:p>
+            <a:r>
+              <a:rPr lang="en-US" altLang="zh-CN" sz="1600" dirty="0"/>
+              <a:t>0   (-inf, 0.62)     72   0.178218    0.041667  300.426641</a:t>
+            </a:r>
+          </a:p>
+          <a:p>
+            <a:r>
+              <a:rPr lang="en-US" altLang="zh-CN" sz="1600" dirty="0"/>
+              <a:t>1   [0.62, 0.66)     23   0.056931    0.086957  315.157494</a:t>
+            </a:r>
+          </a:p>
+          <a:p>
+            <a:r>
+              <a:rPr lang="en-US" altLang="zh-CN" sz="1600" dirty="0"/>
+              <a:t>2   [0.66, 0.77)     51   0.126238    0.117647  311.057910</a:t>
+            </a:r>
+          </a:p>
+          <a:p>
+            <a:r>
+              <a:rPr lang="en-US" altLang="zh-CN" sz="1600" dirty="0"/>
+              <a:t>3   [0.77, 0.86)     56   0.138614    0.196429  305.471945</a:t>
+            </a:r>
+          </a:p>
+          <a:p>
+            <a:r>
+              <a:rPr lang="en-US" altLang="zh-CN" sz="1600" dirty="0"/>
+              <a:t>4   [0.86, 1.02)     90   0.222772    0.322222  323.630971</a:t>
+            </a:r>
+          </a:p>
+          <a:p>
+            <a:r>
+              <a:rPr lang="en-US" altLang="zh-CN" sz="1600" dirty="0"/>
+              <a:t>5   [1.02, 1.08)     29   0.071782    0.448276  340.087512</a:t>
+            </a:r>
+          </a:p>
+          <a:p>
+            <a:r>
+              <a:rPr lang="en-US" altLang="zh-CN" sz="1600" dirty="0"/>
+              <a:t>6   [1.08, 1.18)     30   0.074257    0.333333  347.399867</a:t>
+            </a:r>
+          </a:p>
+          <a:p>
+            <a:r>
+              <a:rPr lang="en-US" altLang="zh-CN" sz="1600" dirty="0"/>
+              <a:t>7   [1.18, 1.34)     30   0.074257    0.200000  334.152584</a:t>
+            </a:r>
+          </a:p>
+          <a:p>
+            <a:r>
+              <a:rPr lang="en-US" altLang="zh-CN" sz="1600" dirty="0"/>
+              <a:t>8    [1.34, inf)     23   0.056931    0.043478  325.560536</a:t>
+            </a:r>
+            <a:endParaRPr lang="zh-CN" altLang="en-US" sz="1600" dirty="0"/>
+          </a:p>
+        </p:txBody>
+      </p:sp>
+      <p:pic>
+        <p:nvPicPr>
+          <p:cNvPr id="4" name="图片 3">
+            <a:extLst>
+              <a:ext uri="{FF2B5EF4-FFF2-40B4-BE49-F238E27FC236}">
+                <a16:creationId xmlns:a16="http://schemas.microsoft.com/office/drawing/2014/main" id="{7E7642BF-0A22-F75A-4E6B-057675A6F7D0}"/>
+              </a:ext>
+            </a:extLst>
+          </p:cNvPr>
+          <p:cNvPicPr>
+            <a:picLocks noChangeAspect="1"/>
+          </p:cNvPicPr>
+          <p:nvPr/>
+        </p:nvPicPr>
+        <p:blipFill>
+          <a:blip r:embed="rId2"/>
+          <a:stretch>
+            <a:fillRect/>
+          </a:stretch>
+        </p:blipFill>
+        <p:spPr>
+          <a:xfrm>
+            <a:off x="832416" y="1533412"/>
+            <a:ext cx="4911159" cy="3642714"/>
+          </a:xfrm>
+          <a:prstGeom prst="rect">
+            <a:avLst/>
+          </a:prstGeom>
+        </p:spPr>
+      </p:pic>
+    </p:spTree>
+    <p:extLst>
+      <p:ext uri="{BB962C8B-B14F-4D97-AF65-F5344CB8AC3E}">
+        <p14:creationId xmlns:p14="http://schemas.microsoft.com/office/powerpoint/2010/main" val="3365990512"/>
+      </p:ext>
+    </p:extLst>
+  </p:cSld>
+  <p:clrMapOvr>
+    <a:masterClrMapping/>
+  </p:clrMapOvr>
+  <mc:AlternateContent xmlns:mc="http://schemas.openxmlformats.org/markup-compatibility/2006">
+    <mc:Choice xmlns:p14="http://schemas.microsoft.com/office/powerpoint/2010/main" Requires="p14">
+      <p:transition spd="med" p14:dur="700">
+        <p:fade/>
+      </p:transition>
+    </mc:Choice>
+    <mc:Fallback>
+      <p:transition spd="med">
+        <p:fade/>
+      </p:transition>
+    </mc:Fallback>
+  </mc:AlternateContent>
+</p:sld>
+</file>
+
+<file path=ppt/slides/slide29.xml><?xml version="1.0" encoding="utf-8"?>
+<p:sld xmlns:a="http://schemas.openxmlformats.org/drawingml/2006/main" xmlns:r="http://schemas.openxmlformats.org/officeDocument/2006/relationships" xmlns:p="http://schemas.openxmlformats.org/presentationml/2006/main">
+  <p:cSld>
+    <p:spTree>
+      <p:nvGrpSpPr>
+        <p:cNvPr id="1" name="">
+          <a:extLst>
+            <a:ext uri="{FF2B5EF4-FFF2-40B4-BE49-F238E27FC236}">
+              <a16:creationId xmlns:a16="http://schemas.microsoft.com/office/drawing/2014/main" id="{6A400878-76C8-A63E-7DAF-8074C98DADFB}"/>
+            </a:ext>
+          </a:extLst>
+        </p:cNvPr>
+        <p:cNvGrpSpPr/>
+        <p:nvPr/>
+      </p:nvGrpSpPr>
+      <p:grpSpPr>
+        <a:xfrm>
+          <a:off x="0" y="0"/>
+          <a:ext cx="0" cy="0"/>
+          <a:chOff x="0" y="0"/>
+          <a:chExt cx="0" cy="0"/>
+        </a:xfrm>
+      </p:grpSpPr>
+      <p:sp>
+        <p:nvSpPr>
+          <p:cNvPr id="5" name="文本框 4">
+            <a:extLst>
+              <a:ext uri="{FF2B5EF4-FFF2-40B4-BE49-F238E27FC236}">
+                <a16:creationId xmlns:a16="http://schemas.microsoft.com/office/drawing/2014/main" id="{179B9332-7049-A425-59DD-F6ADE4CE5017}"/>
+              </a:ext>
+            </a:extLst>
+          </p:cNvPr>
+          <p:cNvSpPr txBox="1"/>
+          <p:nvPr/>
+        </p:nvSpPr>
+        <p:spPr>
+          <a:xfrm>
+            <a:off x="6343651" y="2220427"/>
+            <a:ext cx="5181600" cy="1815882"/>
+          </a:xfrm>
+          <a:prstGeom prst="rect">
+            <a:avLst/>
+          </a:prstGeom>
+          <a:noFill/>
+        </p:spPr>
+        <p:txBody>
+          <a:bodyPr wrap="square">
+            <a:spAutoFit/>
+          </a:bodyPr>
+          <a:lstStyle/>
+          <a:p>
+            <a:r>
+              <a:rPr lang="en-US" altLang="zh-CN" sz="1600" dirty="0"/>
+              <a:t>  Bin  Count  </a:t>
+            </a:r>
+            <a:r>
+              <a:rPr lang="en-US" altLang="zh-CN" sz="1600" dirty="0" err="1"/>
+              <a:t>Count</a:t>
+            </a:r>
+            <a:r>
+              <a:rPr lang="en-US" altLang="zh-CN" sz="1600" dirty="0"/>
+              <a:t> (%)  Event rate         EEF</a:t>
+            </a:r>
+          </a:p>
+          <a:p>
+            <a:r>
+              <a:rPr lang="en-US" altLang="zh-CN" sz="1600" dirty="0"/>
+              <a:t>0  (-inf, 0.51)     74   0.183168    0.175676  303.381895</a:t>
+            </a:r>
+          </a:p>
+          <a:p>
+            <a:r>
+              <a:rPr lang="en-US" altLang="zh-CN" sz="1600" dirty="0"/>
+              <a:t>1  [0.51, 0.62)    124   0.306931    0.096774  306.056388</a:t>
+            </a:r>
+          </a:p>
+          <a:p>
+            <a:r>
+              <a:rPr lang="en-US" altLang="zh-CN" sz="1600" dirty="0"/>
+              <a:t>2  [0.62, 0.64)     31   0.076733    0.032258  309.367064</a:t>
+            </a:r>
+          </a:p>
+          <a:p>
+            <a:r>
+              <a:rPr lang="en-US" altLang="zh-CN" sz="1600" dirty="0"/>
+              <a:t>3  [0.64, 0.68)     36   0.089109    0.166667  316.454138</a:t>
+            </a:r>
+          </a:p>
+          <a:p>
+            <a:r>
+              <a:rPr lang="en-US" altLang="zh-CN" sz="1600" dirty="0"/>
+              <a:t>4  [0.68, 0.74)     57   0.141089    0.263158  328.701584</a:t>
+            </a:r>
+          </a:p>
+          <a:p>
+            <a:r>
+              <a:rPr lang="en-US" altLang="zh-CN" sz="1600" dirty="0"/>
+              <a:t>5   [0.74, inf)     82   0.202970    0.414634  349.433457</a:t>
+            </a:r>
+            <a:endParaRPr lang="zh-CN" altLang="en-US" sz="1600" dirty="0"/>
+          </a:p>
+        </p:txBody>
+      </p:sp>
+      <p:pic>
+        <p:nvPicPr>
+          <p:cNvPr id="3" name="图片 2">
+            <a:extLst>
+              <a:ext uri="{FF2B5EF4-FFF2-40B4-BE49-F238E27FC236}">
+                <a16:creationId xmlns:a16="http://schemas.microsoft.com/office/drawing/2014/main" id="{E451EEEE-575F-050C-E89C-D324A778EC87}"/>
+              </a:ext>
+            </a:extLst>
+          </p:cNvPr>
+          <p:cNvPicPr>
+            <a:picLocks noChangeAspect="1"/>
+          </p:cNvPicPr>
+          <p:nvPr/>
+        </p:nvPicPr>
+        <p:blipFill>
+          <a:blip r:embed="rId2"/>
+          <a:stretch>
+            <a:fillRect/>
+          </a:stretch>
+        </p:blipFill>
+        <p:spPr>
+          <a:xfrm>
+            <a:off x="407035" y="1479307"/>
+            <a:ext cx="5314206" cy="3899385"/>
+          </a:xfrm>
+          <a:prstGeom prst="rect">
+            <a:avLst/>
+          </a:prstGeom>
+        </p:spPr>
+      </p:pic>
+    </p:spTree>
+    <p:extLst>
+      <p:ext uri="{BB962C8B-B14F-4D97-AF65-F5344CB8AC3E}">
+        <p14:creationId xmlns:p14="http://schemas.microsoft.com/office/powerpoint/2010/main" val="3261964731"/>
+      </p:ext>
+    </p:extLst>
+  </p:cSld>
+  <p:clrMapOvr>
+    <a:masterClrMapping/>
+  </p:clrMapOvr>
+  <mc:AlternateContent xmlns:mc="http://schemas.openxmlformats.org/markup-compatibility/2006">
+    <mc:Choice xmlns:p14="http://schemas.microsoft.com/office/powerpoint/2010/main" Requires="p14">
+      <p:transition spd="med" p14:dur="700">
+        <p:fade/>
+      </p:transition>
+    </mc:Choice>
+    <mc:Fallback>
       <p:transition spd="med">
         <p:fade/>
       </p:transition>
@@ -18824,7 +25495,1841 @@
         <p:fade/>
       </p:transition>
     </mc:Choice>
-    <mc:Fallback xmlns="" xmlns:a16="http://schemas.microsoft.com/office/drawing/2014/main">
+    <mc:Fallback xmlns:a16="http://schemas.microsoft.com/office/drawing/2014/main" xmlns="">
+      <p:transition spd="med">
+        <p:fade/>
+      </p:transition>
+    </mc:Fallback>
+  </mc:AlternateContent>
+</p:sld>
+</file>
+
+<file path=ppt/slides/slide30.xml><?xml version="1.0" encoding="utf-8"?>
+<p:sld xmlns:a="http://schemas.openxmlformats.org/drawingml/2006/main" xmlns:r="http://schemas.openxmlformats.org/officeDocument/2006/relationships" xmlns:p="http://schemas.openxmlformats.org/presentationml/2006/main">
+  <p:cSld>
+    <p:spTree>
+      <p:nvGrpSpPr>
+        <p:cNvPr id="1" name=""/>
+        <p:cNvGrpSpPr/>
+        <p:nvPr/>
+      </p:nvGrpSpPr>
+      <p:grpSpPr>
+        <a:xfrm>
+          <a:off x="0" y="0"/>
+          <a:ext cx="0" cy="0"/>
+          <a:chOff x="0" y="0"/>
+          <a:chExt cx="0" cy="0"/>
+        </a:xfrm>
+      </p:grpSpPr>
+      <p:pic>
+        <p:nvPicPr>
+          <p:cNvPr id="11" name="图片 10">
+            <a:extLst>
+              <a:ext uri="{FF2B5EF4-FFF2-40B4-BE49-F238E27FC236}">
+                <a16:creationId xmlns:a16="http://schemas.microsoft.com/office/drawing/2014/main" id="{FA1E48DA-7B6B-DD2E-A22B-B699B33543AB}"/>
+              </a:ext>
+            </a:extLst>
+          </p:cNvPr>
+          <p:cNvPicPr>
+            <a:picLocks noChangeAspect="1"/>
+          </p:cNvPicPr>
+          <p:nvPr/>
+        </p:nvPicPr>
+        <p:blipFill>
+          <a:blip r:embed="rId2"/>
+          <a:stretch>
+            <a:fillRect/>
+          </a:stretch>
+        </p:blipFill>
+        <p:spPr>
+          <a:xfrm>
+            <a:off x="362187" y="151277"/>
+            <a:ext cx="2199946" cy="1647825"/>
+          </a:xfrm>
+          <a:prstGeom prst="rect">
+            <a:avLst/>
+          </a:prstGeom>
+        </p:spPr>
+      </p:pic>
+      <p:pic>
+        <p:nvPicPr>
+          <p:cNvPr id="13" name="图片 12">
+            <a:extLst>
+              <a:ext uri="{FF2B5EF4-FFF2-40B4-BE49-F238E27FC236}">
+                <a16:creationId xmlns:a16="http://schemas.microsoft.com/office/drawing/2014/main" id="{6E8392C2-B829-8015-261C-ECA00B4E281D}"/>
+              </a:ext>
+            </a:extLst>
+          </p:cNvPr>
+          <p:cNvPicPr>
+            <a:picLocks noChangeAspect="1"/>
+          </p:cNvPicPr>
+          <p:nvPr/>
+        </p:nvPicPr>
+        <p:blipFill>
+          <a:blip r:embed="rId3"/>
+          <a:stretch>
+            <a:fillRect/>
+          </a:stretch>
+        </p:blipFill>
+        <p:spPr>
+          <a:xfrm>
+            <a:off x="6234111" y="151277"/>
+            <a:ext cx="2118090" cy="1557338"/>
+          </a:xfrm>
+          <a:prstGeom prst="rect">
+            <a:avLst/>
+          </a:prstGeom>
+        </p:spPr>
+      </p:pic>
+      <p:pic>
+        <p:nvPicPr>
+          <p:cNvPr id="15" name="图片 14">
+            <a:extLst>
+              <a:ext uri="{FF2B5EF4-FFF2-40B4-BE49-F238E27FC236}">
+                <a16:creationId xmlns:a16="http://schemas.microsoft.com/office/drawing/2014/main" id="{B2673AC9-7FE6-F846-E909-2C0C9252C85C}"/>
+              </a:ext>
+            </a:extLst>
+          </p:cNvPr>
+          <p:cNvPicPr>
+            <a:picLocks noChangeAspect="1"/>
+          </p:cNvPicPr>
+          <p:nvPr/>
+        </p:nvPicPr>
+        <p:blipFill>
+          <a:blip r:embed="rId4"/>
+          <a:stretch>
+            <a:fillRect/>
+          </a:stretch>
+        </p:blipFill>
+        <p:spPr>
+          <a:xfrm>
+            <a:off x="362187" y="1773075"/>
+            <a:ext cx="2199947" cy="1631749"/>
+          </a:xfrm>
+          <a:prstGeom prst="rect">
+            <a:avLst/>
+          </a:prstGeom>
+        </p:spPr>
+      </p:pic>
+      <p:pic>
+        <p:nvPicPr>
+          <p:cNvPr id="17" name="图片 16">
+            <a:extLst>
+              <a:ext uri="{FF2B5EF4-FFF2-40B4-BE49-F238E27FC236}">
+                <a16:creationId xmlns:a16="http://schemas.microsoft.com/office/drawing/2014/main" id="{EC2A78E2-D959-1CDE-E5DB-47D7ED7864F0}"/>
+              </a:ext>
+            </a:extLst>
+          </p:cNvPr>
+          <p:cNvPicPr>
+            <a:picLocks noChangeAspect="1"/>
+          </p:cNvPicPr>
+          <p:nvPr/>
+        </p:nvPicPr>
+        <p:blipFill>
+          <a:blip r:embed="rId5"/>
+          <a:stretch>
+            <a:fillRect/>
+          </a:stretch>
+        </p:blipFill>
+        <p:spPr>
+          <a:xfrm>
+            <a:off x="6234111" y="1735935"/>
+            <a:ext cx="2118090" cy="1566154"/>
+          </a:xfrm>
+          <a:prstGeom prst="rect">
+            <a:avLst/>
+          </a:prstGeom>
+        </p:spPr>
+      </p:pic>
+      <p:sp>
+        <p:nvSpPr>
+          <p:cNvPr id="19" name="文本框 18">
+            <a:extLst>
+              <a:ext uri="{FF2B5EF4-FFF2-40B4-BE49-F238E27FC236}">
+                <a16:creationId xmlns:a16="http://schemas.microsoft.com/office/drawing/2014/main" id="{61642F50-00AE-A27F-7CA2-945AEB007FBC}"/>
+              </a:ext>
+            </a:extLst>
+          </p:cNvPr>
+          <p:cNvSpPr txBox="1"/>
+          <p:nvPr/>
+        </p:nvSpPr>
+        <p:spPr>
+          <a:xfrm>
+            <a:off x="2657383" y="282892"/>
+            <a:ext cx="3743325" cy="1384995"/>
+          </a:xfrm>
+          <a:prstGeom prst="rect">
+            <a:avLst/>
+          </a:prstGeom>
+          <a:noFill/>
+        </p:spPr>
+        <p:txBody>
+          <a:bodyPr wrap="square">
+            <a:spAutoFit/>
+          </a:bodyPr>
+          <a:lstStyle/>
+          <a:p>
+            <a:r>
+              <a:rPr lang="zh-CN" altLang="en-US" sz="1050" dirty="0"/>
+              <a:t> Bin  Count  Count (%)  Event rate         EEF</a:t>
+            </a:r>
+          </a:p>
+          <a:p>
+            <a:r>
+              <a:rPr lang="zh-CN" altLang="en-US" sz="1050" dirty="0"/>
+              <a:t>0   (-inf, 32.95)     25   0.061881    0.240000  332.769032</a:t>
+            </a:r>
+          </a:p>
+          <a:p>
+            <a:r>
+              <a:rPr lang="zh-CN" altLang="en-US" sz="1050" dirty="0"/>
+              <a:t>1  [32.95, 33.15)     21   0.051980    0.380952  348.271487</a:t>
+            </a:r>
+          </a:p>
+          <a:p>
+            <a:r>
+              <a:rPr lang="zh-CN" altLang="en-US" sz="1050" dirty="0"/>
+              <a:t>2  [33.15, 33.35)     27   0.066832    0.407407  347.575989</a:t>
+            </a:r>
+          </a:p>
+          <a:p>
+            <a:r>
+              <a:rPr lang="zh-CN" altLang="en-US" sz="1050" dirty="0"/>
+              <a:t>3  [33.35, 33.65)    113   0.279703    0.265487  333.411433</a:t>
+            </a:r>
+          </a:p>
+          <a:p>
+            <a:r>
+              <a:rPr lang="zh-CN" altLang="en-US" sz="1050" dirty="0"/>
+              <a:t>4  [33.65, 33.85)    101   0.250000    0.148515  317.053942</a:t>
+            </a:r>
+          </a:p>
+          <a:p>
+            <a:r>
+              <a:rPr lang="zh-CN" altLang="en-US" sz="1050" dirty="0"/>
+              <a:t>5  [33.85, 33.95)     43   0.106436    0.139535  301.144171</a:t>
+            </a:r>
+          </a:p>
+          <a:p>
+            <a:r>
+              <a:rPr lang="zh-CN" altLang="en-US" sz="1050" dirty="0"/>
+              <a:t>6    [33.95, inf)     74   0.183168    0.067568  285.255348</a:t>
+            </a:r>
+          </a:p>
+        </p:txBody>
+      </p:sp>
+      <p:sp>
+        <p:nvSpPr>
+          <p:cNvPr id="21" name="文本框 20">
+            <a:extLst>
+              <a:ext uri="{FF2B5EF4-FFF2-40B4-BE49-F238E27FC236}">
+                <a16:creationId xmlns:a16="http://schemas.microsoft.com/office/drawing/2014/main" id="{4D657476-BEFE-E3EF-4F57-9F546E90DF88}"/>
+              </a:ext>
+            </a:extLst>
+          </p:cNvPr>
+          <p:cNvSpPr txBox="1"/>
+          <p:nvPr/>
+        </p:nvSpPr>
+        <p:spPr>
+          <a:xfrm>
+            <a:off x="8352201" y="151277"/>
+            <a:ext cx="3671978" cy="1446550"/>
+          </a:xfrm>
+          <a:prstGeom prst="rect">
+            <a:avLst/>
+          </a:prstGeom>
+          <a:noFill/>
+        </p:spPr>
+        <p:txBody>
+          <a:bodyPr wrap="square">
+            <a:spAutoFit/>
+          </a:bodyPr>
+          <a:lstStyle/>
+          <a:p>
+            <a:r>
+              <a:rPr lang="zh-CN" altLang="en-US" sz="1100" dirty="0"/>
+              <a:t> Bin  Count  Count (%)  Event rate         EEF</a:t>
+            </a:r>
+          </a:p>
+          <a:p>
+            <a:r>
+              <a:rPr lang="zh-CN" altLang="en-US" sz="1100" dirty="0"/>
+              <a:t>0   (-inf, 31.25)     57   0.141089    0.456140  356.942402</a:t>
+            </a:r>
+          </a:p>
+          <a:p>
+            <a:r>
+              <a:rPr lang="zh-CN" altLang="en-US" sz="1100" dirty="0"/>
+              <a:t>1  [31.25, 31.45)     45   0.111386    0.222222  313.793061</a:t>
+            </a:r>
+          </a:p>
+          <a:p>
+            <a:r>
+              <a:rPr lang="zh-CN" altLang="en-US" sz="1100" dirty="0"/>
+              <a:t>2  [31.45, 31.65)     64   0.158416    0.187500  323.463248</a:t>
+            </a:r>
+          </a:p>
+          <a:p>
+            <a:r>
+              <a:rPr lang="zh-CN" altLang="en-US" sz="1100" dirty="0"/>
+              <a:t>3  [31.65, 31.95)    137   0.339109    0.182482  315.236569</a:t>
+            </a:r>
+          </a:p>
+          <a:p>
+            <a:r>
+              <a:rPr lang="zh-CN" altLang="en-US" sz="1100" dirty="0"/>
+              <a:t>4  [31.95, 32.05)     26   0.064356    0.038462  282.169649</a:t>
+            </a:r>
+          </a:p>
+          <a:p>
+            <a:r>
+              <a:rPr lang="zh-CN" altLang="en-US" sz="1100" dirty="0"/>
+              <a:t>5  [32.05, 32.25)     52   0.128713    0.057692  307.355370</a:t>
+            </a:r>
+          </a:p>
+          <a:p>
+            <a:r>
+              <a:rPr lang="zh-CN" altLang="en-US" sz="1100" dirty="0"/>
+              <a:t>6    [32.25, inf)     23   0.056931    0.173913  308.659194</a:t>
+            </a:r>
+          </a:p>
+        </p:txBody>
+      </p:sp>
+      <p:sp>
+        <p:nvSpPr>
+          <p:cNvPr id="23" name="文本框 22">
+            <a:extLst>
+              <a:ext uri="{FF2B5EF4-FFF2-40B4-BE49-F238E27FC236}">
+                <a16:creationId xmlns:a16="http://schemas.microsoft.com/office/drawing/2014/main" id="{6F964AED-D305-CA83-1B26-997CADB6AE23}"/>
+              </a:ext>
+            </a:extLst>
+          </p:cNvPr>
+          <p:cNvSpPr txBox="1"/>
+          <p:nvPr/>
+        </p:nvSpPr>
+        <p:spPr>
+          <a:xfrm>
+            <a:off x="2562133" y="1880376"/>
+            <a:ext cx="3838575" cy="1277273"/>
+          </a:xfrm>
+          <a:prstGeom prst="rect">
+            <a:avLst/>
+          </a:prstGeom>
+          <a:noFill/>
+        </p:spPr>
+        <p:txBody>
+          <a:bodyPr wrap="square">
+            <a:spAutoFit/>
+          </a:bodyPr>
+          <a:lstStyle/>
+          <a:p>
+            <a:r>
+              <a:rPr lang="zh-CN" altLang="en-US" sz="1100" dirty="0"/>
+              <a:t> Bin  Count  Count (%)  Event rate         EEF</a:t>
+            </a:r>
+          </a:p>
+          <a:p>
+            <a:r>
+              <a:rPr lang="zh-CN" altLang="en-US" sz="1100" dirty="0"/>
+              <a:t>0   (-inf, 29.05)     34   0.084158    0.617647  369.537969</a:t>
+            </a:r>
+          </a:p>
+          <a:p>
+            <a:r>
+              <a:rPr lang="zh-CN" altLang="en-US" sz="1100" dirty="0"/>
+              <a:t>1  [29.05, 29.25)     34   0.084158    0.294118  343.346843</a:t>
+            </a:r>
+          </a:p>
+          <a:p>
+            <a:r>
+              <a:rPr lang="zh-CN" altLang="en-US" sz="1100" dirty="0"/>
+              <a:t>2  [29.25, 29.45)     38   0.094059    0.236842  333.230199</a:t>
+            </a:r>
+          </a:p>
+          <a:p>
+            <a:r>
+              <a:rPr lang="zh-CN" altLang="en-US" sz="1100" dirty="0"/>
+              <a:t>3  [29.45, 29.75)    103   0.254950    0.203883  323.406747</a:t>
+            </a:r>
+          </a:p>
+          <a:p>
+            <a:r>
+              <a:rPr lang="zh-CN" altLang="en-US" sz="1100" dirty="0"/>
+              <a:t>4  [29.75, 30.45)    157   0.388614    0.121019  301.799712</a:t>
+            </a:r>
+          </a:p>
+          <a:p>
+            <a:r>
+              <a:rPr lang="zh-CN" altLang="en-US" sz="1100" dirty="0"/>
+              <a:t>5    [30.45, inf)     38   0.094059    0.026316  294.19034</a:t>
+            </a:r>
+          </a:p>
+        </p:txBody>
+      </p:sp>
+      <p:sp>
+        <p:nvSpPr>
+          <p:cNvPr id="25" name="文本框 24">
+            <a:extLst>
+              <a:ext uri="{FF2B5EF4-FFF2-40B4-BE49-F238E27FC236}">
+                <a16:creationId xmlns:a16="http://schemas.microsoft.com/office/drawing/2014/main" id="{A29E1AA9-4402-C7C2-E16C-2F46655D3C25}"/>
+              </a:ext>
+            </a:extLst>
+          </p:cNvPr>
+          <p:cNvSpPr txBox="1"/>
+          <p:nvPr/>
+        </p:nvSpPr>
+        <p:spPr>
+          <a:xfrm>
+            <a:off x="8448674" y="1735935"/>
+            <a:ext cx="3743326" cy="1446550"/>
+          </a:xfrm>
+          <a:prstGeom prst="rect">
+            <a:avLst/>
+          </a:prstGeom>
+          <a:noFill/>
+        </p:spPr>
+        <p:txBody>
+          <a:bodyPr wrap="square">
+            <a:spAutoFit/>
+          </a:bodyPr>
+          <a:lstStyle/>
+          <a:p>
+            <a:r>
+              <a:rPr lang="zh-CN" altLang="en-US" sz="1100" dirty="0"/>
+              <a:t> Bin  Count  Count (%)  Event rate         EEF</a:t>
+            </a:r>
+          </a:p>
+          <a:p>
+            <a:r>
+              <a:rPr lang="zh-CN" altLang="en-US" sz="1100" dirty="0"/>
+              <a:t>0   (-inf, 27.95)     32   0.079208    0.593750  373.862493</a:t>
+            </a:r>
+          </a:p>
+          <a:p>
+            <a:r>
+              <a:rPr lang="zh-CN" altLang="en-US" sz="1100" dirty="0"/>
+              <a:t>1  [27.95, 28.05)     22   0.054455    0.363636  347.239201</a:t>
+            </a:r>
+          </a:p>
+          <a:p>
+            <a:r>
+              <a:rPr lang="zh-CN" altLang="en-US" sz="1100" dirty="0"/>
+              <a:t>2  [28.05, 28.25)     42   0.103960    0.309524  337.613449</a:t>
+            </a:r>
+          </a:p>
+          <a:p>
+            <a:r>
+              <a:rPr lang="zh-CN" altLang="en-US" sz="1100" dirty="0"/>
+              <a:t>3  [28.25, 28.35)     25   0.061881    0.280000  338.396853</a:t>
+            </a:r>
+          </a:p>
+          <a:p>
+            <a:r>
+              <a:rPr lang="zh-CN" altLang="en-US" sz="1100" dirty="0"/>
+              <a:t>4  [28.35, 28.75)    138   0.341584    0.152174  317.196402</a:t>
+            </a:r>
+          </a:p>
+          <a:p>
+            <a:r>
+              <a:rPr lang="zh-CN" altLang="en-US" sz="1100" dirty="0"/>
+              <a:t>5  [28.75, 29.25)     97   0.240099    0.113402  299.652149</a:t>
+            </a:r>
+          </a:p>
+          <a:p>
+            <a:r>
+              <a:rPr lang="zh-CN" altLang="en-US" sz="1100" dirty="0"/>
+              <a:t>6    [29.25, inf)     48   0.118812    0.041667  285.241743</a:t>
+            </a:r>
+          </a:p>
+        </p:txBody>
+      </p:sp>
+      <p:pic>
+        <p:nvPicPr>
+          <p:cNvPr id="26" name="图片 25">
+            <a:extLst>
+              <a:ext uri="{FF2B5EF4-FFF2-40B4-BE49-F238E27FC236}">
+                <a16:creationId xmlns:a16="http://schemas.microsoft.com/office/drawing/2014/main" id="{D336B9C6-4029-FA17-56C0-459726F18880}"/>
+              </a:ext>
+            </a:extLst>
+          </p:cNvPr>
+          <p:cNvPicPr>
+            <a:picLocks noChangeAspect="1"/>
+          </p:cNvPicPr>
+          <p:nvPr/>
+        </p:nvPicPr>
+        <p:blipFill>
+          <a:blip r:embed="rId6"/>
+          <a:stretch>
+            <a:fillRect/>
+          </a:stretch>
+        </p:blipFill>
+        <p:spPr>
+          <a:xfrm>
+            <a:off x="6234111" y="3319940"/>
+            <a:ext cx="2199947" cy="1632593"/>
+          </a:xfrm>
+          <a:prstGeom prst="rect">
+            <a:avLst/>
+          </a:prstGeom>
+        </p:spPr>
+      </p:pic>
+      <p:pic>
+        <p:nvPicPr>
+          <p:cNvPr id="27" name="图片 26">
+            <a:extLst>
+              <a:ext uri="{FF2B5EF4-FFF2-40B4-BE49-F238E27FC236}">
+                <a16:creationId xmlns:a16="http://schemas.microsoft.com/office/drawing/2014/main" id="{8B8E23F4-C65F-3FDC-3A47-0016398A0EF4}"/>
+              </a:ext>
+            </a:extLst>
+          </p:cNvPr>
+          <p:cNvPicPr>
+            <a:picLocks noChangeAspect="1"/>
+          </p:cNvPicPr>
+          <p:nvPr/>
+        </p:nvPicPr>
+        <p:blipFill>
+          <a:blip r:embed="rId7"/>
+          <a:stretch>
+            <a:fillRect/>
+          </a:stretch>
+        </p:blipFill>
+        <p:spPr>
+          <a:xfrm>
+            <a:off x="281361" y="5100905"/>
+            <a:ext cx="2280772" cy="1691124"/>
+          </a:xfrm>
+          <a:prstGeom prst="rect">
+            <a:avLst/>
+          </a:prstGeom>
+        </p:spPr>
+      </p:pic>
+      <p:pic>
+        <p:nvPicPr>
+          <p:cNvPr id="28" name="图片 27">
+            <a:extLst>
+              <a:ext uri="{FF2B5EF4-FFF2-40B4-BE49-F238E27FC236}">
+                <a16:creationId xmlns:a16="http://schemas.microsoft.com/office/drawing/2014/main" id="{504099F4-4258-3260-9770-E4AC744DE8C3}"/>
+              </a:ext>
+            </a:extLst>
+          </p:cNvPr>
+          <p:cNvPicPr>
+            <a:picLocks noChangeAspect="1"/>
+          </p:cNvPicPr>
+          <p:nvPr/>
+        </p:nvPicPr>
+        <p:blipFill>
+          <a:blip r:embed="rId8"/>
+          <a:stretch>
+            <a:fillRect/>
+          </a:stretch>
+        </p:blipFill>
+        <p:spPr>
+          <a:xfrm>
+            <a:off x="6192846" y="5091380"/>
+            <a:ext cx="2255828" cy="1691124"/>
+          </a:xfrm>
+          <a:prstGeom prst="rect">
+            <a:avLst/>
+          </a:prstGeom>
+        </p:spPr>
+      </p:pic>
+      <p:pic>
+        <p:nvPicPr>
+          <p:cNvPr id="29" name="图片 28">
+            <a:extLst>
+              <a:ext uri="{FF2B5EF4-FFF2-40B4-BE49-F238E27FC236}">
+                <a16:creationId xmlns:a16="http://schemas.microsoft.com/office/drawing/2014/main" id="{883D21E2-392E-F735-5873-FF800FD81FB9}"/>
+              </a:ext>
+            </a:extLst>
+          </p:cNvPr>
+          <p:cNvPicPr>
+            <a:picLocks noChangeAspect="1"/>
+          </p:cNvPicPr>
+          <p:nvPr/>
+        </p:nvPicPr>
+        <p:blipFill>
+          <a:blip r:embed="rId9"/>
+          <a:stretch>
+            <a:fillRect/>
+          </a:stretch>
+        </p:blipFill>
+        <p:spPr>
+          <a:xfrm>
+            <a:off x="362186" y="3421326"/>
+            <a:ext cx="2199947" cy="1670054"/>
+          </a:xfrm>
+          <a:prstGeom prst="rect">
+            <a:avLst/>
+          </a:prstGeom>
+        </p:spPr>
+      </p:pic>
+      <p:sp>
+        <p:nvSpPr>
+          <p:cNvPr id="33" name="文本框 32">
+            <a:extLst>
+              <a:ext uri="{FF2B5EF4-FFF2-40B4-BE49-F238E27FC236}">
+                <a16:creationId xmlns:a16="http://schemas.microsoft.com/office/drawing/2014/main" id="{619596FA-7416-374F-7225-227C8D771DD5}"/>
+              </a:ext>
+            </a:extLst>
+          </p:cNvPr>
+          <p:cNvSpPr txBox="1"/>
+          <p:nvPr/>
+        </p:nvSpPr>
+        <p:spPr>
+          <a:xfrm>
+            <a:off x="2562133" y="3486098"/>
+            <a:ext cx="3790949" cy="1446550"/>
+          </a:xfrm>
+          <a:prstGeom prst="rect">
+            <a:avLst/>
+          </a:prstGeom>
+          <a:noFill/>
+        </p:spPr>
+        <p:txBody>
+          <a:bodyPr wrap="square">
+            <a:spAutoFit/>
+          </a:bodyPr>
+          <a:lstStyle/>
+          <a:p>
+            <a:r>
+              <a:rPr lang="zh-CN" altLang="en-US" sz="1100" dirty="0"/>
+              <a:t> Bin  Count  Count (%)  Event rate         EEF</a:t>
+            </a:r>
+          </a:p>
+          <a:p>
+            <a:r>
+              <a:rPr lang="zh-CN" altLang="en-US" sz="1100" dirty="0"/>
+              <a:t>0   (-inf, 26.95)     61   0.150990    0.475410  363.309711</a:t>
+            </a:r>
+          </a:p>
+          <a:p>
+            <a:r>
+              <a:rPr lang="zh-CN" altLang="en-US" sz="1100" dirty="0"/>
+              <a:t>1  [26.95, 27.15)     35   0.086634    0.342857  332.225721</a:t>
+            </a:r>
+          </a:p>
+          <a:p>
+            <a:r>
+              <a:rPr lang="zh-CN" altLang="en-US" sz="1100" dirty="0"/>
+              <a:t>2  [27.15, 27.35)     56   0.138614    0.178571  324.024583</a:t>
+            </a:r>
+          </a:p>
+          <a:p>
+            <a:r>
+              <a:rPr lang="zh-CN" altLang="en-US" sz="1100" dirty="0"/>
+              <a:t>3  [27.35, 27.45)     35   0.086634    0.171429  317.890314</a:t>
+            </a:r>
+          </a:p>
+          <a:p>
+            <a:r>
+              <a:rPr lang="zh-CN" altLang="en-US" sz="1100" dirty="0"/>
+              <a:t>4  [27.45, 27.75)     95   0.235149    0.136842  312.052635</a:t>
+            </a:r>
+          </a:p>
+          <a:p>
+            <a:r>
+              <a:rPr lang="zh-CN" altLang="en-US" sz="1100" dirty="0"/>
+              <a:t>5  [27.75, 27.95)     31   0.076733    0.032258  294.401106</a:t>
+            </a:r>
+          </a:p>
+          <a:p>
+            <a:r>
+              <a:rPr lang="zh-CN" altLang="en-US" sz="1100" dirty="0"/>
+              <a:t>6    [27.95, inf)     91   0.225248    0.109890  296.052189</a:t>
+            </a:r>
+          </a:p>
+        </p:txBody>
+      </p:sp>
+      <p:sp>
+        <p:nvSpPr>
+          <p:cNvPr id="35" name="文本框 34">
+            <a:extLst>
+              <a:ext uri="{FF2B5EF4-FFF2-40B4-BE49-F238E27FC236}">
+                <a16:creationId xmlns:a16="http://schemas.microsoft.com/office/drawing/2014/main" id="{E4E7326C-7455-DC8C-2F43-A24F4005CBD3}"/>
+              </a:ext>
+            </a:extLst>
+          </p:cNvPr>
+          <p:cNvSpPr txBox="1"/>
+          <p:nvPr/>
+        </p:nvSpPr>
+        <p:spPr>
+          <a:xfrm>
+            <a:off x="8448674" y="3486098"/>
+            <a:ext cx="3590926" cy="1277273"/>
+          </a:xfrm>
+          <a:prstGeom prst="rect">
+            <a:avLst/>
+          </a:prstGeom>
+          <a:noFill/>
+        </p:spPr>
+        <p:txBody>
+          <a:bodyPr wrap="square">
+            <a:spAutoFit/>
+          </a:bodyPr>
+          <a:lstStyle/>
+          <a:p>
+            <a:r>
+              <a:rPr lang="zh-CN" altLang="en-US" sz="1100" dirty="0"/>
+              <a:t> Bin  Count  Count (%)  Event rate         EEF</a:t>
+            </a:r>
+          </a:p>
+          <a:p>
+            <a:r>
+              <a:rPr lang="zh-CN" altLang="en-US" sz="1100" dirty="0"/>
+              <a:t>0   (-inf, 25.85)     61   0.150990    0.327869  344.317566</a:t>
+            </a:r>
+          </a:p>
+          <a:p>
+            <a:r>
+              <a:rPr lang="zh-CN" altLang="en-US" sz="1100" dirty="0"/>
+              <a:t>1  [25.85, 26.25)    112   0.277228    0.294643  340.888478</a:t>
+            </a:r>
+          </a:p>
+          <a:p>
+            <a:r>
+              <a:rPr lang="zh-CN" altLang="en-US" sz="1100" dirty="0"/>
+              <a:t>2  [26.25, 26.45)     39   0.096535    0.256410  334.176948</a:t>
+            </a:r>
+          </a:p>
+          <a:p>
+            <a:r>
+              <a:rPr lang="zh-CN" altLang="en-US" sz="1100" dirty="0"/>
+              <a:t>3  [26.45, 26.55)     23   0.056931    0.173913  309.526740</a:t>
+            </a:r>
+          </a:p>
+          <a:p>
+            <a:r>
+              <a:rPr lang="zh-CN" altLang="en-US" sz="1100" dirty="0"/>
+              <a:t>4  [26.55, 26.65)     26   0.064356    0.153846  325.139994</a:t>
+            </a:r>
+          </a:p>
+          <a:p>
+            <a:r>
+              <a:rPr lang="zh-CN" altLang="en-US" sz="1100" dirty="0"/>
+              <a:t>5    [26.65, inf)    143   0.353960    0.069930  286.608232</a:t>
+            </a:r>
+          </a:p>
+        </p:txBody>
+      </p:sp>
+      <p:sp>
+        <p:nvSpPr>
+          <p:cNvPr id="37" name="文本框 36">
+            <a:extLst>
+              <a:ext uri="{FF2B5EF4-FFF2-40B4-BE49-F238E27FC236}">
+                <a16:creationId xmlns:a16="http://schemas.microsoft.com/office/drawing/2014/main" id="{9BB2B102-AAD8-2464-0D29-8A662558BB88}"/>
+              </a:ext>
+            </a:extLst>
+          </p:cNvPr>
+          <p:cNvSpPr txBox="1"/>
+          <p:nvPr/>
+        </p:nvSpPr>
+        <p:spPr>
+          <a:xfrm>
+            <a:off x="2562133" y="5116657"/>
+            <a:ext cx="3619500" cy="1446550"/>
+          </a:xfrm>
+          <a:prstGeom prst="rect">
+            <a:avLst/>
+          </a:prstGeom>
+          <a:noFill/>
+        </p:spPr>
+        <p:txBody>
+          <a:bodyPr wrap="square">
+            <a:spAutoFit/>
+          </a:bodyPr>
+          <a:lstStyle/>
+          <a:p>
+            <a:r>
+              <a:rPr lang="zh-CN" altLang="en-US" sz="1100" dirty="0"/>
+              <a:t> Bin  Count  Count (%)  Event rate         EEF</a:t>
+            </a:r>
+          </a:p>
+          <a:p>
+            <a:r>
+              <a:rPr lang="zh-CN" altLang="en-US" sz="1100" dirty="0"/>
+              <a:t>0   (-inf, 24.45)     34   0.084158    0.588235  367.956671</a:t>
+            </a:r>
+          </a:p>
+          <a:p>
+            <a:r>
+              <a:rPr lang="zh-CN" altLang="en-US" sz="1100" dirty="0"/>
+              <a:t>1  [24.45, 24.65)     24   0.059406    0.416667  355.145749</a:t>
+            </a:r>
+          </a:p>
+          <a:p>
+            <a:r>
+              <a:rPr lang="zh-CN" altLang="en-US" sz="1100" dirty="0"/>
+              <a:t>2  [24.65, 24.95)     47   0.116337    0.297872  332.996416</a:t>
+            </a:r>
+          </a:p>
+          <a:p>
+            <a:r>
+              <a:rPr lang="zh-CN" altLang="en-US" sz="1100" dirty="0"/>
+              <a:t>3  [24.95, 25.15)     55   0.136139    0.254545  335.131044</a:t>
+            </a:r>
+          </a:p>
+          <a:p>
+            <a:r>
+              <a:rPr lang="zh-CN" altLang="en-US" sz="1100" dirty="0"/>
+              <a:t>4  [25.15, 25.45)     64   0.158416    0.125000  330.996931</a:t>
+            </a:r>
+          </a:p>
+          <a:p>
+            <a:r>
+              <a:rPr lang="zh-CN" altLang="en-US" sz="1100" dirty="0"/>
+              <a:t>5  [25.45, 25.65)     40   0.099010    0.125000  311.485559</a:t>
+            </a:r>
+          </a:p>
+          <a:p>
+            <a:r>
+              <a:rPr lang="zh-CN" altLang="en-US" sz="1100" dirty="0"/>
+              <a:t>6    [25.65, inf)    140   0.346535    0.071429  285.808745</a:t>
+            </a:r>
+          </a:p>
+        </p:txBody>
+      </p:sp>
+      <p:sp>
+        <p:nvSpPr>
+          <p:cNvPr id="39" name="文本框 38">
+            <a:extLst>
+              <a:ext uri="{FF2B5EF4-FFF2-40B4-BE49-F238E27FC236}">
+                <a16:creationId xmlns:a16="http://schemas.microsoft.com/office/drawing/2014/main" id="{E3EF5571-7DEB-4331-6520-787CCEA6B2D9}"/>
+              </a:ext>
+            </a:extLst>
+          </p:cNvPr>
+          <p:cNvSpPr txBox="1"/>
+          <p:nvPr/>
+        </p:nvSpPr>
+        <p:spPr>
+          <a:xfrm>
+            <a:off x="8448674" y="5201295"/>
+            <a:ext cx="3600451" cy="1277273"/>
+          </a:xfrm>
+          <a:prstGeom prst="rect">
+            <a:avLst/>
+          </a:prstGeom>
+          <a:noFill/>
+        </p:spPr>
+        <p:txBody>
+          <a:bodyPr wrap="square">
+            <a:spAutoFit/>
+          </a:bodyPr>
+          <a:lstStyle/>
+          <a:p>
+            <a:r>
+              <a:rPr lang="zh-CN" altLang="en-US" sz="1100" dirty="0"/>
+              <a:t> Bin  Count  Count (%)  Event rate         EEF</a:t>
+            </a:r>
+          </a:p>
+          <a:p>
+            <a:r>
+              <a:rPr lang="zh-CN" altLang="en-US" sz="1100" dirty="0"/>
+              <a:t>0   (-inf, 23.25)     37   0.091584    0.540541  365.211991</a:t>
+            </a:r>
+          </a:p>
+          <a:p>
+            <a:r>
+              <a:rPr lang="zh-CN" altLang="en-US" sz="1100" dirty="0"/>
+              <a:t>1  [23.25, 23.85)     55   0.136139    0.290909  346.804884</a:t>
+            </a:r>
+          </a:p>
+          <a:p>
+            <a:r>
+              <a:rPr lang="zh-CN" altLang="en-US" sz="1100" dirty="0"/>
+              <a:t>2  [23.85, 24.35)     76   0.188119    0.276316  332.385727</a:t>
+            </a:r>
+          </a:p>
+          <a:p>
+            <a:r>
+              <a:rPr lang="zh-CN" altLang="en-US" sz="1100" dirty="0"/>
+              <a:t>3  [24.35, 24.55)     23   0.056931    0.217391  339.185718</a:t>
+            </a:r>
+          </a:p>
+          <a:p>
+            <a:r>
+              <a:rPr lang="zh-CN" altLang="en-US" sz="1100" dirty="0"/>
+              <a:t>4  [24.55, 25.85)    187   0.462871    0.090909  296.144568</a:t>
+            </a:r>
+          </a:p>
+          <a:p>
+            <a:r>
+              <a:rPr lang="zh-CN" altLang="en-US" sz="1100" dirty="0"/>
+              <a:t>5    [25.85, inf)     26   0.064356    0.076923  297.876181</a:t>
+            </a:r>
+          </a:p>
+        </p:txBody>
+      </p:sp>
+    </p:spTree>
+    <p:extLst>
+      <p:ext uri="{BB962C8B-B14F-4D97-AF65-F5344CB8AC3E}">
+        <p14:creationId xmlns:p14="http://schemas.microsoft.com/office/powerpoint/2010/main" val="3384085127"/>
+      </p:ext>
+    </p:extLst>
+  </p:cSld>
+  <p:clrMapOvr>
+    <a:masterClrMapping/>
+  </p:clrMapOvr>
+  <mc:AlternateContent xmlns:mc="http://schemas.openxmlformats.org/markup-compatibility/2006" xmlns:p14="http://schemas.microsoft.com/office/powerpoint/2010/main">
+    <mc:Choice Requires="p14">
+      <p:transition spd="med" p14:dur="700">
+        <p:fade/>
+      </p:transition>
+    </mc:Choice>
+    <mc:Fallback xmlns="">
+      <p:transition spd="med">
+        <p:fade/>
+      </p:transition>
+    </mc:Fallback>
+  </mc:AlternateContent>
+</p:sld>
+</file>
+
+<file path=ppt/slides/slide31.xml><?xml version="1.0" encoding="utf-8"?>
+<p:sld xmlns:a="http://schemas.openxmlformats.org/drawingml/2006/main" xmlns:r="http://schemas.openxmlformats.org/officeDocument/2006/relationships" xmlns:p="http://schemas.openxmlformats.org/presentationml/2006/main">
+  <p:cSld>
+    <p:spTree>
+      <p:nvGrpSpPr>
+        <p:cNvPr id="1" name=""/>
+        <p:cNvGrpSpPr/>
+        <p:nvPr/>
+      </p:nvGrpSpPr>
+      <p:grpSpPr>
+        <a:xfrm>
+          <a:off x="0" y="0"/>
+          <a:ext cx="0" cy="0"/>
+          <a:chOff x="0" y="0"/>
+          <a:chExt cx="0" cy="0"/>
+        </a:xfrm>
+      </p:grpSpPr>
+      <p:pic>
+        <p:nvPicPr>
+          <p:cNvPr id="19" name="图片 18">
+            <a:extLst>
+              <a:ext uri="{FF2B5EF4-FFF2-40B4-BE49-F238E27FC236}">
+                <a16:creationId xmlns:a16="http://schemas.microsoft.com/office/drawing/2014/main" id="{48F83B33-0445-CF01-75E6-C0530C999EF6}"/>
+              </a:ext>
+            </a:extLst>
+          </p:cNvPr>
+          <p:cNvPicPr>
+            <a:picLocks noChangeAspect="1"/>
+          </p:cNvPicPr>
+          <p:nvPr/>
+        </p:nvPicPr>
+        <p:blipFill>
+          <a:blip r:embed="rId2"/>
+          <a:stretch>
+            <a:fillRect/>
+          </a:stretch>
+        </p:blipFill>
+        <p:spPr>
+          <a:xfrm>
+            <a:off x="244353" y="478814"/>
+            <a:ext cx="2065094" cy="1500653"/>
+          </a:xfrm>
+          <a:prstGeom prst="rect">
+            <a:avLst/>
+          </a:prstGeom>
+        </p:spPr>
+      </p:pic>
+      <p:pic>
+        <p:nvPicPr>
+          <p:cNvPr id="21" name="图片 20">
+            <a:extLst>
+              <a:ext uri="{FF2B5EF4-FFF2-40B4-BE49-F238E27FC236}">
+                <a16:creationId xmlns:a16="http://schemas.microsoft.com/office/drawing/2014/main" id="{8109D02B-4B38-3551-0B20-9D9AF84974D1}"/>
+              </a:ext>
+            </a:extLst>
+          </p:cNvPr>
+          <p:cNvPicPr>
+            <a:picLocks noChangeAspect="1"/>
+          </p:cNvPicPr>
+          <p:nvPr/>
+        </p:nvPicPr>
+        <p:blipFill>
+          <a:blip r:embed="rId3"/>
+          <a:stretch>
+            <a:fillRect/>
+          </a:stretch>
+        </p:blipFill>
+        <p:spPr>
+          <a:xfrm>
+            <a:off x="6148124" y="362575"/>
+            <a:ext cx="2184222" cy="1616892"/>
+          </a:xfrm>
+          <a:prstGeom prst="rect">
+            <a:avLst/>
+          </a:prstGeom>
+        </p:spPr>
+      </p:pic>
+      <p:pic>
+        <p:nvPicPr>
+          <p:cNvPr id="23" name="图片 22">
+            <a:extLst>
+              <a:ext uri="{FF2B5EF4-FFF2-40B4-BE49-F238E27FC236}">
+                <a16:creationId xmlns:a16="http://schemas.microsoft.com/office/drawing/2014/main" id="{3EEDD94E-B44F-AA77-3703-125DE01BC71E}"/>
+              </a:ext>
+            </a:extLst>
+          </p:cNvPr>
+          <p:cNvPicPr>
+            <a:picLocks noChangeAspect="1"/>
+          </p:cNvPicPr>
+          <p:nvPr/>
+        </p:nvPicPr>
+        <p:blipFill>
+          <a:blip r:embed="rId4"/>
+          <a:stretch>
+            <a:fillRect/>
+          </a:stretch>
+        </p:blipFill>
+        <p:spPr>
+          <a:xfrm>
+            <a:off x="254627" y="1979467"/>
+            <a:ext cx="2054820" cy="1504711"/>
+          </a:xfrm>
+          <a:prstGeom prst="rect">
+            <a:avLst/>
+          </a:prstGeom>
+        </p:spPr>
+      </p:pic>
+      <p:pic>
+        <p:nvPicPr>
+          <p:cNvPr id="25" name="图片 24">
+            <a:extLst>
+              <a:ext uri="{FF2B5EF4-FFF2-40B4-BE49-F238E27FC236}">
+                <a16:creationId xmlns:a16="http://schemas.microsoft.com/office/drawing/2014/main" id="{A896623A-76AD-204F-5A3C-75CE8B746B29}"/>
+              </a:ext>
+            </a:extLst>
+          </p:cNvPr>
+          <p:cNvPicPr>
+            <a:picLocks noChangeAspect="1"/>
+          </p:cNvPicPr>
+          <p:nvPr/>
+        </p:nvPicPr>
+        <p:blipFill>
+          <a:blip r:embed="rId5"/>
+          <a:stretch>
+            <a:fillRect/>
+          </a:stretch>
+        </p:blipFill>
+        <p:spPr>
+          <a:xfrm>
+            <a:off x="6148124" y="1979467"/>
+            <a:ext cx="2189602" cy="1504711"/>
+          </a:xfrm>
+          <a:prstGeom prst="rect">
+            <a:avLst/>
+          </a:prstGeom>
+        </p:spPr>
+      </p:pic>
+      <p:pic>
+        <p:nvPicPr>
+          <p:cNvPr id="27" name="图片 26">
+            <a:extLst>
+              <a:ext uri="{FF2B5EF4-FFF2-40B4-BE49-F238E27FC236}">
+                <a16:creationId xmlns:a16="http://schemas.microsoft.com/office/drawing/2014/main" id="{45B0F1A0-6A0D-84AB-AB5C-0F129CF8444C}"/>
+              </a:ext>
+            </a:extLst>
+          </p:cNvPr>
+          <p:cNvPicPr>
+            <a:picLocks noChangeAspect="1"/>
+          </p:cNvPicPr>
+          <p:nvPr/>
+        </p:nvPicPr>
+        <p:blipFill>
+          <a:blip r:embed="rId6"/>
+          <a:stretch>
+            <a:fillRect/>
+          </a:stretch>
+        </p:blipFill>
+        <p:spPr>
+          <a:xfrm>
+            <a:off x="254627" y="3478143"/>
+            <a:ext cx="2054820" cy="1506688"/>
+          </a:xfrm>
+          <a:prstGeom prst="rect">
+            <a:avLst/>
+          </a:prstGeom>
+        </p:spPr>
+      </p:pic>
+      <p:pic>
+        <p:nvPicPr>
+          <p:cNvPr id="29" name="图片 28">
+            <a:extLst>
+              <a:ext uri="{FF2B5EF4-FFF2-40B4-BE49-F238E27FC236}">
+                <a16:creationId xmlns:a16="http://schemas.microsoft.com/office/drawing/2014/main" id="{999349C5-F6EA-7E0E-760E-D9A6895FB625}"/>
+              </a:ext>
+            </a:extLst>
+          </p:cNvPr>
+          <p:cNvPicPr>
+            <a:picLocks noChangeAspect="1"/>
+          </p:cNvPicPr>
+          <p:nvPr/>
+        </p:nvPicPr>
+        <p:blipFill>
+          <a:blip r:embed="rId7"/>
+          <a:stretch>
+            <a:fillRect/>
+          </a:stretch>
+        </p:blipFill>
+        <p:spPr>
+          <a:xfrm>
+            <a:off x="6148124" y="3429001"/>
+            <a:ext cx="2184222" cy="1622816"/>
+          </a:xfrm>
+          <a:prstGeom prst="rect">
+            <a:avLst/>
+          </a:prstGeom>
+        </p:spPr>
+      </p:pic>
+      <p:pic>
+        <p:nvPicPr>
+          <p:cNvPr id="31" name="图片 30">
+            <a:extLst>
+              <a:ext uri="{FF2B5EF4-FFF2-40B4-BE49-F238E27FC236}">
+                <a16:creationId xmlns:a16="http://schemas.microsoft.com/office/drawing/2014/main" id="{2D8577EF-83DF-5029-E487-F24344C0CE41}"/>
+              </a:ext>
+            </a:extLst>
+          </p:cNvPr>
+          <p:cNvPicPr>
+            <a:picLocks noChangeAspect="1"/>
+          </p:cNvPicPr>
+          <p:nvPr/>
+        </p:nvPicPr>
+        <p:blipFill>
+          <a:blip r:embed="rId8"/>
+          <a:stretch>
+            <a:fillRect/>
+          </a:stretch>
+        </p:blipFill>
+        <p:spPr>
+          <a:xfrm>
+            <a:off x="244353" y="5051817"/>
+            <a:ext cx="2031360" cy="1504711"/>
+          </a:xfrm>
+          <a:prstGeom prst="rect">
+            <a:avLst/>
+          </a:prstGeom>
+        </p:spPr>
+      </p:pic>
+      <p:pic>
+        <p:nvPicPr>
+          <p:cNvPr id="33" name="图片 32">
+            <a:extLst>
+              <a:ext uri="{FF2B5EF4-FFF2-40B4-BE49-F238E27FC236}">
+                <a16:creationId xmlns:a16="http://schemas.microsoft.com/office/drawing/2014/main" id="{E8558D93-19E8-43FD-AB8E-42A837405042}"/>
+              </a:ext>
+            </a:extLst>
+          </p:cNvPr>
+          <p:cNvPicPr>
+            <a:picLocks noChangeAspect="1"/>
+          </p:cNvPicPr>
+          <p:nvPr/>
+        </p:nvPicPr>
+        <p:blipFill>
+          <a:blip r:embed="rId9"/>
+          <a:stretch>
+            <a:fillRect/>
+          </a:stretch>
+        </p:blipFill>
+        <p:spPr>
+          <a:xfrm>
+            <a:off x="6153018" y="5041069"/>
+            <a:ext cx="2184222" cy="1629499"/>
+          </a:xfrm>
+          <a:prstGeom prst="rect">
+            <a:avLst/>
+          </a:prstGeom>
+        </p:spPr>
+      </p:pic>
+      <p:sp>
+        <p:nvSpPr>
+          <p:cNvPr id="35" name="文本框 34">
+            <a:extLst>
+              <a:ext uri="{FF2B5EF4-FFF2-40B4-BE49-F238E27FC236}">
+                <a16:creationId xmlns:a16="http://schemas.microsoft.com/office/drawing/2014/main" id="{5E380994-BCEB-7B40-CF44-F1D8614AF581}"/>
+              </a:ext>
+            </a:extLst>
+          </p:cNvPr>
+          <p:cNvSpPr txBox="1"/>
+          <p:nvPr/>
+        </p:nvSpPr>
+        <p:spPr>
+          <a:xfrm>
+            <a:off x="2309447" y="675143"/>
+            <a:ext cx="3548009" cy="1107996"/>
+          </a:xfrm>
+          <a:prstGeom prst="rect">
+            <a:avLst/>
+          </a:prstGeom>
+          <a:noFill/>
+        </p:spPr>
+        <p:txBody>
+          <a:bodyPr wrap="square">
+            <a:spAutoFit/>
+          </a:bodyPr>
+          <a:lstStyle/>
+          <a:p>
+            <a:r>
+              <a:rPr lang="zh-CN" altLang="en-US" sz="1100" dirty="0"/>
+              <a:t> Bin  Count  Count (%)  Event rate         EEF</a:t>
+            </a:r>
+          </a:p>
+          <a:p>
+            <a:r>
+              <a:rPr lang="zh-CN" altLang="en-US" sz="1100" dirty="0"/>
+              <a:t>0   (-inf, 3.15)     61   0.150990    0.262295  334.655198</a:t>
+            </a:r>
+          </a:p>
+          <a:p>
+            <a:r>
+              <a:rPr lang="zh-CN" altLang="en-US" sz="1100" dirty="0"/>
+              <a:t>1   [3.15, 5.05)     50   0.123762    0.100000  298.204674</a:t>
+            </a:r>
+          </a:p>
+          <a:p>
+            <a:r>
+              <a:rPr lang="zh-CN" altLang="en-US" sz="1100" dirty="0"/>
+              <a:t>2   [5.05, 8.05)     59   0.146040    0.033898  281.344935</a:t>
+            </a:r>
+          </a:p>
+          <a:p>
+            <a:r>
+              <a:rPr lang="zh-CN" altLang="en-US" sz="1100" dirty="0"/>
+              <a:t>3  [8.05, 11.70)     83   0.205446    0.192771  312.181894</a:t>
+            </a:r>
+          </a:p>
+          <a:p>
+            <a:r>
+              <a:rPr lang="zh-CN" altLang="en-US" sz="1100" dirty="0"/>
+              <a:t>4   [11.70, inf)    151   0.373762    0.278146  337.343476</a:t>
+            </a:r>
+          </a:p>
+        </p:txBody>
+      </p:sp>
+      <p:sp>
+        <p:nvSpPr>
+          <p:cNvPr id="37" name="文本框 36">
+            <a:extLst>
+              <a:ext uri="{FF2B5EF4-FFF2-40B4-BE49-F238E27FC236}">
+                <a16:creationId xmlns:a16="http://schemas.microsoft.com/office/drawing/2014/main" id="{AC398E2B-CAB2-3C4B-D02D-0003FC411D43}"/>
+              </a:ext>
+            </a:extLst>
+          </p:cNvPr>
+          <p:cNvSpPr txBox="1"/>
+          <p:nvPr/>
+        </p:nvSpPr>
+        <p:spPr>
+          <a:xfrm>
+            <a:off x="8332346" y="640106"/>
+            <a:ext cx="3475234" cy="1061829"/>
+          </a:xfrm>
+          <a:prstGeom prst="rect">
+            <a:avLst/>
+          </a:prstGeom>
+          <a:noFill/>
+        </p:spPr>
+        <p:txBody>
+          <a:bodyPr wrap="square">
+            <a:spAutoFit/>
+          </a:bodyPr>
+          <a:lstStyle/>
+          <a:p>
+            <a:r>
+              <a:rPr lang="zh-CN" altLang="en-US" sz="1050" dirty="0"/>
+              <a:t> Bin  Count  Count (%)  Event rate         EEF</a:t>
+            </a:r>
+          </a:p>
+          <a:p>
+            <a:r>
+              <a:rPr lang="zh-CN" altLang="en-US" sz="1050" dirty="0"/>
+              <a:t>0   (-inf, 3.45)     70   0.173267    0.171429  320.941887</a:t>
+            </a:r>
+          </a:p>
+          <a:p>
+            <a:r>
+              <a:rPr lang="zh-CN" altLang="en-US" sz="1050" dirty="0"/>
+              <a:t>1   [3.45, 4.35)     26   0.064356    0.038462  318.827542</a:t>
+            </a:r>
+          </a:p>
+          <a:p>
+            <a:r>
+              <a:rPr lang="zh-CN" altLang="en-US" sz="1050" dirty="0"/>
+              <a:t>2   [4.35, 5.45)     34   0.084158    0.117647  290.103071</a:t>
+            </a:r>
+          </a:p>
+          <a:p>
+            <a:r>
+              <a:rPr lang="zh-CN" altLang="en-US" sz="1050" dirty="0"/>
+              <a:t>3  [5.45, 12.75)    166   0.410891    0.210843  310.394024</a:t>
+            </a:r>
+          </a:p>
+          <a:p>
+            <a:r>
+              <a:rPr lang="zh-CN" altLang="en-US" sz="1050" dirty="0"/>
+              <a:t>4   [12.75, inf)    108   0.267327    0.268519  339.158828</a:t>
+            </a:r>
+          </a:p>
+        </p:txBody>
+      </p:sp>
+      <p:sp>
+        <p:nvSpPr>
+          <p:cNvPr id="39" name="文本框 38">
+            <a:extLst>
+              <a:ext uri="{FF2B5EF4-FFF2-40B4-BE49-F238E27FC236}">
+                <a16:creationId xmlns:a16="http://schemas.microsoft.com/office/drawing/2014/main" id="{89F0DC13-1D9B-897C-E45D-ABEF7341F611}"/>
+              </a:ext>
+            </a:extLst>
+          </p:cNvPr>
+          <p:cNvSpPr txBox="1"/>
+          <p:nvPr/>
+        </p:nvSpPr>
+        <p:spPr>
+          <a:xfrm>
+            <a:off x="2275713" y="2102706"/>
+            <a:ext cx="3432755" cy="1277273"/>
+          </a:xfrm>
+          <a:prstGeom prst="rect">
+            <a:avLst/>
+          </a:prstGeom>
+          <a:noFill/>
+        </p:spPr>
+        <p:txBody>
+          <a:bodyPr wrap="square">
+            <a:spAutoFit/>
+          </a:bodyPr>
+          <a:lstStyle/>
+          <a:p>
+            <a:r>
+              <a:rPr lang="zh-CN" altLang="en-US" sz="1100" dirty="0"/>
+              <a:t> Bin  Count  Count (%)  Event rate         EEF</a:t>
+            </a:r>
+          </a:p>
+          <a:p>
+            <a:r>
+              <a:rPr lang="zh-CN" altLang="en-US" sz="1100" dirty="0"/>
+              <a:t>0  (-inf, 1.15)     26   0.064356    0.153846  311.405421</a:t>
+            </a:r>
+          </a:p>
+          <a:p>
+            <a:r>
+              <a:rPr lang="zh-CN" altLang="en-US" sz="1100" dirty="0"/>
+              <a:t>1  [1.15, 4.05)     64   0.158416    0.140625  297.775114</a:t>
+            </a:r>
+          </a:p>
+          <a:p>
+            <a:r>
+              <a:rPr lang="zh-CN" altLang="en-US" sz="1100" dirty="0"/>
+              <a:t>2  [4.05, 5.05)     51   0.126238    0.058824  291.959725</a:t>
+            </a:r>
+          </a:p>
+          <a:p>
+            <a:r>
+              <a:rPr lang="zh-CN" altLang="en-US" sz="1100" dirty="0"/>
+              <a:t>3  [5.05, 6.15)     42   0.103960    0.071429  304.014415</a:t>
+            </a:r>
+          </a:p>
+          <a:p>
+            <a:r>
+              <a:rPr lang="zh-CN" altLang="en-US" sz="1100" dirty="0"/>
+              <a:t>4  [6.15, 6.75)     21   0.051980    0.095238  283.143581</a:t>
+            </a:r>
+          </a:p>
+          <a:p>
+            <a:r>
+              <a:rPr lang="zh-CN" altLang="en-US" sz="1100" dirty="0"/>
+              <a:t>5   [6.75, inf)    200   0.495050    0.300000  340.073996</a:t>
+            </a:r>
+          </a:p>
+        </p:txBody>
+      </p:sp>
+      <p:sp>
+        <p:nvSpPr>
+          <p:cNvPr id="41" name="文本框 40">
+            <a:extLst>
+              <a:ext uri="{FF2B5EF4-FFF2-40B4-BE49-F238E27FC236}">
+                <a16:creationId xmlns:a16="http://schemas.microsoft.com/office/drawing/2014/main" id="{6FAA17C5-C23D-B23F-EA2A-08FE8FD7749C}"/>
+              </a:ext>
+            </a:extLst>
+          </p:cNvPr>
+          <p:cNvSpPr txBox="1"/>
+          <p:nvPr/>
+        </p:nvSpPr>
+        <p:spPr>
+          <a:xfrm>
+            <a:off x="8332346" y="1862316"/>
+            <a:ext cx="3548009" cy="1615827"/>
+          </a:xfrm>
+          <a:prstGeom prst="rect">
+            <a:avLst/>
+          </a:prstGeom>
+          <a:noFill/>
+        </p:spPr>
+        <p:txBody>
+          <a:bodyPr wrap="square">
+            <a:spAutoFit/>
+          </a:bodyPr>
+          <a:lstStyle/>
+          <a:p>
+            <a:r>
+              <a:rPr lang="zh-CN" altLang="en-US" sz="1100" dirty="0"/>
+              <a:t> Bin  Count  Count (%)  Event rate         EEF</a:t>
+            </a:r>
+          </a:p>
+          <a:p>
+            <a:r>
+              <a:rPr lang="zh-CN" altLang="en-US" sz="1100" dirty="0"/>
+              <a:t>0    (-inf, 2.05)     41   0.101485    0.146341  324.418157</a:t>
+            </a:r>
+          </a:p>
+          <a:p>
+            <a:r>
+              <a:rPr lang="zh-CN" altLang="en-US" sz="1100" dirty="0"/>
+              <a:t>1    [2.05, 4.15)     88   0.217822    0.068182  284.835475</a:t>
+            </a:r>
+          </a:p>
+          <a:p>
+            <a:r>
+              <a:rPr lang="zh-CN" altLang="en-US" sz="1100" dirty="0"/>
+              <a:t>2    [4.15, 5.45)     47   0.116337    0.042553  278.237275</a:t>
+            </a:r>
+          </a:p>
+          <a:p>
+            <a:r>
+              <a:rPr lang="zh-CN" altLang="en-US" sz="1100" dirty="0"/>
+              <a:t>3    [5.45, 5.95)     21   0.051980    0.238095  302.578113</a:t>
+            </a:r>
+          </a:p>
+          <a:p>
+            <a:r>
+              <a:rPr lang="zh-CN" altLang="en-US" sz="1100" dirty="0"/>
+              <a:t>4    [5.95, 6.55)     23   0.056931    0.260870  337.245515</a:t>
+            </a:r>
+          </a:p>
+          <a:p>
+            <a:r>
+              <a:rPr lang="zh-CN" altLang="en-US" sz="1100" dirty="0"/>
+              <a:t>5    [6.55, 9.25)     75   0.185644    0.266667  345.554672</a:t>
+            </a:r>
+          </a:p>
+          <a:p>
+            <a:r>
+              <a:rPr lang="zh-CN" altLang="en-US" sz="1100" dirty="0"/>
+              <a:t>6   [9.25, 12.45)     47   0.116337    0.319149  342.146279</a:t>
+            </a:r>
+          </a:p>
+          <a:p>
+            <a:r>
+              <a:rPr lang="zh-CN" altLang="en-US" sz="1100" dirty="0"/>
+              <a:t>7    [12.45, inf)     62   0.153465    0.338710  342.281179</a:t>
+            </a:r>
+          </a:p>
+        </p:txBody>
+      </p:sp>
+      <p:sp>
+        <p:nvSpPr>
+          <p:cNvPr id="43" name="文本框 42">
+            <a:extLst>
+              <a:ext uri="{FF2B5EF4-FFF2-40B4-BE49-F238E27FC236}">
+                <a16:creationId xmlns:a16="http://schemas.microsoft.com/office/drawing/2014/main" id="{6C59EBF2-3255-4DBB-357F-ECAA47955766}"/>
+              </a:ext>
+            </a:extLst>
+          </p:cNvPr>
+          <p:cNvSpPr txBox="1"/>
+          <p:nvPr/>
+        </p:nvSpPr>
+        <p:spPr>
+          <a:xfrm>
+            <a:off x="2275713" y="3607417"/>
+            <a:ext cx="3432755" cy="1223412"/>
+          </a:xfrm>
+          <a:prstGeom prst="rect">
+            <a:avLst/>
+          </a:prstGeom>
+          <a:noFill/>
+        </p:spPr>
+        <p:txBody>
+          <a:bodyPr wrap="square">
+            <a:spAutoFit/>
+          </a:bodyPr>
+          <a:lstStyle/>
+          <a:p>
+            <a:r>
+              <a:rPr lang="zh-CN" altLang="en-US" sz="1050" dirty="0"/>
+              <a:t> Bin  Count  Count (%)  Event rate         EEF</a:t>
+            </a:r>
+          </a:p>
+          <a:p>
+            <a:r>
+              <a:rPr lang="zh-CN" altLang="en-US" sz="1050" dirty="0"/>
+              <a:t>0   (-inf, 1.45)     33   0.081683    0.272727  308.493679</a:t>
+            </a:r>
+          </a:p>
+          <a:p>
+            <a:r>
+              <a:rPr lang="zh-CN" altLang="en-US" sz="1050" dirty="0"/>
+              <a:t>1   [1.45, 2.65)     41   0.101485    0.097561  302.143936</a:t>
+            </a:r>
+          </a:p>
+          <a:p>
+            <a:r>
+              <a:rPr lang="zh-CN" altLang="en-US" sz="1050" dirty="0"/>
+              <a:t>2   [2.65, 3.15)     22   0.054455    0.045455  285.913419</a:t>
+            </a:r>
+          </a:p>
+          <a:p>
+            <a:r>
+              <a:rPr lang="zh-CN" altLang="en-US" sz="1050" dirty="0"/>
+              <a:t>3   [3.15, 5.25)    101   0.250000    0.168317  306.617518</a:t>
+            </a:r>
+          </a:p>
+          <a:p>
+            <a:r>
+              <a:rPr lang="zh-CN" altLang="en-US" sz="1050" dirty="0"/>
+              <a:t>4  [5.25, 13.00)    172   0.425743    0.174419  326.471197</a:t>
+            </a:r>
+          </a:p>
+          <a:p>
+            <a:r>
+              <a:rPr lang="zh-CN" altLang="en-US" sz="1050" dirty="0"/>
+              <a:t>5   [13.00, inf)     35   0.086634    0.571429  365.537456</a:t>
+            </a:r>
+          </a:p>
+        </p:txBody>
+      </p:sp>
+      <p:sp>
+        <p:nvSpPr>
+          <p:cNvPr id="45" name="文本框 44">
+            <a:extLst>
+              <a:ext uri="{FF2B5EF4-FFF2-40B4-BE49-F238E27FC236}">
+                <a16:creationId xmlns:a16="http://schemas.microsoft.com/office/drawing/2014/main" id="{9410D51C-9EFB-6197-1F00-98B555EA7723}"/>
+              </a:ext>
+            </a:extLst>
+          </p:cNvPr>
+          <p:cNvSpPr txBox="1"/>
+          <p:nvPr/>
+        </p:nvSpPr>
+        <p:spPr>
+          <a:xfrm>
+            <a:off x="8332345" y="3755675"/>
+            <a:ext cx="3548009" cy="938719"/>
+          </a:xfrm>
+          <a:prstGeom prst="rect">
+            <a:avLst/>
+          </a:prstGeom>
+          <a:noFill/>
+        </p:spPr>
+        <p:txBody>
+          <a:bodyPr wrap="square">
+            <a:spAutoFit/>
+          </a:bodyPr>
+          <a:lstStyle/>
+          <a:p>
+            <a:r>
+              <a:rPr lang="zh-CN" altLang="en-US" sz="1100" dirty="0"/>
+              <a:t> Bin  Count  Count (%)  Event rate         EEF</a:t>
+            </a:r>
+          </a:p>
+          <a:p>
+            <a:r>
+              <a:rPr lang="zh-CN" altLang="en-US" sz="1100" dirty="0"/>
+              <a:t>0   (-inf, 2.75)     93   0.230198    0.096774  292.232054</a:t>
+            </a:r>
+          </a:p>
+          <a:p>
+            <a:r>
+              <a:rPr lang="zh-CN" altLang="en-US" sz="1100" dirty="0"/>
+              <a:t>1   [2.75, 6.45)    149   0.368812    0.147651  309.709199</a:t>
+            </a:r>
+          </a:p>
+          <a:p>
+            <a:r>
+              <a:rPr lang="zh-CN" altLang="en-US" sz="1100" dirty="0"/>
+              <a:t>2  [6.45, 11.95)    127   0.314356    0.244094  336.445253</a:t>
+            </a:r>
+          </a:p>
+          <a:p>
+            <a:r>
+              <a:rPr lang="zh-CN" altLang="en-US" sz="1100" dirty="0"/>
+              <a:t>3   [11.95, inf)     35   0.086634    0.542857  363.449005</a:t>
+            </a:r>
+          </a:p>
+        </p:txBody>
+      </p:sp>
+      <p:sp>
+        <p:nvSpPr>
+          <p:cNvPr id="47" name="文本框 46">
+            <a:extLst>
+              <a:ext uri="{FF2B5EF4-FFF2-40B4-BE49-F238E27FC236}">
+                <a16:creationId xmlns:a16="http://schemas.microsoft.com/office/drawing/2014/main" id="{36978773-D847-2390-0263-A3FB8BAF2B4A}"/>
+              </a:ext>
+            </a:extLst>
+          </p:cNvPr>
+          <p:cNvSpPr txBox="1"/>
+          <p:nvPr/>
+        </p:nvSpPr>
+        <p:spPr>
+          <a:xfrm>
+            <a:off x="2254131" y="5250174"/>
+            <a:ext cx="3603325" cy="1107996"/>
+          </a:xfrm>
+          <a:prstGeom prst="rect">
+            <a:avLst/>
+          </a:prstGeom>
+          <a:noFill/>
+        </p:spPr>
+        <p:txBody>
+          <a:bodyPr wrap="square">
+            <a:spAutoFit/>
+          </a:bodyPr>
+          <a:lstStyle/>
+          <a:p>
+            <a:r>
+              <a:rPr lang="zh-CN" altLang="en-US" sz="1100" dirty="0"/>
+              <a:t> Bin  Count  Count (%)  Event rate         EEF</a:t>
+            </a:r>
+          </a:p>
+          <a:p>
+            <a:r>
+              <a:rPr lang="zh-CN" altLang="en-US" sz="1100" dirty="0"/>
+              <a:t>0  (-inf, 1.95)     67   0.165842    0.104478  296.534599</a:t>
+            </a:r>
+          </a:p>
+          <a:p>
+            <a:r>
+              <a:rPr lang="zh-CN" altLang="en-US" sz="1100" dirty="0"/>
+              <a:t>1  [1.95, 2.75)     31   0.076733    0.032258  281.913221</a:t>
+            </a:r>
+          </a:p>
+          <a:p>
+            <a:r>
+              <a:rPr lang="zh-CN" altLang="en-US" sz="1100" dirty="0"/>
+              <a:t>2  [2.75, 4.15)     72   0.178218    0.138889  306.909372</a:t>
+            </a:r>
+          </a:p>
+          <a:p>
+            <a:r>
+              <a:rPr lang="zh-CN" altLang="en-US" sz="1100" dirty="0"/>
+              <a:t>3  [4.15, 9.85)    189   0.467822    0.216931  327.815402</a:t>
+            </a:r>
+          </a:p>
+          <a:p>
+            <a:r>
+              <a:rPr lang="zh-CN" altLang="en-US" sz="1100" dirty="0"/>
+              <a:t>4   [9.85, inf)     45   0.111386    0.488889  358.040008</a:t>
+            </a:r>
+          </a:p>
+        </p:txBody>
+      </p:sp>
+      <p:sp>
+        <p:nvSpPr>
+          <p:cNvPr id="49" name="文本框 48">
+            <a:extLst>
+              <a:ext uri="{FF2B5EF4-FFF2-40B4-BE49-F238E27FC236}">
+                <a16:creationId xmlns:a16="http://schemas.microsoft.com/office/drawing/2014/main" id="{D494DC9B-21EC-4A03-A754-1B1F615E1197}"/>
+              </a:ext>
+            </a:extLst>
+          </p:cNvPr>
+          <p:cNvSpPr txBox="1"/>
+          <p:nvPr/>
+        </p:nvSpPr>
+        <p:spPr>
+          <a:xfrm>
+            <a:off x="8332345" y="5132543"/>
+            <a:ext cx="3432756" cy="1446550"/>
+          </a:xfrm>
+          <a:prstGeom prst="rect">
+            <a:avLst/>
+          </a:prstGeom>
+          <a:noFill/>
+        </p:spPr>
+        <p:txBody>
+          <a:bodyPr wrap="square">
+            <a:spAutoFit/>
+          </a:bodyPr>
+          <a:lstStyle/>
+          <a:p>
+            <a:r>
+              <a:rPr lang="zh-CN" altLang="en-US" sz="1100" dirty="0"/>
+              <a:t> Bin  Count  Count (%)  Event rate         EEF</a:t>
+            </a:r>
+          </a:p>
+          <a:p>
+            <a:r>
+              <a:rPr lang="zh-CN" altLang="en-US" sz="1100" dirty="0"/>
+              <a:t>0  (-inf, 2.75)    118   0.292079    0.245763  314.890477</a:t>
+            </a:r>
+          </a:p>
+          <a:p>
+            <a:r>
+              <a:rPr lang="zh-CN" altLang="en-US" sz="1100" dirty="0"/>
+              <a:t>1  [2.75, 3.85)     54   0.133663    0.203704  301.434264</a:t>
+            </a:r>
+          </a:p>
+          <a:p>
+            <a:r>
+              <a:rPr lang="zh-CN" altLang="en-US" sz="1100" dirty="0"/>
+              <a:t>2  [3.85, 5.05)     72   0.178218    0.097222  310.091343</a:t>
+            </a:r>
+          </a:p>
+          <a:p>
+            <a:r>
+              <a:rPr lang="zh-CN" altLang="en-US" sz="1100" dirty="0"/>
+              <a:t>3  [5.05, 5.55)     32   0.079208    0.031250  316.862900</a:t>
+            </a:r>
+          </a:p>
+          <a:p>
+            <a:r>
+              <a:rPr lang="zh-CN" altLang="en-US" sz="1100" dirty="0"/>
+              <a:t>4  [5.55, 6.30)     27   0.066832    0.074074  308.653207</a:t>
+            </a:r>
+          </a:p>
+          <a:p>
+            <a:r>
+              <a:rPr lang="zh-CN" altLang="en-US" sz="1100" dirty="0"/>
+              <a:t>5  [6.30, 8.85)     52   0.128713    0.192308  333.575341</a:t>
+            </a:r>
+          </a:p>
+          <a:p>
+            <a:r>
+              <a:rPr lang="zh-CN" altLang="en-US" sz="1100" dirty="0"/>
+              <a:t>6   [8.85, inf)     49   0.121287    0.428571  350.882523</a:t>
+            </a:r>
+          </a:p>
+        </p:txBody>
+      </p:sp>
+    </p:spTree>
+    <p:extLst>
+      <p:ext uri="{BB962C8B-B14F-4D97-AF65-F5344CB8AC3E}">
+        <p14:creationId xmlns:p14="http://schemas.microsoft.com/office/powerpoint/2010/main" val="1482653434"/>
+      </p:ext>
+    </p:extLst>
+  </p:cSld>
+  <p:clrMapOvr>
+    <a:masterClrMapping/>
+  </p:clrMapOvr>
+  <mc:AlternateContent xmlns:mc="http://schemas.openxmlformats.org/markup-compatibility/2006" xmlns:p14="http://schemas.microsoft.com/office/powerpoint/2010/main">
+    <mc:Choice Requires="p14">
+      <p:transition spd="med" p14:dur="700">
+        <p:fade/>
+      </p:transition>
+    </mc:Choice>
+    <mc:Fallback xmlns="">
+      <p:transition spd="med">
+        <p:fade/>
+      </p:transition>
+    </mc:Fallback>
+  </mc:AlternateContent>
+</p:sld>
+</file>
+
+<file path=ppt/slides/slide32.xml><?xml version="1.0" encoding="utf-8"?>
+<p:sld xmlns:a="http://schemas.openxmlformats.org/drawingml/2006/main" xmlns:r="http://schemas.openxmlformats.org/officeDocument/2006/relationships" xmlns:p="http://schemas.openxmlformats.org/presentationml/2006/main">
+  <p:cSld>
+    <p:spTree>
+      <p:nvGrpSpPr>
+        <p:cNvPr id="1" name="">
+          <a:extLst>
+            <a:ext uri="{FF2B5EF4-FFF2-40B4-BE49-F238E27FC236}">
+              <a16:creationId xmlns:a16="http://schemas.microsoft.com/office/drawing/2014/main" id="{E3FE1759-B493-67DE-1F9E-D3F539CEB049}"/>
+            </a:ext>
+          </a:extLst>
+        </p:cNvPr>
+        <p:cNvGrpSpPr/>
+        <p:nvPr/>
+      </p:nvGrpSpPr>
+      <p:grpSpPr>
+        <a:xfrm>
+          <a:off x="0" y="0"/>
+          <a:ext cx="0" cy="0"/>
+          <a:chOff x="0" y="0"/>
+          <a:chExt cx="0" cy="0"/>
+        </a:xfrm>
+      </p:grpSpPr>
+      <p:sp>
+        <p:nvSpPr>
+          <p:cNvPr id="4" name="Title 3">
+            <a:extLst>
+              <a:ext uri="{FF2B5EF4-FFF2-40B4-BE49-F238E27FC236}">
+                <a16:creationId xmlns:a16="http://schemas.microsoft.com/office/drawing/2014/main" id="{547F18B6-B26F-09DF-E000-A7BF0AD0D84B}"/>
+              </a:ext>
+            </a:extLst>
+          </p:cNvPr>
+          <p:cNvSpPr>
+            <a:spLocks noGrp="1"/>
+          </p:cNvSpPr>
+          <p:nvPr>
+            <p:ph type="title"/>
+          </p:nvPr>
+        </p:nvSpPr>
+        <p:spPr>
+          <a:xfrm>
+            <a:off x="792226" y="957768"/>
+            <a:ext cx="8082481" cy="861774"/>
+          </a:xfrm>
+        </p:spPr>
+        <p:txBody>
+          <a:bodyPr/>
+          <a:lstStyle/>
+          <a:p>
+            <a:r>
+              <a:rPr lang="zh-CN" altLang="en-US" sz="4400" dirty="0">
+                <a:latin typeface="等线" panose="02010600030101010101" pitchFamily="2" charset="-122"/>
+                <a:ea typeface="等线" panose="02010600030101010101" pitchFamily="2" charset="-122"/>
+              </a:rPr>
+              <a:t>下周计划</a:t>
+            </a:r>
+            <a:endParaRPr lang="en-US" sz="4400" dirty="0">
+              <a:latin typeface="等线" panose="02010600030101010101" pitchFamily="2" charset="-122"/>
+              <a:ea typeface="等线" panose="02010600030101010101" pitchFamily="2" charset="-122"/>
+            </a:endParaRPr>
+          </a:p>
+        </p:txBody>
+      </p:sp>
+      <p:sp>
+        <p:nvSpPr>
+          <p:cNvPr id="3" name="文本占位符 2">
+            <a:extLst>
+              <a:ext uri="{FF2B5EF4-FFF2-40B4-BE49-F238E27FC236}">
+                <a16:creationId xmlns:a16="http://schemas.microsoft.com/office/drawing/2014/main" id="{62344FB5-5D1A-25EB-41D1-35CC3CFE3176}"/>
+              </a:ext>
+            </a:extLst>
+          </p:cNvPr>
+          <p:cNvSpPr>
+            <a:spLocks noGrp="1"/>
+          </p:cNvSpPr>
+          <p:nvPr>
+            <p:ph type="body" sz="quarter" idx="10"/>
+          </p:nvPr>
+        </p:nvSpPr>
+        <p:spPr/>
+        <p:txBody>
+          <a:bodyPr/>
+          <a:lstStyle/>
+          <a:p>
+            <a:endParaRPr lang="zh-CN" altLang="en-US"/>
+          </a:p>
+        </p:txBody>
+      </p:sp>
+    </p:spTree>
+    <p:custDataLst>
+      <p:tags r:id="rId1"/>
+    </p:custDataLst>
+    <p:extLst>
+      <p:ext uri="{BB962C8B-B14F-4D97-AF65-F5344CB8AC3E}">
+        <p14:creationId xmlns:p14="http://schemas.microsoft.com/office/powerpoint/2010/main" val="1501994932"/>
+      </p:ext>
+    </p:extLst>
+  </p:cSld>
+  <p:clrMapOvr>
+    <a:masterClrMapping/>
+  </p:clrMapOvr>
+  <mc:AlternateContent xmlns:mc="http://schemas.openxmlformats.org/markup-compatibility/2006" xmlns:p14="http://schemas.microsoft.com/office/powerpoint/2010/main">
+    <mc:Choice Requires="p14">
+      <p:transition spd="med" p14:dur="700">
+        <p:fade/>
+      </p:transition>
+    </mc:Choice>
+    <mc:Fallback xmlns="">
       <p:transition spd="med">
         <p:fade/>
       </p:transition>
@@ -24680,6 +33185,12 @@
 </file>
 
 <file path=customXml/item1.xml><?xml version="1.0" encoding="utf-8"?>
+<p:properties xmlns:p="http://schemas.microsoft.com/office/2006/metadata/properties" xmlns:xsi="http://www.w3.org/2001/XMLSchema-instance" xmlns:pc="http://schemas.microsoft.com/office/infopath/2007/PartnerControls">
+  <documentManagement/>
+</p:properties>
+</file>
+
+<file path=customXml/item2.xml><?xml version="1.0" encoding="utf-8"?>
 <ct:contentTypeSchema xmlns:ct="http://schemas.microsoft.com/office/2006/metadata/contentType" xmlns:ma="http://schemas.microsoft.com/office/2006/metadata/properties/metaAttributes" ct:_="" ma:_="" ma:contentTypeName="Document" ma:contentTypeID="0x0101008252B48C136D414EB12EC6609A2B4A69" ma:contentTypeVersion="5" ma:contentTypeDescription="Create a new document." ma:contentTypeScope="" ma:versionID="c506d0840867f1adddbc926f9a8dfc6f">
   <xsd:schema xmlns:xsd="http://www.w3.org/2001/XMLSchema" xmlns:xs="http://www.w3.org/2001/XMLSchema" xmlns:p="http://schemas.microsoft.com/office/2006/metadata/properties" xmlns:ns2="d21cdafc-5a3a-425e-9674-4fb06b514c0e" xmlns:ns3="6e647c50-2143-4825-9865-d236e7692e65" targetNamespace="http://schemas.microsoft.com/office/2006/metadata/properties" ma:root="true" ma:fieldsID="0df08590ed69fcf4c72a3fc3581b1869" ns2:_="" ns3:_="">
     <xsd:import namespace="d21cdafc-5a3a-425e-9674-4fb06b514c0e"/>
@@ -24850,12 +33361,6 @@
 </ct:contentTypeSchema>
 </file>
 
-<file path=customXml/item2.xml><?xml version="1.0" encoding="utf-8"?>
-<p:properties xmlns:p="http://schemas.microsoft.com/office/2006/metadata/properties" xmlns:xsi="http://www.w3.org/2001/XMLSchema-instance" xmlns:pc="http://schemas.microsoft.com/office/infopath/2007/PartnerControls">
-  <documentManagement/>
-</p:properties>
-</file>
-
 <file path=customXml/item3.xml><?xml version="1.0" encoding="utf-8"?>
 <?mso-contentType ?>
 <FormTemplates xmlns="http://schemas.microsoft.com/sharepoint/v3/contenttype/forms">
@@ -24866,13 +33371,13 @@
 </file>
 
 <file path=customXml/itemProps1.xml><?xml version="1.0" encoding="utf-8"?>
-<ds:datastoreItem xmlns:ds="http://schemas.openxmlformats.org/officeDocument/2006/customXml" ds:itemID="{51779852-367B-483D-8C46-CF2C7DC5D261}">
+<ds:datastoreItem xmlns:ds="http://schemas.openxmlformats.org/officeDocument/2006/customXml" ds:itemID="{E2663518-7548-4643-8219-608BFF0DFA0C}">
   <ds:schemaRefs/>
 </ds:datastoreItem>
 </file>
 
 <file path=customXml/itemProps2.xml><?xml version="1.0" encoding="utf-8"?>
-<ds:datastoreItem xmlns:ds="http://schemas.openxmlformats.org/officeDocument/2006/customXml" ds:itemID="{E2663518-7548-4643-8219-608BFF0DFA0C}">
+<ds:datastoreItem xmlns:ds="http://schemas.openxmlformats.org/officeDocument/2006/customXml" ds:itemID="{51779852-367B-483D-8C46-CF2C7DC5D261}">
   <ds:schemaRefs/>
 </ds:datastoreItem>
 </file>
